--- a/Digital_Minds_Track3_Slides.pptx
+++ b/Digital_Minds_Track3_Slides.pptx
@@ -11,10 +11,6 @@
     <p:sldId id="259" r:id="rId10"/>
     <p:sldId id="260" r:id="rId11"/>
     <p:sldId id="261" r:id="rId12"/>
-    <p:sldId id="262" r:id="rId13"/>
-    <p:sldId id="263" r:id="rId14"/>
-    <p:sldId id="264" r:id="rId15"/>
-    <p:sldId id="265" r:id="rId16"/>
   </p:sldIdLst>
   <p:sldSz cx="12191695" cy="6858000" type="screen4x3"/>
   <p:notesSz cx="6858000" cy="9144000"/>
@@ -3093,7 +3089,7 @@
     <p:bg>
       <p:bgPr>
         <a:solidFill>
-          <a:srgbClr val="FFFFFF"/>
+          <a:srgbClr val="0D1117"/>
         </a:solidFill>
         <a:effectLst/>
       </p:bgPr>
@@ -3107,237 +3103,20 @@
       <p:grpSpPr/>
       <p:sp>
         <p:nvSpPr>
-          <p:cNvPr id="2" name="TextBox 1"/>
-          <p:cNvSpPr txBox="1"/>
-          <p:nvPr/>
-        </p:nvSpPr>
-        <p:spPr>
-          <a:xfrm>
-            <a:off x="822960" y="566928"/>
-            <a:ext cx="10545775" cy="365760"/>
-          </a:xfrm>
-          <a:prstGeom prst="rect">
-            <a:avLst/>
-          </a:prstGeom>
-          <a:noFill/>
-        </p:spPr>
-        <p:txBody>
-          <a:bodyPr wrap="square">
-            <a:spAutoFit/>
-          </a:bodyPr>
-          <a:lstStyle/>
-          <a:p>
-            <a:pPr algn="l">
-              <a:spcAft>
-                <a:spcPts val="800"/>
-              </a:spcAft>
-            </a:pPr>
-            <a:r>
-              <a:rPr sz="1100" b="0" spc="140">
-                <a:solidFill>
-                  <a:srgbClr val="59636F"/>
-                </a:solidFill>
-                <a:latin typeface="Consolas"/>
-              </a:rPr>
-              <a:t>DIGITAL MINDS SPRINT  ·  TRACK 3  ·  INTROSPECTION &amp; SELF-REPORT RELIABILITY</a:t>
-            </a:r>
-          </a:p>
-        </p:txBody>
-      </p:sp>
-      <p:sp>
-        <p:nvSpPr>
-          <p:cNvPr id="3" name="TextBox 2"/>
-          <p:cNvSpPr txBox="1"/>
-          <p:nvPr/>
-        </p:nvSpPr>
-        <p:spPr>
-          <a:xfrm>
-            <a:off x="822960" y="1371600"/>
-            <a:ext cx="10545775" cy="1371600"/>
-          </a:xfrm>
-          <a:prstGeom prst="rect">
-            <a:avLst/>
-          </a:prstGeom>
-          <a:noFill/>
-        </p:spPr>
-        <p:txBody>
-          <a:bodyPr wrap="square">
-            <a:spAutoFit/>
-          </a:bodyPr>
-          <a:lstStyle/>
-          <a:p>
-            <a:pPr algn="l">
-              <a:lnSpc>
-                <a:spcPct val="105000"/>
-              </a:lnSpc>
-              <a:spcAft>
-                <a:spcPts val="800"/>
-              </a:spcAft>
-            </a:pPr>
-            <a:r>
-              <a:rPr sz="5400" b="1">
-                <a:solidFill>
-                  <a:srgbClr val="12171F"/>
-                </a:solidFill>
-                <a:latin typeface="Georgia"/>
-              </a:rPr>
-              <a:t>Beaten by eighteen features</a:t>
-            </a:r>
-          </a:p>
-        </p:txBody>
-      </p:sp>
-      <p:sp>
-        <p:nvSpPr>
-          <p:cNvPr id="4" name="TextBox 3"/>
-          <p:cNvSpPr txBox="1"/>
-          <p:nvPr/>
-        </p:nvSpPr>
-        <p:spPr>
-          <a:xfrm>
-            <a:off x="822960" y="3017520"/>
-            <a:ext cx="8595360" cy="1463040"/>
-          </a:xfrm>
-          <a:prstGeom prst="rect">
-            <a:avLst/>
-          </a:prstGeom>
-          <a:noFill/>
-        </p:spPr>
-        <p:txBody>
-          <a:bodyPr wrap="square">
-            <a:spAutoFit/>
-          </a:bodyPr>
-          <a:lstStyle/>
-          <a:p>
-            <a:pPr algn="l">
-              <a:lnSpc>
-                <a:spcPct val="130000"/>
-              </a:lnSpc>
-              <a:spcAft>
-                <a:spcPts val="800"/>
-              </a:spcAft>
-            </a:pPr>
-            <a:r>
-              <a:rPr sz="2100" b="0">
-                <a:solidFill>
-                  <a:srgbClr val="59636F"/>
-                </a:solidFill>
-                <a:latin typeface="Segoe UI"/>
-              </a:rPr>
-              <a:t>Two 70-billion-parameter models were asked to pick out their own writing. A logistic regression on eighteen surface features did it better.</a:t>
-            </a:r>
-          </a:p>
-        </p:txBody>
-      </p:sp>
-      <p:sp>
-        <p:nvSpPr>
-          <p:cNvPr id="5" name="TextBox 4"/>
-          <p:cNvSpPr txBox="1"/>
-          <p:nvPr/>
-        </p:nvSpPr>
-        <p:spPr>
-          <a:xfrm>
-            <a:off x="822960" y="5120640"/>
-            <a:ext cx="10545775" cy="822960"/>
-          </a:xfrm>
-          <a:prstGeom prst="rect">
-            <a:avLst/>
-          </a:prstGeom>
-          <a:noFill/>
-        </p:spPr>
-        <p:txBody>
-          <a:bodyPr wrap="square">
-            <a:spAutoFit/>
-          </a:bodyPr>
-          <a:lstStyle/>
-          <a:p>
-            <a:pPr algn="l">
-              <a:spcAft>
-                <a:spcPts val="200"/>
-              </a:spcAft>
-            </a:pPr>
-            <a:r>
-              <a:rPr sz="1500" b="0">
-                <a:solidFill>
-                  <a:srgbClr val="12171F"/>
-                </a:solidFill>
-                <a:latin typeface="Segoe UI"/>
-              </a:rPr>
-              <a:t>Ubayd Hattas &amp; Jaswin Chinthala</a:t>
-            </a:r>
-          </a:p>
-          <a:p>
-            <a:pPr algn="l">
-              <a:spcAft>
-                <a:spcPts val="800"/>
-              </a:spcAft>
-            </a:pPr>
-            <a:r>
-              <a:rPr sz="1300" b="0">
-                <a:solidFill>
-                  <a:srgbClr val="59636F"/>
-                </a:solidFill>
-                <a:latin typeface="Segoe UI"/>
-              </a:rPr>
-              <a:t>with Apart Research · August 2026</a:t>
-            </a:r>
-          </a:p>
-        </p:txBody>
-      </p:sp>
-      <p:sp>
-        <p:nvSpPr>
-          <p:cNvPr id="6" name="TextBox 5"/>
-          <p:cNvSpPr txBox="1"/>
-          <p:nvPr/>
-        </p:nvSpPr>
-        <p:spPr>
-          <a:xfrm>
-            <a:off x="822960" y="6172200"/>
-            <a:ext cx="1828800" cy="320040"/>
-          </a:xfrm>
-          <a:prstGeom prst="rect">
-            <a:avLst/>
-          </a:prstGeom>
-          <a:noFill/>
-        </p:spPr>
-        <p:txBody>
-          <a:bodyPr wrap="square">
-            <a:spAutoFit/>
-          </a:bodyPr>
-          <a:lstStyle/>
-          <a:p>
-            <a:pPr algn="l">
-              <a:spcAft>
-                <a:spcPts val="800"/>
-              </a:spcAft>
-            </a:pPr>
-            <a:r>
-              <a:rPr sz="1100" b="0" spc="80">
-                <a:solidFill>
-                  <a:srgbClr val="0F6E8C"/>
-                </a:solidFill>
-                <a:latin typeface="Consolas"/>
-              </a:rPr>
-              <a:t>01</a:t>
-            </a:r>
-          </a:p>
-        </p:txBody>
-      </p:sp>
-      <p:sp>
-        <p:nvSpPr>
-          <p:cNvPr id="7" name="Rectangle 6"/>
+          <p:cNvPr id="2" name="Rectangle 1"/>
           <p:cNvSpPr/>
           <p:nvPr/>
         </p:nvSpPr>
         <p:spPr>
           <a:xfrm>
-            <a:off x="822960" y="5989320"/>
-            <a:ext cx="10545775" cy="9525"/>
+            <a:off x="0" y="0"/>
+            <a:ext cx="12191695" cy="82296"/>
           </a:xfrm>
           <a:prstGeom prst="rect">
             <a:avLst/>
           </a:prstGeom>
           <a:solidFill>
-            <a:srgbClr val="DCE2E8"/>
+            <a:srgbClr val="F0C040"/>
           </a:solidFill>
           <a:ln>
             <a:noFill/>
@@ -3366,42 +3145,16 @@
           </a:p>
         </p:txBody>
       </p:sp>
-    </p:spTree>
-  </p:cSld>
-  <p:clrMapOvr>
-    <a:masterClrMapping/>
-  </p:clrMapOvr>
-</p:sld>
-</file>
-
-<file path=ppt/slides/slide10.xml><?xml version="1.0" encoding="utf-8"?>
-<p:sld xmlns:a="http://schemas.openxmlformats.org/drawingml/2006/main" xmlns:p="http://schemas.openxmlformats.org/presentationml/2006/main" xmlns:r="http://schemas.openxmlformats.org/officeDocument/2006/relationships">
-  <p:cSld>
-    <p:bg>
-      <p:bgPr>
-        <a:solidFill>
-          <a:srgbClr val="FFFFFF"/>
-        </a:solidFill>
-        <a:effectLst/>
-      </p:bgPr>
-    </p:bg>
-    <p:spTree>
-      <p:nvGrpSpPr>
-        <p:cNvPr id="1" name=""/>
-        <p:cNvGrpSpPr/>
-        <p:nvPr/>
-      </p:nvGrpSpPr>
-      <p:grpSpPr/>
-      <p:sp>
-        <p:nvSpPr>
-          <p:cNvPr id="2" name="TextBox 1"/>
+      <p:sp>
+        <p:nvSpPr>
+          <p:cNvPr id="3" name="TextBox 2"/>
           <p:cNvSpPr txBox="1"/>
           <p:nvPr/>
         </p:nvSpPr>
         <p:spPr>
           <a:xfrm>
-            <a:off x="822960" y="566928"/>
-            <a:ext cx="10545775" cy="365760"/>
+            <a:off x="658368" y="658368"/>
+            <a:ext cx="10874959" cy="274320"/>
           </a:xfrm>
           <a:prstGeom prst="rect">
             <a:avLst/>
@@ -3409,7 +3162,7 @@
           <a:noFill/>
         </p:spPr>
         <p:txBody>
-          <a:bodyPr wrap="square">
+          <a:bodyPr wrap="square" lIns="0" rIns="0" tIns="0" bIns="0">
             <a:spAutoFit/>
           </a:bodyPr>
           <a:lstStyle/>
@@ -3420,27 +3173,27 @@
               </a:spcAft>
             </a:pPr>
             <a:r>
-              <a:rPr sz="1100" b="0" spc="140">
-                <a:solidFill>
-                  <a:srgbClr val="59636F"/>
+              <a:rPr sz="1200" b="0" spc="100">
+                <a:solidFill>
+                  <a:srgbClr val="98A3B0"/>
                 </a:solidFill>
                 <a:latin typeface="Consolas"/>
               </a:rPr>
-              <a:t>TAKEAWAY</a:t>
-            </a:r>
-          </a:p>
-        </p:txBody>
-      </p:sp>
-      <p:sp>
-        <p:nvSpPr>
-          <p:cNvPr id="3" name="TextBox 2"/>
+              <a:t>Digital Minds Research Sprint  ·  Track 3  ·  Introspection &amp; Self-Report Reliability</a:t>
+            </a:r>
+          </a:p>
+        </p:txBody>
+      </p:sp>
+      <p:sp>
+        <p:nvSpPr>
+          <p:cNvPr id="4" name="TextBox 3"/>
           <p:cNvSpPr txBox="1"/>
           <p:nvPr/>
         </p:nvSpPr>
         <p:spPr>
           <a:xfrm>
-            <a:off x="822960" y="1463040"/>
-            <a:ext cx="10545775" cy="1371600"/>
+            <a:off x="658368" y="1417320"/>
+            <a:ext cx="10424160" cy="2011680"/>
           </a:xfrm>
           <a:prstGeom prst="rect">
             <a:avLst/>
@@ -3448,147 +3201,66 @@
           <a:noFill/>
         </p:spPr>
         <p:txBody>
-          <a:bodyPr wrap="square">
+          <a:bodyPr wrap="square" lIns="0" rIns="0" tIns="0" bIns="0">
             <a:spAutoFit/>
           </a:bodyPr>
           <a:lstStyle/>
           <a:p>
             <a:pPr algn="l">
               <a:lnSpc>
-                <a:spcPct val="105000"/>
+                <a:spcPct val="102000"/>
               </a:lnSpc>
               <a:spcAft>
-                <a:spcPts val="800"/>
-              </a:spcAft>
-            </a:pPr>
-            <a:r>
-              <a:rPr sz="4800" b="1">
-                <a:solidFill>
-                  <a:srgbClr val="12171F"/>
-                </a:solidFill>
-                <a:latin typeface="Georgia"/>
-              </a:rPr>
-              <a:t>Ask the model. Then ask a regression.</a:t>
-            </a:r>
-          </a:p>
-        </p:txBody>
-      </p:sp>
-      <p:sp>
-        <p:nvSpPr>
-          <p:cNvPr id="4" name="TextBox 3"/>
-          <p:cNvSpPr txBox="1"/>
-          <p:nvPr/>
-        </p:nvSpPr>
-        <p:spPr>
-          <a:xfrm>
-            <a:off x="822960" y="3200400"/>
-            <a:ext cx="8961120" cy="2011680"/>
-          </a:xfrm>
-          <a:prstGeom prst="rect">
-            <a:avLst/>
-          </a:prstGeom>
-          <a:noFill/>
-        </p:spPr>
-        <p:txBody>
-          <a:bodyPr wrap="square">
-            <a:spAutoFit/>
-          </a:bodyPr>
-          <a:lstStyle/>
+                <a:spcPts val="400"/>
+              </a:spcAft>
+            </a:pPr>
+            <a:r>
+              <a:rPr sz="5000" b="1">
+                <a:solidFill>
+                  <a:srgbClr val="E9EEF4"/>
+                </a:solidFill>
+                <a:latin typeface="Calibri"/>
+              </a:rPr>
+              <a:t>Beaten by Eighteen Features</a:t>
+            </a:r>
+          </a:p>
           <a:p>
             <a:pPr algn="l">
               <a:lnSpc>
-                <a:spcPct val="130000"/>
+                <a:spcPct val="108000"/>
               </a:lnSpc>
               <a:spcAft>
-                <a:spcPts val="1800"/>
-              </a:spcAft>
-            </a:pPr>
-            <a:r>
-              <a:rPr sz="2100" b="0">
-                <a:solidFill>
-                  <a:srgbClr val="59636F"/>
-                </a:solidFill>
-                <a:latin typeface="Segoe UI"/>
-              </a:rPr>
-              <a:t>If eighteen surface features beat the model at recognising its own writing, an above-chance self-report is not evidence of privileged access.</a:t>
-            </a:r>
-          </a:p>
-          <a:p>
-            <a:pPr algn="l">
-              <a:lnSpc>
-                <a:spcPct val="135000"/>
-              </a:lnSpc>
-              <a:spcAft>
                 <a:spcPts val="800"/>
               </a:spcAft>
             </a:pPr>
             <a:r>
-              <a:rPr sz="1600" b="0">
-                <a:solidFill>
-                  <a:srgbClr val="12171F"/>
-                </a:solidFill>
-                <a:latin typeface="Segoe UI"/>
-              </a:rPr>
-              <a:t>Fit the baseline per condition, on the same stimuli. Print the answer distribution next to every accuracy. Both are free, and in our hands both were decisive.</a:t>
-            </a:r>
-          </a:p>
-        </p:txBody>
-      </p:sp>
-      <p:sp>
-        <p:nvSpPr>
-          <p:cNvPr id="5" name="TextBox 4"/>
-          <p:cNvSpPr txBox="1"/>
-          <p:nvPr/>
-        </p:nvSpPr>
-        <p:spPr>
-          <a:xfrm>
-            <a:off x="822960" y="6172200"/>
-            <a:ext cx="1828800" cy="320040"/>
-          </a:xfrm>
-          <a:prstGeom prst="rect">
-            <a:avLst/>
-          </a:prstGeom>
-          <a:noFill/>
-        </p:spPr>
-        <p:txBody>
-          <a:bodyPr wrap="square">
-            <a:spAutoFit/>
-          </a:bodyPr>
-          <a:lstStyle/>
-          <a:p>
-            <a:pPr algn="l">
-              <a:spcAft>
-                <a:spcPts val="800"/>
-              </a:spcAft>
-            </a:pPr>
-            <a:r>
-              <a:rPr sz="1100" b="0" spc="80">
-                <a:solidFill>
-                  <a:srgbClr val="0F6E8C"/>
-                </a:solidFill>
-                <a:latin typeface="Consolas"/>
-              </a:rPr>
-              <a:t>10</a:t>
-            </a:r>
-          </a:p>
-        </p:txBody>
-      </p:sp>
-      <p:sp>
-        <p:nvSpPr>
-          <p:cNvPr id="6" name="Rectangle 5"/>
+              <a:rPr sz="3000" b="0">
+                <a:solidFill>
+                  <a:srgbClr val="F0C040"/>
+                </a:solidFill>
+                <a:latin typeface="Calibri"/>
+              </a:rPr>
+              <a:t>A Capability-Controlled Test of Privileged Self-Access</a:t>
+            </a:r>
+          </a:p>
+        </p:txBody>
+      </p:sp>
+      <p:sp>
+        <p:nvSpPr>
+          <p:cNvPr id="5" name="Rectangle 4"/>
           <p:cNvSpPr/>
           <p:nvPr/>
         </p:nvSpPr>
         <p:spPr>
           <a:xfrm>
-            <a:off x="822960" y="5989320"/>
-            <a:ext cx="10545775" cy="9525"/>
+            <a:off x="658368" y="3401568"/>
+            <a:ext cx="2377440" cy="19050"/>
           </a:xfrm>
           <a:prstGeom prst="rect">
             <a:avLst/>
           </a:prstGeom>
           <a:solidFill>
-            <a:srgbClr val="DCE2E8"/>
+            <a:srgbClr val="2A323C"/>
           </a:solidFill>
           <a:ln>
             <a:noFill/>
@@ -3614,6 +3286,352 @@
           <a:lstStyle/>
           <a:p>
             <a:pPr algn="ctr"/>
+          </a:p>
+        </p:txBody>
+      </p:sp>
+      <p:sp>
+        <p:nvSpPr>
+          <p:cNvPr id="6" name="TextBox 5"/>
+          <p:cNvSpPr txBox="1"/>
+          <p:nvPr/>
+        </p:nvSpPr>
+        <p:spPr>
+          <a:xfrm>
+            <a:off x="658368" y="3703320"/>
+            <a:ext cx="8778240" cy="914400"/>
+          </a:xfrm>
+          <a:prstGeom prst="rect">
+            <a:avLst/>
+          </a:prstGeom>
+          <a:noFill/>
+        </p:spPr>
+        <p:txBody>
+          <a:bodyPr wrap="square" lIns="0" rIns="0" tIns="0" bIns="0">
+            <a:spAutoFit/>
+          </a:bodyPr>
+          <a:lstStyle/>
+          <a:p>
+            <a:pPr algn="l">
+              <a:lnSpc>
+                <a:spcPct val="128000"/>
+              </a:lnSpc>
+              <a:spcAft>
+                <a:spcPts val="800"/>
+              </a:spcAft>
+            </a:pPr>
+            <a:r>
+              <a:rPr sz="2100" b="0">
+                <a:solidFill>
+                  <a:srgbClr val="98A3B0"/>
+                </a:solidFill>
+                <a:latin typeface="Calibri"/>
+              </a:rPr>
+              <a:t>Does behavioural self-prediction provide information unavailable to an external observer?</a:t>
+            </a:r>
+          </a:p>
+        </p:txBody>
+      </p:sp>
+      <p:sp>
+        <p:nvSpPr>
+          <p:cNvPr id="7" name="TextBox 6"/>
+          <p:cNvSpPr txBox="1"/>
+          <p:nvPr/>
+        </p:nvSpPr>
+        <p:spPr>
+          <a:xfrm>
+            <a:off x="658368" y="5074920"/>
+            <a:ext cx="3657600" cy="1005840"/>
+          </a:xfrm>
+          <a:prstGeom prst="rect">
+            <a:avLst/>
+          </a:prstGeom>
+          <a:noFill/>
+        </p:spPr>
+        <p:txBody>
+          <a:bodyPr wrap="square" lIns="0" rIns="0" tIns="0" bIns="0">
+            <a:spAutoFit/>
+          </a:bodyPr>
+          <a:lstStyle/>
+          <a:p>
+            <a:pPr algn="l">
+              <a:spcAft>
+                <a:spcPts val="300"/>
+              </a:spcAft>
+            </a:pPr>
+            <a:r>
+              <a:rPr sz="1600" b="1">
+                <a:solidFill>
+                  <a:srgbClr val="E9EEF4"/>
+                </a:solidFill>
+                <a:latin typeface="Calibri"/>
+              </a:rPr>
+              <a:t>Ubayd Hattas</a:t>
+            </a:r>
+          </a:p>
+          <a:p>
+            <a:pPr algn="l">
+              <a:lnSpc>
+                <a:spcPct val="120000"/>
+              </a:lnSpc>
+              <a:spcAft>
+                <a:spcPts val="100"/>
+              </a:spcAft>
+            </a:pPr>
+            <a:r>
+              <a:rPr sz="1200" b="0">
+                <a:solidFill>
+                  <a:srgbClr val="98A3B0"/>
+                </a:solidFill>
+                <a:latin typeface="Calibri"/>
+              </a:rPr>
+              <a:t>Computer Science, Statistics &amp; Data Science</a:t>
+            </a:r>
+          </a:p>
+          <a:p>
+            <a:pPr algn="l">
+              <a:lnSpc>
+                <a:spcPct val="120000"/>
+              </a:lnSpc>
+              <a:spcAft>
+                <a:spcPts val="100"/>
+              </a:spcAft>
+            </a:pPr>
+            <a:r>
+              <a:rPr sz="1200" b="0">
+                <a:solidFill>
+                  <a:srgbClr val="98A3B0"/>
+                </a:solidFill>
+                <a:latin typeface="Calibri"/>
+              </a:rPr>
+              <a:t>University of Cape Town</a:t>
+            </a:r>
+          </a:p>
+        </p:txBody>
+      </p:sp>
+      <p:sp>
+        <p:nvSpPr>
+          <p:cNvPr id="8" name="TextBox 7"/>
+          <p:cNvSpPr txBox="1"/>
+          <p:nvPr/>
+        </p:nvSpPr>
+        <p:spPr>
+          <a:xfrm>
+            <a:off x="4590288" y="5074920"/>
+            <a:ext cx="3657600" cy="1005840"/>
+          </a:xfrm>
+          <a:prstGeom prst="rect">
+            <a:avLst/>
+          </a:prstGeom>
+          <a:noFill/>
+        </p:spPr>
+        <p:txBody>
+          <a:bodyPr wrap="square" lIns="0" rIns="0" tIns="0" bIns="0">
+            <a:spAutoFit/>
+          </a:bodyPr>
+          <a:lstStyle/>
+          <a:p>
+            <a:pPr algn="l">
+              <a:spcAft>
+                <a:spcPts val="300"/>
+              </a:spcAft>
+            </a:pPr>
+            <a:r>
+              <a:rPr sz="1600" b="1">
+                <a:solidFill>
+                  <a:srgbClr val="E9EEF4"/>
+                </a:solidFill>
+                <a:latin typeface="Calibri"/>
+              </a:rPr>
+              <a:t>Jaswin Chinthala</a:t>
+            </a:r>
+          </a:p>
+          <a:p>
+            <a:pPr algn="l">
+              <a:lnSpc>
+                <a:spcPct val="120000"/>
+              </a:lnSpc>
+              <a:spcAft>
+                <a:spcPts val="100"/>
+              </a:spcAft>
+            </a:pPr>
+            <a:r>
+              <a:rPr sz="1200" b="0">
+                <a:solidFill>
+                  <a:srgbClr val="98A3B0"/>
+                </a:solidFill>
+                <a:latin typeface="Calibri"/>
+              </a:rPr>
+              <a:t>Electrical Engineering</a:t>
+            </a:r>
+          </a:p>
+          <a:p>
+            <a:pPr algn="l">
+              <a:lnSpc>
+                <a:spcPct val="120000"/>
+              </a:lnSpc>
+              <a:spcAft>
+                <a:spcPts val="100"/>
+              </a:spcAft>
+            </a:pPr>
+            <a:r>
+              <a:rPr sz="1200" b="0">
+                <a:solidFill>
+                  <a:srgbClr val="98A3B0"/>
+                </a:solidFill>
+                <a:latin typeface="Calibri"/>
+              </a:rPr>
+              <a:t>University of Cape Town</a:t>
+            </a:r>
+          </a:p>
+        </p:txBody>
+      </p:sp>
+      <p:sp>
+        <p:nvSpPr>
+          <p:cNvPr id="9" name="TextBox 8"/>
+          <p:cNvSpPr txBox="1"/>
+          <p:nvPr/>
+        </p:nvSpPr>
+        <p:spPr>
+          <a:xfrm>
+            <a:off x="8241487" y="5074920"/>
+            <a:ext cx="3291840" cy="1005840"/>
+          </a:xfrm>
+          <a:prstGeom prst="rect">
+            <a:avLst/>
+          </a:prstGeom>
+          <a:noFill/>
+        </p:spPr>
+        <p:txBody>
+          <a:bodyPr wrap="square" lIns="0" rIns="0" tIns="0" bIns="0">
+            <a:spAutoFit/>
+          </a:bodyPr>
+          <a:lstStyle/>
+          <a:p>
+            <a:pPr algn="r">
+              <a:spcAft>
+                <a:spcPts val="300"/>
+              </a:spcAft>
+            </a:pPr>
+            <a:r>
+              <a:rPr sz="1300" b="1">
+                <a:solidFill>
+                  <a:srgbClr val="F0C040"/>
+                </a:solidFill>
+                <a:latin typeface="Consolas"/>
+              </a:rPr>
+              <a:t>9,269 scored trials  ·  $3.12</a:t>
+            </a:r>
+          </a:p>
+          <a:p>
+            <a:pPr algn="r">
+              <a:spcAft>
+                <a:spcPts val="800"/>
+              </a:spcAft>
+            </a:pPr>
+            <a:r>
+              <a:rPr sz="1150" b="0">
+                <a:solidFill>
+                  <a:srgbClr val="98A3B0"/>
+                </a:solidFill>
+                <a:latin typeface="Consolas"/>
+              </a:rPr>
+              <a:t>github.com/UbaJaz/Digital_Minds_Research</a:t>
+            </a:r>
+          </a:p>
+        </p:txBody>
+      </p:sp>
+      <p:sp>
+        <p:nvSpPr>
+          <p:cNvPr id="10" name="Rectangle 9"/>
+          <p:cNvSpPr/>
+          <p:nvPr/>
+        </p:nvSpPr>
+        <p:spPr>
+          <a:xfrm>
+            <a:off x="658368" y="6291072"/>
+            <a:ext cx="10874959" cy="9525"/>
+          </a:xfrm>
+          <a:prstGeom prst="rect">
+            <a:avLst/>
+          </a:prstGeom>
+          <a:solidFill>
+            <a:srgbClr val="2A323C"/>
+          </a:solidFill>
+          <a:ln>
+            <a:noFill/>
+          </a:ln>
+          <a:effectLst/>
+        </p:spPr>
+        <p:style>
+          <a:lnRef idx="1">
+            <a:schemeClr val="accent1"/>
+          </a:lnRef>
+          <a:fillRef idx="3">
+            <a:schemeClr val="accent1"/>
+          </a:fillRef>
+          <a:effectRef idx="2">
+            <a:schemeClr val="accent1"/>
+          </a:effectRef>
+          <a:fontRef idx="minor">
+            <a:schemeClr val="lt1"/>
+          </a:fontRef>
+        </p:style>
+        <p:txBody>
+          <a:bodyPr rtlCol="0" anchor="ctr"/>
+          <a:lstStyle/>
+          <a:p>
+            <a:pPr algn="ctr"/>
+          </a:p>
+        </p:txBody>
+      </p:sp>
+      <p:sp>
+        <p:nvSpPr>
+          <p:cNvPr id="11" name="TextBox 10"/>
+          <p:cNvSpPr txBox="1"/>
+          <p:nvPr/>
+        </p:nvSpPr>
+        <p:spPr>
+          <a:xfrm>
+            <a:off x="658368" y="6400800"/>
+            <a:ext cx="10874959" cy="274320"/>
+          </a:xfrm>
+          <a:prstGeom prst="rect">
+            <a:avLst/>
+          </a:prstGeom>
+          <a:noFill/>
+        </p:spPr>
+        <p:txBody>
+          <a:bodyPr wrap="square" lIns="0" rIns="0" tIns="0" bIns="0">
+            <a:spAutoFit/>
+          </a:bodyPr>
+          <a:lstStyle/>
+          <a:p>
+            <a:pPr algn="l">
+              <a:lnSpc>
+                <a:spcPct val="128000"/>
+              </a:lnSpc>
+              <a:spcAft>
+                <a:spcPts val="0"/>
+              </a:spcAft>
+            </a:pPr>
+            <a:r>
+              <a:rPr sz="1050" b="1">
+                <a:solidFill>
+                  <a:srgbClr val="F0C040"/>
+                </a:solidFill>
+                <a:latin typeface="Consolas"/>
+              </a:rPr>
+              <a:t>1</a:t>
+            </a:r>
+            <a:r>
+              <a:rPr sz="1050" b="0">
+                <a:solidFill>
+                  <a:srgbClr val="6B7683"/>
+                </a:solidFill>
+                <a:latin typeface="Consolas"/>
+              </a:rPr>
+              <a:t>  /  6     Beaten by Eighteen Features</a:t>
+            </a:r>
           </a:p>
         </p:txBody>
       </p:sp>
@@ -3631,7 +3649,7 @@
     <p:bg>
       <p:bgPr>
         <a:solidFill>
-          <a:srgbClr val="F6F8FA"/>
+          <a:srgbClr val="0D1117"/>
         </a:solidFill>
         <a:effectLst/>
       </p:bgPr>
@@ -3651,8 +3669,8 @@
         </p:nvSpPr>
         <p:spPr>
           <a:xfrm>
-            <a:off x="822960" y="566928"/>
-            <a:ext cx="10545775" cy="365760"/>
+            <a:off x="658368" y="475488"/>
+            <a:ext cx="10874959" cy="310896"/>
           </a:xfrm>
           <a:prstGeom prst="rect">
             <a:avLst/>
@@ -3660,7 +3678,7 @@
           <a:noFill/>
         </p:spPr>
         <p:txBody>
-          <a:bodyPr wrap="square">
+          <a:bodyPr wrap="square" lIns="0" rIns="0" tIns="0" bIns="0">
             <a:spAutoFit/>
           </a:bodyPr>
           <a:lstStyle/>
@@ -3671,13 +3689,13 @@
               </a:spcAft>
             </a:pPr>
             <a:r>
-              <a:rPr sz="1100" b="0" spc="140">
-                <a:solidFill>
-                  <a:srgbClr val="59636F"/>
+              <a:rPr sz="1150" b="0" spc="160">
+                <a:solidFill>
+                  <a:srgbClr val="F0C040"/>
                 </a:solidFill>
                 <a:latin typeface="Consolas"/>
               </a:rPr>
-              <a:t>WHY IT MATTERS</a:t>
+              <a:t>THE QUESTION, AND THE DESIGN THAT CAN ANSWER IT</a:t>
             </a:r>
           </a:p>
         </p:txBody>
@@ -3690,8 +3708,8 @@
         </p:nvSpPr>
         <p:spPr>
           <a:xfrm>
-            <a:off x="822960" y="960120"/>
-            <a:ext cx="10545775" cy="1371600"/>
+            <a:off x="658368" y="868680"/>
+            <a:ext cx="10874959" cy="1005840"/>
           </a:xfrm>
           <a:prstGeom prst="rect">
             <a:avLst/>
@@ -3699,27 +3717,27 @@
           <a:noFill/>
         </p:spPr>
         <p:txBody>
-          <a:bodyPr wrap="square">
+          <a:bodyPr wrap="square" lIns="0" rIns="0" tIns="0" bIns="0">
             <a:spAutoFit/>
           </a:bodyPr>
           <a:lstStyle/>
           <a:p>
             <a:pPr algn="l">
               <a:lnSpc>
-                <a:spcPct val="105000"/>
+                <a:spcPct val="106000"/>
               </a:lnSpc>
               <a:spcAft>
                 <a:spcPts val="800"/>
               </a:spcAft>
             </a:pPr>
             <a:r>
-              <a:rPr sz="4000" b="1">
-                <a:solidFill>
-                  <a:srgbClr val="12171F"/>
-                </a:solidFill>
-                <a:latin typeface="Georgia"/>
-              </a:rPr>
-              <a:t>Model welfare research runs on self-report</a:t>
+              <a:rPr sz="3100" b="1">
+                <a:solidFill>
+                  <a:srgbClr val="E9EEF4"/>
+                </a:solidFill>
+                <a:latin typeface="Calibri"/>
+              </a:rPr>
+              <a:t>Privileged access means beating a cheap observer</a:t>
             </a:r>
           </a:p>
         </p:txBody>
@@ -3732,8 +3750,8 @@
         </p:nvSpPr>
         <p:spPr>
           <a:xfrm>
-            <a:off x="822960" y="2286000"/>
-            <a:ext cx="8778240" cy="3566160"/>
+            <a:off x="658368" y="1444752"/>
+            <a:ext cx="10881360" cy="548640"/>
           </a:xfrm>
           <a:prstGeom prst="rect">
             <a:avLst/>
@@ -3741,79 +3759,270 @@
           <a:noFill/>
         </p:spPr>
         <p:txBody>
-          <a:bodyPr wrap="square">
+          <a:bodyPr wrap="square" lIns="0" rIns="0" tIns="0" bIns="0">
             <a:spAutoFit/>
           </a:bodyPr>
           <a:lstStyle/>
           <a:p>
             <a:pPr algn="l">
               <a:lnSpc>
-                <a:spcPct val="130000"/>
+                <a:spcPct val="128000"/>
               </a:lnSpc>
               <a:spcAft>
-                <a:spcPts val="1200"/>
-              </a:spcAft>
-            </a:pPr>
-            <a:r>
-              <a:rPr sz="1600" b="0">
-                <a:solidFill>
-                  <a:srgbClr val="12171F"/>
-                </a:solidFill>
-                <a:latin typeface="Segoe UI"/>
-              </a:rPr>
-              <a:t>When we ask whether a model has preferences, is distressed, or is flourishing, we mostly ask the model. That only works if its report about itself carries information an outside observer could not get from the same text.</a:t>
-            </a:r>
-          </a:p>
+                <a:spcPts val="0"/>
+              </a:spcAft>
+            </a:pPr>
+            <a:r>
+              <a:rPr sz="1450" b="1">
+                <a:solidFill>
+                  <a:srgbClr val="E9EEF4"/>
+                </a:solidFill>
+                <a:latin typeface="Calibri"/>
+              </a:rPr>
+              <a:t>Two confounds block any black-box test. </a:t>
+            </a:r>
+            <a:r>
+              <a:rPr sz="1450" b="0">
+                <a:solidFill>
+                  <a:srgbClr val="98A3B0"/>
+                </a:solidFill>
+                <a:latin typeface="Calibri"/>
+              </a:rPr>
+              <a:t>The self predictor is usually also the strongest model in the comparison, and a hidden property may simply be legible in the text. We remove the first by construction and turn the second into a measurement.</a:t>
+            </a:r>
+          </a:p>
+        </p:txBody>
+      </p:sp>
+      <p:sp>
+        <p:nvSpPr>
+          <p:cNvPr id="5" name="Rectangle 4"/>
+          <p:cNvSpPr/>
+          <p:nvPr/>
+        </p:nvSpPr>
+        <p:spPr>
+          <a:xfrm>
+            <a:off x="658368" y="2267712"/>
+            <a:ext cx="2212848" cy="1517904"/>
+          </a:xfrm>
+          <a:prstGeom prst="rect">
+            <a:avLst/>
+          </a:prstGeom>
+          <a:solidFill>
+            <a:srgbClr val="161B22"/>
+          </a:solidFill>
+          <a:ln w="12700">
+            <a:solidFill>
+              <a:srgbClr val="2A323C"/>
+            </a:solidFill>
+          </a:ln>
+          <a:effectLst/>
+        </p:spPr>
+        <p:style>
+          <a:lnRef idx="1">
+            <a:schemeClr val="accent1"/>
+          </a:lnRef>
+          <a:fillRef idx="3">
+            <a:schemeClr val="accent1"/>
+          </a:fillRef>
+          <a:effectRef idx="2">
+            <a:schemeClr val="accent1"/>
+          </a:effectRef>
+          <a:fontRef idx="minor">
+            <a:schemeClr val="lt1"/>
+          </a:fontRef>
+        </p:style>
+        <p:txBody>
+          <a:bodyPr rtlCol="0" anchor="ctr"/>
+          <a:lstStyle/>
+          <a:p>
+            <a:pPr algn="ctr"/>
+          </a:p>
+        </p:txBody>
+      </p:sp>
+      <p:sp>
+        <p:nvSpPr>
+          <p:cNvPr id="6" name="TextBox 5"/>
+          <p:cNvSpPr txBox="1"/>
+          <p:nvPr/>
+        </p:nvSpPr>
+        <p:spPr>
+          <a:xfrm>
+            <a:off x="804672" y="2395728"/>
+            <a:ext cx="1920240" cy="310896"/>
+          </a:xfrm>
+          <a:prstGeom prst="rect">
+            <a:avLst/>
+          </a:prstGeom>
+          <a:noFill/>
+        </p:spPr>
+        <p:txBody>
+          <a:bodyPr wrap="square" lIns="0" rIns="0" tIns="0" bIns="0">
+            <a:spAutoFit/>
+          </a:bodyPr>
+          <a:lstStyle/>
           <a:p>
             <a:pPr algn="l">
               <a:lnSpc>
-                <a:spcPct val="130000"/>
+                <a:spcPct val="128000"/>
               </a:lnSpc>
               <a:spcAft>
-                <a:spcPts val="1200"/>
-              </a:spcAft>
-            </a:pPr>
-            <a:r>
-              <a:rPr sz="1600" b="0">
-                <a:solidFill>
-                  <a:srgbClr val="12171F"/>
-                </a:solidFill>
-                <a:latin typeface="Segoe UI"/>
-              </a:rPr>
-              <a:t>Binder et al. say models have that privileged access. Song et al. say the apparent effect is just behavioural similarity.</a:t>
+                <a:spcPts val="0"/>
+              </a:spcAft>
+            </a:pPr>
+            <a:r>
+              <a:rPr sz="2000" b="1">
+                <a:solidFill>
+                  <a:srgbClr val="4A9B4A"/>
+                </a:solidFill>
+                <a:latin typeface="Consolas"/>
+              </a:rPr>
+              <a:t>M   </a:t>
+            </a:r>
+            <a:r>
+              <a:rPr sz="1000" b="1">
+                <a:solidFill>
+                  <a:srgbClr val="6B7683"/>
+                </a:solidFill>
+                <a:latin typeface="Consolas"/>
+              </a:rPr>
+              <a:t>TARGET</a:t>
+            </a:r>
+          </a:p>
+        </p:txBody>
+      </p:sp>
+      <p:sp>
+        <p:nvSpPr>
+          <p:cNvPr id="7" name="TextBox 6"/>
+          <p:cNvSpPr txBox="1"/>
+          <p:nvPr/>
+        </p:nvSpPr>
+        <p:spPr>
+          <a:xfrm>
+            <a:off x="804672" y="2834640"/>
+            <a:ext cx="1920240" cy="868680"/>
+          </a:xfrm>
+          <a:prstGeom prst="rect">
+            <a:avLst/>
+          </a:prstGeom>
+          <a:noFill/>
+        </p:spPr>
+        <p:txBody>
+          <a:bodyPr wrap="square" lIns="0" rIns="0" tIns="0" bIns="0">
+            <a:spAutoFit/>
+          </a:bodyPr>
+          <a:lstStyle/>
+          <a:p>
+            <a:pPr algn="l">
+              <a:spcAft>
+                <a:spcPts val="400"/>
+              </a:spcAft>
+            </a:pPr>
+            <a:r>
+              <a:rPr sz="1350" b="1">
+                <a:solidFill>
+                  <a:srgbClr val="E9EEF4"/>
+                </a:solidFill>
+                <a:latin typeface="Calibri"/>
+              </a:rPr>
+              <a:t>Llama-3.1-70B</a:t>
             </a:r>
           </a:p>
           <a:p>
             <a:pPr algn="l">
               <a:lnSpc>
-                <a:spcPct val="130000"/>
+                <a:spcPct val="116000"/>
               </a:lnSpc>
               <a:spcAft>
-                <a:spcPts val="1200"/>
-              </a:spcAft>
-            </a:pPr>
-            <a:r>
-              <a:rPr sz="1600" b="1">
-                <a:solidFill>
-                  <a:srgbClr val="12171F"/>
-                </a:solidFill>
-                <a:latin typeface="Segoe UI"/>
-              </a:rPr>
-              <a:t>Settling it decides whether a whole class of welfare measurements means anything — and whether we over- or under-attribute moral significance to AI systems.</a:t>
-            </a:r>
-          </a:p>
-        </p:txBody>
-      </p:sp>
-      <p:sp>
-        <p:nvSpPr>
-          <p:cNvPr id="5" name="TextBox 4"/>
+                <a:spcPts val="0"/>
+              </a:spcAft>
+            </a:pPr>
+            <a:r>
+              <a:rPr sz="1150" b="0">
+                <a:solidFill>
+                  <a:srgbClr val="98A3B0"/>
+                </a:solidFill>
+                <a:latin typeface="Calibri"/>
+              </a:rPr>
+              <a:t>generates a column;</a:t>
+            </a:r>
+          </a:p>
+          <a:p>
+            <a:pPr algn="l">
+              <a:lnSpc>
+                <a:spcPct val="116000"/>
+              </a:lnSpc>
+              <a:spcAft>
+                <a:spcPts val="0"/>
+              </a:spcAft>
+            </a:pPr>
+            <a:r>
+              <a:rPr sz="1150" b="0">
+                <a:solidFill>
+                  <a:srgbClr val="98A3B0"/>
+                </a:solidFill>
+                <a:latin typeface="Calibri"/>
+              </a:rPr>
+              <a:t>predicts both</a:t>
+            </a:r>
+          </a:p>
+        </p:txBody>
+      </p:sp>
+      <p:sp>
+        <p:nvSpPr>
+          <p:cNvPr id="8" name="Rectangle 7"/>
+          <p:cNvSpPr/>
+          <p:nvPr/>
+        </p:nvSpPr>
+        <p:spPr>
+          <a:xfrm>
+            <a:off x="3054096" y="2267712"/>
+            <a:ext cx="2212848" cy="1517904"/>
+          </a:xfrm>
+          <a:prstGeom prst="rect">
+            <a:avLst/>
+          </a:prstGeom>
+          <a:solidFill>
+            <a:srgbClr val="161B22"/>
+          </a:solidFill>
+          <a:ln w="12700">
+            <a:solidFill>
+              <a:srgbClr val="2A323C"/>
+            </a:solidFill>
+          </a:ln>
+          <a:effectLst/>
+        </p:spPr>
+        <p:style>
+          <a:lnRef idx="1">
+            <a:schemeClr val="accent1"/>
+          </a:lnRef>
+          <a:fillRef idx="3">
+            <a:schemeClr val="accent1"/>
+          </a:fillRef>
+          <a:effectRef idx="2">
+            <a:schemeClr val="accent1"/>
+          </a:effectRef>
+          <a:fontRef idx="minor">
+            <a:schemeClr val="lt1"/>
+          </a:fontRef>
+        </p:style>
+        <p:txBody>
+          <a:bodyPr rtlCol="0" anchor="ctr"/>
+          <a:lstStyle/>
+          <a:p>
+            <a:pPr algn="ctr"/>
+          </a:p>
+        </p:txBody>
+      </p:sp>
+      <p:sp>
+        <p:nvSpPr>
+          <p:cNvPr id="9" name="TextBox 8"/>
           <p:cNvSpPr txBox="1"/>
           <p:nvPr/>
         </p:nvSpPr>
         <p:spPr>
           <a:xfrm>
-            <a:off x="822960" y="6172200"/>
-            <a:ext cx="1828800" cy="320040"/>
+            <a:off x="3200400" y="2395728"/>
+            <a:ext cx="1920240" cy="310896"/>
           </a:xfrm>
           <a:prstGeom prst="rect">
             <a:avLst/>
@@ -3821,44 +4030,1096 @@
           <a:noFill/>
         </p:spPr>
         <p:txBody>
-          <a:bodyPr wrap="square">
+          <a:bodyPr wrap="square" lIns="0" rIns="0" tIns="0" bIns="0">
             <a:spAutoFit/>
           </a:bodyPr>
           <a:lstStyle/>
           <a:p>
             <a:pPr algn="l">
+              <a:lnSpc>
+                <a:spcPct val="128000"/>
+              </a:lnSpc>
+              <a:spcAft>
+                <a:spcPts val="0"/>
+              </a:spcAft>
+            </a:pPr>
+            <a:r>
+              <a:rPr sz="2000" b="1">
+                <a:solidFill>
+                  <a:srgbClr val="4A90D9"/>
+                </a:solidFill>
+                <a:latin typeface="Consolas"/>
+              </a:rPr>
+              <a:t>N   </a:t>
+            </a:r>
+            <a:r>
+              <a:rPr sz="1000" b="1">
+                <a:solidFill>
+                  <a:srgbClr val="6B7683"/>
+                </a:solidFill>
+                <a:latin typeface="Consolas"/>
+              </a:rPr>
+              <a:t>SIBLING</a:t>
+            </a:r>
+          </a:p>
+        </p:txBody>
+      </p:sp>
+      <p:sp>
+        <p:nvSpPr>
+          <p:cNvPr id="10" name="TextBox 9"/>
+          <p:cNvSpPr txBox="1"/>
+          <p:nvPr/>
+        </p:nvSpPr>
+        <p:spPr>
+          <a:xfrm>
+            <a:off x="3200400" y="2834640"/>
+            <a:ext cx="1920240" cy="868680"/>
+          </a:xfrm>
+          <a:prstGeom prst="rect">
+            <a:avLst/>
+          </a:prstGeom>
+          <a:noFill/>
+        </p:spPr>
+        <p:txBody>
+          <a:bodyPr wrap="square" lIns="0" rIns="0" tIns="0" bIns="0">
+            <a:spAutoFit/>
+          </a:bodyPr>
+          <a:lstStyle/>
+          <a:p>
+            <a:pPr algn="l">
+              <a:spcAft>
+                <a:spcPts val="400"/>
+              </a:spcAft>
+            </a:pPr>
+            <a:r>
+              <a:rPr sz="1350" b="1">
+                <a:solidFill>
+                  <a:srgbClr val="E9EEF4"/>
+                </a:solidFill>
+                <a:latin typeface="Calibri"/>
+              </a:rPr>
+              <a:t>Hermes-3-70B</a:t>
+            </a:r>
+          </a:p>
+          <a:p>
+            <a:pPr algn="l">
+              <a:lnSpc>
+                <a:spcPct val="116000"/>
+              </a:lnSpc>
+              <a:spcAft>
+                <a:spcPts val="0"/>
+              </a:spcAft>
+            </a:pPr>
+            <a:r>
+              <a:rPr sz="1150" b="0">
+                <a:solidFill>
+                  <a:srgbClr val="98A3B0"/>
+                </a:solidFill>
+                <a:latin typeface="Calibri"/>
+              </a:rPr>
+              <a:t>same pretrained base;</a:t>
+            </a:r>
+          </a:p>
+          <a:p>
+            <a:pPr algn="l">
+              <a:lnSpc>
+                <a:spcPct val="116000"/>
+              </a:lnSpc>
+              <a:spcAft>
+                <a:spcPts val="0"/>
+              </a:spcAft>
+            </a:pPr>
+            <a:r>
+              <a:rPr sz="1150" b="0">
+                <a:solidFill>
+                  <a:srgbClr val="98A3B0"/>
+                </a:solidFill>
+                <a:latin typeface="Calibri"/>
+              </a:rPr>
+              <a:t>different post-training</a:t>
+            </a:r>
+          </a:p>
+        </p:txBody>
+      </p:sp>
+      <p:sp>
+        <p:nvSpPr>
+          <p:cNvPr id="11" name="Rectangle 10"/>
+          <p:cNvSpPr/>
+          <p:nvPr/>
+        </p:nvSpPr>
+        <p:spPr>
+          <a:xfrm>
+            <a:off x="5449824" y="2267712"/>
+            <a:ext cx="2212848" cy="1517904"/>
+          </a:xfrm>
+          <a:prstGeom prst="rect">
+            <a:avLst/>
+          </a:prstGeom>
+          <a:solidFill>
+            <a:srgbClr val="161B22"/>
+          </a:solidFill>
+          <a:ln w="12700">
+            <a:solidFill>
+              <a:srgbClr val="2A323C"/>
+            </a:solidFill>
+          </a:ln>
+          <a:effectLst/>
+        </p:spPr>
+        <p:style>
+          <a:lnRef idx="1">
+            <a:schemeClr val="accent1"/>
+          </a:lnRef>
+          <a:fillRef idx="3">
+            <a:schemeClr val="accent1"/>
+          </a:fillRef>
+          <a:effectRef idx="2">
+            <a:schemeClr val="accent1"/>
+          </a:effectRef>
+          <a:fontRef idx="minor">
+            <a:schemeClr val="lt1"/>
+          </a:fontRef>
+        </p:style>
+        <p:txBody>
+          <a:bodyPr rtlCol="0" anchor="ctr"/>
+          <a:lstStyle/>
+          <a:p>
+            <a:pPr algn="ctr"/>
+          </a:p>
+        </p:txBody>
+      </p:sp>
+      <p:sp>
+        <p:nvSpPr>
+          <p:cNvPr id="12" name="TextBox 11"/>
+          <p:cNvSpPr txBox="1"/>
+          <p:nvPr/>
+        </p:nvSpPr>
+        <p:spPr>
+          <a:xfrm>
+            <a:off x="5596128" y="2395728"/>
+            <a:ext cx="1920240" cy="310896"/>
+          </a:xfrm>
+          <a:prstGeom prst="rect">
+            <a:avLst/>
+          </a:prstGeom>
+          <a:noFill/>
+        </p:spPr>
+        <p:txBody>
+          <a:bodyPr wrap="square" lIns="0" rIns="0" tIns="0" bIns="0">
+            <a:spAutoFit/>
+          </a:bodyPr>
+          <a:lstStyle/>
+          <a:p>
+            <a:pPr algn="l">
+              <a:lnSpc>
+                <a:spcPct val="128000"/>
+              </a:lnSpc>
+              <a:spcAft>
+                <a:spcPts val="0"/>
+              </a:spcAft>
+            </a:pPr>
+            <a:r>
+              <a:rPr sz="2000" b="1">
+                <a:solidFill>
+                  <a:srgbClr val="98A3B0"/>
+                </a:solidFill>
+                <a:latin typeface="Consolas"/>
+              </a:rPr>
+              <a:t>F   </a:t>
+            </a:r>
+            <a:r>
+              <a:rPr sz="1000" b="1">
+                <a:solidFill>
+                  <a:srgbClr val="6B7683"/>
+                </a:solidFill>
+                <a:latin typeface="Consolas"/>
+              </a:rPr>
+              <a:t>FAR OBSERVER</a:t>
+            </a:r>
+          </a:p>
+        </p:txBody>
+      </p:sp>
+      <p:sp>
+        <p:nvSpPr>
+          <p:cNvPr id="13" name="TextBox 12"/>
+          <p:cNvSpPr txBox="1"/>
+          <p:nvPr/>
+        </p:nvSpPr>
+        <p:spPr>
+          <a:xfrm>
+            <a:off x="5596128" y="2834640"/>
+            <a:ext cx="1920240" cy="868680"/>
+          </a:xfrm>
+          <a:prstGeom prst="rect">
+            <a:avLst/>
+          </a:prstGeom>
+          <a:noFill/>
+        </p:spPr>
+        <p:txBody>
+          <a:bodyPr wrap="square" lIns="0" rIns="0" tIns="0" bIns="0">
+            <a:spAutoFit/>
+          </a:bodyPr>
+          <a:lstStyle/>
+          <a:p>
+            <a:pPr algn="l">
+              <a:spcAft>
+                <a:spcPts val="400"/>
+              </a:spcAft>
+            </a:pPr>
+            <a:r>
+              <a:rPr sz="1350" b="1">
+                <a:solidFill>
+                  <a:srgbClr val="E9EEF4"/>
+                </a:solidFill>
+                <a:latin typeface="Calibri"/>
+              </a:rPr>
+              <a:t>Mistral-Small-24B</a:t>
+            </a:r>
+          </a:p>
+          <a:p>
+            <a:pPr algn="l">
+              <a:lnSpc>
+                <a:spcPct val="116000"/>
+              </a:lnSpc>
+              <a:spcAft>
+                <a:spcPts val="0"/>
+              </a:spcAft>
+            </a:pPr>
+            <a:r>
+              <a:rPr sz="1150" b="0">
+                <a:solidFill>
+                  <a:srgbClr val="98A3B0"/>
+                </a:solidFill>
+                <a:latin typeface="Calibri"/>
+              </a:rPr>
+              <a:t>different organisation,</a:t>
+            </a:r>
+          </a:p>
+          <a:p>
+            <a:pPr algn="l">
+              <a:lnSpc>
+                <a:spcPct val="116000"/>
+              </a:lnSpc>
+              <a:spcAft>
+                <a:spcPts val="0"/>
+              </a:spcAft>
+            </a:pPr>
+            <a:r>
+              <a:rPr sz="1150" b="0">
+                <a:solidFill>
+                  <a:srgbClr val="98A3B0"/>
+                </a:solidFill>
+                <a:latin typeface="Calibri"/>
+              </a:rPr>
+              <a:t>base and family</a:t>
+            </a:r>
+          </a:p>
+        </p:txBody>
+      </p:sp>
+      <p:sp>
+        <p:nvSpPr>
+          <p:cNvPr id="14" name="TextBox 13"/>
+          <p:cNvSpPr txBox="1"/>
+          <p:nvPr/>
+        </p:nvSpPr>
+        <p:spPr>
+          <a:xfrm>
+            <a:off x="8110728" y="1993392"/>
+            <a:ext cx="4023360" cy="256032"/>
+          </a:xfrm>
+          <a:prstGeom prst="rect">
+            <a:avLst/>
+          </a:prstGeom>
+          <a:noFill/>
+        </p:spPr>
+        <p:txBody>
+          <a:bodyPr wrap="square" lIns="0" rIns="0" tIns="0" bIns="0">
+            <a:spAutoFit/>
+          </a:bodyPr>
+          <a:lstStyle/>
+          <a:p>
+            <a:pPr algn="l">
               <a:spcAft>
                 <a:spcPts val="800"/>
               </a:spcAft>
             </a:pPr>
             <a:r>
-              <a:rPr sz="1100" b="0" spc="80">
-                <a:solidFill>
-                  <a:srgbClr val="0F6E8C"/>
+              <a:rPr sz="1050" b="1" spc="120">
+                <a:solidFill>
+                  <a:srgbClr val="F0C040"/>
                 </a:solidFill>
                 <a:latin typeface="Consolas"/>
               </a:rPr>
-              <a:t>02</a:t>
-            </a:r>
-          </a:p>
-        </p:txBody>
-      </p:sp>
-      <p:sp>
-        <p:nvSpPr>
-          <p:cNvPr id="6" name="Rectangle 5"/>
+              <a:t>CROSSED 2×2 — 24 CELLS</a:t>
+            </a:r>
+          </a:p>
+        </p:txBody>
+      </p:sp>
+      <p:sp>
+        <p:nvSpPr>
+          <p:cNvPr id="15" name="TextBox 14"/>
+          <p:cNvSpPr txBox="1"/>
+          <p:nvPr/>
+        </p:nvSpPr>
+        <p:spPr>
+          <a:xfrm>
+            <a:off x="9070848" y="2249424"/>
+            <a:ext cx="2432304" cy="237744"/>
+          </a:xfrm>
+          <a:prstGeom prst="rect">
+            <a:avLst/>
+          </a:prstGeom>
+          <a:noFill/>
+        </p:spPr>
+        <p:txBody>
+          <a:bodyPr wrap="square" lIns="0" rIns="0" tIns="0" bIns="0">
+            <a:spAutoFit/>
+          </a:bodyPr>
+          <a:lstStyle/>
+          <a:p>
+            <a:pPr algn="l">
+              <a:spcAft>
+                <a:spcPts val="800"/>
+              </a:spcAft>
+            </a:pPr>
+            <a:r>
+              <a:rPr sz="1050" b="0">
+                <a:solidFill>
+                  <a:srgbClr val="6B7683"/>
+                </a:solidFill>
+                <a:latin typeface="Consolas"/>
+              </a:rPr>
+              <a:t>M's texts      N's texts</a:t>
+            </a:r>
+          </a:p>
+        </p:txBody>
+      </p:sp>
+      <p:sp>
+        <p:nvSpPr>
+          <p:cNvPr id="16" name="TextBox 15"/>
+          <p:cNvSpPr txBox="1"/>
+          <p:nvPr/>
+        </p:nvSpPr>
+        <p:spPr>
+          <a:xfrm>
+            <a:off x="8110728" y="2578608"/>
+            <a:ext cx="914400" cy="256032"/>
+          </a:xfrm>
+          <a:prstGeom prst="rect">
+            <a:avLst/>
+          </a:prstGeom>
+          <a:noFill/>
+        </p:spPr>
+        <p:txBody>
+          <a:bodyPr wrap="square" lIns="0" rIns="0" tIns="0" bIns="0">
+            <a:spAutoFit/>
+          </a:bodyPr>
+          <a:lstStyle/>
+          <a:p>
+            <a:pPr algn="l">
+              <a:spcAft>
+                <a:spcPts val="800"/>
+              </a:spcAft>
+            </a:pPr>
+            <a:r>
+              <a:rPr sz="1100" b="0">
+                <a:solidFill>
+                  <a:srgbClr val="98A3B0"/>
+                </a:solidFill>
+                <a:latin typeface="Consolas"/>
+              </a:rPr>
+              <a:t>M predicts</a:t>
+            </a:r>
+          </a:p>
+        </p:txBody>
+      </p:sp>
+      <p:sp>
+        <p:nvSpPr>
+          <p:cNvPr id="17" name="Rectangle 16"/>
           <p:cNvSpPr/>
           <p:nvPr/>
         </p:nvSpPr>
         <p:spPr>
           <a:xfrm>
-            <a:off x="822960" y="5989320"/>
-            <a:ext cx="10545775" cy="9525"/>
+            <a:off x="9070848" y="2505456"/>
+            <a:ext cx="1170432" cy="365760"/>
           </a:xfrm>
           <a:prstGeom prst="rect">
             <a:avLst/>
           </a:prstGeom>
           <a:solidFill>
-            <a:srgbClr val="DCE2E8"/>
+            <a:srgbClr val="1F3324"/>
+          </a:solidFill>
+          <a:ln w="12700">
+            <a:solidFill>
+              <a:srgbClr val="4A9B4A"/>
+            </a:solidFill>
+          </a:ln>
+          <a:effectLst/>
+        </p:spPr>
+        <p:style>
+          <a:lnRef idx="1">
+            <a:schemeClr val="accent1"/>
+          </a:lnRef>
+          <a:fillRef idx="3">
+            <a:schemeClr val="accent1"/>
+          </a:fillRef>
+          <a:effectRef idx="2">
+            <a:schemeClr val="accent1"/>
+          </a:effectRef>
+          <a:fontRef idx="minor">
+            <a:schemeClr val="lt1"/>
+          </a:fontRef>
+        </p:style>
+        <p:txBody>
+          <a:bodyPr rtlCol="0" anchor="ctr" lIns="0" rIns="0" tIns="0" bIns="0"/>
+          <a:lstStyle/>
+          <a:p>
+            <a:pPr algn="ctr">
+              <a:spcAft>
+                <a:spcPts val="800"/>
+              </a:spcAft>
+            </a:pPr>
+            <a:r>
+              <a:rPr sz="1100" b="1">
+                <a:solidFill>
+                  <a:srgbClr val="4A9B4A"/>
+                </a:solidFill>
+                <a:latin typeface="Consolas"/>
+              </a:rPr>
+              <a:t>M→M  self</a:t>
+            </a:r>
+          </a:p>
+        </p:txBody>
+      </p:sp>
+      <p:sp>
+        <p:nvSpPr>
+          <p:cNvPr id="18" name="Rectangle 17"/>
+          <p:cNvSpPr/>
+          <p:nvPr/>
+        </p:nvSpPr>
+        <p:spPr>
+          <a:xfrm>
+            <a:off x="10332720" y="2505456"/>
+            <a:ext cx="1170432" cy="365760"/>
+          </a:xfrm>
+          <a:prstGeom prst="rect">
+            <a:avLst/>
+          </a:prstGeom>
+          <a:solidFill>
+            <a:srgbClr val="1A1F2E"/>
+          </a:solidFill>
+          <a:ln w="12700">
+            <a:solidFill>
+              <a:srgbClr val="2A323C"/>
+            </a:solidFill>
+          </a:ln>
+          <a:effectLst/>
+        </p:spPr>
+        <p:style>
+          <a:lnRef idx="1">
+            <a:schemeClr val="accent1"/>
+          </a:lnRef>
+          <a:fillRef idx="3">
+            <a:schemeClr val="accent1"/>
+          </a:fillRef>
+          <a:effectRef idx="2">
+            <a:schemeClr val="accent1"/>
+          </a:effectRef>
+          <a:fontRef idx="minor">
+            <a:schemeClr val="lt1"/>
+          </a:fontRef>
+        </p:style>
+        <p:txBody>
+          <a:bodyPr rtlCol="0" anchor="ctr" lIns="0" rIns="0" tIns="0" bIns="0"/>
+          <a:lstStyle/>
+          <a:p>
+            <a:pPr algn="ctr">
+              <a:spcAft>
+                <a:spcPts val="800"/>
+              </a:spcAft>
+            </a:pPr>
+            <a:r>
+              <a:rPr sz="1100" b="0">
+                <a:solidFill>
+                  <a:srgbClr val="98A3B0"/>
+                </a:solidFill>
+                <a:latin typeface="Consolas"/>
+              </a:rPr>
+              <a:t>M→N</a:t>
+            </a:r>
+          </a:p>
+        </p:txBody>
+      </p:sp>
+      <p:sp>
+        <p:nvSpPr>
+          <p:cNvPr id="19" name="TextBox 18"/>
+          <p:cNvSpPr txBox="1"/>
+          <p:nvPr/>
+        </p:nvSpPr>
+        <p:spPr>
+          <a:xfrm>
+            <a:off x="8110728" y="2999232"/>
+            <a:ext cx="914400" cy="256032"/>
+          </a:xfrm>
+          <a:prstGeom prst="rect">
+            <a:avLst/>
+          </a:prstGeom>
+          <a:noFill/>
+        </p:spPr>
+        <p:txBody>
+          <a:bodyPr wrap="square" lIns="0" rIns="0" tIns="0" bIns="0">
+            <a:spAutoFit/>
+          </a:bodyPr>
+          <a:lstStyle/>
+          <a:p>
+            <a:pPr algn="l">
+              <a:spcAft>
+                <a:spcPts val="800"/>
+              </a:spcAft>
+            </a:pPr>
+            <a:r>
+              <a:rPr sz="1100" b="0">
+                <a:solidFill>
+                  <a:srgbClr val="98A3B0"/>
+                </a:solidFill>
+                <a:latin typeface="Consolas"/>
+              </a:rPr>
+              <a:t>N predicts</a:t>
+            </a:r>
+          </a:p>
+        </p:txBody>
+      </p:sp>
+      <p:sp>
+        <p:nvSpPr>
+          <p:cNvPr id="20" name="Rectangle 19"/>
+          <p:cNvSpPr/>
+          <p:nvPr/>
+        </p:nvSpPr>
+        <p:spPr>
+          <a:xfrm>
+            <a:off x="9070848" y="2926080"/>
+            <a:ext cx="1170432" cy="365760"/>
+          </a:xfrm>
+          <a:prstGeom prst="rect">
+            <a:avLst/>
+          </a:prstGeom>
+          <a:solidFill>
+            <a:srgbClr val="1A1F2E"/>
+          </a:solidFill>
+          <a:ln w="12700">
+            <a:solidFill>
+              <a:srgbClr val="2A323C"/>
+            </a:solidFill>
+          </a:ln>
+          <a:effectLst/>
+        </p:spPr>
+        <p:style>
+          <a:lnRef idx="1">
+            <a:schemeClr val="accent1"/>
+          </a:lnRef>
+          <a:fillRef idx="3">
+            <a:schemeClr val="accent1"/>
+          </a:fillRef>
+          <a:effectRef idx="2">
+            <a:schemeClr val="accent1"/>
+          </a:effectRef>
+          <a:fontRef idx="minor">
+            <a:schemeClr val="lt1"/>
+          </a:fontRef>
+        </p:style>
+        <p:txBody>
+          <a:bodyPr rtlCol="0" anchor="ctr" lIns="0" rIns="0" tIns="0" bIns="0"/>
+          <a:lstStyle/>
+          <a:p>
+            <a:pPr algn="ctr">
+              <a:spcAft>
+                <a:spcPts val="800"/>
+              </a:spcAft>
+            </a:pPr>
+            <a:r>
+              <a:rPr sz="1100" b="0">
+                <a:solidFill>
+                  <a:srgbClr val="98A3B0"/>
+                </a:solidFill>
+                <a:latin typeface="Consolas"/>
+              </a:rPr>
+              <a:t>N→M</a:t>
+            </a:r>
+          </a:p>
+        </p:txBody>
+      </p:sp>
+      <p:sp>
+        <p:nvSpPr>
+          <p:cNvPr id="21" name="Rectangle 20"/>
+          <p:cNvSpPr/>
+          <p:nvPr/>
+        </p:nvSpPr>
+        <p:spPr>
+          <a:xfrm>
+            <a:off x="10332720" y="2926080"/>
+            <a:ext cx="1170432" cy="365760"/>
+          </a:xfrm>
+          <a:prstGeom prst="rect">
+            <a:avLst/>
+          </a:prstGeom>
+          <a:solidFill>
+            <a:srgbClr val="1F3324"/>
+          </a:solidFill>
+          <a:ln w="12700">
+            <a:solidFill>
+              <a:srgbClr val="4A9B4A"/>
+            </a:solidFill>
+          </a:ln>
+          <a:effectLst/>
+        </p:spPr>
+        <p:style>
+          <a:lnRef idx="1">
+            <a:schemeClr val="accent1"/>
+          </a:lnRef>
+          <a:fillRef idx="3">
+            <a:schemeClr val="accent1"/>
+          </a:fillRef>
+          <a:effectRef idx="2">
+            <a:schemeClr val="accent1"/>
+          </a:effectRef>
+          <a:fontRef idx="minor">
+            <a:schemeClr val="lt1"/>
+          </a:fontRef>
+        </p:style>
+        <p:txBody>
+          <a:bodyPr rtlCol="0" anchor="ctr" lIns="0" rIns="0" tIns="0" bIns="0"/>
+          <a:lstStyle/>
+          <a:p>
+            <a:pPr algn="ctr">
+              <a:spcAft>
+                <a:spcPts val="800"/>
+              </a:spcAft>
+            </a:pPr>
+            <a:r>
+              <a:rPr sz="1100" b="1">
+                <a:solidFill>
+                  <a:srgbClr val="4A9B4A"/>
+                </a:solidFill>
+                <a:latin typeface="Consolas"/>
+              </a:rPr>
+              <a:t>N→N  self</a:t>
+            </a:r>
+          </a:p>
+        </p:txBody>
+      </p:sp>
+      <p:sp>
+        <p:nvSpPr>
+          <p:cNvPr id="22" name="TextBox 21"/>
+          <p:cNvSpPr txBox="1"/>
+          <p:nvPr/>
+        </p:nvSpPr>
+        <p:spPr>
+          <a:xfrm>
+            <a:off x="8110728" y="3419856"/>
+            <a:ext cx="914400" cy="256032"/>
+          </a:xfrm>
+          <a:prstGeom prst="rect">
+            <a:avLst/>
+          </a:prstGeom>
+          <a:noFill/>
+        </p:spPr>
+        <p:txBody>
+          <a:bodyPr wrap="square" lIns="0" rIns="0" tIns="0" bIns="0">
+            <a:spAutoFit/>
+          </a:bodyPr>
+          <a:lstStyle/>
+          <a:p>
+            <a:pPr algn="l">
+              <a:spcAft>
+                <a:spcPts val="800"/>
+              </a:spcAft>
+            </a:pPr>
+            <a:r>
+              <a:rPr sz="1100" b="0">
+                <a:solidFill>
+                  <a:srgbClr val="98A3B0"/>
+                </a:solidFill>
+                <a:latin typeface="Consolas"/>
+              </a:rPr>
+              <a:t>F predicts</a:t>
+            </a:r>
+          </a:p>
+        </p:txBody>
+      </p:sp>
+      <p:sp>
+        <p:nvSpPr>
+          <p:cNvPr id="23" name="Rectangle 22"/>
+          <p:cNvSpPr/>
+          <p:nvPr/>
+        </p:nvSpPr>
+        <p:spPr>
+          <a:xfrm>
+            <a:off x="9070848" y="3346704"/>
+            <a:ext cx="1170432" cy="365760"/>
+          </a:xfrm>
+          <a:prstGeom prst="rect">
+            <a:avLst/>
+          </a:prstGeom>
+          <a:solidFill>
+            <a:srgbClr val="1A1F2E"/>
+          </a:solidFill>
+          <a:ln w="12700">
+            <a:solidFill>
+              <a:srgbClr val="2A323C"/>
+            </a:solidFill>
+          </a:ln>
+          <a:effectLst/>
+        </p:spPr>
+        <p:style>
+          <a:lnRef idx="1">
+            <a:schemeClr val="accent1"/>
+          </a:lnRef>
+          <a:fillRef idx="3">
+            <a:schemeClr val="accent1"/>
+          </a:fillRef>
+          <a:effectRef idx="2">
+            <a:schemeClr val="accent1"/>
+          </a:effectRef>
+          <a:fontRef idx="minor">
+            <a:schemeClr val="lt1"/>
+          </a:fontRef>
+        </p:style>
+        <p:txBody>
+          <a:bodyPr rtlCol="0" anchor="ctr" lIns="0" rIns="0" tIns="0" bIns="0"/>
+          <a:lstStyle/>
+          <a:p>
+            <a:pPr algn="ctr">
+              <a:spcAft>
+                <a:spcPts val="800"/>
+              </a:spcAft>
+            </a:pPr>
+            <a:r>
+              <a:rPr sz="1100" b="0">
+                <a:solidFill>
+                  <a:srgbClr val="98A3B0"/>
+                </a:solidFill>
+                <a:latin typeface="Consolas"/>
+              </a:rPr>
+              <a:t>F→M</a:t>
+            </a:r>
+          </a:p>
+        </p:txBody>
+      </p:sp>
+      <p:sp>
+        <p:nvSpPr>
+          <p:cNvPr id="24" name="Rectangle 23"/>
+          <p:cNvSpPr/>
+          <p:nvPr/>
+        </p:nvSpPr>
+        <p:spPr>
+          <a:xfrm>
+            <a:off x="10332720" y="3346704"/>
+            <a:ext cx="1170432" cy="365760"/>
+          </a:xfrm>
+          <a:prstGeom prst="rect">
+            <a:avLst/>
+          </a:prstGeom>
+          <a:solidFill>
+            <a:srgbClr val="1A1F2E"/>
+          </a:solidFill>
+          <a:ln w="12700">
+            <a:solidFill>
+              <a:srgbClr val="2A323C"/>
+            </a:solidFill>
+          </a:ln>
+          <a:effectLst/>
+        </p:spPr>
+        <p:style>
+          <a:lnRef idx="1">
+            <a:schemeClr val="accent1"/>
+          </a:lnRef>
+          <a:fillRef idx="3">
+            <a:schemeClr val="accent1"/>
+          </a:fillRef>
+          <a:effectRef idx="2">
+            <a:schemeClr val="accent1"/>
+          </a:effectRef>
+          <a:fontRef idx="minor">
+            <a:schemeClr val="lt1"/>
+          </a:fontRef>
+        </p:style>
+        <p:txBody>
+          <a:bodyPr rtlCol="0" anchor="ctr" lIns="0" rIns="0" tIns="0" bIns="0"/>
+          <a:lstStyle/>
+          <a:p>
+            <a:pPr algn="ctr">
+              <a:spcAft>
+                <a:spcPts val="800"/>
+              </a:spcAft>
+            </a:pPr>
+            <a:r>
+              <a:rPr sz="1100" b="0">
+                <a:solidFill>
+                  <a:srgbClr val="98A3B0"/>
+                </a:solidFill>
+                <a:latin typeface="Consolas"/>
+              </a:rPr>
+              <a:t>F→N</a:t>
+            </a:r>
+          </a:p>
+        </p:txBody>
+      </p:sp>
+      <p:sp>
+        <p:nvSpPr>
+          <p:cNvPr id="25" name="Rectangle 24"/>
+          <p:cNvSpPr/>
+          <p:nvPr/>
+        </p:nvSpPr>
+        <p:spPr>
+          <a:xfrm>
+            <a:off x="8110728" y="3822192"/>
+            <a:ext cx="3392424" cy="384048"/>
+          </a:xfrm>
+          <a:prstGeom prst="rect">
+            <a:avLst/>
+          </a:prstGeom>
+          <a:solidFill>
+            <a:srgbClr val="161B22"/>
+          </a:solidFill>
+          <a:ln w="12700">
+            <a:solidFill>
+              <a:srgbClr val="F0C040"/>
+            </a:solidFill>
+          </a:ln>
+          <a:effectLst/>
+        </p:spPr>
+        <p:style>
+          <a:lnRef idx="1">
+            <a:schemeClr val="accent1"/>
+          </a:lnRef>
+          <a:fillRef idx="3">
+            <a:schemeClr val="accent1"/>
+          </a:fillRef>
+          <a:effectRef idx="2">
+            <a:schemeClr val="accent1"/>
+          </a:effectRef>
+          <a:fontRef idx="minor">
+            <a:schemeClr val="lt1"/>
+          </a:fontRef>
+        </p:style>
+        <p:txBody>
+          <a:bodyPr rtlCol="0" anchor="ctr"/>
+          <a:lstStyle/>
+          <a:p>
+            <a:pPr algn="ctr"/>
+          </a:p>
+        </p:txBody>
+      </p:sp>
+      <p:sp>
+        <p:nvSpPr>
+          <p:cNvPr id="26" name="TextBox 25"/>
+          <p:cNvSpPr txBox="1"/>
+          <p:nvPr/>
+        </p:nvSpPr>
+        <p:spPr>
+          <a:xfrm>
+            <a:off x="8238744" y="3913632"/>
+            <a:ext cx="3200400" cy="274320"/>
+          </a:xfrm>
+          <a:prstGeom prst="rect">
+            <a:avLst/>
+          </a:prstGeom>
+          <a:noFill/>
+        </p:spPr>
+        <p:txBody>
+          <a:bodyPr wrap="square" lIns="0" rIns="0" tIns="0" bIns="0">
+            <a:spAutoFit/>
+          </a:bodyPr>
+          <a:lstStyle/>
+          <a:p>
+            <a:pPr algn="l">
+              <a:lnSpc>
+                <a:spcPct val="128000"/>
+              </a:lnSpc>
+              <a:spcAft>
+                <a:spcPts val="0"/>
+              </a:spcAft>
+            </a:pPr>
+            <a:r>
+              <a:rPr sz="1200" b="1">
+                <a:solidFill>
+                  <a:srgbClr val="F0C040"/>
+                </a:solidFill>
+                <a:latin typeface="Consolas"/>
+              </a:rPr>
+              <a:t>D  </a:t>
+            </a:r>
+            <a:r>
+              <a:rPr sz="1150" b="0">
+                <a:solidFill>
+                  <a:srgbClr val="E9EEF4"/>
+                </a:solidFill>
+                <a:latin typeface="Calibri"/>
+              </a:rPr>
+              <a:t>surface baseline — the cheap third party</a:t>
+            </a:r>
+          </a:p>
+        </p:txBody>
+      </p:sp>
+      <p:sp>
+        <p:nvSpPr>
+          <p:cNvPr id="27" name="TextBox 26"/>
+          <p:cNvSpPr txBox="1"/>
+          <p:nvPr/>
+        </p:nvSpPr>
+        <p:spPr>
+          <a:xfrm>
+            <a:off x="658368" y="4224528"/>
+            <a:ext cx="10881360" cy="1371600"/>
+          </a:xfrm>
+          <a:prstGeom prst="rect">
+            <a:avLst/>
+          </a:prstGeom>
+          <a:noFill/>
+        </p:spPr>
+        <p:txBody>
+          <a:bodyPr wrap="square" lIns="0" rIns="0" tIns="0" bIns="0">
+            <a:spAutoFit/>
+          </a:bodyPr>
+          <a:lstStyle/>
+          <a:p>
+            <a:pPr algn="l">
+              <a:lnSpc>
+                <a:spcPct val="128000"/>
+              </a:lnSpc>
+              <a:spcAft>
+                <a:spcPts val="600"/>
+              </a:spcAft>
+            </a:pPr>
+            <a:r>
+              <a:rPr sz="1400" b="1">
+                <a:solidFill>
+                  <a:srgbClr val="4A9B4A"/>
+                </a:solidFill>
+                <a:latin typeface="Calibri"/>
+              </a:rPr>
+              <a:t>Capability cancels. </a:t>
+            </a:r>
+            <a:r>
+              <a:rPr sz="1400" b="0">
+                <a:solidFill>
+                  <a:srgbClr val="98A3B0"/>
+                </a:solidFill>
+                <a:latin typeface="Calibri"/>
+              </a:rPr>
+              <a:t>An additive competence edge appears in both of M's cells, so it drops out of the interaction  </a:t>
+            </a:r>
+            <a:r>
+              <a:rPr sz="1300" b="1">
+                <a:solidFill>
+                  <a:srgbClr val="E9EEF4"/>
+                </a:solidFill>
+                <a:latin typeface="Consolas"/>
+              </a:rPr>
+              <a:t>(M→M − N→M) − (M→N − N→N)</a:t>
+            </a:r>
+            <a:r>
+              <a:rPr sz="1400" b="0">
+                <a:solidFill>
+                  <a:srgbClr val="98A3B0"/>
+                </a:solidFill>
+                <a:latin typeface="Calibri"/>
+              </a:rPr>
+              <a:t>.</a:t>
+            </a:r>
+          </a:p>
+          <a:p>
+            <a:pPr algn="l">
+              <a:lnSpc>
+                <a:spcPct val="128000"/>
+              </a:lnSpc>
+              <a:spcAft>
+                <a:spcPts val="600"/>
+              </a:spcAft>
+            </a:pPr>
+            <a:r>
+              <a:rPr sz="1400" b="1">
+                <a:solidFill>
+                  <a:srgbClr val="F0C040"/>
+                </a:solidFill>
+                <a:latin typeface="Calibri"/>
+              </a:rPr>
+              <a:t>Leakage becomes the variable. </a:t>
+            </a:r>
+            <a:r>
+              <a:rPr sz="1400" b="0">
+                <a:solidFill>
+                  <a:srgbClr val="98A3B0"/>
+                </a:solidFill>
+                <a:latin typeface="Calibri"/>
+              </a:rPr>
+              <a:t>Four stimulus constructions on one shared 200-prompt pool, spanning surface baselines 0.54–0.85, with D fit per target column and gated on </a:t>
+            </a:r>
+            <a:r>
+              <a:rPr sz="1400" b="1">
+                <a:solidFill>
+                  <a:srgbClr val="E9EEF4"/>
+                </a:solidFill>
+                <a:latin typeface="Calibri"/>
+              </a:rPr>
+              <a:t>before</a:t>
+            </a:r>
+            <a:r>
+              <a:rPr sz="1400" b="0">
+                <a:solidFill>
+                  <a:srgbClr val="98A3B0"/>
+                </a:solidFill>
+                <a:latin typeface="Calibri"/>
+              </a:rPr>
+              <a:t> main data is collected.</a:t>
+            </a:r>
+          </a:p>
+          <a:p>
+            <a:pPr algn="l">
+              <a:lnSpc>
+                <a:spcPct val="128000"/>
+              </a:lnSpc>
+              <a:spcAft>
+                <a:spcPts val="0"/>
+              </a:spcAft>
+            </a:pPr>
+            <a:r>
+              <a:rPr sz="1400" b="1">
+                <a:solidFill>
+                  <a:srgbClr val="4A90D9"/>
+                </a:solidFill>
+                <a:latin typeface="Calibri"/>
+              </a:rPr>
+              <a:t>The criterion. </a:t>
+            </a:r>
+            <a:r>
+              <a:rPr sz="1400" b="0">
+                <a:solidFill>
+                  <a:srgbClr val="98A3B0"/>
+                </a:solidFill>
+                <a:latin typeface="Calibri"/>
+              </a:rPr>
+              <a:t>Privileged access requires beating an equal-or-lower-cost observer reading the same text — not merely beating chance.</a:t>
+            </a:r>
+          </a:p>
+        </p:txBody>
+      </p:sp>
+      <p:sp>
+        <p:nvSpPr>
+          <p:cNvPr id="28" name="Rectangle 27"/>
+          <p:cNvSpPr/>
+          <p:nvPr/>
+        </p:nvSpPr>
+        <p:spPr>
+          <a:xfrm>
+            <a:off x="658368" y="5650992"/>
+            <a:ext cx="10874959" cy="475488"/>
+          </a:xfrm>
+          <a:prstGeom prst="rect">
+            <a:avLst/>
+          </a:prstGeom>
+          <a:solidFill>
+            <a:srgbClr val="1A1F2E"/>
           </a:solidFill>
           <a:ln>
             <a:noFill/>
@@ -3884,6 +5145,152 @@
           <a:lstStyle/>
           <a:p>
             <a:pPr algn="ctr"/>
+          </a:p>
+        </p:txBody>
+      </p:sp>
+      <p:sp>
+        <p:nvSpPr>
+          <p:cNvPr id="29" name="TextBox 28"/>
+          <p:cNvSpPr txBox="1"/>
+          <p:nvPr/>
+        </p:nvSpPr>
+        <p:spPr>
+          <a:xfrm>
+            <a:off x="841248" y="5769864"/>
+            <a:ext cx="10509199" cy="274320"/>
+          </a:xfrm>
+          <a:prstGeom prst="rect">
+            <a:avLst/>
+          </a:prstGeom>
+          <a:noFill/>
+        </p:spPr>
+        <p:txBody>
+          <a:bodyPr wrap="square" lIns="0" rIns="0" tIns="0" bIns="0">
+            <a:spAutoFit/>
+          </a:bodyPr>
+          <a:lstStyle/>
+          <a:p>
+            <a:pPr algn="l">
+              <a:lnSpc>
+                <a:spcPct val="128000"/>
+              </a:lnSpc>
+              <a:spcAft>
+                <a:spcPts val="0"/>
+              </a:spcAft>
+            </a:pPr>
+            <a:r>
+              <a:rPr sz="1250" b="1">
+                <a:solidFill>
+                  <a:srgbClr val="E9EEF4"/>
+                </a:solidFill>
+                <a:latin typeface="Calibri"/>
+              </a:rPr>
+              <a:t>Ground truth is constructed, not elicited. </a:t>
+            </a:r>
+            <a:r>
+              <a:rPr sz="1250" b="0">
+                <a:solidFill>
+                  <a:srgbClr val="98A3B0"/>
+                </a:solidFill>
+                <a:latin typeface="Calibri"/>
+              </a:rPr>
+              <a:t>The label lives where the prediction code structurally cannot import it — no predictor, including Self, ever sees it.</a:t>
+            </a:r>
+          </a:p>
+        </p:txBody>
+      </p:sp>
+      <p:sp>
+        <p:nvSpPr>
+          <p:cNvPr id="30" name="Rectangle 29"/>
+          <p:cNvSpPr/>
+          <p:nvPr/>
+        </p:nvSpPr>
+        <p:spPr>
+          <a:xfrm>
+            <a:off x="658368" y="6291072"/>
+            <a:ext cx="10874959" cy="9525"/>
+          </a:xfrm>
+          <a:prstGeom prst="rect">
+            <a:avLst/>
+          </a:prstGeom>
+          <a:solidFill>
+            <a:srgbClr val="2A323C"/>
+          </a:solidFill>
+          <a:ln>
+            <a:noFill/>
+          </a:ln>
+          <a:effectLst/>
+        </p:spPr>
+        <p:style>
+          <a:lnRef idx="1">
+            <a:schemeClr val="accent1"/>
+          </a:lnRef>
+          <a:fillRef idx="3">
+            <a:schemeClr val="accent1"/>
+          </a:fillRef>
+          <a:effectRef idx="2">
+            <a:schemeClr val="accent1"/>
+          </a:effectRef>
+          <a:fontRef idx="minor">
+            <a:schemeClr val="lt1"/>
+          </a:fontRef>
+        </p:style>
+        <p:txBody>
+          <a:bodyPr rtlCol="0" anchor="ctr"/>
+          <a:lstStyle/>
+          <a:p>
+            <a:pPr algn="ctr"/>
+          </a:p>
+        </p:txBody>
+      </p:sp>
+      <p:sp>
+        <p:nvSpPr>
+          <p:cNvPr id="31" name="TextBox 30"/>
+          <p:cNvSpPr txBox="1"/>
+          <p:nvPr/>
+        </p:nvSpPr>
+        <p:spPr>
+          <a:xfrm>
+            <a:off x="658368" y="6400800"/>
+            <a:ext cx="10874959" cy="274320"/>
+          </a:xfrm>
+          <a:prstGeom prst="rect">
+            <a:avLst/>
+          </a:prstGeom>
+          <a:noFill/>
+        </p:spPr>
+        <p:txBody>
+          <a:bodyPr wrap="square" lIns="0" rIns="0" tIns="0" bIns="0">
+            <a:spAutoFit/>
+          </a:bodyPr>
+          <a:lstStyle/>
+          <a:p>
+            <a:pPr algn="l">
+              <a:lnSpc>
+                <a:spcPct val="128000"/>
+              </a:lnSpc>
+              <a:spcAft>
+                <a:spcPts val="0"/>
+              </a:spcAft>
+            </a:pPr>
+            <a:r>
+              <a:rPr sz="1050" b="1">
+                <a:solidFill>
+                  <a:srgbClr val="F0C040"/>
+                </a:solidFill>
+                <a:latin typeface="Consolas"/>
+              </a:rPr>
+              <a:t>2</a:t>
+            </a:r>
+            <a:r>
+              <a:rPr sz="1050" b="0">
+                <a:solidFill>
+                  <a:srgbClr val="6B7683"/>
+                </a:solidFill>
+                <a:latin typeface="Consolas"/>
+              </a:rPr>
+              <a:t>  /  6     Question and design</a:t>
+            </a:r>
           </a:p>
         </p:txBody>
       </p:sp>
@@ -3901,7 +5308,7 @@
     <p:bg>
       <p:bgPr>
         <a:solidFill>
-          <a:srgbClr val="F6F8FA"/>
+          <a:srgbClr val="0D1117"/>
         </a:solidFill>
         <a:effectLst/>
       </p:bgPr>
@@ -3921,8 +5328,8 @@
         </p:nvSpPr>
         <p:spPr>
           <a:xfrm>
-            <a:off x="822960" y="566928"/>
-            <a:ext cx="10545775" cy="365760"/>
+            <a:off x="658368" y="475488"/>
+            <a:ext cx="10874959" cy="310896"/>
           </a:xfrm>
           <a:prstGeom prst="rect">
             <a:avLst/>
@@ -3930,7 +5337,7 @@
           <a:noFill/>
         </p:spPr>
         <p:txBody>
-          <a:bodyPr wrap="square">
+          <a:bodyPr wrap="square" lIns="0" rIns="0" tIns="0" bIns="0">
             <a:spAutoFit/>
           </a:bodyPr>
           <a:lstStyle/>
@@ -3941,13 +5348,13 @@
               </a:spcAft>
             </a:pPr>
             <a:r>
-              <a:rPr sz="1100" b="0" spc="140">
-                <a:solidFill>
-                  <a:srgbClr val="59636F"/>
+              <a:rPr sz="1150" b="0" spc="160">
+                <a:solidFill>
+                  <a:srgbClr val="F0C040"/>
                 </a:solidFill>
                 <a:latin typeface="Consolas"/>
               </a:rPr>
-              <a:t>THE DESIGN</a:t>
+              <a:t>FINDING 1  ·  THE PILOT, FIVE PERSONA PAIRS, TEN GENERATOR COLUMNS</a:t>
             </a:r>
           </a:p>
         </p:txBody>
@@ -3960,8 +5367,8 @@
         </p:nvSpPr>
         <p:spPr>
           <a:xfrm>
-            <a:off x="822960" y="960120"/>
-            <a:ext cx="10545775" cy="1371600"/>
+            <a:off x="658368" y="868680"/>
+            <a:ext cx="10874959" cy="1005840"/>
           </a:xfrm>
           <a:prstGeom prst="rect">
             <a:avLst/>
@@ -3969,220 +5376,47 @@
           <a:noFill/>
         </p:spPr>
         <p:txBody>
-          <a:bodyPr wrap="square">
+          <a:bodyPr wrap="square" lIns="0" rIns="0" tIns="0" bIns="0">
             <a:spAutoFit/>
           </a:bodyPr>
           <a:lstStyle/>
           <a:p>
             <a:pPr algn="l">
               <a:lnSpc>
-                <a:spcPct val="105000"/>
+                <a:spcPct val="106000"/>
               </a:lnSpc>
               <a:spcAft>
                 <a:spcPts val="800"/>
               </a:spcAft>
             </a:pPr>
             <a:r>
-              <a:rPr sz="4000" b="1">
-                <a:solidFill>
-                  <a:srgbClr val="12171F"/>
-                </a:solidFill>
-                <a:latin typeface="Georgia"/>
-              </a:rPr>
-              <a:t>Two confounds, removed by construction</a:t>
-            </a:r>
-          </a:p>
-        </p:txBody>
-      </p:sp>
-      <p:sp>
-        <p:nvSpPr>
-          <p:cNvPr id="4" name="TextBox 3"/>
-          <p:cNvSpPr txBox="1"/>
-          <p:nvPr/>
-        </p:nvSpPr>
-        <p:spPr>
-          <a:xfrm>
-            <a:off x="822960" y="2240280"/>
-            <a:ext cx="9326880" cy="3611880"/>
-          </a:xfrm>
-          <a:prstGeom prst="rect">
-            <a:avLst/>
-          </a:prstGeom>
-          <a:noFill/>
-        </p:spPr>
-        <p:txBody>
-          <a:bodyPr wrap="square">
-            <a:spAutoFit/>
-          </a:bodyPr>
-          <a:lstStyle/>
-          <a:p>
-            <a:pPr>
-              <a:lnSpc>
-                <a:spcPct val="130000"/>
-              </a:lnSpc>
-              <a:spcAft>
-                <a:spcPts val="1300"/>
-              </a:spcAft>
-            </a:pPr>
-            <a:r>
-              <a:rPr sz="1500">
-                <a:solidFill>
-                  <a:srgbClr val="0F6E8C"/>
-                </a:solidFill>
-                <a:latin typeface="Segoe UI"/>
-              </a:rPr>
-              <a:t>— </a:t>
-            </a:r>
-            <a:r>
-              <a:rPr sz="1500" b="1">
-                <a:solidFill>
-                  <a:srgbClr val="12171F"/>
-                </a:solidFill>
-                <a:latin typeface="Segoe UI"/>
-              </a:rPr>
-              <a:t>Capability. </a:t>
-            </a:r>
-            <a:r>
-              <a:rPr sz="1500">
-                <a:solidFill>
-                  <a:srgbClr val="12171F"/>
-                </a:solidFill>
-                <a:latin typeface="Segoe UI"/>
-              </a:rPr>
-              <a:t>The "self" model is usually also the smartest model in the comparison. We use two models sharing a pretraining base — Llama-3.1-70B and Hermes-3-70B — in a crossed 2×2, so a general competence edge cancels.</a:t>
-            </a:r>
-          </a:p>
-          <a:p>
-            <a:pPr>
-              <a:lnSpc>
-                <a:spcPct val="130000"/>
-              </a:lnSpc>
-              <a:spcAft>
-                <a:spcPts val="1300"/>
-              </a:spcAft>
-            </a:pPr>
-            <a:r>
-              <a:rPr sz="1500">
-                <a:solidFill>
-                  <a:srgbClr val="0F6E8C"/>
-                </a:solidFill>
-                <a:latin typeface="Segoe UI"/>
-              </a:rPr>
-              <a:t>— </a:t>
-            </a:r>
-            <a:r>
-              <a:rPr sz="1500" b="1">
-                <a:solidFill>
-                  <a:srgbClr val="12171F"/>
-                </a:solidFill>
-                <a:latin typeface="Segoe UI"/>
-              </a:rPr>
-              <a:t>Surface leakage. </a:t>
-            </a:r>
-            <a:r>
-              <a:rPr sz="1500">
-                <a:solidFill>
-                  <a:srgbClr val="12171F"/>
-                </a:solidFill>
-                <a:latin typeface="Segoe UI"/>
-              </a:rPr>
-              <a:t>A hidden property is only interesting if a third party can't read it off the text. We fit an 18-feature style classifier to every stimulus set and gate on it before collecting main data.</a:t>
-            </a:r>
-          </a:p>
-          <a:p>
-            <a:pPr>
-              <a:lnSpc>
-                <a:spcPct val="130000"/>
-              </a:lnSpc>
-              <a:spcAft>
-                <a:spcPts val="1300"/>
-              </a:spcAft>
-            </a:pPr>
-            <a:r>
-              <a:rPr sz="1500">
-                <a:solidFill>
-                  <a:srgbClr val="0F6E8C"/>
-                </a:solidFill>
-                <a:latin typeface="Segoe UI"/>
-              </a:rPr>
-              <a:t>— </a:t>
-            </a:r>
-            <a:r>
-              <a:rPr sz="1500" b="1">
-                <a:solidFill>
-                  <a:srgbClr val="12171F"/>
-                </a:solidFill>
-                <a:latin typeface="Segoe UI"/>
-              </a:rPr>
-              <a:t>Ground truth is constructed, not elicited. </a:t>
-            </a:r>
-            <a:r>
-              <a:rPr sz="1500">
-                <a:solidFill>
-                  <a:srgbClr val="12171F"/>
-                </a:solidFill>
-                <a:latin typeface="Segoe UI"/>
-              </a:rPr>
-              <a:t>We set which persona writes each text and store the label where the prediction code structurally cannot reach it.</a:t>
-            </a:r>
-          </a:p>
-        </p:txBody>
-      </p:sp>
-      <p:sp>
-        <p:nvSpPr>
-          <p:cNvPr id="5" name="TextBox 4"/>
-          <p:cNvSpPr txBox="1"/>
-          <p:nvPr/>
-        </p:nvSpPr>
-        <p:spPr>
-          <a:xfrm>
-            <a:off x="822960" y="6172200"/>
-            <a:ext cx="1828800" cy="320040"/>
-          </a:xfrm>
-          <a:prstGeom prst="rect">
-            <a:avLst/>
-          </a:prstGeom>
-          <a:noFill/>
-        </p:spPr>
-        <p:txBody>
-          <a:bodyPr wrap="square">
-            <a:spAutoFit/>
-          </a:bodyPr>
-          <a:lstStyle/>
-          <a:p>
-            <a:pPr algn="l">
-              <a:spcAft>
-                <a:spcPts val="800"/>
-              </a:spcAft>
-            </a:pPr>
-            <a:r>
-              <a:rPr sz="1100" b="0" spc="80">
-                <a:solidFill>
-                  <a:srgbClr val="0F6E8C"/>
-                </a:solidFill>
-                <a:latin typeface="Consolas"/>
-              </a:rPr>
-              <a:t>03</a:t>
-            </a:r>
-          </a:p>
-        </p:txBody>
-      </p:sp>
-      <p:sp>
-        <p:nvSpPr>
-          <p:cNvPr id="6" name="Rectangle 5"/>
+              <a:rPr sz="3400" b="1">
+                <a:solidFill>
+                  <a:srgbClr val="E9EEF4"/>
+                </a:solidFill>
+                <a:latin typeface="Calibri"/>
+              </a:rPr>
+              <a:t>Persona prediction tracks a cheap surface signal</a:t>
+            </a:r>
+          </a:p>
+        </p:txBody>
+      </p:sp>
+      <p:sp>
+        <p:nvSpPr>
+          <p:cNvPr id="5" name="Rectangle 4"/>
           <p:cNvSpPr/>
           <p:nvPr/>
         </p:nvSpPr>
         <p:spPr>
           <a:xfrm>
-            <a:off x="822960" y="5989320"/>
-            <a:ext cx="10545775" cy="9525"/>
+            <a:off x="1094683" y="1563624"/>
+            <a:ext cx="4851513" cy="4233671"/>
           </a:xfrm>
           <a:prstGeom prst="rect">
             <a:avLst/>
           </a:prstGeom>
           <a:solidFill>
-            <a:srgbClr val="DCE2E8"/>
+            <a:srgbClr val="FFFFFF"/>
           </a:solidFill>
           <a:ln>
             <a:noFill/>
@@ -4208,6 +5442,438 @@
           <a:lstStyle/>
           <a:p>
             <a:pPr algn="ctr"/>
+          </a:p>
+        </p:txBody>
+      </p:sp>
+      <p:pic>
+        <p:nvPicPr>
+          <p:cNvPr id="4" name="Picture 3" descr="fig1_self_vs_surface.png"/>
+          <p:cNvPicPr>
+            <a:picLocks noChangeAspect="1"/>
+          </p:cNvPicPr>
+          <p:nvPr/>
+        </p:nvPicPr>
+        <p:blipFill>
+          <a:blip r:embed="rId2"/>
+          <a:stretch>
+            <a:fillRect/>
+          </a:stretch>
+        </p:blipFill>
+        <p:spPr>
+          <a:xfrm>
+            <a:off x="1222699" y="1691640"/>
+            <a:ext cx="4595481" cy="3977639"/>
+          </a:xfrm>
+          <a:prstGeom prst="rect">
+            <a:avLst/>
+          </a:prstGeom>
+        </p:spPr>
+      </p:pic>
+      <p:sp>
+        <p:nvSpPr>
+          <p:cNvPr id="6" name="TextBox 5"/>
+          <p:cNvSpPr txBox="1"/>
+          <p:nvPr/>
+        </p:nvSpPr>
+        <p:spPr>
+          <a:xfrm>
+            <a:off x="6903720" y="1700784"/>
+            <a:ext cx="4572000" cy="1005840"/>
+          </a:xfrm>
+          <a:prstGeom prst="rect">
+            <a:avLst/>
+          </a:prstGeom>
+          <a:noFill/>
+        </p:spPr>
+        <p:txBody>
+          <a:bodyPr wrap="square" lIns="0" rIns="0" tIns="0" bIns="0">
+            <a:spAutoFit/>
+          </a:bodyPr>
+          <a:lstStyle/>
+          <a:p>
+            <a:pPr algn="l">
+              <a:spcAft>
+                <a:spcPts val="200"/>
+              </a:spcAft>
+            </a:pPr>
+            <a:r>
+              <a:rPr sz="2800" b="1">
+                <a:solidFill>
+                  <a:srgbClr val="F0C040"/>
+                </a:solidFill>
+                <a:latin typeface="Consolas"/>
+              </a:rPr>
+              <a:t>r = +0.71</a:t>
+            </a:r>
+          </a:p>
+          <a:p>
+            <a:pPr algn="l">
+              <a:lnSpc>
+                <a:spcPct val="122000"/>
+              </a:lnSpc>
+              <a:spcAft>
+                <a:spcPts val="0"/>
+              </a:spcAft>
+            </a:pPr>
+            <a:r>
+              <a:rPr sz="1250" b="0">
+                <a:solidFill>
+                  <a:srgbClr val="98A3B0"/>
+                </a:solidFill>
+                <a:latin typeface="Calibri"/>
+              </a:rPr>
+              <a:t>correlation between self-prediction accuracy and the 18-feature surface baseline, across ten columns</a:t>
+            </a:r>
+          </a:p>
+        </p:txBody>
+      </p:sp>
+      <p:sp>
+        <p:nvSpPr>
+          <p:cNvPr id="7" name="TextBox 6"/>
+          <p:cNvSpPr txBox="1"/>
+          <p:nvPr/>
+        </p:nvSpPr>
+        <p:spPr>
+          <a:xfrm>
+            <a:off x="6903720" y="2779776"/>
+            <a:ext cx="4572000" cy="1005840"/>
+          </a:xfrm>
+          <a:prstGeom prst="rect">
+            <a:avLst/>
+          </a:prstGeom>
+          <a:noFill/>
+        </p:spPr>
+        <p:txBody>
+          <a:bodyPr wrap="square" lIns="0" rIns="0" tIns="0" bIns="0">
+            <a:spAutoFit/>
+          </a:bodyPr>
+          <a:lstStyle/>
+          <a:p>
+            <a:pPr algn="l">
+              <a:spcAft>
+                <a:spcPts val="200"/>
+              </a:spcAft>
+            </a:pPr>
+            <a:r>
+              <a:rPr sz="2800" b="1">
+                <a:solidFill>
+                  <a:srgbClr val="F0C040"/>
+                </a:solidFill>
+                <a:latin typeface="Consolas"/>
+              </a:rPr>
+              <a:t>6 / 10</a:t>
+            </a:r>
+          </a:p>
+          <a:p>
+            <a:pPr algn="l">
+              <a:lnSpc>
+                <a:spcPct val="122000"/>
+              </a:lnSpc>
+              <a:spcAft>
+                <a:spcPts val="0"/>
+              </a:spcAft>
+            </a:pPr>
+            <a:r>
+              <a:rPr sz="1250" b="0">
+                <a:solidFill>
+                  <a:srgbClr val="98A3B0"/>
+                </a:solidFill>
+                <a:latin typeface="Calibri"/>
+              </a:rPr>
+              <a:t>columns where the surface baseline matches or beats the model at reading its own persona</a:t>
+            </a:r>
+          </a:p>
+        </p:txBody>
+      </p:sp>
+      <p:sp>
+        <p:nvSpPr>
+          <p:cNvPr id="8" name="TextBox 7"/>
+          <p:cNvSpPr txBox="1"/>
+          <p:nvPr/>
+        </p:nvSpPr>
+        <p:spPr>
+          <a:xfrm>
+            <a:off x="6903720" y="3858768"/>
+            <a:ext cx="4572000" cy="1005840"/>
+          </a:xfrm>
+          <a:prstGeom prst="rect">
+            <a:avLst/>
+          </a:prstGeom>
+          <a:noFill/>
+        </p:spPr>
+        <p:txBody>
+          <a:bodyPr wrap="square" lIns="0" rIns="0" tIns="0" bIns="0">
+            <a:spAutoFit/>
+          </a:bodyPr>
+          <a:lstStyle/>
+          <a:p>
+            <a:pPr algn="l">
+              <a:spcAft>
+                <a:spcPts val="200"/>
+              </a:spcAft>
+            </a:pPr>
+            <a:r>
+              <a:rPr sz="2800" b="1">
+                <a:solidFill>
+                  <a:srgbClr val="4A90D9"/>
+                </a:solidFill>
+                <a:latin typeface="Consolas"/>
+              </a:rPr>
+              <a:t>0.325</a:t>
+            </a:r>
+          </a:p>
+          <a:p>
+            <a:pPr algn="l">
+              <a:lnSpc>
+                <a:spcPct val="122000"/>
+              </a:lnSpc>
+              <a:spcAft>
+                <a:spcPts val="0"/>
+              </a:spcAft>
+            </a:pPr>
+            <a:r>
+              <a:rPr sz="1250" b="0">
+                <a:solidFill>
+                  <a:srgbClr val="98A3B0"/>
+                </a:solidFill>
+                <a:latin typeface="Calibri"/>
+              </a:rPr>
+              <a:t>surface baseline on VO-D's M column once style is equalised — and the model falls to 0.500 with it</a:t>
+            </a:r>
+          </a:p>
+        </p:txBody>
+      </p:sp>
+      <p:sp>
+        <p:nvSpPr>
+          <p:cNvPr id="9" name="Rectangle 8"/>
+          <p:cNvSpPr/>
+          <p:nvPr/>
+        </p:nvSpPr>
+        <p:spPr>
+          <a:xfrm>
+            <a:off x="6903720" y="4974336"/>
+            <a:ext cx="4617720" cy="1188720"/>
+          </a:xfrm>
+          <a:prstGeom prst="rect">
+            <a:avLst/>
+          </a:prstGeom>
+          <a:solidFill>
+            <a:srgbClr val="161B22"/>
+          </a:solidFill>
+          <a:ln w="12700">
+            <a:solidFill>
+              <a:srgbClr val="E24A4A"/>
+            </a:solidFill>
+          </a:ln>
+          <a:effectLst/>
+        </p:spPr>
+        <p:style>
+          <a:lnRef idx="1">
+            <a:schemeClr val="accent1"/>
+          </a:lnRef>
+          <a:fillRef idx="3">
+            <a:schemeClr val="accent1"/>
+          </a:fillRef>
+          <a:effectRef idx="2">
+            <a:schemeClr val="accent1"/>
+          </a:effectRef>
+          <a:fontRef idx="minor">
+            <a:schemeClr val="lt1"/>
+          </a:fontRef>
+        </p:style>
+        <p:txBody>
+          <a:bodyPr rtlCol="0" anchor="ctr"/>
+          <a:lstStyle/>
+          <a:p>
+            <a:pPr algn="ctr"/>
+          </a:p>
+        </p:txBody>
+      </p:sp>
+      <p:sp>
+        <p:nvSpPr>
+          <p:cNvPr id="10" name="TextBox 9"/>
+          <p:cNvSpPr txBox="1"/>
+          <p:nvPr/>
+        </p:nvSpPr>
+        <p:spPr>
+          <a:xfrm>
+            <a:off x="7068312" y="5102352"/>
+            <a:ext cx="4297680" cy="960120"/>
+          </a:xfrm>
+          <a:prstGeom prst="rect">
+            <a:avLst/>
+          </a:prstGeom>
+          <a:noFill/>
+        </p:spPr>
+        <p:txBody>
+          <a:bodyPr wrap="square" lIns="0" rIns="0" tIns="0" bIns="0">
+            <a:spAutoFit/>
+          </a:bodyPr>
+          <a:lstStyle/>
+          <a:p>
+            <a:pPr algn="l">
+              <a:lnSpc>
+                <a:spcPct val="122000"/>
+              </a:lnSpc>
+              <a:spcAft>
+                <a:spcPts val="0"/>
+              </a:spcAft>
+            </a:pPr>
+            <a:r>
+              <a:rPr sz="1250" b="1">
+                <a:solidFill>
+                  <a:srgbClr val="E24A4A"/>
+                </a:solidFill>
+                <a:latin typeface="Calibri"/>
+              </a:rPr>
+              <a:t>Caveat.  </a:t>
+            </a:r>
+            <a:r>
+              <a:rPr sz="1250" b="0">
+                <a:solidFill>
+                  <a:srgbClr val="E9EEF4"/>
+                </a:solidFill>
+                <a:latin typeface="Calibri"/>
+              </a:rPr>
+              <a:t>VO-D also changed the behavioural expression of the hidden property, so it is not a clean causal isolation of style: the two personas largely converged on the same recommendation.</a:t>
+            </a:r>
+          </a:p>
+        </p:txBody>
+      </p:sp>
+      <p:sp>
+        <p:nvSpPr>
+          <p:cNvPr id="11" name="TextBox 10"/>
+          <p:cNvSpPr txBox="1"/>
+          <p:nvPr/>
+        </p:nvSpPr>
+        <p:spPr>
+          <a:xfrm>
+            <a:off x="658368" y="5870448"/>
+            <a:ext cx="6035040" cy="365760"/>
+          </a:xfrm>
+          <a:prstGeom prst="rect">
+            <a:avLst/>
+          </a:prstGeom>
+          <a:noFill/>
+        </p:spPr>
+        <p:txBody>
+          <a:bodyPr wrap="square" lIns="0" rIns="0" tIns="0" bIns="0">
+            <a:spAutoFit/>
+          </a:bodyPr>
+          <a:lstStyle/>
+          <a:p>
+            <a:pPr algn="l">
+              <a:lnSpc>
+                <a:spcPct val="120000"/>
+              </a:lnSpc>
+              <a:spcAft>
+                <a:spcPts val="800"/>
+              </a:spcAft>
+            </a:pPr>
+            <a:r>
+              <a:rPr sz="1200" b="0">
+                <a:solidFill>
+                  <a:srgbClr val="6B7683"/>
+                </a:solidFill>
+                <a:latin typeface="Calibri"/>
+              </a:rPr>
+              <a:t>Points at or below the diagonal: a stylometric baseline matches or beats the model.</a:t>
+            </a:r>
+          </a:p>
+        </p:txBody>
+      </p:sp>
+      <p:sp>
+        <p:nvSpPr>
+          <p:cNvPr id="12" name="Rectangle 11"/>
+          <p:cNvSpPr/>
+          <p:nvPr/>
+        </p:nvSpPr>
+        <p:spPr>
+          <a:xfrm>
+            <a:off x="658368" y="6291072"/>
+            <a:ext cx="10874959" cy="9525"/>
+          </a:xfrm>
+          <a:prstGeom prst="rect">
+            <a:avLst/>
+          </a:prstGeom>
+          <a:solidFill>
+            <a:srgbClr val="2A323C"/>
+          </a:solidFill>
+          <a:ln>
+            <a:noFill/>
+          </a:ln>
+          <a:effectLst/>
+        </p:spPr>
+        <p:style>
+          <a:lnRef idx="1">
+            <a:schemeClr val="accent1"/>
+          </a:lnRef>
+          <a:fillRef idx="3">
+            <a:schemeClr val="accent1"/>
+          </a:fillRef>
+          <a:effectRef idx="2">
+            <a:schemeClr val="accent1"/>
+          </a:effectRef>
+          <a:fontRef idx="minor">
+            <a:schemeClr val="lt1"/>
+          </a:fontRef>
+        </p:style>
+        <p:txBody>
+          <a:bodyPr rtlCol="0" anchor="ctr"/>
+          <a:lstStyle/>
+          <a:p>
+            <a:pPr algn="ctr"/>
+          </a:p>
+        </p:txBody>
+      </p:sp>
+      <p:sp>
+        <p:nvSpPr>
+          <p:cNvPr id="13" name="TextBox 12"/>
+          <p:cNvSpPr txBox="1"/>
+          <p:nvPr/>
+        </p:nvSpPr>
+        <p:spPr>
+          <a:xfrm>
+            <a:off x="658368" y="6400800"/>
+            <a:ext cx="10874959" cy="274320"/>
+          </a:xfrm>
+          <a:prstGeom prst="rect">
+            <a:avLst/>
+          </a:prstGeom>
+          <a:noFill/>
+        </p:spPr>
+        <p:txBody>
+          <a:bodyPr wrap="square" lIns="0" rIns="0" tIns="0" bIns="0">
+            <a:spAutoFit/>
+          </a:bodyPr>
+          <a:lstStyle/>
+          <a:p>
+            <a:pPr algn="l">
+              <a:lnSpc>
+                <a:spcPct val="128000"/>
+              </a:lnSpc>
+              <a:spcAft>
+                <a:spcPts val="0"/>
+              </a:spcAft>
+            </a:pPr>
+            <a:r>
+              <a:rPr sz="1050" b="1">
+                <a:solidFill>
+                  <a:srgbClr val="F0C040"/>
+                </a:solidFill>
+                <a:latin typeface="Consolas"/>
+              </a:rPr>
+              <a:t>3</a:t>
+            </a:r>
+            <a:r>
+              <a:rPr sz="1050" b="0">
+                <a:solidFill>
+                  <a:srgbClr val="6B7683"/>
+                </a:solidFill>
+                <a:latin typeface="Consolas"/>
+              </a:rPr>
+              <a:t>  /  6     Surface leakage</a:t>
+            </a:r>
           </a:p>
         </p:txBody>
       </p:sp>
@@ -4225,7 +5891,7 @@
     <p:bg>
       <p:bgPr>
         <a:solidFill>
-          <a:srgbClr val="F6F8FA"/>
+          <a:srgbClr val="0D1117"/>
         </a:solidFill>
         <a:effectLst/>
       </p:bgPr>
@@ -4245,8 +5911,8 @@
         </p:nvSpPr>
         <p:spPr>
           <a:xfrm>
-            <a:off x="822960" y="566928"/>
-            <a:ext cx="10545775" cy="365760"/>
+            <a:off x="658368" y="475488"/>
+            <a:ext cx="10874959" cy="310896"/>
           </a:xfrm>
           <a:prstGeom prst="rect">
             <a:avLst/>
@@ -4254,7 +5920,7 @@
           <a:noFill/>
         </p:spPr>
         <p:txBody>
-          <a:bodyPr wrap="square">
+          <a:bodyPr wrap="square" lIns="0" rIns="0" tIns="0" bIns="0">
             <a:spAutoFit/>
           </a:bodyPr>
           <a:lstStyle/>
@@ -4265,13 +5931,13 @@
               </a:spcAft>
             </a:pPr>
             <a:r>
-              <a:rPr sz="1100" b="0" spc="140">
-                <a:solidFill>
-                  <a:srgbClr val="59636F"/>
+              <a:rPr sz="1150" b="0" spc="160">
+                <a:solidFill>
+                  <a:srgbClr val="F0C040"/>
                 </a:solidFill>
                 <a:latin typeface="Consolas"/>
               </a:rPr>
-              <a:t>FINDING 1</a:t>
+              <a:t>FINDING 2  ·  24 CELLS  ·  9,269 SCORED TRIALS  ·  ZERO MALFORMED</a:t>
             </a:r>
           </a:p>
         </p:txBody>
@@ -4284,8 +5950,8 @@
         </p:nvSpPr>
         <p:spPr>
           <a:xfrm>
-            <a:off x="822960" y="960120"/>
-            <a:ext cx="10545775" cy="1371600"/>
+            <a:off x="658368" y="868680"/>
+            <a:ext cx="10874959" cy="1005840"/>
           </a:xfrm>
           <a:prstGeom prst="rect">
             <a:avLst/>
@@ -4293,65 +5959,669 @@
           <a:noFill/>
         </p:spPr>
         <p:txBody>
-          <a:bodyPr wrap="square">
+          <a:bodyPr wrap="square" lIns="0" rIns="0" tIns="0" bIns="0">
             <a:spAutoFit/>
           </a:bodyPr>
           <a:lstStyle/>
           <a:p>
             <a:pPr algn="l">
               <a:lnSpc>
-                <a:spcPct val="105000"/>
+                <a:spcPct val="106000"/>
               </a:lnSpc>
               <a:spcAft>
                 <a:spcPts val="800"/>
               </a:spcAft>
             </a:pPr>
             <a:r>
-              <a:rPr sz="3400" b="1">
-                <a:solidFill>
-                  <a:srgbClr val="12171F"/>
-                </a:solidFill>
-                <a:latin typeface="Georgia"/>
-              </a:rPr>
-              <a:t>What looked like self-recognition was style-recognition</a:t>
-            </a:r>
-          </a:p>
-        </p:txBody>
-      </p:sp>
-      <p:pic>
-        <p:nvPicPr>
-          <p:cNvPr id="4" name="Picture 3" descr="fig1_self_vs_surface.png"/>
-          <p:cNvPicPr>
-            <a:picLocks noChangeAspect="1"/>
-          </p:cNvPicPr>
-          <p:nvPr/>
-        </p:nvPicPr>
-        <p:blipFill>
-          <a:blip r:embed="rId2"/>
-          <a:stretch>
-            <a:fillRect/>
-          </a:stretch>
-        </p:blipFill>
-        <p:spPr>
-          <a:xfrm>
-            <a:off x="3982982" y="1874519"/>
-            <a:ext cx="4225731" cy="3657600"/>
-          </a:xfrm>
-          <a:prstGeom prst="rect">
-            <a:avLst/>
-          </a:prstGeom>
-        </p:spPr>
-      </p:pic>
-      <p:sp>
-        <p:nvSpPr>
-          <p:cNvPr id="5" name="TextBox 4"/>
+              <a:rPr sz="3000" b="1">
+                <a:solidFill>
+                  <a:srgbClr val="E9EEF4"/>
+                </a:solidFill>
+                <a:latin typeface="Calibri"/>
+              </a:rPr>
+              <a:t>No self-advantage on the target column — and one positive interaction</a:t>
+            </a:r>
+          </a:p>
+        </p:txBody>
+      </p:sp>
+      <p:graphicFrame>
+        <p:nvGraphicFramePr>
+          <p:cNvPr id="4" name="Table 3"/>
+          <p:cNvGraphicFramePr>
+            <a:graphicFrameLocks noGrp="1"/>
+          </p:cNvGraphicFramePr>
+          <p:nvPr/>
+        </p:nvGraphicFramePr>
+        <p:xfrm>
+          <a:off x="658368" y="1627632"/>
+          <a:ext cx="8229600" cy="2286000"/>
+        </p:xfrm>
+        <a:graphic>
+          <a:graphicData uri="http://schemas.openxmlformats.org/drawingml/2006/table">
+            <a:tbl>
+              <a:tblPr firstRow="1" bandRow="1">
+                <a:tableStyleId>{5C22544A-7EE6-4342-B048-85BDC9FD1C3A}</a:tableStyleId>
+              </a:tblPr>
+              <a:tblGrid>
+                <a:gridCol w="2148840"/>
+                <a:gridCol w="1417320"/>
+                <a:gridCol w="2331720"/>
+                <a:gridCol w="2331720"/>
+              </a:tblGrid>
+              <a:tr h="457200">
+                <a:tc>
+                  <a:txBody>
+                    <a:bodyPr/>
+                    <a:lstStyle/>
+                    <a:p>
+                      <a:pPr algn="l"/>
+                      <a:r>
+                        <a:rPr sz="1050" b="1">
+                          <a:solidFill>
+                            <a:srgbClr val="6B7683"/>
+                          </a:solidFill>
+                          <a:latin typeface="Calibri"/>
+                        </a:rPr>
+                        <a:t>Stimulus set</a:t>
+                      </a:r>
+                    </a:p>
+                  </a:txBody>
+                  <a:tcPr marL="91440" marR="91440" anchor="ctr">
+                    <a:solidFill>
+                      <a:srgbClr val="0D1117"/>
+                    </a:solidFill>
+                  </a:tcPr>
+                </a:tc>
+                <a:tc>
+                  <a:txBody>
+                    <a:bodyPr/>
+                    <a:lstStyle/>
+                    <a:p>
+                      <a:pPr algn="l"/>
+                      <a:r>
+                        <a:rPr sz="1050" b="1">
+                          <a:solidFill>
+                            <a:srgbClr val="6B7683"/>
+                          </a:solidFill>
+                          <a:latin typeface="Calibri"/>
+                        </a:rPr>
+                        <a:t>Surface D</a:t>
+                      </a:r>
+                    </a:p>
+                    <a:p>
+                      <a:pPr algn="l"/>
+                      <a:r>
+                        <a:rPr sz="1050" b="1">
+                          <a:solidFill>
+                            <a:srgbClr val="6B7683"/>
+                          </a:solidFill>
+                          <a:latin typeface="Calibri"/>
+                        </a:rPr>
+                        <a:t>(M / N col)</a:t>
+                      </a:r>
+                    </a:p>
+                  </a:txBody>
+                  <a:tcPr marL="91440" marR="91440" anchor="ctr">
+                    <a:solidFill>
+                      <a:srgbClr val="0D1117"/>
+                    </a:solidFill>
+                  </a:tcPr>
+                </a:tc>
+                <a:tc>
+                  <a:txBody>
+                    <a:bodyPr/>
+                    <a:lstStyle/>
+                    <a:p>
+                      <a:pPr algn="l"/>
+                      <a:r>
+                        <a:rPr sz="1050" b="1">
+                          <a:solidFill>
+                            <a:srgbClr val="6B7683"/>
+                          </a:solidFill>
+                          <a:latin typeface="Calibri"/>
+                        </a:rPr>
+                        <a:t>Self-advantage</a:t>
+                      </a:r>
+                    </a:p>
+                    <a:p>
+                      <a:pPr algn="l"/>
+                      <a:r>
+                        <a:rPr sz="1050" b="1">
+                          <a:solidFill>
+                            <a:srgbClr val="6B7683"/>
+                          </a:solidFill>
+                          <a:latin typeface="Calibri"/>
+                        </a:rPr>
+                        <a:t>M→M − N→M</a:t>
+                      </a:r>
+                    </a:p>
+                  </a:txBody>
+                  <a:tcPr marL="91440" marR="91440" anchor="ctr">
+                    <a:solidFill>
+                      <a:srgbClr val="0D1117"/>
+                    </a:solidFill>
+                  </a:tcPr>
+                </a:tc>
+                <a:tc>
+                  <a:txBody>
+                    <a:bodyPr/>
+                    <a:lstStyle/>
+                    <a:p>
+                      <a:pPr algn="l"/>
+                      <a:r>
+                        <a:rPr sz="1050" b="1">
+                          <a:solidFill>
+                            <a:srgbClr val="6B7683"/>
+                          </a:solidFill>
+                          <a:latin typeface="Calibri"/>
+                        </a:rPr>
+                        <a:t>Capability-controlled</a:t>
+                      </a:r>
+                    </a:p>
+                    <a:p>
+                      <a:pPr algn="l"/>
+                      <a:r>
+                        <a:rPr sz="1050" b="1">
+                          <a:solidFill>
+                            <a:srgbClr val="6B7683"/>
+                          </a:solidFill>
+                          <a:latin typeface="Calibri"/>
+                        </a:rPr>
+                        <a:t>interaction</a:t>
+                      </a:r>
+                    </a:p>
+                  </a:txBody>
+                  <a:tcPr marL="91440" marR="91440" anchor="ctr">
+                    <a:solidFill>
+                      <a:srgbClr val="0D1117"/>
+                    </a:solidFill>
+                  </a:tcPr>
+                </a:tc>
+              </a:tr>
+              <a:tr h="457200">
+                <a:tc>
+                  <a:txBody>
+                    <a:bodyPr/>
+                    <a:lstStyle/>
+                    <a:p>
+                      <a:pPr algn="l"/>
+                      <a:r>
+                        <a:rPr sz="1200" b="0">
+                          <a:solidFill>
+                            <a:srgbClr val="E9EEF4"/>
+                          </a:solidFill>
+                          <a:latin typeface="Calibri"/>
+                        </a:rPr>
+                        <a:t>VO-D  style-equalised</a:t>
+                      </a:r>
+                    </a:p>
+                  </a:txBody>
+                  <a:tcPr marL="91440" marR="91440" anchor="ctr">
+                    <a:solidFill>
+                      <a:srgbClr val="161B22"/>
+                    </a:solidFill>
+                  </a:tcPr>
+                </a:tc>
+                <a:tc>
+                  <a:txBody>
+                    <a:bodyPr/>
+                    <a:lstStyle/>
+                    <a:p>
+                      <a:pPr algn="l"/>
+                      <a:r>
+                        <a:rPr sz="1200" b="0">
+                          <a:solidFill>
+                            <a:srgbClr val="E9EEF4"/>
+                          </a:solidFill>
+                          <a:latin typeface="Consolas"/>
+                        </a:rPr>
+                        <a:t>0.55 / 0.54</a:t>
+                      </a:r>
+                    </a:p>
+                  </a:txBody>
+                  <a:tcPr marL="91440" marR="91440" anchor="ctr">
+                    <a:solidFill>
+                      <a:srgbClr val="161B22"/>
+                    </a:solidFill>
+                  </a:tcPr>
+                </a:tc>
+                <a:tc>
+                  <a:txBody>
+                    <a:bodyPr/>
+                    <a:lstStyle/>
+                    <a:p>
+                      <a:pPr algn="l"/>
+                      <a:r>
+                        <a:rPr sz="1200" b="0">
+                          <a:solidFill>
+                            <a:srgbClr val="E9EEF4"/>
+                          </a:solidFill>
+                          <a:latin typeface="Consolas"/>
+                        </a:rPr>
+                        <a:t>+0.000 [−0.015, +0.015]</a:t>
+                      </a:r>
+                    </a:p>
+                  </a:txBody>
+                  <a:tcPr marL="91440" marR="91440" anchor="ctr">
+                    <a:solidFill>
+                      <a:srgbClr val="161B22"/>
+                    </a:solidFill>
+                  </a:tcPr>
+                </a:tc>
+                <a:tc>
+                  <a:txBody>
+                    <a:bodyPr/>
+                    <a:lstStyle/>
+                    <a:p>
+                      <a:pPr algn="l"/>
+                      <a:r>
+                        <a:rPr sz="1200" b="0">
+                          <a:solidFill>
+                            <a:srgbClr val="E9EEF4"/>
+                          </a:solidFill>
+                          <a:latin typeface="Consolas"/>
+                        </a:rPr>
+                        <a:t>−0.006 [−0.033, +0.021]</a:t>
+                      </a:r>
+                    </a:p>
+                  </a:txBody>
+                  <a:tcPr marL="91440" marR="91440" anchor="ctr">
+                    <a:solidFill>
+                      <a:srgbClr val="161B22"/>
+                    </a:solidFill>
+                  </a:tcPr>
+                </a:tc>
+              </a:tr>
+              <a:tr h="457200">
+                <a:tc>
+                  <a:txBody>
+                    <a:bodyPr/>
+                    <a:lstStyle/>
+                    <a:p>
+                      <a:pPr algn="l"/>
+                      <a:r>
+                        <a:rPr sz="1200" b="0">
+                          <a:solidFill>
+                            <a:srgbClr val="E9EEF4"/>
+                          </a:solidFill>
+                          <a:latin typeface="Calibri"/>
+                        </a:rPr>
+                        <a:t>VO-B  original</a:t>
+                      </a:r>
+                    </a:p>
+                  </a:txBody>
+                  <a:tcPr marL="91440" marR="91440" anchor="ctr">
+                    <a:solidFill>
+                      <a:srgbClr val="161B22"/>
+                    </a:solidFill>
+                  </a:tcPr>
+                </a:tc>
+                <a:tc>
+                  <a:txBody>
+                    <a:bodyPr/>
+                    <a:lstStyle/>
+                    <a:p>
+                      <a:pPr algn="l"/>
+                      <a:r>
+                        <a:rPr sz="1200" b="0">
+                          <a:solidFill>
+                            <a:srgbClr val="E9EEF4"/>
+                          </a:solidFill>
+                          <a:latin typeface="Consolas"/>
+                        </a:rPr>
+                        <a:t>0.65 / 0.75</a:t>
+                      </a:r>
+                    </a:p>
+                  </a:txBody>
+                  <a:tcPr marL="91440" marR="91440" anchor="ctr">
+                    <a:solidFill>
+                      <a:srgbClr val="161B22"/>
+                    </a:solidFill>
+                  </a:tcPr>
+                </a:tc>
+                <a:tc>
+                  <a:txBody>
+                    <a:bodyPr/>
+                    <a:lstStyle/>
+                    <a:p>
+                      <a:pPr algn="l"/>
+                      <a:r>
+                        <a:rPr sz="1200" b="0">
+                          <a:solidFill>
+                            <a:srgbClr val="E9EEF4"/>
+                          </a:solidFill>
+                          <a:latin typeface="Consolas"/>
+                        </a:rPr>
+                        <a:t>+0.000 [−0.033, +0.035]</a:t>
+                      </a:r>
+                    </a:p>
+                  </a:txBody>
+                  <a:tcPr marL="91440" marR="91440" anchor="ctr">
+                    <a:solidFill>
+                      <a:srgbClr val="161B22"/>
+                    </a:solidFill>
+                  </a:tcPr>
+                </a:tc>
+                <a:tc>
+                  <a:txBody>
+                    <a:bodyPr/>
+                    <a:lstStyle/>
+                    <a:p>
+                      <a:pPr algn="l"/>
+                      <a:r>
+                        <a:rPr sz="1200" b="0">
+                          <a:solidFill>
+                            <a:srgbClr val="E9EEF4"/>
+                          </a:solidFill>
+                          <a:latin typeface="Consolas"/>
+                        </a:rPr>
+                        <a:t>+0.005 [−0.040, +0.050]</a:t>
+                      </a:r>
+                    </a:p>
+                  </a:txBody>
+                  <a:tcPr marL="91440" marR="91440" anchor="ctr">
+                    <a:solidFill>
+                      <a:srgbClr val="161B22"/>
+                    </a:solidFill>
+                  </a:tcPr>
+                </a:tc>
+              </a:tr>
+              <a:tr h="457200">
+                <a:tc>
+                  <a:txBody>
+                    <a:bodyPr/>
+                    <a:lstStyle/>
+                    <a:p>
+                      <a:pPr algn="l"/>
+                      <a:r>
+                        <a:rPr sz="1200" b="0">
+                          <a:solidFill>
+                            <a:srgbClr val="E9EEF4"/>
+                          </a:solidFill>
+                          <a:latin typeface="Calibri"/>
+                        </a:rPr>
+                        <a:t>VO-A  original</a:t>
+                      </a:r>
+                    </a:p>
+                  </a:txBody>
+                  <a:tcPr marL="91440" marR="91440" anchor="ctr">
+                    <a:solidFill>
+                      <a:srgbClr val="161B22"/>
+                    </a:solidFill>
+                  </a:tcPr>
+                </a:tc>
+                <a:tc>
+                  <a:txBody>
+                    <a:bodyPr/>
+                    <a:lstStyle/>
+                    <a:p>
+                      <a:pPr algn="l"/>
+                      <a:r>
+                        <a:rPr sz="1200" b="0">
+                          <a:solidFill>
+                            <a:srgbClr val="E9EEF4"/>
+                          </a:solidFill>
+                          <a:latin typeface="Consolas"/>
+                        </a:rPr>
+                        <a:t>0.66 / 0.75</a:t>
+                      </a:r>
+                    </a:p>
+                  </a:txBody>
+                  <a:tcPr marL="91440" marR="91440" anchor="ctr">
+                    <a:solidFill>
+                      <a:srgbClr val="161B22"/>
+                    </a:solidFill>
+                  </a:tcPr>
+                </a:tc>
+                <a:tc>
+                  <a:txBody>
+                    <a:bodyPr/>
+                    <a:lstStyle/>
+                    <a:p>
+                      <a:pPr algn="l"/>
+                      <a:r>
+                        <a:rPr sz="1200" b="0">
+                          <a:solidFill>
+                            <a:srgbClr val="E9EEF4"/>
+                          </a:solidFill>
+                          <a:latin typeface="Consolas"/>
+                        </a:rPr>
+                        <a:t>+0.020 [−0.015, +0.056]</a:t>
+                      </a:r>
+                    </a:p>
+                  </a:txBody>
+                  <a:tcPr marL="91440" marR="91440" anchor="ctr">
+                    <a:solidFill>
+                      <a:srgbClr val="161B22"/>
+                    </a:solidFill>
+                  </a:tcPr>
+                </a:tc>
+                <a:tc>
+                  <a:txBody>
+                    <a:bodyPr/>
+                    <a:lstStyle/>
+                    <a:p>
+                      <a:pPr algn="l"/>
+                      <a:r>
+                        <a:rPr sz="1200" b="0">
+                          <a:solidFill>
+                            <a:srgbClr val="E9EEF4"/>
+                          </a:solidFill>
+                          <a:latin typeface="Consolas"/>
+                        </a:rPr>
+                        <a:t>−0.030 [−0.079, +0.018]</a:t>
+                      </a:r>
+                    </a:p>
+                  </a:txBody>
+                  <a:tcPr marL="91440" marR="91440" anchor="ctr">
+                    <a:solidFill>
+                      <a:srgbClr val="161B22"/>
+                    </a:solidFill>
+                  </a:tcPr>
+                </a:tc>
+              </a:tr>
+              <a:tr h="457200">
+                <a:tc>
+                  <a:txBody>
+                    <a:bodyPr/>
+                    <a:lstStyle/>
+                    <a:p>
+                      <a:pPr algn="l"/>
+                      <a:r>
+                        <a:rPr sz="1200" b="1">
+                          <a:solidFill>
+                            <a:srgbClr val="F0C040"/>
+                          </a:solidFill>
+                          <a:latin typeface="Calibri"/>
+                        </a:rPr>
+                        <a:t>VO-C  leakiest</a:t>
+                      </a:r>
+                    </a:p>
+                  </a:txBody>
+                  <a:tcPr marL="91440" marR="91440" anchor="ctr">
+                    <a:solidFill>
+                      <a:srgbClr val="1A1F2E"/>
+                    </a:solidFill>
+                  </a:tcPr>
+                </a:tc>
+                <a:tc>
+                  <a:txBody>
+                    <a:bodyPr/>
+                    <a:lstStyle/>
+                    <a:p>
+                      <a:pPr algn="l"/>
+                      <a:r>
+                        <a:rPr sz="1200" b="1">
+                          <a:solidFill>
+                            <a:srgbClr val="F0C040"/>
+                          </a:solidFill>
+                          <a:latin typeface="Consolas"/>
+                        </a:rPr>
+                        <a:t>0.69 / 0.85</a:t>
+                      </a:r>
+                    </a:p>
+                  </a:txBody>
+                  <a:tcPr marL="91440" marR="91440" anchor="ctr">
+                    <a:solidFill>
+                      <a:srgbClr val="1A1F2E"/>
+                    </a:solidFill>
+                  </a:tcPr>
+                </a:tc>
+                <a:tc>
+                  <a:txBody>
+                    <a:bodyPr/>
+                    <a:lstStyle/>
+                    <a:p>
+                      <a:pPr algn="l"/>
+                      <a:r>
+                        <a:rPr sz="1200" b="1">
+                          <a:solidFill>
+                            <a:srgbClr val="F0C040"/>
+                          </a:solidFill>
+                          <a:latin typeface="Consolas"/>
+                        </a:rPr>
+                        <a:t>−0.033 [−0.058, −0.008]</a:t>
+                      </a:r>
+                    </a:p>
+                  </a:txBody>
+                  <a:tcPr marL="91440" marR="91440" anchor="ctr">
+                    <a:solidFill>
+                      <a:srgbClr val="1A1F2E"/>
+                    </a:solidFill>
+                  </a:tcPr>
+                </a:tc>
+                <a:tc>
+                  <a:txBody>
+                    <a:bodyPr/>
+                    <a:lstStyle/>
+                    <a:p>
+                      <a:pPr algn="l"/>
+                      <a:r>
+                        <a:rPr sz="1200" b="1">
+                          <a:solidFill>
+                            <a:srgbClr val="F0C040"/>
+                          </a:solidFill>
+                          <a:latin typeface="Consolas"/>
+                        </a:rPr>
+                        <a:t>+0.089 [+0.048, +0.131]</a:t>
+                      </a:r>
+                    </a:p>
+                  </a:txBody>
+                  <a:tcPr marL="91440" marR="91440" anchor="ctr">
+                    <a:solidFill>
+                      <a:srgbClr val="1A1F2E"/>
+                    </a:solidFill>
+                  </a:tcPr>
+                </a:tc>
+              </a:tr>
+            </a:tbl>
+          </a:graphicData>
+        </a:graphic>
+      </p:graphicFrame>
+      <p:sp>
+        <p:nvSpPr>
+          <p:cNvPr id="5" name="Rectangle 4"/>
+          <p:cNvSpPr/>
+          <p:nvPr/>
+        </p:nvSpPr>
+        <p:spPr>
+          <a:xfrm>
+            <a:off x="9189720" y="1627632"/>
+            <a:ext cx="2331720" cy="2286000"/>
+          </a:xfrm>
+          <a:prstGeom prst="rect">
+            <a:avLst/>
+          </a:prstGeom>
+          <a:solidFill>
+            <a:srgbClr val="161B22"/>
+          </a:solidFill>
+          <a:ln w="12700">
+            <a:solidFill>
+              <a:srgbClr val="F0C040"/>
+            </a:solidFill>
+          </a:ln>
+          <a:effectLst/>
+        </p:spPr>
+        <p:style>
+          <a:lnRef idx="1">
+            <a:schemeClr val="accent1"/>
+          </a:lnRef>
+          <a:fillRef idx="3">
+            <a:schemeClr val="accent1"/>
+          </a:fillRef>
+          <a:effectRef idx="2">
+            <a:schemeClr val="accent1"/>
+          </a:effectRef>
+          <a:fontRef idx="minor">
+            <a:schemeClr val="lt1"/>
+          </a:fontRef>
+        </p:style>
+        <p:txBody>
+          <a:bodyPr rtlCol="0" anchor="ctr" wrap="square" lIns="146304" rIns="146304" tIns="146304"/>
+          <a:lstStyle/>
+          <a:p>
+            <a:pPr algn="l">
+              <a:spcAft>
+                <a:spcPts val="200"/>
+              </a:spcAft>
+            </a:pPr>
+            <a:r>
+              <a:rPr sz="3000" b="1">
+                <a:solidFill>
+                  <a:srgbClr val="F0C040"/>
+                </a:solidFill>
+                <a:latin typeface="Consolas"/>
+              </a:rPr>
+              <a:t>+0.089</a:t>
+            </a:r>
+          </a:p>
+          <a:p>
+            <a:pPr algn="l">
+              <a:spcAft>
+                <a:spcPts val="700"/>
+              </a:spcAft>
+            </a:pPr>
+            <a:r>
+              <a:rPr sz="1150" b="0">
+                <a:solidFill>
+                  <a:srgbClr val="98A3B0"/>
+                </a:solidFill>
+                <a:latin typeface="Consolas"/>
+              </a:rPr>
+              <a:t>[+0.048, +0.131]</a:t>
+            </a:r>
+          </a:p>
+          <a:p>
+            <a:pPr algn="l">
+              <a:lnSpc>
+                <a:spcPct val="122000"/>
+              </a:lnSpc>
+              <a:spcAft>
+                <a:spcPts val="0"/>
+              </a:spcAft>
+            </a:pPr>
+            <a:r>
+              <a:rPr sz="1200" b="0">
+                <a:solidFill>
+                  <a:srgbClr val="E9EEF4"/>
+                </a:solidFill>
+                <a:latin typeface="Calibri"/>
+              </a:rPr>
+              <a:t>The originally preregistered interaction — positive, on the leakiest set in the study. We report it rather than bury it.</a:t>
+            </a:r>
+          </a:p>
+        </p:txBody>
+      </p:sp>
+      <p:sp>
+        <p:nvSpPr>
+          <p:cNvPr id="6" name="TextBox 5"/>
           <p:cNvSpPr txBox="1"/>
           <p:nvPr/>
         </p:nvSpPr>
         <p:spPr>
           <a:xfrm>
-            <a:off x="822960" y="5623560"/>
-            <a:ext cx="10545775" cy="731520"/>
+            <a:off x="658368" y="4133087"/>
+            <a:ext cx="10881360" cy="1188720"/>
           </a:xfrm>
           <a:prstGeom prst="rect">
             <a:avLst/>
@@ -4359,66 +6629,100 @@
           <a:noFill/>
         </p:spPr>
         <p:txBody>
-          <a:bodyPr wrap="square">
+          <a:bodyPr wrap="square" lIns="0" rIns="0" tIns="0" bIns="0">
             <a:spAutoFit/>
           </a:bodyPr>
           <a:lstStyle/>
           <a:p>
-            <a:pPr algn="ctr">
+            <a:pPr algn="l">
               <a:lnSpc>
-                <a:spcPct val="125000"/>
+                <a:spcPct val="128000"/>
               </a:lnSpc>
               <a:spcAft>
-                <a:spcPts val="800"/>
-              </a:spcAft>
-            </a:pPr>
-            <a:r>
-              <a:rPr sz="1200" b="0">
-                <a:solidFill>
-                  <a:srgbClr val="59636F"/>
-                </a:solidFill>
-                <a:latin typeface="Segoe UI"/>
-              </a:rPr>
-              <a:t>Ten conditions, five stimulus designs. Self-prediction tracks the style classifier at r = +0.71; the classifier matches or beats the model in six of ten.</a:t>
-            </a:r>
-          </a:p>
-        </p:txBody>
-      </p:sp>
-      <p:sp>
-        <p:nvSpPr>
-          <p:cNvPr id="6" name="TextBox 5"/>
-          <p:cNvSpPr txBox="1"/>
-          <p:nvPr/>
-        </p:nvSpPr>
-        <p:spPr>
-          <a:xfrm>
-            <a:off x="822960" y="6172200"/>
-            <a:ext cx="1828800" cy="320040"/>
-          </a:xfrm>
-          <a:prstGeom prst="rect">
-            <a:avLst/>
-          </a:prstGeom>
-          <a:noFill/>
-        </p:spPr>
-        <p:txBody>
-          <a:bodyPr wrap="square">
-            <a:spAutoFit/>
-          </a:bodyPr>
-          <a:lstStyle/>
+                <a:spcPts val="700"/>
+              </a:spcAft>
+            </a:pPr>
+            <a:r>
+              <a:rPr sz="1500" b="1">
+                <a:solidFill>
+                  <a:srgbClr val="E9EEF4"/>
+                </a:solidFill>
+                <a:latin typeface="Calibri"/>
+              </a:rPr>
+              <a:t>Not one construction shows a positive M-target self-advantage whose interval excludes zero. </a:t>
+            </a:r>
+            <a:r>
+              <a:rPr sz="1500" b="0">
+                <a:solidFill>
+                  <a:srgbClr val="98A3B0"/>
+                </a:solidFill>
+                <a:latin typeface="Calibri"/>
+              </a:rPr>
+              <a:t>The single significant value on that contrast is </a:t>
+            </a:r>
+            <a:r>
+              <a:rPr sz="1500" b="1">
+                <a:solidFill>
+                  <a:srgbClr val="E24A4A"/>
+                </a:solidFill>
+                <a:latin typeface="Calibri"/>
+              </a:rPr>
+              <a:t>negative</a:t>
+            </a:r>
+            <a:r>
+              <a:rPr sz="1500" b="0">
+                <a:solidFill>
+                  <a:srgbClr val="98A3B0"/>
+                </a:solidFill>
+                <a:latin typeface="Calibri"/>
+              </a:rPr>
+              <a:t> — and on VO-C's M column the self model is the worst of the three predictors of its own output (M→M 0.603, below N→M 0.636 and F→M 0.628).</a:t>
+            </a:r>
+          </a:p>
           <a:p>
             <a:pPr algn="l">
-              <a:spcAft>
-                <a:spcPts val="800"/>
-              </a:spcAft>
-            </a:pPr>
-            <a:r>
-              <a:rPr sz="1100" b="0" spc="80">
-                <a:solidFill>
-                  <a:srgbClr val="0F6E8C"/>
-                </a:solidFill>
-                <a:latin typeface="Consolas"/>
-              </a:rPr>
-              <a:t>04</a:t>
+              <a:lnSpc>
+                <a:spcPct val="128000"/>
+              </a:lnSpc>
+              <a:spcAft>
+                <a:spcPts val="0"/>
+              </a:spcAft>
+            </a:pPr>
+            <a:r>
+              <a:rPr sz="1400" b="1">
+                <a:solidFill>
+                  <a:srgbClr val="F0C040"/>
+                </a:solidFill>
+                <a:latin typeface="Calibri"/>
+              </a:rPr>
+              <a:t>Positive interaction, but predictor-by-column differences prevent it from uniquely identifying privileged access. </a:t>
+            </a:r>
+            <a:r>
+              <a:rPr sz="1400" b="0">
+                <a:solidFill>
+                  <a:srgbClr val="98A3B0"/>
+                </a:solidFill>
+                <a:latin typeface="Calibri"/>
+              </a:rPr>
+              <a:t>It is positive because M </a:t>
+            </a:r>
+            <a:r>
+              <a:rPr sz="1400" b="1">
+                <a:solidFill>
+                  <a:srgbClr val="E9EEF4"/>
+                </a:solidFill>
+                <a:latin typeface="Calibri"/>
+              </a:rPr>
+              <a:t>under</a:t>
+            </a:r>
+            <a:r>
+              <a:rPr sz="1400" b="0">
+                <a:solidFill>
+                  <a:srgbClr val="98A3B0"/>
+                </a:solidFill>
+                <a:latin typeface="Calibri"/>
+              </a:rPr>
+              <a:t>-performs on N's column, not because it over-performs on its own — and the estimator cancels only the additive part.</a:t>
             </a:r>
           </a:p>
         </p:txBody>
@@ -4431,14 +6735,14 @@
         </p:nvSpPr>
         <p:spPr>
           <a:xfrm>
-            <a:off x="822960" y="5989320"/>
-            <a:ext cx="10545775" cy="9525"/>
+            <a:off x="658368" y="5623560"/>
+            <a:ext cx="10874959" cy="566928"/>
           </a:xfrm>
           <a:prstGeom prst="rect">
             <a:avLst/>
           </a:prstGeom>
           <a:solidFill>
-            <a:srgbClr val="DCE2E8"/>
+            <a:srgbClr val="1A1F2E"/>
           </a:solidFill>
           <a:ln>
             <a:noFill/>
@@ -4460,10 +6764,130 @@
           </a:fontRef>
         </p:style>
         <p:txBody>
+          <a:bodyPr rtlCol="0" anchor="ctr" lIns="182880"/>
+          <a:lstStyle/>
+          <a:p>
+            <a:pPr algn="l">
+              <a:lnSpc>
+                <a:spcPct val="128000"/>
+              </a:lnSpc>
+              <a:spcAft>
+                <a:spcPts val="0"/>
+              </a:spcAft>
+            </a:pPr>
+            <a:r>
+              <a:rPr sz="1300" b="1">
+                <a:solidFill>
+                  <a:srgbClr val="E9EEF4"/>
+                </a:solidFill>
+                <a:latin typeface="Calibri"/>
+              </a:rPr>
+              <a:t>Four stimulus constructions  ·  shared 200-prompt pool</a:t>
+            </a:r>
+            <a:r>
+              <a:rPr sz="1100" b="0">
+                <a:solidFill>
+                  <a:srgbClr val="6B7683"/>
+                </a:solidFill>
+                <a:latin typeface="Calibri"/>
+              </a:rPr>
+              <a:t>          Preregistered floor 500/cell; achieved ~400; VO-D N = 323. Prompt-clustered bootstrap throughout.</a:t>
+            </a:r>
+          </a:p>
+        </p:txBody>
+      </p:sp>
+      <p:sp>
+        <p:nvSpPr>
+          <p:cNvPr id="8" name="Rectangle 7"/>
+          <p:cNvSpPr/>
+          <p:nvPr/>
+        </p:nvSpPr>
+        <p:spPr>
+          <a:xfrm>
+            <a:off x="658368" y="6291072"/>
+            <a:ext cx="10874959" cy="9525"/>
+          </a:xfrm>
+          <a:prstGeom prst="rect">
+            <a:avLst/>
+          </a:prstGeom>
+          <a:solidFill>
+            <a:srgbClr val="2A323C"/>
+          </a:solidFill>
+          <a:ln>
+            <a:noFill/>
+          </a:ln>
+          <a:effectLst/>
+        </p:spPr>
+        <p:style>
+          <a:lnRef idx="1">
+            <a:schemeClr val="accent1"/>
+          </a:lnRef>
+          <a:fillRef idx="3">
+            <a:schemeClr val="accent1"/>
+          </a:fillRef>
+          <a:effectRef idx="2">
+            <a:schemeClr val="accent1"/>
+          </a:effectRef>
+          <a:fontRef idx="minor">
+            <a:schemeClr val="lt1"/>
+          </a:fontRef>
+        </p:style>
+        <p:txBody>
           <a:bodyPr rtlCol="0" anchor="ctr"/>
           <a:lstStyle/>
           <a:p>
             <a:pPr algn="ctr"/>
+          </a:p>
+        </p:txBody>
+      </p:sp>
+      <p:sp>
+        <p:nvSpPr>
+          <p:cNvPr id="9" name="TextBox 8"/>
+          <p:cNvSpPr txBox="1"/>
+          <p:nvPr/>
+        </p:nvSpPr>
+        <p:spPr>
+          <a:xfrm>
+            <a:off x="658368" y="6400800"/>
+            <a:ext cx="10874959" cy="274320"/>
+          </a:xfrm>
+          <a:prstGeom prst="rect">
+            <a:avLst/>
+          </a:prstGeom>
+          <a:noFill/>
+        </p:spPr>
+        <p:txBody>
+          <a:bodyPr wrap="square" lIns="0" rIns="0" tIns="0" bIns="0">
+            <a:spAutoFit/>
+          </a:bodyPr>
+          <a:lstStyle/>
+          <a:p>
+            <a:pPr algn="l">
+              <a:lnSpc>
+                <a:spcPct val="128000"/>
+              </a:lnSpc>
+              <a:spcAft>
+                <a:spcPts val="0"/>
+              </a:spcAft>
+            </a:pPr>
+            <a:r>
+              <a:rPr sz="1050" b="1">
+                <a:solidFill>
+                  <a:srgbClr val="F0C040"/>
+                </a:solidFill>
+                <a:latin typeface="Consolas"/>
+              </a:rPr>
+              <a:t>4</a:t>
+            </a:r>
+            <a:r>
+              <a:rPr sz="1050" b="0">
+                <a:solidFill>
+                  <a:srgbClr val="6B7683"/>
+                </a:solidFill>
+                <a:latin typeface="Consolas"/>
+              </a:rPr>
+              <a:t>  /  6     Crossed design</a:t>
+            </a:r>
           </a:p>
         </p:txBody>
       </p:sp>
@@ -4481,7 +6905,7 @@
     <p:bg>
       <p:bgPr>
         <a:solidFill>
-          <a:srgbClr val="F6F8FA"/>
+          <a:srgbClr val="0D1117"/>
         </a:solidFill>
         <a:effectLst/>
       </p:bgPr>
@@ -4501,8 +6925,8 @@
         </p:nvSpPr>
         <p:spPr>
           <a:xfrm>
-            <a:off x="822960" y="566928"/>
-            <a:ext cx="10545775" cy="365760"/>
+            <a:off x="658368" y="475488"/>
+            <a:ext cx="10874959" cy="310896"/>
           </a:xfrm>
           <a:prstGeom prst="rect">
             <a:avLst/>
@@ -4510,7 +6934,7 @@
           <a:noFill/>
         </p:spPr>
         <p:txBody>
-          <a:bodyPr wrap="square">
+          <a:bodyPr wrap="square" lIns="0" rIns="0" tIns="0" bIns="0">
             <a:spAutoFit/>
           </a:bodyPr>
           <a:lstStyle/>
@@ -4521,13 +6945,13 @@
               </a:spcAft>
             </a:pPr>
             <a:r>
-              <a:rPr sz="1100" b="0" spc="140">
-                <a:solidFill>
-                  <a:srgbClr val="59636F"/>
+              <a:rPr sz="1150" b="0" spc="160">
+                <a:solidFill>
+                  <a:srgbClr val="F0C040"/>
                 </a:solidFill>
                 <a:latin typeface="Consolas"/>
               </a:rPr>
-              <a:t>FINDING 2  ·  24 CELLS  ·  9,269 TRIALS  ·  FOUR INDEPENDENT STIMULUS DESIGNS</a:t>
+              <a:t>FINDING 3  ·  “WHICH OF THESE TWO REPLIES WOULD YOU PRODUCE?”  ·  391 PAIRS</a:t>
             </a:r>
           </a:p>
         </p:txBody>
@@ -4540,8 +6964,8 @@
         </p:nvSpPr>
         <p:spPr>
           <a:xfrm>
-            <a:off x="822960" y="960120"/>
-            <a:ext cx="10545775" cy="1371600"/>
+            <a:off x="658368" y="868680"/>
+            <a:ext cx="10874959" cy="1005840"/>
           </a:xfrm>
           <a:prstGeom prst="rect">
             <a:avLst/>
@@ -4549,529 +6973,77 @@
           <a:noFill/>
         </p:spPr>
         <p:txBody>
-          <a:bodyPr wrap="square">
+          <a:bodyPr wrap="square" lIns="0" rIns="0" tIns="0" bIns="0">
             <a:spAutoFit/>
           </a:bodyPr>
           <a:lstStyle/>
           <a:p>
             <a:pPr algn="l">
               <a:lnSpc>
-                <a:spcPct val="105000"/>
+                <a:spcPct val="106000"/>
               </a:lnSpc>
               <a:spcAft>
                 <a:spcPts val="800"/>
               </a:spcAft>
             </a:pPr>
             <a:r>
-              <a:rPr sz="3400" b="1">
-                <a:solidFill>
-                  <a:srgbClr val="12171F"/>
-                </a:solidFill>
-                <a:latin typeface="Georgia"/>
-              </a:rPr>
-              <a:t>No self-advantage in any design — replicated four times</a:t>
-            </a:r>
-          </a:p>
-        </p:txBody>
-      </p:sp>
-      <p:graphicFrame>
-        <p:nvGraphicFramePr>
-          <p:cNvPr id="4" name="Table 3"/>
-          <p:cNvGraphicFramePr>
-            <a:graphicFrameLocks noGrp="1"/>
-          </p:cNvGraphicFramePr>
-          <p:nvPr/>
-        </p:nvGraphicFramePr>
-        <p:xfrm>
-          <a:off x="822960" y="2011680"/>
-          <a:ext cx="10607040" cy="2194560"/>
-        </p:xfrm>
-        <a:graphic>
-          <a:graphicData uri="http://schemas.openxmlformats.org/drawingml/2006/table">
-            <a:tbl>
-              <a:tblPr firstRow="1" bandRow="1">
-                <a:tableStyleId>{5C22544A-7EE6-4342-B048-85BDC9FD1C3A}</a:tableStyleId>
-              </a:tblPr>
-              <a:tblGrid>
-                <a:gridCol w="3017520"/>
-                <a:gridCol w="2103120"/>
-                <a:gridCol w="2834640"/>
-                <a:gridCol w="2651760"/>
-              </a:tblGrid>
-              <a:tr h="438912">
-                <a:tc>
-                  <a:txBody>
-                    <a:bodyPr/>
-                    <a:lstStyle/>
-                    <a:p>
-                      <a:pPr algn="l"/>
-                      <a:r>
-                        <a:rPr sz="1000" b="1">
-                          <a:solidFill>
-                            <a:srgbClr val="59636F"/>
-                          </a:solidFill>
-                          <a:latin typeface="Segoe UI"/>
-                        </a:rPr>
-                        <a:t>Stimulus set</a:t>
-                      </a:r>
-                    </a:p>
-                  </a:txBody>
-                  <a:tcPr>
-                    <a:solidFill>
-                      <a:srgbClr val="EEF3F6"/>
-                    </a:solidFill>
-                  </a:tcPr>
-                </a:tc>
-                <a:tc>
-                  <a:txBody>
-                    <a:bodyPr/>
-                    <a:lstStyle/>
-                    <a:p>
-                      <a:pPr algn="l"/>
-                      <a:r>
-                        <a:rPr sz="1000" b="1">
-                          <a:solidFill>
-                            <a:srgbClr val="59636F"/>
-                          </a:solidFill>
-                          <a:latin typeface="Segoe UI"/>
-                        </a:rPr>
-                        <a:t>Surface baseline</a:t>
-                      </a:r>
-                    </a:p>
-                  </a:txBody>
-                  <a:tcPr>
-                    <a:solidFill>
-                      <a:srgbClr val="EEF3F6"/>
-                    </a:solidFill>
-                  </a:tcPr>
-                </a:tc>
-                <a:tc>
-                  <a:txBody>
-                    <a:bodyPr/>
-                    <a:lstStyle/>
-                    <a:p>
-                      <a:pPr algn="l"/>
-                      <a:r>
-                        <a:rPr sz="1000" b="1">
-                          <a:solidFill>
-                            <a:srgbClr val="59636F"/>
-                          </a:solidFill>
-                          <a:latin typeface="Segoe UI"/>
-                        </a:rPr>
-                        <a:t>Self-advantage</a:t>
-                      </a:r>
-                    </a:p>
-                  </a:txBody>
-                  <a:tcPr>
-                    <a:solidFill>
-                      <a:srgbClr val="EEF3F6"/>
-                    </a:solidFill>
-                  </a:tcPr>
-                </a:tc>
-                <a:tc>
-                  <a:txBody>
-                    <a:bodyPr/>
-                    <a:lstStyle/>
-                    <a:p>
-                      <a:pPr algn="l"/>
-                      <a:r>
-                        <a:rPr sz="1000" b="1">
-                          <a:solidFill>
-                            <a:srgbClr val="59636F"/>
-                          </a:solidFill>
-                          <a:latin typeface="Segoe UI"/>
-                        </a:rPr>
-                        <a:t>Interaction</a:t>
-                      </a:r>
-                    </a:p>
-                  </a:txBody>
-                  <a:tcPr>
-                    <a:solidFill>
-                      <a:srgbClr val="EEF3F6"/>
-                    </a:solidFill>
-                  </a:tcPr>
-                </a:tc>
-              </a:tr>
-              <a:tr h="438912">
-                <a:tc>
-                  <a:txBody>
-                    <a:bodyPr/>
-                    <a:lstStyle/>
-                    <a:p>
-                      <a:pPr algn="l"/>
-                      <a:r>
-                        <a:rPr sz="1100" b="0">
-                          <a:solidFill>
-                            <a:srgbClr val="12171F"/>
-                          </a:solidFill>
-                          <a:latin typeface="Segoe UI"/>
-                        </a:rPr>
-                        <a:t>VO-D  (style-equalised)</a:t>
-                      </a:r>
-                    </a:p>
-                  </a:txBody>
-                  <a:tcPr>
-                    <a:solidFill>
-                      <a:srgbClr val="FFFFFF"/>
-                    </a:solidFill>
-                  </a:tcPr>
-                </a:tc>
-                <a:tc>
-                  <a:txBody>
-                    <a:bodyPr/>
-                    <a:lstStyle/>
-                    <a:p>
-                      <a:pPr algn="l"/>
-                      <a:r>
-                        <a:rPr sz="1100" b="0">
-                          <a:solidFill>
-                            <a:srgbClr val="12171F"/>
-                          </a:solidFill>
-                          <a:latin typeface="Consolas"/>
-                        </a:rPr>
-                        <a:t>0.55 / 0.54</a:t>
-                      </a:r>
-                    </a:p>
-                  </a:txBody>
-                  <a:tcPr>
-                    <a:solidFill>
-                      <a:srgbClr val="FFFFFF"/>
-                    </a:solidFill>
-                  </a:tcPr>
-                </a:tc>
-                <a:tc>
-                  <a:txBody>
-                    <a:bodyPr/>
-                    <a:lstStyle/>
-                    <a:p>
-                      <a:pPr algn="l"/>
-                      <a:r>
-                        <a:rPr sz="1100" b="0">
-                          <a:solidFill>
-                            <a:srgbClr val="12171F"/>
-                          </a:solidFill>
-                          <a:latin typeface="Consolas"/>
-                        </a:rPr>
-                        <a:t>+0.000 [−0.015, +0.015]</a:t>
-                      </a:r>
-                    </a:p>
-                  </a:txBody>
-                  <a:tcPr>
-                    <a:solidFill>
-                      <a:srgbClr val="FFFFFF"/>
-                    </a:solidFill>
-                  </a:tcPr>
-                </a:tc>
-                <a:tc>
-                  <a:txBody>
-                    <a:bodyPr/>
-                    <a:lstStyle/>
-                    <a:p>
-                      <a:pPr algn="l"/>
-                      <a:r>
-                        <a:rPr sz="1100" b="0">
-                          <a:solidFill>
-                            <a:srgbClr val="12171F"/>
-                          </a:solidFill>
-                          <a:latin typeface="Consolas"/>
-                        </a:rPr>
-                        <a:t>−0.006 [−0.033, +0.021]</a:t>
-                      </a:r>
-                    </a:p>
-                  </a:txBody>
-                  <a:tcPr>
-                    <a:solidFill>
-                      <a:srgbClr val="FFFFFF"/>
-                    </a:solidFill>
-                  </a:tcPr>
-                </a:tc>
-              </a:tr>
-              <a:tr h="438912">
-                <a:tc>
-                  <a:txBody>
-                    <a:bodyPr/>
-                    <a:lstStyle/>
-                    <a:p>
-                      <a:pPr algn="l"/>
-                      <a:r>
-                        <a:rPr sz="1100" b="0">
-                          <a:solidFill>
-                            <a:srgbClr val="12171F"/>
-                          </a:solidFill>
-                          <a:latin typeface="Segoe UI"/>
-                        </a:rPr>
-                        <a:t>VO-B</a:t>
-                      </a:r>
-                    </a:p>
-                  </a:txBody>
-                  <a:tcPr>
-                    <a:solidFill>
-                      <a:srgbClr val="EEF3F6"/>
-                    </a:solidFill>
-                  </a:tcPr>
-                </a:tc>
-                <a:tc>
-                  <a:txBody>
-                    <a:bodyPr/>
-                    <a:lstStyle/>
-                    <a:p>
-                      <a:pPr algn="l"/>
-                      <a:r>
-                        <a:rPr sz="1100" b="0">
-                          <a:solidFill>
-                            <a:srgbClr val="12171F"/>
-                          </a:solidFill>
-                          <a:latin typeface="Consolas"/>
-                        </a:rPr>
-                        <a:t>0.65 / 0.75</a:t>
-                      </a:r>
-                    </a:p>
-                  </a:txBody>
-                  <a:tcPr>
-                    <a:solidFill>
-                      <a:srgbClr val="EEF3F6"/>
-                    </a:solidFill>
-                  </a:tcPr>
-                </a:tc>
-                <a:tc>
-                  <a:txBody>
-                    <a:bodyPr/>
-                    <a:lstStyle/>
-                    <a:p>
-                      <a:pPr algn="l"/>
-                      <a:r>
-                        <a:rPr sz="1100" b="0">
-                          <a:solidFill>
-                            <a:srgbClr val="12171F"/>
-                          </a:solidFill>
-                          <a:latin typeface="Consolas"/>
-                        </a:rPr>
-                        <a:t>+0.000 [−0.033, +0.035]</a:t>
-                      </a:r>
-                    </a:p>
-                  </a:txBody>
-                  <a:tcPr>
-                    <a:solidFill>
-                      <a:srgbClr val="EEF3F6"/>
-                    </a:solidFill>
-                  </a:tcPr>
-                </a:tc>
-                <a:tc>
-                  <a:txBody>
-                    <a:bodyPr/>
-                    <a:lstStyle/>
-                    <a:p>
-                      <a:pPr algn="l"/>
-                      <a:r>
-                        <a:rPr sz="1100" b="0">
-                          <a:solidFill>
-                            <a:srgbClr val="12171F"/>
-                          </a:solidFill>
-                          <a:latin typeface="Consolas"/>
-                        </a:rPr>
-                        <a:t>+0.005 [−0.040, +0.050]</a:t>
-                      </a:r>
-                    </a:p>
-                  </a:txBody>
-                  <a:tcPr>
-                    <a:solidFill>
-                      <a:srgbClr val="EEF3F6"/>
-                    </a:solidFill>
-                  </a:tcPr>
-                </a:tc>
-              </a:tr>
-              <a:tr h="438912">
-                <a:tc>
-                  <a:txBody>
-                    <a:bodyPr/>
-                    <a:lstStyle/>
-                    <a:p>
-                      <a:pPr algn="l"/>
-                      <a:r>
-                        <a:rPr sz="1100" b="0">
-                          <a:solidFill>
-                            <a:srgbClr val="12171F"/>
-                          </a:solidFill>
-                          <a:latin typeface="Segoe UI"/>
-                        </a:rPr>
-                        <a:t>VO-A</a:t>
-                      </a:r>
-                    </a:p>
-                  </a:txBody>
-                  <a:tcPr>
-                    <a:solidFill>
-                      <a:srgbClr val="FFFFFF"/>
-                    </a:solidFill>
-                  </a:tcPr>
-                </a:tc>
-                <a:tc>
-                  <a:txBody>
-                    <a:bodyPr/>
-                    <a:lstStyle/>
-                    <a:p>
-                      <a:pPr algn="l"/>
-                      <a:r>
-                        <a:rPr sz="1100" b="0">
-                          <a:solidFill>
-                            <a:srgbClr val="12171F"/>
-                          </a:solidFill>
-                          <a:latin typeface="Consolas"/>
-                        </a:rPr>
-                        <a:t>0.66 / 0.75</a:t>
-                      </a:r>
-                    </a:p>
-                  </a:txBody>
-                  <a:tcPr>
-                    <a:solidFill>
-                      <a:srgbClr val="FFFFFF"/>
-                    </a:solidFill>
-                  </a:tcPr>
-                </a:tc>
-                <a:tc>
-                  <a:txBody>
-                    <a:bodyPr/>
-                    <a:lstStyle/>
-                    <a:p>
-                      <a:pPr algn="l"/>
-                      <a:r>
-                        <a:rPr sz="1100" b="0">
-                          <a:solidFill>
-                            <a:srgbClr val="12171F"/>
-                          </a:solidFill>
-                          <a:latin typeface="Consolas"/>
-                        </a:rPr>
-                        <a:t>+0.020 [−0.015, +0.056]</a:t>
-                      </a:r>
-                    </a:p>
-                  </a:txBody>
-                  <a:tcPr>
-                    <a:solidFill>
-                      <a:srgbClr val="FFFFFF"/>
-                    </a:solidFill>
-                  </a:tcPr>
-                </a:tc>
-                <a:tc>
-                  <a:txBody>
-                    <a:bodyPr/>
-                    <a:lstStyle/>
-                    <a:p>
-                      <a:pPr algn="l"/>
-                      <a:r>
-                        <a:rPr sz="1100" b="0">
-                          <a:solidFill>
-                            <a:srgbClr val="12171F"/>
-                          </a:solidFill>
-                          <a:latin typeface="Consolas"/>
-                        </a:rPr>
-                        <a:t>−0.030 [−0.079, +0.018]</a:t>
-                      </a:r>
-                    </a:p>
-                  </a:txBody>
-                  <a:tcPr>
-                    <a:solidFill>
-                      <a:srgbClr val="FFFFFF"/>
-                    </a:solidFill>
-                  </a:tcPr>
-                </a:tc>
-              </a:tr>
-              <a:tr h="438912">
-                <a:tc>
-                  <a:txBody>
-                    <a:bodyPr/>
-                    <a:lstStyle/>
-                    <a:p>
-                      <a:pPr algn="l"/>
-                      <a:r>
-                        <a:rPr sz="1100" b="1">
-                          <a:solidFill>
-                            <a:srgbClr val="12171F"/>
-                          </a:solidFill>
-                          <a:latin typeface="Segoe UI"/>
-                        </a:rPr>
-                        <a:t>VO-C  (leakiest)</a:t>
-                      </a:r>
-                    </a:p>
-                  </a:txBody>
-                  <a:tcPr>
-                    <a:solidFill>
-                      <a:srgbClr val="EEF3F6"/>
-                    </a:solidFill>
-                  </a:tcPr>
-                </a:tc>
-                <a:tc>
-                  <a:txBody>
-                    <a:bodyPr/>
-                    <a:lstStyle/>
-                    <a:p>
-                      <a:pPr algn="l"/>
-                      <a:r>
-                        <a:rPr sz="1100" b="1">
-                          <a:solidFill>
-                            <a:srgbClr val="12171F"/>
-                          </a:solidFill>
-                          <a:latin typeface="Consolas"/>
-                        </a:rPr>
-                        <a:t>0.69 / 0.85</a:t>
-                      </a:r>
-                    </a:p>
-                  </a:txBody>
-                  <a:tcPr>
-                    <a:solidFill>
-                      <a:srgbClr val="EEF3F6"/>
-                    </a:solidFill>
-                  </a:tcPr>
-                </a:tc>
-                <a:tc>
-                  <a:txBody>
-                    <a:bodyPr/>
-                    <a:lstStyle/>
-                    <a:p>
-                      <a:pPr algn="l"/>
-                      <a:r>
-                        <a:rPr sz="1100" b="1">
-                          <a:solidFill>
-                            <a:srgbClr val="12171F"/>
-                          </a:solidFill>
-                          <a:latin typeface="Consolas"/>
-                        </a:rPr>
-                        <a:t>−0.033 [−0.058, −0.008]</a:t>
-                      </a:r>
-                    </a:p>
-                  </a:txBody>
-                  <a:tcPr>
-                    <a:solidFill>
-                      <a:srgbClr val="EEF3F6"/>
-                    </a:solidFill>
-                  </a:tcPr>
-                </a:tc>
-                <a:tc>
-                  <a:txBody>
-                    <a:bodyPr/>
-                    <a:lstStyle/>
-                    <a:p>
-                      <a:pPr algn="l"/>
-                      <a:r>
-                        <a:rPr sz="1100" b="1">
-                          <a:solidFill>
-                            <a:srgbClr val="12171F"/>
-                          </a:solidFill>
-                          <a:latin typeface="Consolas"/>
-                        </a:rPr>
-                        <a:t>+0.089 [+0.048, +0.131]</a:t>
-                      </a:r>
-                    </a:p>
-                  </a:txBody>
-                  <a:tcPr>
-                    <a:solidFill>
-                      <a:srgbClr val="EEF3F6"/>
-                    </a:solidFill>
-                  </a:tcPr>
-                </a:tc>
-              </a:tr>
-            </a:tbl>
-          </a:graphicData>
-        </a:graphic>
-      </p:graphicFrame>
+              <a:rPr sz="3000" b="1">
+                <a:solidFill>
+                  <a:srgbClr val="E9EEF4"/>
+                </a:solidFill>
+                <a:latin typeface="Calibri"/>
+              </a:rPr>
+              <a:t>Hermes-3 can predict itself. A cheaper observer still does better.</a:t>
+            </a:r>
+          </a:p>
+        </p:txBody>
+      </p:sp>
+      <p:sp>
+        <p:nvSpPr>
+          <p:cNvPr id="4" name="Rectangle 3"/>
+          <p:cNvSpPr/>
+          <p:nvPr/>
+        </p:nvSpPr>
+        <p:spPr>
+          <a:xfrm>
+            <a:off x="658368" y="1572768"/>
+            <a:ext cx="3456432" cy="2084831"/>
+          </a:xfrm>
+          <a:prstGeom prst="rect">
+            <a:avLst/>
+          </a:prstGeom>
+          <a:solidFill>
+            <a:srgbClr val="161B22"/>
+          </a:solidFill>
+          <a:ln w="12700">
+            <a:solidFill>
+              <a:srgbClr val="2A323C"/>
+            </a:solidFill>
+          </a:ln>
+          <a:effectLst/>
+        </p:spPr>
+        <p:style>
+          <a:lnRef idx="1">
+            <a:schemeClr val="accent1"/>
+          </a:lnRef>
+          <a:fillRef idx="3">
+            <a:schemeClr val="accent1"/>
+          </a:fillRef>
+          <a:effectRef idx="2">
+            <a:schemeClr val="accent1"/>
+          </a:effectRef>
+          <a:fontRef idx="minor">
+            <a:schemeClr val="lt1"/>
+          </a:fontRef>
+        </p:style>
+        <p:txBody>
+          <a:bodyPr rtlCol="0" anchor="ctr"/>
+          <a:lstStyle/>
+          <a:p>
+            <a:pPr algn="ctr"/>
+          </a:p>
+        </p:txBody>
+      </p:sp>
       <p:sp>
         <p:nvSpPr>
           <p:cNvPr id="5" name="TextBox 4"/>
@@ -5080,8 +7052,8 @@
         </p:nvSpPr>
         <p:spPr>
           <a:xfrm>
-            <a:off x="822960" y="4572000"/>
-            <a:ext cx="8778240" cy="1280160"/>
+            <a:off x="841248" y="1719072"/>
+            <a:ext cx="3090672" cy="1371600"/>
           </a:xfrm>
           <a:prstGeom prst="rect">
             <a:avLst/>
@@ -5089,86 +7061,98 @@
           <a:noFill/>
         </p:spPr>
         <p:txBody>
-          <a:bodyPr wrap="square">
+          <a:bodyPr wrap="square" lIns="0" rIns="0" tIns="0" bIns="0">
             <a:spAutoFit/>
           </a:bodyPr>
           <a:lstStyle/>
           <a:p>
             <a:pPr algn="l">
+              <a:spcAft>
+                <a:spcPts val="200"/>
+              </a:spcAft>
+            </a:pPr>
+            <a:r>
+              <a:rPr sz="1350" b="1">
+                <a:solidFill>
+                  <a:srgbClr val="E9EEF4"/>
+                </a:solidFill>
+                <a:latin typeface="Calibri"/>
+              </a:rPr>
+              <a:t>Hermes-3 self-prediction</a:t>
+            </a:r>
+          </a:p>
+          <a:p>
+            <a:pPr algn="l">
+              <a:spcAft>
+                <a:spcPts val="300"/>
+              </a:spcAft>
+            </a:pPr>
+            <a:r>
+              <a:rPr sz="4000" b="1">
+                <a:solidFill>
+                  <a:srgbClr val="4A9B4A"/>
+                </a:solidFill>
+                <a:latin typeface="Consolas"/>
+              </a:rPr>
+              <a:t>0.719</a:t>
+            </a:r>
+          </a:p>
+          <a:p>
+            <a:pPr algn="l">
               <a:lnSpc>
-                <a:spcPct val="130000"/>
+                <a:spcPct val="116000"/>
               </a:lnSpc>
               <a:spcAft>
-                <a:spcPts val="1200"/>
-              </a:spcAft>
-            </a:pPr>
-            <a:r>
-              <a:rPr sz="1500" b="1">
-                <a:solidFill>
-                  <a:srgbClr val="12171F"/>
-                </a:solidFill>
-                <a:latin typeface="Segoe UI"/>
-              </a:rPr>
-              <a:t>Not one set shows a positive self-advantage whose interval excludes zero. The only significant one is negative, and the only non-zero interaction belongs to the leakiest stimuli in the study.</a:t>
-            </a:r>
-          </a:p>
-        </p:txBody>
-      </p:sp>
-      <p:sp>
-        <p:nvSpPr>
-          <p:cNvPr id="6" name="TextBox 5"/>
-          <p:cNvSpPr txBox="1"/>
-          <p:nvPr/>
-        </p:nvSpPr>
-        <p:spPr>
-          <a:xfrm>
-            <a:off x="822960" y="6172200"/>
-            <a:ext cx="1828800" cy="320040"/>
-          </a:xfrm>
-          <a:prstGeom prst="rect">
-            <a:avLst/>
-          </a:prstGeom>
-          <a:noFill/>
-        </p:spPr>
-        <p:txBody>
-          <a:bodyPr wrap="square">
-            <a:spAutoFit/>
-          </a:bodyPr>
-          <a:lstStyle/>
+                <a:spcPts val="0"/>
+              </a:spcAft>
+            </a:pPr>
+            <a:r>
+              <a:rPr sz="1150" b="0">
+                <a:solidFill>
+                  <a:srgbClr val="98A3B0"/>
+                </a:solidFill>
+                <a:latin typeface="Calibri"/>
+              </a:rPr>
+              <a:t>balanced accuracy [0.675, 0.762]</a:t>
+            </a:r>
+          </a:p>
           <a:p>
             <a:pPr algn="l">
-              <a:spcAft>
-                <a:spcPts val="800"/>
-              </a:spcAft>
-            </a:pPr>
-            <a:r>
-              <a:rPr sz="1100" b="0" spc="80">
-                <a:solidFill>
-                  <a:srgbClr val="0F6E8C"/>
-                </a:solidFill>
-                <a:latin typeface="Consolas"/>
-              </a:rPr>
-              <a:t>05</a:t>
-            </a:r>
-          </a:p>
-        </p:txBody>
-      </p:sp>
-      <p:sp>
-        <p:nvSpPr>
-          <p:cNvPr id="7" name="Rectangle 6"/>
+              <a:lnSpc>
+                <a:spcPct val="116000"/>
+              </a:lnSpc>
+              <a:spcAft>
+                <a:spcPts val="0"/>
+              </a:spcAft>
+            </a:pPr>
+            <a:r>
+              <a:rPr sz="1150" b="0">
+                <a:solidFill>
+                  <a:srgbClr val="98A3B0"/>
+                </a:solidFill>
+                <a:latin typeface="Calibri"/>
+              </a:rPr>
+              <a:t>discrimination +0.437</a:t>
+            </a:r>
+          </a:p>
+        </p:txBody>
+      </p:sp>
+      <p:sp>
+        <p:nvSpPr>
+          <p:cNvPr id="6" name="Rectangle 5"/>
           <p:cNvSpPr/>
           <p:nvPr/>
         </p:nvSpPr>
         <p:spPr>
           <a:xfrm>
-            <a:off x="822960" y="5989320"/>
-            <a:ext cx="10545775" cy="9525"/>
+            <a:off x="841248" y="3145536"/>
+            <a:ext cx="3090672" cy="137160"/>
           </a:xfrm>
           <a:prstGeom prst="rect">
             <a:avLst/>
           </a:prstGeom>
           <a:solidFill>
-            <a:srgbClr val="DCE2E8"/>
+            <a:srgbClr val="1A1F2E"/>
           </a:solidFill>
           <a:ln>
             <a:noFill/>
@@ -5194,6 +7178,1253 @@
           <a:lstStyle/>
           <a:p>
             <a:pPr algn="ctr"/>
+          </a:p>
+        </p:txBody>
+      </p:sp>
+      <p:sp>
+        <p:nvSpPr>
+          <p:cNvPr id="7" name="Rectangle 6"/>
+          <p:cNvSpPr/>
+          <p:nvPr/>
+        </p:nvSpPr>
+        <p:spPr>
+          <a:xfrm>
+            <a:off x="841248" y="3145536"/>
+            <a:ext cx="1692142" cy="137160"/>
+          </a:xfrm>
+          <a:prstGeom prst="rect">
+            <a:avLst/>
+          </a:prstGeom>
+          <a:solidFill>
+            <a:srgbClr val="4A9B4A"/>
+          </a:solidFill>
+          <a:ln>
+            <a:noFill/>
+          </a:ln>
+          <a:effectLst/>
+        </p:spPr>
+        <p:style>
+          <a:lnRef idx="1">
+            <a:schemeClr val="accent1"/>
+          </a:lnRef>
+          <a:fillRef idx="3">
+            <a:schemeClr val="accent1"/>
+          </a:fillRef>
+          <a:effectRef idx="2">
+            <a:schemeClr val="accent1"/>
+          </a:effectRef>
+          <a:fontRef idx="minor">
+            <a:schemeClr val="lt1"/>
+          </a:fontRef>
+        </p:style>
+        <p:txBody>
+          <a:bodyPr rtlCol="0" anchor="ctr"/>
+          <a:lstStyle/>
+          <a:p>
+            <a:pPr algn="ctr"/>
+          </a:p>
+        </p:txBody>
+      </p:sp>
+      <p:sp>
+        <p:nvSpPr>
+          <p:cNvPr id="8" name="TextBox 7"/>
+          <p:cNvSpPr txBox="1"/>
+          <p:nvPr/>
+        </p:nvSpPr>
+        <p:spPr>
+          <a:xfrm>
+            <a:off x="841248" y="3319272"/>
+            <a:ext cx="3090672" cy="182880"/>
+          </a:xfrm>
+          <a:prstGeom prst="rect">
+            <a:avLst/>
+          </a:prstGeom>
+          <a:noFill/>
+        </p:spPr>
+        <p:txBody>
+          <a:bodyPr wrap="square" lIns="0" rIns="0" tIns="0" bIns="0">
+            <a:spAutoFit/>
+          </a:bodyPr>
+          <a:lstStyle/>
+          <a:p>
+            <a:pPr algn="l">
+              <a:spcAft>
+                <a:spcPts val="0"/>
+              </a:spcAft>
+            </a:pPr>
+            <a:r>
+              <a:rPr sz="950" b="0">
+                <a:solidFill>
+                  <a:srgbClr val="6B7683"/>
+                </a:solidFill>
+                <a:latin typeface="Consolas"/>
+              </a:rPr>
+              <a:t>0.50 chance</a:t>
+            </a:r>
+          </a:p>
+        </p:txBody>
+      </p:sp>
+      <p:sp>
+        <p:nvSpPr>
+          <p:cNvPr id="9" name="TextBox 8"/>
+          <p:cNvSpPr txBox="1"/>
+          <p:nvPr/>
+        </p:nvSpPr>
+        <p:spPr>
+          <a:xfrm>
+            <a:off x="841248" y="3319272"/>
+            <a:ext cx="3090672" cy="182880"/>
+          </a:xfrm>
+          <a:prstGeom prst="rect">
+            <a:avLst/>
+          </a:prstGeom>
+          <a:noFill/>
+        </p:spPr>
+        <p:txBody>
+          <a:bodyPr wrap="square" lIns="0" rIns="0" tIns="0" bIns="0">
+            <a:spAutoFit/>
+          </a:bodyPr>
+          <a:lstStyle/>
+          <a:p>
+            <a:pPr algn="r">
+              <a:spcAft>
+                <a:spcPts val="0"/>
+              </a:spcAft>
+            </a:pPr>
+            <a:r>
+              <a:rPr sz="950" b="0">
+                <a:solidFill>
+                  <a:srgbClr val="6B7683"/>
+                </a:solidFill>
+                <a:latin typeface="Consolas"/>
+              </a:rPr>
+              <a:t>0.90</a:t>
+            </a:r>
+          </a:p>
+        </p:txBody>
+      </p:sp>
+      <p:sp>
+        <p:nvSpPr>
+          <p:cNvPr id="10" name="Rectangle 9"/>
+          <p:cNvSpPr/>
+          <p:nvPr/>
+        </p:nvSpPr>
+        <p:spPr>
+          <a:xfrm>
+            <a:off x="4315968" y="1572768"/>
+            <a:ext cx="3456432" cy="2084831"/>
+          </a:xfrm>
+          <a:prstGeom prst="rect">
+            <a:avLst/>
+          </a:prstGeom>
+          <a:solidFill>
+            <a:srgbClr val="161B22"/>
+          </a:solidFill>
+          <a:ln w="12700">
+            <a:solidFill>
+              <a:srgbClr val="2A323C"/>
+            </a:solidFill>
+          </a:ln>
+          <a:effectLst/>
+        </p:spPr>
+        <p:style>
+          <a:lnRef idx="1">
+            <a:schemeClr val="accent1"/>
+          </a:lnRef>
+          <a:fillRef idx="3">
+            <a:schemeClr val="accent1"/>
+          </a:fillRef>
+          <a:effectRef idx="2">
+            <a:schemeClr val="accent1"/>
+          </a:effectRef>
+          <a:fontRef idx="minor">
+            <a:schemeClr val="lt1"/>
+          </a:fontRef>
+        </p:style>
+        <p:txBody>
+          <a:bodyPr rtlCol="0" anchor="ctr"/>
+          <a:lstStyle/>
+          <a:p>
+            <a:pPr algn="ctr"/>
+          </a:p>
+        </p:txBody>
+      </p:sp>
+      <p:sp>
+        <p:nvSpPr>
+          <p:cNvPr id="11" name="TextBox 10"/>
+          <p:cNvSpPr txBox="1"/>
+          <p:nvPr/>
+        </p:nvSpPr>
+        <p:spPr>
+          <a:xfrm>
+            <a:off x="4498848" y="1719072"/>
+            <a:ext cx="3090672" cy="1371600"/>
+          </a:xfrm>
+          <a:prstGeom prst="rect">
+            <a:avLst/>
+          </a:prstGeom>
+          <a:noFill/>
+        </p:spPr>
+        <p:txBody>
+          <a:bodyPr wrap="square" lIns="0" rIns="0" tIns="0" bIns="0">
+            <a:spAutoFit/>
+          </a:bodyPr>
+          <a:lstStyle/>
+          <a:p>
+            <a:pPr algn="l">
+              <a:spcAft>
+                <a:spcPts val="200"/>
+              </a:spcAft>
+            </a:pPr>
+            <a:r>
+              <a:rPr sz="1350" b="1">
+                <a:solidFill>
+                  <a:srgbClr val="E9EEF4"/>
+                </a:solidFill>
+                <a:latin typeface="Calibri"/>
+              </a:rPr>
+              <a:t>Length-only observer</a:t>
+            </a:r>
+          </a:p>
+          <a:p>
+            <a:pPr algn="l">
+              <a:spcAft>
+                <a:spcPts val="300"/>
+              </a:spcAft>
+            </a:pPr>
+            <a:r>
+              <a:rPr sz="4000" b="1">
+                <a:solidFill>
+                  <a:srgbClr val="4A90D9"/>
+                </a:solidFill>
+                <a:latin typeface="Consolas"/>
+              </a:rPr>
+              <a:t>0.808</a:t>
+            </a:r>
+          </a:p>
+          <a:p>
+            <a:pPr algn="l">
+              <a:lnSpc>
+                <a:spcPct val="116000"/>
+              </a:lnSpc>
+              <a:spcAft>
+                <a:spcPts val="0"/>
+              </a:spcAft>
+            </a:pPr>
+            <a:r>
+              <a:rPr sz="1150" b="0">
+                <a:solidFill>
+                  <a:srgbClr val="98A3B0"/>
+                </a:solidFill>
+                <a:latin typeface="Calibri"/>
+              </a:rPr>
+              <a:t>“pick the longer reply”</a:t>
+            </a:r>
+          </a:p>
+          <a:p>
+            <a:pPr algn="l">
+              <a:lnSpc>
+                <a:spcPct val="116000"/>
+              </a:lnSpc>
+              <a:spcAft>
+                <a:spcPts val="0"/>
+              </a:spcAft>
+            </a:pPr>
+            <a:r>
+              <a:rPr sz="1150" b="0">
+                <a:solidFill>
+                  <a:srgbClr val="98A3B0"/>
+                </a:solidFill>
+                <a:latin typeface="Calibri"/>
+              </a:rPr>
+              <a:t>one feature, no training</a:t>
+            </a:r>
+          </a:p>
+        </p:txBody>
+      </p:sp>
+      <p:sp>
+        <p:nvSpPr>
+          <p:cNvPr id="12" name="Rectangle 11"/>
+          <p:cNvSpPr/>
+          <p:nvPr/>
+        </p:nvSpPr>
+        <p:spPr>
+          <a:xfrm>
+            <a:off x="4498848" y="3145536"/>
+            <a:ext cx="3090672" cy="137160"/>
+          </a:xfrm>
+          <a:prstGeom prst="rect">
+            <a:avLst/>
+          </a:prstGeom>
+          <a:solidFill>
+            <a:srgbClr val="1A1F2E"/>
+          </a:solidFill>
+          <a:ln>
+            <a:noFill/>
+          </a:ln>
+          <a:effectLst/>
+        </p:spPr>
+        <p:style>
+          <a:lnRef idx="1">
+            <a:schemeClr val="accent1"/>
+          </a:lnRef>
+          <a:fillRef idx="3">
+            <a:schemeClr val="accent1"/>
+          </a:fillRef>
+          <a:effectRef idx="2">
+            <a:schemeClr val="accent1"/>
+          </a:effectRef>
+          <a:fontRef idx="minor">
+            <a:schemeClr val="lt1"/>
+          </a:fontRef>
+        </p:style>
+        <p:txBody>
+          <a:bodyPr rtlCol="0" anchor="ctr"/>
+          <a:lstStyle/>
+          <a:p>
+            <a:pPr algn="ctr"/>
+          </a:p>
+        </p:txBody>
+      </p:sp>
+      <p:sp>
+        <p:nvSpPr>
+          <p:cNvPr id="13" name="Rectangle 12"/>
+          <p:cNvSpPr/>
+          <p:nvPr/>
+        </p:nvSpPr>
+        <p:spPr>
+          <a:xfrm>
+            <a:off x="4498848" y="3145536"/>
+            <a:ext cx="2379817" cy="137160"/>
+          </a:xfrm>
+          <a:prstGeom prst="rect">
+            <a:avLst/>
+          </a:prstGeom>
+          <a:solidFill>
+            <a:srgbClr val="4A90D9"/>
+          </a:solidFill>
+          <a:ln>
+            <a:noFill/>
+          </a:ln>
+          <a:effectLst/>
+        </p:spPr>
+        <p:style>
+          <a:lnRef idx="1">
+            <a:schemeClr val="accent1"/>
+          </a:lnRef>
+          <a:fillRef idx="3">
+            <a:schemeClr val="accent1"/>
+          </a:fillRef>
+          <a:effectRef idx="2">
+            <a:schemeClr val="accent1"/>
+          </a:effectRef>
+          <a:fontRef idx="minor">
+            <a:schemeClr val="lt1"/>
+          </a:fontRef>
+        </p:style>
+        <p:txBody>
+          <a:bodyPr rtlCol="0" anchor="ctr"/>
+          <a:lstStyle/>
+          <a:p>
+            <a:pPr algn="ctr"/>
+          </a:p>
+        </p:txBody>
+      </p:sp>
+      <p:sp>
+        <p:nvSpPr>
+          <p:cNvPr id="14" name="TextBox 13"/>
+          <p:cNvSpPr txBox="1"/>
+          <p:nvPr/>
+        </p:nvSpPr>
+        <p:spPr>
+          <a:xfrm>
+            <a:off x="4498848" y="3319272"/>
+            <a:ext cx="3090672" cy="182880"/>
+          </a:xfrm>
+          <a:prstGeom prst="rect">
+            <a:avLst/>
+          </a:prstGeom>
+          <a:noFill/>
+        </p:spPr>
+        <p:txBody>
+          <a:bodyPr wrap="square" lIns="0" rIns="0" tIns="0" bIns="0">
+            <a:spAutoFit/>
+          </a:bodyPr>
+          <a:lstStyle/>
+          <a:p>
+            <a:pPr algn="l">
+              <a:spcAft>
+                <a:spcPts val="0"/>
+              </a:spcAft>
+            </a:pPr>
+            <a:r>
+              <a:rPr sz="950" b="0">
+                <a:solidFill>
+                  <a:srgbClr val="6B7683"/>
+                </a:solidFill>
+                <a:latin typeface="Consolas"/>
+              </a:rPr>
+              <a:t>0.50 chance</a:t>
+            </a:r>
+          </a:p>
+        </p:txBody>
+      </p:sp>
+      <p:sp>
+        <p:nvSpPr>
+          <p:cNvPr id="15" name="TextBox 14"/>
+          <p:cNvSpPr txBox="1"/>
+          <p:nvPr/>
+        </p:nvSpPr>
+        <p:spPr>
+          <a:xfrm>
+            <a:off x="4498848" y="3319272"/>
+            <a:ext cx="3090672" cy="182880"/>
+          </a:xfrm>
+          <a:prstGeom prst="rect">
+            <a:avLst/>
+          </a:prstGeom>
+          <a:noFill/>
+        </p:spPr>
+        <p:txBody>
+          <a:bodyPr wrap="square" lIns="0" rIns="0" tIns="0" bIns="0">
+            <a:spAutoFit/>
+          </a:bodyPr>
+          <a:lstStyle/>
+          <a:p>
+            <a:pPr algn="r">
+              <a:spcAft>
+                <a:spcPts val="0"/>
+              </a:spcAft>
+            </a:pPr>
+            <a:r>
+              <a:rPr sz="950" b="0">
+                <a:solidFill>
+                  <a:srgbClr val="6B7683"/>
+                </a:solidFill>
+                <a:latin typeface="Consolas"/>
+              </a:rPr>
+              <a:t>0.90</a:t>
+            </a:r>
+          </a:p>
+        </p:txBody>
+      </p:sp>
+      <p:sp>
+        <p:nvSpPr>
+          <p:cNvPr id="16" name="Rectangle 15"/>
+          <p:cNvSpPr/>
+          <p:nvPr/>
+        </p:nvSpPr>
+        <p:spPr>
+          <a:xfrm>
+            <a:off x="7973568" y="1572768"/>
+            <a:ext cx="3456432" cy="2084831"/>
+          </a:xfrm>
+          <a:prstGeom prst="rect">
+            <a:avLst/>
+          </a:prstGeom>
+          <a:solidFill>
+            <a:srgbClr val="161B22"/>
+          </a:solidFill>
+          <a:ln w="12700">
+            <a:solidFill>
+              <a:srgbClr val="2A323C"/>
+            </a:solidFill>
+          </a:ln>
+          <a:effectLst/>
+        </p:spPr>
+        <p:style>
+          <a:lnRef idx="1">
+            <a:schemeClr val="accent1"/>
+          </a:lnRef>
+          <a:fillRef idx="3">
+            <a:schemeClr val="accent1"/>
+          </a:fillRef>
+          <a:effectRef idx="2">
+            <a:schemeClr val="accent1"/>
+          </a:effectRef>
+          <a:fontRef idx="minor">
+            <a:schemeClr val="lt1"/>
+          </a:fontRef>
+        </p:style>
+        <p:txBody>
+          <a:bodyPr rtlCol="0" anchor="ctr"/>
+          <a:lstStyle/>
+          <a:p>
+            <a:pPr algn="ctr"/>
+          </a:p>
+        </p:txBody>
+      </p:sp>
+      <p:sp>
+        <p:nvSpPr>
+          <p:cNvPr id="17" name="TextBox 16"/>
+          <p:cNvSpPr txBox="1"/>
+          <p:nvPr/>
+        </p:nvSpPr>
+        <p:spPr>
+          <a:xfrm>
+            <a:off x="8156448" y="1719072"/>
+            <a:ext cx="3090672" cy="1371600"/>
+          </a:xfrm>
+          <a:prstGeom prst="rect">
+            <a:avLst/>
+          </a:prstGeom>
+          <a:noFill/>
+        </p:spPr>
+        <p:txBody>
+          <a:bodyPr wrap="square" lIns="0" rIns="0" tIns="0" bIns="0">
+            <a:spAutoFit/>
+          </a:bodyPr>
+          <a:lstStyle/>
+          <a:p>
+            <a:pPr algn="l">
+              <a:spcAft>
+                <a:spcPts val="200"/>
+              </a:spcAft>
+            </a:pPr>
+            <a:r>
+              <a:rPr sz="1350" b="1">
+                <a:solidFill>
+                  <a:srgbClr val="E9EEF4"/>
+                </a:solidFill>
+                <a:latin typeface="Calibri"/>
+              </a:rPr>
+              <a:t>18-feature surface classifier</a:t>
+            </a:r>
+          </a:p>
+          <a:p>
+            <a:pPr algn="l">
+              <a:spcAft>
+                <a:spcPts val="300"/>
+              </a:spcAft>
+            </a:pPr>
+            <a:r>
+              <a:rPr sz="4000" b="1">
+                <a:solidFill>
+                  <a:srgbClr val="F0C040"/>
+                </a:solidFill>
+                <a:latin typeface="Consolas"/>
+              </a:rPr>
+              <a:t>0.831</a:t>
+            </a:r>
+          </a:p>
+          <a:p>
+            <a:pPr algn="l">
+              <a:lnSpc>
+                <a:spcPct val="116000"/>
+              </a:lnSpc>
+              <a:spcAft>
+                <a:spcPts val="0"/>
+              </a:spcAft>
+            </a:pPr>
+            <a:r>
+              <a:rPr sz="1150" b="0">
+                <a:solidFill>
+                  <a:srgbClr val="98A3B0"/>
+                </a:solidFill>
+                <a:latin typeface="Calibri"/>
+              </a:rPr>
+              <a:t>supervised single-text</a:t>
+            </a:r>
+          </a:p>
+          <a:p>
+            <a:pPr algn="l">
+              <a:lnSpc>
+                <a:spcPct val="116000"/>
+              </a:lnSpc>
+              <a:spcAft>
+                <a:spcPts val="0"/>
+              </a:spcAft>
+            </a:pPr>
+            <a:r>
+              <a:rPr sz="1150" b="0">
+                <a:solidFill>
+                  <a:srgbClr val="98A3B0"/>
+                </a:solidFill>
+                <a:latin typeface="Calibri"/>
+              </a:rPr>
+              <a:t>authorship labelling</a:t>
+            </a:r>
+          </a:p>
+        </p:txBody>
+      </p:sp>
+      <p:sp>
+        <p:nvSpPr>
+          <p:cNvPr id="18" name="Rectangle 17"/>
+          <p:cNvSpPr/>
+          <p:nvPr/>
+        </p:nvSpPr>
+        <p:spPr>
+          <a:xfrm>
+            <a:off x="8156448" y="3145536"/>
+            <a:ext cx="3090672" cy="137160"/>
+          </a:xfrm>
+          <a:prstGeom prst="rect">
+            <a:avLst/>
+          </a:prstGeom>
+          <a:solidFill>
+            <a:srgbClr val="1A1F2E"/>
+          </a:solidFill>
+          <a:ln>
+            <a:noFill/>
+          </a:ln>
+          <a:effectLst/>
+        </p:spPr>
+        <p:style>
+          <a:lnRef idx="1">
+            <a:schemeClr val="accent1"/>
+          </a:lnRef>
+          <a:fillRef idx="3">
+            <a:schemeClr val="accent1"/>
+          </a:fillRef>
+          <a:effectRef idx="2">
+            <a:schemeClr val="accent1"/>
+          </a:effectRef>
+          <a:fontRef idx="minor">
+            <a:schemeClr val="lt1"/>
+          </a:fontRef>
+        </p:style>
+        <p:txBody>
+          <a:bodyPr rtlCol="0" anchor="ctr"/>
+          <a:lstStyle/>
+          <a:p>
+            <a:pPr algn="ctr"/>
+          </a:p>
+        </p:txBody>
+      </p:sp>
+      <p:sp>
+        <p:nvSpPr>
+          <p:cNvPr id="19" name="Rectangle 18"/>
+          <p:cNvSpPr/>
+          <p:nvPr/>
+        </p:nvSpPr>
+        <p:spPr>
+          <a:xfrm>
+            <a:off x="8156448" y="3145536"/>
+            <a:ext cx="2557531" cy="137160"/>
+          </a:xfrm>
+          <a:prstGeom prst="rect">
+            <a:avLst/>
+          </a:prstGeom>
+          <a:solidFill>
+            <a:srgbClr val="F0C040"/>
+          </a:solidFill>
+          <a:ln>
+            <a:noFill/>
+          </a:ln>
+          <a:effectLst/>
+        </p:spPr>
+        <p:style>
+          <a:lnRef idx="1">
+            <a:schemeClr val="accent1"/>
+          </a:lnRef>
+          <a:fillRef idx="3">
+            <a:schemeClr val="accent1"/>
+          </a:fillRef>
+          <a:effectRef idx="2">
+            <a:schemeClr val="accent1"/>
+          </a:effectRef>
+          <a:fontRef idx="minor">
+            <a:schemeClr val="lt1"/>
+          </a:fontRef>
+        </p:style>
+        <p:txBody>
+          <a:bodyPr rtlCol="0" anchor="ctr"/>
+          <a:lstStyle/>
+          <a:p>
+            <a:pPr algn="ctr"/>
+          </a:p>
+        </p:txBody>
+      </p:sp>
+      <p:sp>
+        <p:nvSpPr>
+          <p:cNvPr id="20" name="TextBox 19"/>
+          <p:cNvSpPr txBox="1"/>
+          <p:nvPr/>
+        </p:nvSpPr>
+        <p:spPr>
+          <a:xfrm>
+            <a:off x="8156448" y="3319272"/>
+            <a:ext cx="3090672" cy="182880"/>
+          </a:xfrm>
+          <a:prstGeom prst="rect">
+            <a:avLst/>
+          </a:prstGeom>
+          <a:noFill/>
+        </p:spPr>
+        <p:txBody>
+          <a:bodyPr wrap="square" lIns="0" rIns="0" tIns="0" bIns="0">
+            <a:spAutoFit/>
+          </a:bodyPr>
+          <a:lstStyle/>
+          <a:p>
+            <a:pPr algn="l">
+              <a:spcAft>
+                <a:spcPts val="0"/>
+              </a:spcAft>
+            </a:pPr>
+            <a:r>
+              <a:rPr sz="950" b="0">
+                <a:solidFill>
+                  <a:srgbClr val="6B7683"/>
+                </a:solidFill>
+                <a:latin typeface="Consolas"/>
+              </a:rPr>
+              <a:t>0.50 chance</a:t>
+            </a:r>
+          </a:p>
+        </p:txBody>
+      </p:sp>
+      <p:sp>
+        <p:nvSpPr>
+          <p:cNvPr id="21" name="TextBox 20"/>
+          <p:cNvSpPr txBox="1"/>
+          <p:nvPr/>
+        </p:nvSpPr>
+        <p:spPr>
+          <a:xfrm>
+            <a:off x="8156448" y="3319272"/>
+            <a:ext cx="3090672" cy="182880"/>
+          </a:xfrm>
+          <a:prstGeom prst="rect">
+            <a:avLst/>
+          </a:prstGeom>
+          <a:noFill/>
+        </p:spPr>
+        <p:txBody>
+          <a:bodyPr wrap="square" lIns="0" rIns="0" tIns="0" bIns="0">
+            <a:spAutoFit/>
+          </a:bodyPr>
+          <a:lstStyle/>
+          <a:p>
+            <a:pPr algn="r">
+              <a:spcAft>
+                <a:spcPts val="0"/>
+              </a:spcAft>
+            </a:pPr>
+            <a:r>
+              <a:rPr sz="950" b="0">
+                <a:solidFill>
+                  <a:srgbClr val="6B7683"/>
+                </a:solidFill>
+                <a:latin typeface="Consolas"/>
+              </a:rPr>
+              <a:t>0.90</a:t>
+            </a:r>
+          </a:p>
+        </p:txBody>
+      </p:sp>
+      <p:sp>
+        <p:nvSpPr>
+          <p:cNvPr id="22" name="TextBox 21"/>
+          <p:cNvSpPr txBox="1"/>
+          <p:nvPr/>
+        </p:nvSpPr>
+        <p:spPr>
+          <a:xfrm>
+            <a:off x="658368" y="3712463"/>
+            <a:ext cx="10881360" cy="457200"/>
+          </a:xfrm>
+          <a:prstGeom prst="rect">
+            <a:avLst/>
+          </a:prstGeom>
+          <a:noFill/>
+        </p:spPr>
+        <p:txBody>
+          <a:bodyPr wrap="square" lIns="0" rIns="0" tIns="0" bIns="0">
+            <a:spAutoFit/>
+          </a:bodyPr>
+          <a:lstStyle/>
+          <a:p>
+            <a:pPr algn="l">
+              <a:lnSpc>
+                <a:spcPct val="128000"/>
+              </a:lnSpc>
+              <a:spcAft>
+                <a:spcPts val="0"/>
+              </a:spcAft>
+            </a:pPr>
+            <a:r>
+              <a:rPr sz="1250" b="0">
+                <a:solidFill>
+                  <a:srgbClr val="98A3B0"/>
+                </a:solidFill>
+                <a:latin typeface="Calibri"/>
+              </a:rPr>
+              <a:t>Only the length rule is matched to the model's task item-for-item </a:t>
+            </a:r>
+            <a:r>
+              <a:rPr sz="1250" b="0">
+                <a:solidFill>
+                  <a:srgbClr val="E9EEF4"/>
+                </a:solidFill>
+                <a:latin typeface="Consolas"/>
+              </a:rPr>
+              <a:t>(paired difference +0.095 [+0.036, +0.155], McNemar p = 0.0018)</a:t>
+            </a:r>
+            <a:r>
+              <a:rPr sz="1250" b="0">
+                <a:solidFill>
+                  <a:srgbClr val="98A3B0"/>
+                </a:solidFill>
+                <a:latin typeface="Calibri"/>
+              </a:rPr>
+              <a:t>.  The classifier is a different evaluation procedure — a cost criterion, not a matched score.</a:t>
+            </a:r>
+          </a:p>
+        </p:txBody>
+      </p:sp>
+      <p:sp>
+        <p:nvSpPr>
+          <p:cNvPr id="23" name="Rectangle 22"/>
+          <p:cNvSpPr/>
+          <p:nvPr/>
+        </p:nvSpPr>
+        <p:spPr>
+          <a:xfrm>
+            <a:off x="658368" y="4206240"/>
+            <a:ext cx="7040880" cy="1207008"/>
+          </a:xfrm>
+          <a:prstGeom prst="rect">
+            <a:avLst/>
+          </a:prstGeom>
+          <a:solidFill>
+            <a:srgbClr val="1F3324"/>
+          </a:solidFill>
+          <a:ln w="12700">
+            <a:solidFill>
+              <a:srgbClr val="4A9B4A"/>
+            </a:solidFill>
+          </a:ln>
+          <a:effectLst/>
+        </p:spPr>
+        <p:style>
+          <a:lnRef idx="1">
+            <a:schemeClr val="accent1"/>
+          </a:lnRef>
+          <a:fillRef idx="3">
+            <a:schemeClr val="accent1"/>
+          </a:fillRef>
+          <a:effectRef idx="2">
+            <a:schemeClr val="accent1"/>
+          </a:effectRef>
+          <a:fontRef idx="minor">
+            <a:schemeClr val="lt1"/>
+          </a:fontRef>
+        </p:style>
+        <p:txBody>
+          <a:bodyPr rtlCol="0" anchor="ctr"/>
+          <a:lstStyle/>
+          <a:p>
+            <a:pPr algn="ctr"/>
+          </a:p>
+        </p:txBody>
+      </p:sp>
+      <p:sp>
+        <p:nvSpPr>
+          <p:cNvPr id="24" name="TextBox 23"/>
+          <p:cNvSpPr txBox="1"/>
+          <p:nvPr/>
+        </p:nvSpPr>
+        <p:spPr>
+          <a:xfrm>
+            <a:off x="841248" y="4325112"/>
+            <a:ext cx="6675120" cy="1005840"/>
+          </a:xfrm>
+          <a:prstGeom prst="rect">
+            <a:avLst/>
+          </a:prstGeom>
+          <a:noFill/>
+        </p:spPr>
+        <p:txBody>
+          <a:bodyPr wrap="square" lIns="0" rIns="0" tIns="0" bIns="0">
+            <a:spAutoFit/>
+          </a:bodyPr>
+          <a:lstStyle/>
+          <a:p>
+            <a:pPr algn="l">
+              <a:spcAft>
+                <a:spcPts val="200"/>
+              </a:spcAft>
+            </a:pPr>
+            <a:r>
+              <a:rPr sz="1300" b="1">
+                <a:solidFill>
+                  <a:srgbClr val="E9EEF4"/>
+                </a:solidFill>
+                <a:latin typeface="Calibri"/>
+              </a:rPr>
+              <a:t>Hermes still discriminates where the length cue points away from its own reply:</a:t>
+            </a:r>
+          </a:p>
+          <a:p>
+            <a:pPr algn="l">
+              <a:spcAft>
+                <a:spcPts val="300"/>
+              </a:spcAft>
+            </a:pPr>
+            <a:r>
+              <a:rPr sz="1700" b="1">
+                <a:solidFill>
+                  <a:srgbClr val="4A9B4A"/>
+                </a:solidFill>
+                <a:latin typeface="Consolas"/>
+              </a:rPr>
+              <a:t>+0.381 [0.188, 0.566]</a:t>
+            </a:r>
+          </a:p>
+          <a:p>
+            <a:pPr algn="l">
+              <a:lnSpc>
+                <a:spcPct val="116000"/>
+              </a:lnSpc>
+              <a:spcAft>
+                <a:spcPts val="0"/>
+              </a:spcAft>
+            </a:pPr>
+            <a:r>
+              <a:rPr sz="1150" b="0">
+                <a:solidFill>
+                  <a:srgbClr val="98A3B0"/>
+                </a:solidFill>
+                <a:latin typeface="Calibri"/>
+              </a:rPr>
+              <a:t>75 pairs where a pure length strategy is actively wrong. This study cannot name the residual.</a:t>
+            </a:r>
+          </a:p>
+        </p:txBody>
+      </p:sp>
+      <p:sp>
+        <p:nvSpPr>
+          <p:cNvPr id="25" name="Rectangle 24"/>
+          <p:cNvSpPr/>
+          <p:nvPr/>
+        </p:nvSpPr>
+        <p:spPr>
+          <a:xfrm>
+            <a:off x="7882127" y="4206240"/>
+            <a:ext cx="3657600" cy="1207008"/>
+          </a:xfrm>
+          <a:prstGeom prst="rect">
+            <a:avLst/>
+          </a:prstGeom>
+          <a:solidFill>
+            <a:srgbClr val="1A1F2E"/>
+          </a:solidFill>
+          <a:ln w="12700">
+            <a:solidFill>
+              <a:srgbClr val="2A323C"/>
+            </a:solidFill>
+          </a:ln>
+          <a:effectLst/>
+        </p:spPr>
+        <p:style>
+          <a:lnRef idx="1">
+            <a:schemeClr val="accent1"/>
+          </a:lnRef>
+          <a:fillRef idx="3">
+            <a:schemeClr val="accent1"/>
+          </a:fillRef>
+          <a:effectRef idx="2">
+            <a:schemeClr val="accent1"/>
+          </a:effectRef>
+          <a:fontRef idx="minor">
+            <a:schemeClr val="lt1"/>
+          </a:fontRef>
+        </p:style>
+        <p:txBody>
+          <a:bodyPr rtlCol="0" anchor="ctr"/>
+          <a:lstStyle/>
+          <a:p>
+            <a:pPr algn="ctr"/>
+          </a:p>
+        </p:txBody>
+      </p:sp>
+      <p:sp>
+        <p:nvSpPr>
+          <p:cNvPr id="26" name="TextBox 25"/>
+          <p:cNvSpPr txBox="1"/>
+          <p:nvPr/>
+        </p:nvSpPr>
+        <p:spPr>
+          <a:xfrm>
+            <a:off x="8046720" y="4325112"/>
+            <a:ext cx="3328416" cy="1005840"/>
+          </a:xfrm>
+          <a:prstGeom prst="rect">
+            <a:avLst/>
+          </a:prstGeom>
+          <a:noFill/>
+        </p:spPr>
+        <p:txBody>
+          <a:bodyPr wrap="square" lIns="0" rIns="0" tIns="0" bIns="0">
+            <a:spAutoFit/>
+          </a:bodyPr>
+          <a:lstStyle/>
+          <a:p>
+            <a:pPr algn="l">
+              <a:spcAft>
+                <a:spcPts val="300"/>
+              </a:spcAft>
+            </a:pPr>
+            <a:r>
+              <a:rPr sz="1300" b="1">
+                <a:solidFill>
+                  <a:srgbClr val="E9EEF4"/>
+                </a:solidFill>
+                <a:latin typeface="Calibri"/>
+              </a:rPr>
+              <a:t>Llama-3.1: no self-prediction</a:t>
+            </a:r>
+          </a:p>
+          <a:p>
+            <a:pPr algn="l">
+              <a:lnSpc>
+                <a:spcPct val="118000"/>
+              </a:lnSpc>
+              <a:spcAft>
+                <a:spcPts val="0"/>
+              </a:spcAft>
+            </a:pPr>
+            <a:r>
+              <a:rPr sz="1200" b="0">
+                <a:solidFill>
+                  <a:srgbClr val="98A3B0"/>
+                </a:solidFill>
+                <a:latin typeface="Calibri"/>
+              </a:rPr>
+              <a:t>Discrimination −0.107 [−0.166, −0.048]; 89.7% “A”. One model's ability, not a property of language models.</a:t>
+            </a:r>
+          </a:p>
+        </p:txBody>
+      </p:sp>
+      <p:sp>
+        <p:nvSpPr>
+          <p:cNvPr id="27" name="Rectangle 26"/>
+          <p:cNvSpPr/>
+          <p:nvPr/>
+        </p:nvSpPr>
+        <p:spPr>
+          <a:xfrm>
+            <a:off x="658368" y="5541264"/>
+            <a:ext cx="10874959" cy="438912"/>
+          </a:xfrm>
+          <a:prstGeom prst="rect">
+            <a:avLst/>
+          </a:prstGeom>
+          <a:solidFill>
+            <a:srgbClr val="0D1117"/>
+          </a:solidFill>
+          <a:ln w="12700">
+            <a:solidFill>
+              <a:srgbClr val="F0C040"/>
+            </a:solidFill>
+          </a:ln>
+          <a:effectLst/>
+        </p:spPr>
+        <p:style>
+          <a:lnRef idx="1">
+            <a:schemeClr val="accent1"/>
+          </a:lnRef>
+          <a:fillRef idx="3">
+            <a:schemeClr val="accent1"/>
+          </a:fillRef>
+          <a:effectRef idx="2">
+            <a:schemeClr val="accent1"/>
+          </a:effectRef>
+          <a:fontRef idx="minor">
+            <a:schemeClr val="lt1"/>
+          </a:fontRef>
+        </p:style>
+        <p:txBody>
+          <a:bodyPr rtlCol="0" anchor="ctr"/>
+          <a:lstStyle/>
+          <a:p>
+            <a:pPr algn="ctr"/>
+          </a:p>
+        </p:txBody>
+      </p:sp>
+      <p:sp>
+        <p:nvSpPr>
+          <p:cNvPr id="28" name="TextBox 27"/>
+          <p:cNvSpPr txBox="1"/>
+          <p:nvPr/>
+        </p:nvSpPr>
+        <p:spPr>
+          <a:xfrm>
+            <a:off x="859536" y="5641848"/>
+            <a:ext cx="10472623" cy="274320"/>
+          </a:xfrm>
+          <a:prstGeom prst="rect">
+            <a:avLst/>
+          </a:prstGeom>
+          <a:noFill/>
+        </p:spPr>
+        <p:txBody>
+          <a:bodyPr wrap="square" lIns="0" rIns="0" tIns="0" bIns="0">
+            <a:spAutoFit/>
+          </a:bodyPr>
+          <a:lstStyle/>
+          <a:p>
+            <a:pPr algn="l">
+              <a:lnSpc>
+                <a:spcPct val="128000"/>
+              </a:lnSpc>
+              <a:spcAft>
+                <a:spcPts val="0"/>
+              </a:spcAft>
+            </a:pPr>
+            <a:r>
+              <a:rPr sz="1550" b="1">
+                <a:solidFill>
+                  <a:srgbClr val="F0C040"/>
+                </a:solidFill>
+                <a:latin typeface="Calibri"/>
+              </a:rPr>
+              <a:t>Self-prediction is possible. </a:t>
+            </a:r>
+            <a:r>
+              <a:rPr sz="1550" b="1">
+                <a:solidFill>
+                  <a:srgbClr val="E9EEF4"/>
+                </a:solidFill>
+                <a:latin typeface="Calibri"/>
+              </a:rPr>
+              <a:t>Privileged self-access is not thereby demonstrated.</a:t>
+            </a:r>
+          </a:p>
+        </p:txBody>
+      </p:sp>
+      <p:sp>
+        <p:nvSpPr>
+          <p:cNvPr id="29" name="TextBox 28"/>
+          <p:cNvSpPr txBox="1"/>
+          <p:nvPr/>
+        </p:nvSpPr>
+        <p:spPr>
+          <a:xfrm>
+            <a:off x="658368" y="6053328"/>
+            <a:ext cx="10874959" cy="256032"/>
+          </a:xfrm>
+          <a:prstGeom prst="rect">
+            <a:avLst/>
+          </a:prstGeom>
+          <a:noFill/>
+        </p:spPr>
+        <p:txBody>
+          <a:bodyPr wrap="square" lIns="0" rIns="0" tIns="0" bIns="0">
+            <a:spAutoFit/>
+          </a:bodyPr>
+          <a:lstStyle/>
+          <a:p>
+            <a:pPr algn="l">
+              <a:spcAft>
+                <a:spcPts val="800"/>
+              </a:spcAft>
+            </a:pPr>
+            <a:r>
+              <a:rPr sz="1050" b="0">
+                <a:solidFill>
+                  <a:srgbClr val="6B7683"/>
+                </a:solidFill>
+                <a:latin typeface="Consolas"/>
+              </a:rPr>
+              <a:t>post hoc analyses  ·  0.719 and 0.831 are different evaluation procedures, and no statistical test is run between them</a:t>
+            </a:r>
+          </a:p>
+        </p:txBody>
+      </p:sp>
+      <p:sp>
+        <p:nvSpPr>
+          <p:cNvPr id="30" name="Rectangle 29"/>
+          <p:cNvSpPr/>
+          <p:nvPr/>
+        </p:nvSpPr>
+        <p:spPr>
+          <a:xfrm>
+            <a:off x="658368" y="6291072"/>
+            <a:ext cx="10874959" cy="9525"/>
+          </a:xfrm>
+          <a:prstGeom prst="rect">
+            <a:avLst/>
+          </a:prstGeom>
+          <a:solidFill>
+            <a:srgbClr val="2A323C"/>
+          </a:solidFill>
+          <a:ln>
+            <a:noFill/>
+          </a:ln>
+          <a:effectLst/>
+        </p:spPr>
+        <p:style>
+          <a:lnRef idx="1">
+            <a:schemeClr val="accent1"/>
+          </a:lnRef>
+          <a:fillRef idx="3">
+            <a:schemeClr val="accent1"/>
+          </a:fillRef>
+          <a:effectRef idx="2">
+            <a:schemeClr val="accent1"/>
+          </a:effectRef>
+          <a:fontRef idx="minor">
+            <a:schemeClr val="lt1"/>
+          </a:fontRef>
+        </p:style>
+        <p:txBody>
+          <a:bodyPr rtlCol="0" anchor="ctr"/>
+          <a:lstStyle/>
+          <a:p>
+            <a:pPr algn="ctr"/>
+          </a:p>
+        </p:txBody>
+      </p:sp>
+      <p:sp>
+        <p:nvSpPr>
+          <p:cNvPr id="31" name="TextBox 30"/>
+          <p:cNvSpPr txBox="1"/>
+          <p:nvPr/>
+        </p:nvSpPr>
+        <p:spPr>
+          <a:xfrm>
+            <a:off x="658368" y="6400800"/>
+            <a:ext cx="10874959" cy="274320"/>
+          </a:xfrm>
+          <a:prstGeom prst="rect">
+            <a:avLst/>
+          </a:prstGeom>
+          <a:noFill/>
+        </p:spPr>
+        <p:txBody>
+          <a:bodyPr wrap="square" lIns="0" rIns="0" tIns="0" bIns="0">
+            <a:spAutoFit/>
+          </a:bodyPr>
+          <a:lstStyle/>
+          <a:p>
+            <a:pPr algn="l">
+              <a:lnSpc>
+                <a:spcPct val="128000"/>
+              </a:lnSpc>
+              <a:spcAft>
+                <a:spcPts val="0"/>
+              </a:spcAft>
+            </a:pPr>
+            <a:r>
+              <a:rPr sz="1050" b="1">
+                <a:solidFill>
+                  <a:srgbClr val="F0C040"/>
+                </a:solidFill>
+                <a:latin typeface="Consolas"/>
+              </a:rPr>
+              <a:t>5</a:t>
+            </a:r>
+            <a:r>
+              <a:rPr sz="1050" b="0">
+                <a:solidFill>
+                  <a:srgbClr val="6B7683"/>
+                </a:solidFill>
+                <a:latin typeface="Consolas"/>
+              </a:rPr>
+              <a:t>  /  6     Self-prediction</a:t>
+            </a:r>
           </a:p>
         </p:txBody>
       </p:sp>
@@ -5211,7 +8442,7 @@
     <p:bg>
       <p:bgPr>
         <a:solidFill>
-          <a:srgbClr val="F6F8FA"/>
+          <a:srgbClr val="0D1117"/>
         </a:solidFill>
         <a:effectLst/>
       </p:bgPr>
@@ -5231,8 +8462,8 @@
         </p:nvSpPr>
         <p:spPr>
           <a:xfrm>
-            <a:off x="822960" y="566928"/>
-            <a:ext cx="10545775" cy="365760"/>
+            <a:off x="658368" y="475488"/>
+            <a:ext cx="10874959" cy="310896"/>
           </a:xfrm>
           <a:prstGeom prst="rect">
             <a:avLst/>
@@ -5240,7 +8471,7 @@
           <a:noFill/>
         </p:spPr>
         <p:txBody>
-          <a:bodyPr wrap="square">
+          <a:bodyPr wrap="square" lIns="0" rIns="0" tIns="0" bIns="0">
             <a:spAutoFit/>
           </a:bodyPr>
           <a:lstStyle/>
@@ -5251,13 +8482,13 @@
               </a:spcAft>
             </a:pPr>
             <a:r>
-              <a:rPr sz="1100" b="0" spc="140">
-                <a:solidFill>
-                  <a:srgbClr val="59636F"/>
+              <a:rPr sz="1150" b="0" spc="160">
+                <a:solidFill>
+                  <a:srgbClr val="F0C040"/>
                 </a:solidFill>
                 <a:latin typeface="Consolas"/>
               </a:rPr>
-              <a:t>FINDING 3  ·  BINDER'S PARADIGM, BLACK-BOX</a:t>
+              <a:t>WHERE THIS GOES NEXT</a:t>
             </a:r>
           </a:p>
         </p:txBody>
@@ -5270,8 +8501,8 @@
         </p:nvSpPr>
         <p:spPr>
           <a:xfrm>
-            <a:off x="822960" y="960120"/>
-            <a:ext cx="10545775" cy="1371600"/>
+            <a:off x="658368" y="868680"/>
+            <a:ext cx="10874959" cy="1005840"/>
           </a:xfrm>
           <a:prstGeom prst="rect">
             <a:avLst/>
@@ -5279,14 +8510,14 @@
           <a:noFill/>
         </p:spPr>
         <p:txBody>
-          <a:bodyPr wrap="square">
+          <a:bodyPr wrap="square" lIns="0" rIns="0" tIns="0" bIns="0">
             <a:spAutoFit/>
           </a:bodyPr>
           <a:lstStyle/>
           <a:p>
             <a:pPr algn="l">
               <a:lnSpc>
-                <a:spcPct val="105000"/>
+                <a:spcPct val="106000"/>
               </a:lnSpc>
               <a:spcAft>
                 <a:spcPts val="800"/>
@@ -5295,49 +8526,25 @@
             <a:r>
               <a:rPr sz="3400" b="1">
                 <a:solidFill>
-                  <a:srgbClr val="12171F"/>
-                </a:solidFill>
-                <a:latin typeface="Georgia"/>
-              </a:rPr>
-              <a:t>One model really can predict itself. It still loses.</a:t>
-            </a:r>
-          </a:p>
-        </p:txBody>
-      </p:sp>
-      <p:pic>
-        <p:nvPicPr>
-          <p:cNvPr id="4" name="Picture 3" descr="fig4_selfprediction.png"/>
-          <p:cNvPicPr>
-            <a:picLocks noChangeAspect="1"/>
-          </p:cNvPicPr>
-          <p:nvPr/>
-        </p:nvPicPr>
-        <p:blipFill>
-          <a:blip r:embed="rId2"/>
-          <a:stretch>
-            <a:fillRect/>
-          </a:stretch>
-        </p:blipFill>
-        <p:spPr>
-          <a:xfrm>
-            <a:off x="3593913" y="1874519"/>
-            <a:ext cx="5003869" cy="3566160"/>
-          </a:xfrm>
-          <a:prstGeom prst="rect">
-            <a:avLst/>
-          </a:prstGeom>
-        </p:spPr>
-      </p:pic>
-      <p:sp>
-        <p:nvSpPr>
-          <p:cNvPr id="5" name="TextBox 4"/>
+                  <a:srgbClr val="E9EEF4"/>
+                </a:solidFill>
+                <a:latin typeface="Calibri"/>
+              </a:rPr>
+              <a:t>A decision tree, not a schedule</a:t>
+            </a:r>
+          </a:p>
+        </p:txBody>
+      </p:sp>
+      <p:sp>
+        <p:nvSpPr>
+          <p:cNvPr id="4" name="TextBox 3"/>
           <p:cNvSpPr txBox="1"/>
           <p:nvPr/>
         </p:nvSpPr>
         <p:spPr>
           <a:xfrm>
-            <a:off x="822960" y="5532120"/>
-            <a:ext cx="10545775" cy="731520"/>
+            <a:off x="658368" y="1536192"/>
+            <a:ext cx="10881360" cy="457200"/>
           </a:xfrm>
           <a:prstGeom prst="rect">
             <a:avLst/>
@@ -5345,86 +8552,102 @@
           <a:noFill/>
         </p:spPr>
         <p:txBody>
-          <a:bodyPr wrap="square">
+          <a:bodyPr wrap="square" lIns="0" rIns="0" tIns="0" bIns="0">
             <a:spAutoFit/>
           </a:bodyPr>
           <a:lstStyle/>
           <a:p>
-            <a:pPr algn="ctr">
+            <a:pPr algn="l">
               <a:lnSpc>
-                <a:spcPct val="125000"/>
+                <a:spcPct val="128000"/>
               </a:lnSpc>
               <a:spcAft>
-                <a:spcPts val="800"/>
-              </a:spcAft>
-            </a:pPr>
-            <a:r>
-              <a:rPr sz="1200" b="0">
-                <a:solidFill>
-                  <a:srgbClr val="59636F"/>
-                </a:solidFill>
-                <a:latin typeface="Segoe UI"/>
-              </a:rPr>
-              <a:t>“Which of these two replies would you produce?”  Hermes-3 discriminates genuinely (+0.437 hit minus false-alarm); Llama-3.1 answers by position and shows none. An 18-feature regression does the same job at 0.831.</a:t>
-            </a:r>
-          </a:p>
-        </p:txBody>
-      </p:sp>
-      <p:sp>
-        <p:nvSpPr>
-          <p:cNvPr id="6" name="TextBox 5"/>
-          <p:cNvSpPr txBox="1"/>
-          <p:nvPr/>
-        </p:nvSpPr>
-        <p:spPr>
-          <a:xfrm>
-            <a:off x="822960" y="6172200"/>
-            <a:ext cx="1828800" cy="320040"/>
-          </a:xfrm>
-          <a:prstGeom prst="rect">
-            <a:avLst/>
-          </a:prstGeom>
-          <a:noFill/>
-        </p:spPr>
-        <p:txBody>
-          <a:bodyPr wrap="square">
-            <a:spAutoFit/>
-          </a:bodyPr>
-          <a:lstStyle/>
-          <a:p>
-            <a:pPr algn="l">
-              <a:spcAft>
-                <a:spcPts val="800"/>
-              </a:spcAft>
-            </a:pPr>
-            <a:r>
-              <a:rPr sz="1100" b="0" spc="80">
-                <a:solidFill>
-                  <a:srgbClr val="0F6E8C"/>
-                </a:solidFill>
-                <a:latin typeface="Consolas"/>
-              </a:rPr>
-              <a:t>06</a:t>
-            </a:r>
-          </a:p>
-        </p:txBody>
-      </p:sp>
-      <p:sp>
-        <p:nvSpPr>
-          <p:cNvPr id="7" name="Rectangle 6"/>
+                <a:spcPts val="0"/>
+              </a:spcAft>
+            </a:pPr>
+            <a:r>
+              <a:rPr sz="1550" b="0">
+                <a:solidFill>
+                  <a:srgbClr val="98A3B0"/>
+                </a:solidFill>
+                <a:latin typeface="Calibri"/>
+              </a:rPr>
+              <a:t>One question is left open by our own data: </a:t>
+            </a:r>
+            <a:r>
+              <a:rPr sz="1550" b="1">
+                <a:solidFill>
+                  <a:srgbClr val="E9EEF4"/>
+                </a:solidFill>
+                <a:latin typeface="Calibri"/>
+              </a:rPr>
+              <a:t>what is the model-specific residual that survives control of cheap surface cues, and can a behavioural test be built in which a positive privileged-access result would be identifiable?</a:t>
+            </a:r>
+          </a:p>
+        </p:txBody>
+      </p:sp>
+      <p:sp>
+        <p:nvSpPr>
+          <p:cNvPr id="5" name="Rectangle 4"/>
           <p:cNvSpPr/>
           <p:nvPr/>
         </p:nvSpPr>
         <p:spPr>
           <a:xfrm>
-            <a:off x="822960" y="5989320"/>
-            <a:ext cx="10545775" cy="9525"/>
+            <a:off x="658368" y="2212848"/>
+            <a:ext cx="3529584" cy="2788920"/>
           </a:xfrm>
           <a:prstGeom prst="rect">
             <a:avLst/>
           </a:prstGeom>
           <a:solidFill>
-            <a:srgbClr val="DCE2E8"/>
+            <a:srgbClr val="161B22"/>
+          </a:solidFill>
+          <a:ln w="12700">
+            <a:solidFill>
+              <a:srgbClr val="2A323C"/>
+            </a:solidFill>
+          </a:ln>
+          <a:effectLst/>
+        </p:spPr>
+        <p:style>
+          <a:lnRef idx="1">
+            <a:schemeClr val="accent1"/>
+          </a:lnRef>
+          <a:fillRef idx="3">
+            <a:schemeClr val="accent1"/>
+          </a:fillRef>
+          <a:effectRef idx="2">
+            <a:schemeClr val="accent1"/>
+          </a:effectRef>
+          <a:fontRef idx="minor">
+            <a:schemeClr val="lt1"/>
+          </a:fontRef>
+        </p:style>
+        <p:txBody>
+          <a:bodyPr rtlCol="0" anchor="ctr"/>
+          <a:lstStyle/>
+          <a:p>
+            <a:pPr algn="ctr"/>
+          </a:p>
+        </p:txBody>
+      </p:sp>
+      <p:sp>
+        <p:nvSpPr>
+          <p:cNvPr id="6" name="Rectangle 5"/>
+          <p:cNvSpPr/>
+          <p:nvPr/>
+        </p:nvSpPr>
+        <p:spPr>
+          <a:xfrm>
+            <a:off x="658368" y="2212848"/>
+            <a:ext cx="3529584" cy="54864"/>
+          </a:xfrm>
+          <a:prstGeom prst="rect">
+            <a:avLst/>
+          </a:prstGeom>
+          <a:solidFill>
+            <a:srgbClr val="4A9B4A"/>
           </a:solidFill>
           <a:ln>
             <a:noFill/>
@@ -5453,42 +8676,16 @@
           </a:p>
         </p:txBody>
       </p:sp>
-    </p:spTree>
-  </p:cSld>
-  <p:clrMapOvr>
-    <a:masterClrMapping/>
-  </p:clrMapOvr>
-</p:sld>
-</file>
-
-<file path=ppt/slides/slide7.xml><?xml version="1.0" encoding="utf-8"?>
-<p:sld xmlns:a="http://schemas.openxmlformats.org/drawingml/2006/main" xmlns:p="http://schemas.openxmlformats.org/presentationml/2006/main" xmlns:r="http://schemas.openxmlformats.org/officeDocument/2006/relationships">
-  <p:cSld>
-    <p:bg>
-      <p:bgPr>
-        <a:solidFill>
-          <a:srgbClr val="F6F8FA"/>
-        </a:solidFill>
-        <a:effectLst/>
-      </p:bgPr>
-    </p:bg>
-    <p:spTree>
-      <p:nvGrpSpPr>
-        <p:cNvPr id="1" name=""/>
-        <p:cNvGrpSpPr/>
-        <p:nvPr/>
-      </p:nvGrpSpPr>
-      <p:grpSpPr/>
-      <p:sp>
-        <p:nvSpPr>
-          <p:cNvPr id="2" name="TextBox 1"/>
+      <p:sp>
+        <p:nvSpPr>
+          <p:cNvPr id="7" name="TextBox 6"/>
           <p:cNvSpPr txBox="1"/>
           <p:nvPr/>
         </p:nvSpPr>
         <p:spPr>
           <a:xfrm>
-            <a:off x="822960" y="566928"/>
-            <a:ext cx="10545775" cy="365760"/>
+            <a:off x="841248" y="2432304"/>
+            <a:ext cx="3163824" cy="310896"/>
           </a:xfrm>
           <a:prstGeom prst="rect">
             <a:avLst/>
@@ -5496,38 +8693,50 @@
           <a:noFill/>
         </p:spPr>
         <p:txBody>
-          <a:bodyPr wrap="square">
+          <a:bodyPr wrap="square" lIns="0" rIns="0" tIns="0" bIns="0">
             <a:spAutoFit/>
           </a:bodyPr>
           <a:lstStyle/>
           <a:p>
             <a:pPr algn="l">
-              <a:spcAft>
-                <a:spcPts val="800"/>
-              </a:spcAft>
-            </a:pPr>
-            <a:r>
-              <a:rPr sz="1100" b="0" spc="140">
-                <a:solidFill>
-                  <a:srgbClr val="59636F"/>
+              <a:lnSpc>
+                <a:spcPct val="128000"/>
+              </a:lnSpc>
+              <a:spcAft>
+                <a:spcPts val="0"/>
+              </a:spcAft>
+            </a:pPr>
+            <a:r>
+              <a:rPr sz="2000" b="1">
+                <a:solidFill>
+                  <a:srgbClr val="4A9B4A"/>
                 </a:solidFill>
                 <a:latin typeface="Consolas"/>
               </a:rPr>
-              <a:t>WHAT WE RELEASE</a:t>
-            </a:r>
-          </a:p>
-        </p:txBody>
-      </p:sp>
-      <p:sp>
-        <p:nvSpPr>
-          <p:cNvPr id="3" name="TextBox 2"/>
+              <a:t>1   </a:t>
+            </a:r>
+            <a:r>
+              <a:rPr sz="1250" b="1">
+                <a:solidFill>
+                  <a:srgbClr val="4A9B4A"/>
+                </a:solidFill>
+                <a:latin typeface="Consolas"/>
+              </a:rPr>
+              <a:t>DISSOCIATE</a:t>
+            </a:r>
+          </a:p>
+        </p:txBody>
+      </p:sp>
+      <p:sp>
+        <p:nvSpPr>
+          <p:cNvPr id="8" name="TextBox 7"/>
           <p:cNvSpPr txBox="1"/>
           <p:nvPr/>
         </p:nvSpPr>
         <p:spPr>
           <a:xfrm>
-            <a:off x="822960" y="960120"/>
-            <a:ext cx="10545775" cy="1371600"/>
+            <a:off x="841248" y="2871216"/>
+            <a:ext cx="3163824" cy="457200"/>
           </a:xfrm>
           <a:prstGeom prst="rect">
             <a:avLst/>
@@ -5535,51 +8744,132 @@
           <a:noFill/>
         </p:spPr>
         <p:txBody>
-          <a:bodyPr wrap="square">
+          <a:bodyPr wrap="square" lIns="0" rIns="0" tIns="0" bIns="0">
             <a:spAutoFit/>
           </a:bodyPr>
           <a:lstStyle/>
           <a:p>
             <a:pPr algn="l">
               <a:lnSpc>
-                <a:spcPct val="105000"/>
+                <a:spcPct val="115000"/>
               </a:lnSpc>
               <a:spcAft>
+                <a:spcPts val="0"/>
+              </a:spcAft>
+            </a:pPr>
+            <a:r>
+              <a:rPr sz="1400" b="1">
+                <a:solidFill>
+                  <a:srgbClr val="E9EEF4"/>
+                </a:solidFill>
+                <a:latin typeface="Calibri"/>
+              </a:rPr>
+              <a:t>Self-preference vs self-prediction</a:t>
+            </a:r>
+          </a:p>
+        </p:txBody>
+      </p:sp>
+      <p:sp>
+        <p:nvSpPr>
+          <p:cNvPr id="9" name="TextBox 8"/>
+          <p:cNvSpPr txBox="1"/>
+          <p:nvPr/>
+        </p:nvSpPr>
+        <p:spPr>
+          <a:xfrm>
+            <a:off x="841248" y="3401568"/>
+            <a:ext cx="3163824" cy="1463040"/>
+          </a:xfrm>
+          <a:prstGeom prst="rect">
+            <a:avLst/>
+          </a:prstGeom>
+          <a:noFill/>
+        </p:spPr>
+        <p:txBody>
+          <a:bodyPr wrap="square" lIns="0" rIns="0" tIns="0" bIns="0">
+            <a:spAutoFit/>
+          </a:bodyPr>
+          <a:lstStyle/>
+          <a:p>
+            <a:pPr algn="l">
+              <a:lnSpc>
+                <a:spcPct val="128000"/>
+              </a:lnSpc>
+              <a:spcAft>
+                <a:spcPts val="0"/>
+              </a:spcAft>
+            </a:pPr>
+            <a:r>
+              <a:rPr sz="1150" b="0">
+                <a:solidFill>
+                  <a:srgbClr val="98A3B0"/>
+                </a:solidFill>
+                <a:latin typeface="Calibri"/>
+              </a:rPr>
+              <a:t>Re-run the probe on the same pairs under two questions — “which would you produce?” against “which is better?”. A residual as large under the quality question reads as self-preference; one specific to the prediction framing is the discriminating outcome. Needs a behavioural manipulation check run before collection.</a:t>
+            </a:r>
+          </a:p>
+        </p:txBody>
+      </p:sp>
+      <p:sp>
+        <p:nvSpPr>
+          <p:cNvPr id="10" name="TextBox 9"/>
+          <p:cNvSpPr txBox="1"/>
+          <p:nvPr/>
+        </p:nvSpPr>
+        <p:spPr>
+          <a:xfrm>
+            <a:off x="4206240" y="3429000"/>
+            <a:ext cx="182880" cy="365760"/>
+          </a:xfrm>
+          <a:prstGeom prst="rect">
+            <a:avLst/>
+          </a:prstGeom>
+          <a:noFill/>
+        </p:spPr>
+        <p:txBody>
+          <a:bodyPr wrap="square" lIns="0" rIns="0" tIns="0" bIns="0">
+            <a:spAutoFit/>
+          </a:bodyPr>
+          <a:lstStyle/>
+          <a:p>
+            <a:pPr algn="ctr">
+              <a:spcAft>
                 <a:spcPts val="800"/>
               </a:spcAft>
             </a:pPr>
             <a:r>
-              <a:rPr sz="4000" b="1">
-                <a:solidFill>
-                  <a:srgbClr val="12171F"/>
-                </a:solidFill>
-                <a:latin typeface="Georgia"/>
-              </a:rPr>
-              <a:t>Two checks that cost nothing and changed everything</a:t>
-            </a:r>
-          </a:p>
-        </p:txBody>
-      </p:sp>
-      <p:sp>
-        <p:nvSpPr>
-          <p:cNvPr id="4" name="Rectangle 3"/>
+              <a:rPr sz="1700" b="0">
+                <a:solidFill>
+                  <a:srgbClr val="6B7683"/>
+                </a:solidFill>
+                <a:latin typeface="Calibri"/>
+              </a:rPr>
+              <a:t>→</a:t>
+            </a:r>
+          </a:p>
+        </p:txBody>
+      </p:sp>
+      <p:sp>
+        <p:nvSpPr>
+          <p:cNvPr id="11" name="Rectangle 10"/>
           <p:cNvSpPr/>
           <p:nvPr/>
         </p:nvSpPr>
         <p:spPr>
           <a:xfrm>
-            <a:off x="822960" y="2194560"/>
-            <a:ext cx="4846320" cy="2286000"/>
+            <a:off x="4389120" y="2212848"/>
+            <a:ext cx="3529584" cy="2788920"/>
           </a:xfrm>
           <a:prstGeom prst="rect">
             <a:avLst/>
           </a:prstGeom>
           <a:solidFill>
-            <a:srgbClr val="FFFFFF"/>
+            <a:srgbClr val="161B22"/>
           </a:solidFill>
-          <a:ln w="9525">
+          <a:ln w="12700">
             <a:solidFill>
-              <a:srgbClr val="DCE2E8"/>
+              <a:srgbClr val="2A323C"/>
             </a:solidFill>
           </a:ln>
           <a:effectLst/>
@@ -5599,82 +8889,32 @@
           </a:fontRef>
         </p:style>
         <p:txBody>
-          <a:bodyPr rtlCol="0" anchor="ctr" wrap="square" lIns="256032" rIns="256032" tIns="219456"/>
-          <a:lstStyle/>
-          <a:p>
-            <a:pPr algn="l">
-              <a:spcAft>
-                <a:spcPts val="500"/>
-              </a:spcAft>
-            </a:pPr>
-            <a:r>
-              <a:rPr sz="1700" b="1">
-                <a:solidFill>
-                  <a:srgbClr val="12171F"/>
-                </a:solidFill>
-                <a:latin typeface="Segoe UI"/>
-              </a:rPr>
-              <a:t>Surface-leakage gate</a:t>
-            </a:r>
-          </a:p>
-          <a:p>
-            <a:pPr algn="l">
-              <a:spcAft>
-                <a:spcPts val="900"/>
-              </a:spcAft>
-            </a:pPr>
-            <a:r>
-              <a:rPr sz="1200" b="0">
-                <a:solidFill>
-                  <a:srgbClr val="0F6E8C"/>
-                </a:solidFill>
-                <a:latin typeface="Consolas"/>
-              </a:rPr>
-              <a:t>gate(texts, labels, groups)</a:t>
-            </a:r>
-          </a:p>
-          <a:p>
-            <a:pPr algn="l">
-              <a:lnSpc>
-                <a:spcPct val="130000"/>
-              </a:lnSpc>
-              <a:spcAft>
-                <a:spcPts val="800"/>
-              </a:spcAft>
-            </a:pPr>
-            <a:r>
-              <a:rPr sz="1300" b="0">
-                <a:solidFill>
-                  <a:srgbClr val="59636F"/>
-                </a:solidFill>
-                <a:latin typeface="Segoe UI"/>
-              </a:rPr>
-              <a:t>Can a trivial style classifier already solve your hidden property? If yes, an above-chance result does not distinguish self-knowledge from style-reading. Cross-validation is grouped by source prompt by default.</a:t>
-            </a:r>
-          </a:p>
-        </p:txBody>
-      </p:sp>
-      <p:sp>
-        <p:nvSpPr>
-          <p:cNvPr id="5" name="Rectangle 4"/>
+          <a:bodyPr rtlCol="0" anchor="ctr"/>
+          <a:lstStyle/>
+          <a:p>
+            <a:pPr algn="ctr"/>
+          </a:p>
+        </p:txBody>
+      </p:sp>
+      <p:sp>
+        <p:nvSpPr>
+          <p:cNvPr id="12" name="Rectangle 11"/>
           <p:cNvSpPr/>
           <p:nvPr/>
         </p:nvSpPr>
         <p:spPr>
           <a:xfrm>
-            <a:off x="6080760" y="2194560"/>
-            <a:ext cx="4846320" cy="2286000"/>
+            <a:off x="4389120" y="2212848"/>
+            <a:ext cx="3529584" cy="54864"/>
           </a:xfrm>
           <a:prstGeom prst="rect">
             <a:avLst/>
           </a:prstGeom>
           <a:solidFill>
-            <a:srgbClr val="FFFFFF"/>
+            <a:srgbClr val="4A90D9"/>
           </a:solidFill>
-          <a:ln w="9525">
-            <a:solidFill>
-              <a:srgbClr val="DCE2E8"/>
-            </a:solidFill>
+          <a:ln>
+            <a:noFill/>
           </a:ln>
           <a:effectLst/>
         </p:spPr>
@@ -5693,71 +8933,74 @@
           </a:fontRef>
         </p:style>
         <p:txBody>
-          <a:bodyPr rtlCol="0" anchor="ctr" wrap="square" lIns="256032" rIns="256032" tIns="219456"/>
-          <a:lstStyle/>
-          <a:p>
-            <a:pPr algn="l">
-              <a:spcAft>
-                <a:spcPts val="500"/>
-              </a:spcAft>
-            </a:pPr>
-            <a:r>
-              <a:rPr sz="1700" b="1">
-                <a:solidFill>
-                  <a:srgbClr val="12171F"/>
-                </a:solidFill>
-                <a:latin typeface="Segoe UI"/>
-              </a:rPr>
-              <a:t>Response-bias check</a:t>
-            </a:r>
-          </a:p>
-          <a:p>
-            <a:pPr algn="l">
-              <a:spcAft>
-                <a:spcPts val="900"/>
-              </a:spcAft>
-            </a:pPr>
-            <a:r>
-              <a:rPr sz="1200" b="0">
-                <a:solidFill>
-                  <a:srgbClr val="0F6E8C"/>
-                </a:solidFill>
-                <a:latin typeface="Consolas"/>
-              </a:rPr>
-              <a:t>response_bias(answers)</a:t>
-            </a:r>
-          </a:p>
+          <a:bodyPr rtlCol="0" anchor="ctr"/>
+          <a:lstStyle/>
+          <a:p>
+            <a:pPr algn="ctr"/>
+          </a:p>
+        </p:txBody>
+      </p:sp>
+      <p:sp>
+        <p:nvSpPr>
+          <p:cNvPr id="13" name="TextBox 12"/>
+          <p:cNvSpPr txBox="1"/>
+          <p:nvPr/>
+        </p:nvSpPr>
+        <p:spPr>
+          <a:xfrm>
+            <a:off x="4572000" y="2432304"/>
+            <a:ext cx="3163824" cy="310896"/>
+          </a:xfrm>
+          <a:prstGeom prst="rect">
+            <a:avLst/>
+          </a:prstGeom>
+          <a:noFill/>
+        </p:spPr>
+        <p:txBody>
+          <a:bodyPr wrap="square" lIns="0" rIns="0" tIns="0" bIns="0">
+            <a:spAutoFit/>
+          </a:bodyPr>
+          <a:lstStyle/>
           <a:p>
             <a:pPr algn="l">
               <a:lnSpc>
-                <a:spcPct val="130000"/>
+                <a:spcPct val="128000"/>
               </a:lnSpc>
               <a:spcAft>
-                <a:spcPts val="800"/>
-              </a:spcAft>
-            </a:pPr>
-            <a:r>
-              <a:rPr sz="1300" b="0">
-                <a:solidFill>
-                  <a:srgbClr val="59636F"/>
-                </a:solidFill>
-                <a:latin typeface="Segoe UI"/>
-              </a:rPr>
-              <a:t>Is the model answering the question, or answering by position? It caught two of our own results that would otherwise have published as clean nulls.</a:t>
-            </a:r>
-          </a:p>
-        </p:txBody>
-      </p:sp>
-      <p:sp>
-        <p:nvSpPr>
-          <p:cNvPr id="6" name="TextBox 5"/>
+                <a:spcPts val="0"/>
+              </a:spcAft>
+            </a:pPr>
+            <a:r>
+              <a:rPr sz="2000" b="1">
+                <a:solidFill>
+                  <a:srgbClr val="4A90D9"/>
+                </a:solidFill>
+                <a:latin typeface="Consolas"/>
+              </a:rPr>
+              <a:t>2   </a:t>
+            </a:r>
+            <a:r>
+              <a:rPr sz="1250" b="1">
+                <a:solidFill>
+                  <a:srgbClr val="4A90D9"/>
+                </a:solidFill>
+                <a:latin typeface="Consolas"/>
+              </a:rPr>
+              <a:t>AUDIT</a:t>
+            </a:r>
+          </a:p>
+        </p:txBody>
+      </p:sp>
+      <p:sp>
+        <p:nvSpPr>
+          <p:cNvPr id="14" name="TextBox 13"/>
           <p:cNvSpPr txBox="1"/>
           <p:nvPr/>
         </p:nvSpPr>
         <p:spPr>
           <a:xfrm>
-            <a:off x="822960" y="4800600"/>
-            <a:ext cx="8778240" cy="1051560"/>
+            <a:off x="4572000" y="2871216"/>
+            <a:ext cx="3163824" cy="457200"/>
           </a:xfrm>
           <a:prstGeom prst="rect">
             <a:avLst/>
@@ -5765,41 +9008,41 @@
           <a:noFill/>
         </p:spPr>
         <p:txBody>
-          <a:bodyPr wrap="square">
+          <a:bodyPr wrap="square" lIns="0" rIns="0" tIns="0" bIns="0">
             <a:spAutoFit/>
           </a:bodyPr>
           <a:lstStyle/>
           <a:p>
             <a:pPr algn="l">
               <a:lnSpc>
-                <a:spcPct val="130000"/>
+                <a:spcPct val="115000"/>
               </a:lnSpc>
               <a:spcAft>
-                <a:spcPts val="1200"/>
+                <a:spcPts val="0"/>
               </a:spcAft>
             </a:pPr>
             <a:r>
               <a:rPr sz="1400" b="1">
                 <a:solidFill>
-                  <a:srgbClr val="0F6E8C"/>
-                </a:solidFill>
-                <a:latin typeface="Segoe UI"/>
-              </a:rPr>
-              <a:t>One self-contained file, numpy only  ·  tools/surface_leakage_gate.py</a:t>
-            </a:r>
-          </a:p>
-        </p:txBody>
-      </p:sp>
-      <p:sp>
-        <p:nvSpPr>
-          <p:cNvPr id="7" name="TextBox 6"/>
+                  <a:srgbClr val="E9EEF4"/>
+                </a:solidFill>
+                <a:latin typeface="Calibri"/>
+              </a:rPr>
+              <a:t>Apply the controls to existing claims</a:t>
+            </a:r>
+          </a:p>
+        </p:txBody>
+      </p:sp>
+      <p:sp>
+        <p:nvSpPr>
+          <p:cNvPr id="15" name="TextBox 14"/>
           <p:cNvSpPr txBox="1"/>
           <p:nvPr/>
         </p:nvSpPr>
         <p:spPr>
           <a:xfrm>
-            <a:off x="822960" y="6172200"/>
-            <a:ext cx="1828800" cy="320040"/>
+            <a:off x="4572000" y="3401568"/>
+            <a:ext cx="3163824" cy="1463040"/>
           </a:xfrm>
           <a:prstGeom prst="rect">
             <a:avLst/>
@@ -5807,44 +9050,132 @@
           <a:noFill/>
         </p:spPr>
         <p:txBody>
-          <a:bodyPr wrap="square">
+          <a:bodyPr wrap="square" lIns="0" rIns="0" tIns="0" bIns="0">
             <a:spAutoFit/>
           </a:bodyPr>
           <a:lstStyle/>
           <a:p>
             <a:pPr algn="l">
+              <a:lnSpc>
+                <a:spcPct val="128000"/>
+              </a:lnSpc>
+              <a:spcAft>
+                <a:spcPts val="0"/>
+              </a:spcAft>
+            </a:pPr>
+            <a:r>
+              <a:rPr sz="1150" b="0">
+                <a:solidFill>
+                  <a:srgbClr val="98A3B0"/>
+                </a:solidFill>
+                <a:latin typeface="Calibri"/>
+              </a:rPr>
+              <a:t>Take the leakage gate and the response-bias check to published behavioural introspection results, and ask how many survive controls this cheap. No new model runs; it tests whether the framework generalises beyond our stimuli.</a:t>
+            </a:r>
+          </a:p>
+        </p:txBody>
+      </p:sp>
+      <p:sp>
+        <p:nvSpPr>
+          <p:cNvPr id="16" name="TextBox 15"/>
+          <p:cNvSpPr txBox="1"/>
+          <p:nvPr/>
+        </p:nvSpPr>
+        <p:spPr>
+          <a:xfrm>
+            <a:off x="7936992" y="3429000"/>
+            <a:ext cx="182880" cy="365760"/>
+          </a:xfrm>
+          <a:prstGeom prst="rect">
+            <a:avLst/>
+          </a:prstGeom>
+          <a:noFill/>
+        </p:spPr>
+        <p:txBody>
+          <a:bodyPr wrap="square" lIns="0" rIns="0" tIns="0" bIns="0">
+            <a:spAutoFit/>
+          </a:bodyPr>
+          <a:lstStyle/>
+          <a:p>
+            <a:pPr algn="ctr">
               <a:spcAft>
                 <a:spcPts val="800"/>
               </a:spcAft>
             </a:pPr>
             <a:r>
-              <a:rPr sz="1100" b="0" spc="80">
-                <a:solidFill>
-                  <a:srgbClr val="0F6E8C"/>
-                </a:solidFill>
-                <a:latin typeface="Consolas"/>
-              </a:rPr>
-              <a:t>07</a:t>
-            </a:r>
-          </a:p>
-        </p:txBody>
-      </p:sp>
-      <p:sp>
-        <p:nvSpPr>
-          <p:cNvPr id="8" name="Rectangle 7"/>
+              <a:rPr sz="1700" b="0">
+                <a:solidFill>
+                  <a:srgbClr val="6B7683"/>
+                </a:solidFill>
+                <a:latin typeface="Calibri"/>
+              </a:rPr>
+              <a:t>→</a:t>
+            </a:r>
+          </a:p>
+        </p:txBody>
+      </p:sp>
+      <p:sp>
+        <p:nvSpPr>
+          <p:cNvPr id="17" name="Rectangle 16"/>
           <p:cNvSpPr/>
           <p:nvPr/>
         </p:nvSpPr>
         <p:spPr>
           <a:xfrm>
-            <a:off x="822960" y="5989320"/>
-            <a:ext cx="10545775" cy="9525"/>
+            <a:off x="8119872" y="2212848"/>
+            <a:ext cx="3529584" cy="2788920"/>
           </a:xfrm>
           <a:prstGeom prst="rect">
             <a:avLst/>
           </a:prstGeom>
           <a:solidFill>
-            <a:srgbClr val="DCE2E8"/>
+            <a:srgbClr val="161B22"/>
+          </a:solidFill>
+          <a:ln w="12700">
+            <a:solidFill>
+              <a:srgbClr val="2A323C"/>
+            </a:solidFill>
+          </a:ln>
+          <a:effectLst/>
+        </p:spPr>
+        <p:style>
+          <a:lnRef idx="1">
+            <a:schemeClr val="accent1"/>
+          </a:lnRef>
+          <a:fillRef idx="3">
+            <a:schemeClr val="accent1"/>
+          </a:fillRef>
+          <a:effectRef idx="2">
+            <a:schemeClr val="accent1"/>
+          </a:effectRef>
+          <a:fontRef idx="minor">
+            <a:schemeClr val="lt1"/>
+          </a:fontRef>
+        </p:style>
+        <p:txBody>
+          <a:bodyPr rtlCol="0" anchor="ctr"/>
+          <a:lstStyle/>
+          <a:p>
+            <a:pPr algn="ctr"/>
+          </a:p>
+        </p:txBody>
+      </p:sp>
+      <p:sp>
+        <p:nvSpPr>
+          <p:cNvPr id="18" name="Rectangle 17"/>
+          <p:cNvSpPr/>
+          <p:nvPr/>
+        </p:nvSpPr>
+        <p:spPr>
+          <a:xfrm>
+            <a:off x="8119872" y="2212848"/>
+            <a:ext cx="3529584" cy="54864"/>
+          </a:xfrm>
+          <a:prstGeom prst="rect">
+            <a:avLst/>
+          </a:prstGeom>
+          <a:solidFill>
+            <a:srgbClr val="F0C040"/>
           </a:solidFill>
           <a:ln>
             <a:noFill/>
@@ -5873,42 +9204,16 @@
           </a:p>
         </p:txBody>
       </p:sp>
-    </p:spTree>
-  </p:cSld>
-  <p:clrMapOvr>
-    <a:masterClrMapping/>
-  </p:clrMapOvr>
-</p:sld>
-</file>
-
-<file path=ppt/slides/slide8.xml><?xml version="1.0" encoding="utf-8"?>
-<p:sld xmlns:a="http://schemas.openxmlformats.org/drawingml/2006/main" xmlns:p="http://schemas.openxmlformats.org/presentationml/2006/main" xmlns:r="http://schemas.openxmlformats.org/officeDocument/2006/relationships">
-  <p:cSld>
-    <p:bg>
-      <p:bgPr>
-        <a:solidFill>
-          <a:srgbClr val="F6F8FA"/>
-        </a:solidFill>
-        <a:effectLst/>
-      </p:bgPr>
-    </p:bg>
-    <p:spTree>
-      <p:nvGrpSpPr>
-        <p:cNvPr id="1" name=""/>
-        <p:cNvGrpSpPr/>
-        <p:nvPr/>
-      </p:nvGrpSpPr>
-      <p:grpSpPr/>
-      <p:sp>
-        <p:nvSpPr>
-          <p:cNvPr id="2" name="TextBox 1"/>
+      <p:sp>
+        <p:nvSpPr>
+          <p:cNvPr id="19" name="TextBox 18"/>
           <p:cNvSpPr txBox="1"/>
           <p:nvPr/>
         </p:nvSpPr>
         <p:spPr>
           <a:xfrm>
-            <a:off x="822960" y="566928"/>
-            <a:ext cx="10545775" cy="365760"/>
+            <a:off x="8302752" y="2432304"/>
+            <a:ext cx="3163824" cy="310896"/>
           </a:xfrm>
           <a:prstGeom prst="rect">
             <a:avLst/>
@@ -5916,38 +9221,50 @@
           <a:noFill/>
         </p:spPr>
         <p:txBody>
-          <a:bodyPr wrap="square">
+          <a:bodyPr wrap="square" lIns="0" rIns="0" tIns="0" bIns="0">
             <a:spAutoFit/>
           </a:bodyPr>
           <a:lstStyle/>
           <a:p>
             <a:pPr algn="l">
-              <a:spcAft>
-                <a:spcPts val="800"/>
-              </a:spcAft>
-            </a:pPr>
-            <a:r>
-              <a:rPr sz="1100" b="0" spc="140">
-                <a:solidFill>
-                  <a:srgbClr val="59636F"/>
+              <a:lnSpc>
+                <a:spcPct val="128000"/>
+              </a:lnSpc>
+              <a:spcAft>
+                <a:spcPts val="0"/>
+              </a:spcAft>
+            </a:pPr>
+            <a:r>
+              <a:rPr sz="2000" b="1">
+                <a:solidFill>
+                  <a:srgbClr val="F0C040"/>
                 </a:solidFill>
                 <a:latin typeface="Consolas"/>
               </a:rPr>
-              <a:t>WHAT WE DO NOT CLAIM</a:t>
-            </a:r>
-          </a:p>
-        </p:txBody>
-      </p:sp>
-      <p:sp>
-        <p:nvSpPr>
-          <p:cNvPr id="3" name="TextBox 2"/>
+              <a:t>3   </a:t>
+            </a:r>
+            <a:r>
+              <a:rPr sz="1250" b="1">
+                <a:solidFill>
+                  <a:srgbClr val="F0C040"/>
+                </a:solidFill>
+                <a:latin typeface="Consolas"/>
+              </a:rPr>
+              <a:t>TEST</a:t>
+            </a:r>
+          </a:p>
+        </p:txBody>
+      </p:sp>
+      <p:sp>
+        <p:nvSpPr>
+          <p:cNvPr id="20" name="TextBox 19"/>
           <p:cNvSpPr txBox="1"/>
           <p:nvPr/>
         </p:nvSpPr>
         <p:spPr>
           <a:xfrm>
-            <a:off x="822960" y="960120"/>
-            <a:ext cx="10545775" cy="1371600"/>
+            <a:off x="8302752" y="2871216"/>
+            <a:ext cx="3163824" cy="457200"/>
           </a:xfrm>
           <a:prstGeom prst="rect">
             <a:avLst/>
@@ -5955,41 +9272,41 @@
           <a:noFill/>
         </p:spPr>
         <p:txBody>
-          <a:bodyPr wrap="square">
+          <a:bodyPr wrap="square" lIns="0" rIns="0" tIns="0" bIns="0">
             <a:spAutoFit/>
           </a:bodyPr>
           <a:lstStyle/>
           <a:p>
             <a:pPr algn="l">
               <a:lnSpc>
-                <a:spcPct val="105000"/>
+                <a:spcPct val="115000"/>
               </a:lnSpc>
               <a:spcAft>
-                <a:spcPts val="800"/>
-              </a:spcAft>
-            </a:pPr>
-            <a:r>
-              <a:rPr sz="4000" b="1">
-                <a:solidFill>
-                  <a:srgbClr val="12171F"/>
-                </a:solidFill>
-                <a:latin typeface="Georgia"/>
-              </a:rPr>
-              <a:t>The honest boundaries</a:t>
-            </a:r>
-          </a:p>
-        </p:txBody>
-      </p:sp>
-      <p:sp>
-        <p:nvSpPr>
-          <p:cNvPr id="4" name="TextBox 3"/>
+                <a:spcPts val="0"/>
+              </a:spcAft>
+            </a:pPr>
+            <a:r>
+              <a:rPr sz="1400" b="1">
+                <a:solidFill>
+                  <a:srgbClr val="E9EEF4"/>
+                </a:solidFill>
+                <a:latin typeface="Calibri"/>
+              </a:rPr>
+              <a:t>Stronger causal ground truth — conditional</a:t>
+            </a:r>
+          </a:p>
+        </p:txBody>
+      </p:sp>
+      <p:sp>
+        <p:nvSpPr>
+          <p:cNvPr id="21" name="TextBox 20"/>
           <p:cNvSpPr txBox="1"/>
           <p:nvPr/>
         </p:nvSpPr>
         <p:spPr>
           <a:xfrm>
-            <a:off x="822960" y="2240280"/>
-            <a:ext cx="9326880" cy="3611880"/>
+            <a:off x="8302752" y="3401568"/>
+            <a:ext cx="3163824" cy="1463040"/>
           </a:xfrm>
           <a:prstGeom prst="rect">
             <a:avLst/>
@@ -5997,162 +9314,41 @@
           <a:noFill/>
         </p:spPr>
         <p:txBody>
-          <a:bodyPr wrap="square">
+          <a:bodyPr wrap="square" lIns="0" rIns="0" tIns="0" bIns="0">
             <a:spAutoFit/>
           </a:bodyPr>
           <a:lstStyle/>
           <a:p>
-            <a:pPr>
+            <a:pPr algn="l">
               <a:lnSpc>
-                <a:spcPct val="130000"/>
+                <a:spcPct val="128000"/>
               </a:lnSpc>
               <a:spcAft>
-                <a:spcPts val="1300"/>
-              </a:spcAft>
-            </a:pPr>
-            <a:r>
-              <a:rPr sz="1400">
-                <a:solidFill>
-                  <a:srgbClr val="0F6E8C"/>
-                </a:solidFill>
-                <a:latin typeface="Segoe UI"/>
-              </a:rPr>
-              <a:t>— </a:t>
-            </a:r>
-            <a:r>
-              <a:rPr sz="1400">
-                <a:solidFill>
-                  <a:srgbClr val="12171F"/>
-                </a:solidFill>
-                <a:latin typeface="Segoe UI"/>
-              </a:rPr>
-              <a:t>Not a refutation of Binder et al. — they finetune on ~30k examples; we prompt.</a:t>
-            </a:r>
-          </a:p>
-          <a:p>
-            <a:pPr>
-              <a:lnSpc>
-                <a:spcPct val="130000"/>
-              </a:lnSpc>
-              <a:spcAft>
-                <a:spcPts val="1300"/>
-              </a:spcAft>
-            </a:pPr>
-            <a:r>
-              <a:rPr sz="1400">
-                <a:solidFill>
-                  <a:srgbClr val="0F6E8C"/>
-                </a:solidFill>
-                <a:latin typeface="Segoe UI"/>
-              </a:rPr>
-              <a:t>— </a:t>
-            </a:r>
-            <a:r>
-              <a:rPr sz="1400">
-                <a:solidFill>
-                  <a:srgbClr val="12171F"/>
-                </a:solidFill>
-                <a:latin typeface="Segoe UI"/>
-              </a:rPr>
-              <a:t>Nothing about consciousness, welfare or moral status. Prediction happens in a fresh session, so nothing here bears even on same-episode memory.</a:t>
-            </a:r>
-          </a:p>
-          <a:p>
-            <a:pPr>
-              <a:lnSpc>
-                <a:spcPct val="130000"/>
-              </a:lnSpc>
-              <a:spcAft>
-                <a:spcPts val="1300"/>
-              </a:spcAft>
-            </a:pPr>
-            <a:r>
-              <a:rPr sz="1400">
-                <a:solidFill>
-                  <a:srgbClr val="0F6E8C"/>
-                </a:solidFill>
-                <a:latin typeface="Segoe UI"/>
-              </a:rPr>
-              <a:t>— </a:t>
-            </a:r>
-            <a:r>
-              <a:rPr sz="1400">
-                <a:solidFill>
-                  <a:srgbClr val="12171F"/>
-                </a:solidFill>
-                <a:latin typeface="Segoe UI"/>
-              </a:rPr>
-              <a:t>One lineage, one values dimension, one provider at one quantization.</a:t>
-            </a:r>
-          </a:p>
-          <a:p>
-            <a:pPr>
-              <a:lnSpc>
-                <a:spcPct val="130000"/>
-              </a:lnSpc>
-              <a:spcAft>
-                <a:spcPts val="1300"/>
-              </a:spcAft>
-            </a:pPr>
-            <a:r>
-              <a:rPr sz="1400">
-                <a:solidFill>
-                  <a:srgbClr val="0F6E8C"/>
-                </a:solidFill>
-                <a:latin typeface="Segoe UI"/>
-              </a:rPr>
-              <a:t>— </a:t>
-            </a:r>
-            <a:r>
-              <a:rPr sz="1400">
-                <a:solidFill>
-                  <a:srgbClr val="B03A26"/>
-                </a:solidFill>
-                <a:latin typeface="Segoe UI"/>
-              </a:rPr>
-              <a:t>Two of our three self-recognition framings produced degenerate answers. We report them as elicitation failures, not as nulls.</a:t>
-            </a:r>
-          </a:p>
-          <a:p>
-            <a:pPr>
-              <a:lnSpc>
-                <a:spcPct val="130000"/>
-              </a:lnSpc>
-              <a:spcAft>
-                <a:spcPts val="1300"/>
-              </a:spcAft>
-            </a:pPr>
-            <a:r>
-              <a:rPr sz="1400">
-                <a:solidFill>
-                  <a:srgbClr val="0F6E8C"/>
-                </a:solidFill>
-                <a:latin typeface="Segoe UI"/>
-              </a:rPr>
-              <a:t>— </a:t>
-            </a:r>
-            <a:r>
-              <a:rPr sz="1400">
-                <a:solidFill>
-                  <a:srgbClr val="12171F"/>
-                </a:solidFill>
-                <a:latin typeface="Segoe UI"/>
-              </a:rPr>
-              <a:t>The style-equalised condition leaves everyone near chance — there, “no self-advantage” is partly “no signal for anyone.”</a:t>
-            </a:r>
-          </a:p>
-        </p:txBody>
-      </p:sp>
-      <p:sp>
-        <p:nvSpPr>
-          <p:cNvPr id="5" name="TextBox 4"/>
+                <a:spcPts val="0"/>
+              </a:spcAft>
+            </a:pPr>
+            <a:r>
+              <a:rPr sz="1150" b="0">
+                <a:solidFill>
+                  <a:srgbClr val="98A3B0"/>
+                </a:solidFill>
+                <a:latin typeface="Calibri"/>
+              </a:rPr>
+              <a:t>Only if a residual survives Stage 1 and audited effects do not dissolve: a training-relationship ladder against our one-lineage limit, activation steering or an independently planted property so ground truth is verified rather than assumed, and an incremental-validity test against an observer's features.</a:t>
+            </a:r>
+          </a:p>
+        </p:txBody>
+      </p:sp>
+      <p:sp>
+        <p:nvSpPr>
+          <p:cNvPr id="22" name="TextBox 21"/>
           <p:cNvSpPr txBox="1"/>
           <p:nvPr/>
         </p:nvSpPr>
         <p:spPr>
           <a:xfrm>
-            <a:off x="822960" y="6172200"/>
-            <a:ext cx="1828800" cy="320040"/>
+            <a:off x="658368" y="5193792"/>
+            <a:ext cx="10881360" cy="457200"/>
           </a:xfrm>
           <a:prstGeom prst="rect">
             <a:avLst/>
@@ -6160,44 +9356,132 @@
           <a:noFill/>
         </p:spPr>
         <p:txBody>
-          <a:bodyPr wrap="square">
+          <a:bodyPr wrap="square" lIns="0" rIns="0" tIns="0" bIns="0">
             <a:spAutoFit/>
           </a:bodyPr>
           <a:lstStyle/>
           <a:p>
             <a:pPr algn="l">
+              <a:lnSpc>
+                <a:spcPct val="124000"/>
+              </a:lnSpc>
               <a:spcAft>
                 <a:spcPts val="800"/>
               </a:spcAft>
             </a:pPr>
             <a:r>
-              <a:rPr sz="1100" b="0" spc="80">
-                <a:solidFill>
-                  <a:srgbClr val="0F6E8C"/>
-                </a:solidFill>
-                <a:latin typeface="Consolas"/>
-              </a:rPr>
-              <a:t>08</a:t>
-            </a:r>
-          </a:p>
-        </p:txBody>
-      </p:sp>
-      <p:sp>
-        <p:nvSpPr>
-          <p:cNvPr id="6" name="Rectangle 5"/>
+              <a:rPr sz="1250" b="0">
+                <a:solidFill>
+                  <a:srgbClr val="6B7683"/>
+                </a:solidFill>
+                <a:latin typeface="Calibri"/>
+              </a:rPr>
+              <a:t>If Stage 1 dissolves the residual, that is the result and Stage 3 does not run. The bottleneck is breadth and experimental design, not implementation.</a:t>
+            </a:r>
+          </a:p>
+        </p:txBody>
+      </p:sp>
+      <p:sp>
+        <p:nvSpPr>
+          <p:cNvPr id="23" name="Rectangle 22"/>
           <p:cNvSpPr/>
           <p:nvPr/>
         </p:nvSpPr>
         <p:spPr>
           <a:xfrm>
-            <a:off x="822960" y="5989320"/>
-            <a:ext cx="10545775" cy="9525"/>
+            <a:off x="658368" y="5596128"/>
+            <a:ext cx="10874959" cy="530352"/>
           </a:xfrm>
           <a:prstGeom prst="rect">
             <a:avLst/>
           </a:prstGeom>
           <a:solidFill>
-            <a:srgbClr val="DCE2E8"/>
+            <a:srgbClr val="1A1F2E"/>
+          </a:solidFill>
+          <a:ln w="12700">
+            <a:solidFill>
+              <a:srgbClr val="F0C040"/>
+            </a:solidFill>
+          </a:ln>
+          <a:effectLst/>
+        </p:spPr>
+        <p:style>
+          <a:lnRef idx="1">
+            <a:schemeClr val="accent1"/>
+          </a:lnRef>
+          <a:fillRef idx="3">
+            <a:schemeClr val="accent1"/>
+          </a:fillRef>
+          <a:effectRef idx="2">
+            <a:schemeClr val="accent1"/>
+          </a:effectRef>
+          <a:fontRef idx="minor">
+            <a:schemeClr val="lt1"/>
+          </a:fontRef>
+        </p:style>
+        <p:txBody>
+          <a:bodyPr rtlCol="0" anchor="ctr"/>
+          <a:lstStyle/>
+          <a:p>
+            <a:pPr algn="ctr"/>
+          </a:p>
+        </p:txBody>
+      </p:sp>
+      <p:sp>
+        <p:nvSpPr>
+          <p:cNvPr id="24" name="TextBox 23"/>
+          <p:cNvSpPr txBox="1"/>
+          <p:nvPr/>
+        </p:nvSpPr>
+        <p:spPr>
+          <a:xfrm>
+            <a:off x="877824" y="5724144"/>
+            <a:ext cx="10436047" cy="310896"/>
+          </a:xfrm>
+          <a:prstGeom prst="rect">
+            <a:avLst/>
+          </a:prstGeom>
+          <a:noFill/>
+        </p:spPr>
+        <p:txBody>
+          <a:bodyPr wrap="square" lIns="0" rIns="0" tIns="0" bIns="0">
+            <a:spAutoFit/>
+          </a:bodyPr>
+          <a:lstStyle/>
+          <a:p>
+            <a:pPr algn="l">
+              <a:spcAft>
+                <a:spcPts val="0"/>
+              </a:spcAft>
+            </a:pPr>
+            <a:r>
+              <a:rPr sz="1650" b="1">
+                <a:solidFill>
+                  <a:srgbClr val="F0C040"/>
+                </a:solidFill>
+                <a:latin typeface="Calibri"/>
+              </a:rPr>
+              <a:t>Can behavioural self-prediction ever provide evidence unavailable to an external observer?</a:t>
+            </a:r>
+          </a:p>
+        </p:txBody>
+      </p:sp>
+      <p:sp>
+        <p:nvSpPr>
+          <p:cNvPr id="25" name="Rectangle 24"/>
+          <p:cNvSpPr/>
+          <p:nvPr/>
+        </p:nvSpPr>
+        <p:spPr>
+          <a:xfrm>
+            <a:off x="658368" y="6291072"/>
+            <a:ext cx="10874959" cy="9525"/>
+          </a:xfrm>
+          <a:prstGeom prst="rect">
+            <a:avLst/>
+          </a:prstGeom>
+          <a:solidFill>
+            <a:srgbClr val="2A323C"/>
           </a:solidFill>
           <a:ln>
             <a:noFill/>
@@ -6226,42 +9510,16 @@
           </a:p>
         </p:txBody>
       </p:sp>
-    </p:spTree>
-  </p:cSld>
-  <p:clrMapOvr>
-    <a:masterClrMapping/>
-  </p:clrMapOvr>
-</p:sld>
-</file>
-
-<file path=ppt/slides/slide9.xml><?xml version="1.0" encoding="utf-8"?>
-<p:sld xmlns:a="http://schemas.openxmlformats.org/drawingml/2006/main" xmlns:p="http://schemas.openxmlformats.org/presentationml/2006/main" xmlns:r="http://schemas.openxmlformats.org/officeDocument/2006/relationships">
-  <p:cSld>
-    <p:bg>
-      <p:bgPr>
-        <a:solidFill>
-          <a:srgbClr val="F6F8FA"/>
-        </a:solidFill>
-        <a:effectLst/>
-      </p:bgPr>
-    </p:bg>
-    <p:spTree>
-      <p:nvGrpSpPr>
-        <p:cNvPr id="1" name=""/>
-        <p:cNvGrpSpPr/>
-        <p:nvPr/>
-      </p:nvGrpSpPr>
-      <p:grpSpPr/>
-      <p:sp>
-        <p:nvSpPr>
-          <p:cNvPr id="2" name="TextBox 1"/>
+      <p:sp>
+        <p:nvSpPr>
+          <p:cNvPr id="26" name="TextBox 25"/>
           <p:cNvSpPr txBox="1"/>
           <p:nvPr/>
         </p:nvSpPr>
         <p:spPr>
           <a:xfrm>
-            <a:off x="822960" y="566928"/>
-            <a:ext cx="10545775" cy="365760"/>
+            <a:off x="658368" y="6400800"/>
+            <a:ext cx="10874959" cy="274320"/>
           </a:xfrm>
           <a:prstGeom prst="rect">
             <a:avLst/>
@@ -6269,577 +9527,37 @@
           <a:noFill/>
         </p:spPr>
         <p:txBody>
-          <a:bodyPr wrap="square">
+          <a:bodyPr wrap="square" lIns="0" rIns="0" tIns="0" bIns="0">
             <a:spAutoFit/>
           </a:bodyPr>
           <a:lstStyle/>
           <a:p>
             <a:pPr algn="l">
-              <a:spcAft>
-                <a:spcPts val="800"/>
-              </a:spcAft>
-            </a:pPr>
-            <a:r>
-              <a:rPr sz="1100" b="0" spc="140">
-                <a:solidFill>
-                  <a:srgbClr val="59636F"/>
+              <a:lnSpc>
+                <a:spcPct val="128000"/>
+              </a:lnSpc>
+              <a:spcAft>
+                <a:spcPts val="0"/>
+              </a:spcAft>
+            </a:pPr>
+            <a:r>
+              <a:rPr sz="1050" b="1">
+                <a:solidFill>
+                  <a:srgbClr val="F0C040"/>
                 </a:solidFill>
                 <a:latin typeface="Consolas"/>
               </a:rPr>
-              <a:t>RECEIPTS</a:t>
-            </a:r>
-          </a:p>
-        </p:txBody>
-      </p:sp>
-      <p:sp>
-        <p:nvSpPr>
-          <p:cNvPr id="3" name="TextBox 2"/>
-          <p:cNvSpPr txBox="1"/>
-          <p:nvPr/>
-        </p:nvSpPr>
-        <p:spPr>
-          <a:xfrm>
-            <a:off x="822960" y="960120"/>
-            <a:ext cx="10545775" cy="1371600"/>
-          </a:xfrm>
-          <a:prstGeom prst="rect">
-            <a:avLst/>
-          </a:prstGeom>
-          <a:noFill/>
-        </p:spPr>
-        <p:txBody>
-          <a:bodyPr wrap="square">
-            <a:spAutoFit/>
-          </a:bodyPr>
-          <a:lstStyle/>
-          <a:p>
-            <a:pPr algn="l">
-              <a:lnSpc>
-                <a:spcPct val="105000"/>
-              </a:lnSpc>
-              <a:spcAft>
-                <a:spcPts val="800"/>
-              </a:spcAft>
-            </a:pPr>
-            <a:r>
-              <a:rPr sz="4000" b="1">
-                <a:solidFill>
-                  <a:srgbClr val="12171F"/>
-                </a:solidFill>
-                <a:latin typeface="Georgia"/>
-              </a:rPr>
-              <a:t>What it took</a:t>
-            </a:r>
-          </a:p>
-        </p:txBody>
-      </p:sp>
-      <p:sp>
-        <p:nvSpPr>
-          <p:cNvPr id="4" name="TextBox 3"/>
-          <p:cNvSpPr txBox="1"/>
-          <p:nvPr/>
-        </p:nvSpPr>
-        <p:spPr>
-          <a:xfrm>
-            <a:off x="822960" y="2286000"/>
-            <a:ext cx="2011680" cy="1828800"/>
-          </a:xfrm>
-          <a:prstGeom prst="rect">
-            <a:avLst/>
-          </a:prstGeom>
-          <a:noFill/>
-        </p:spPr>
-        <p:txBody>
-          <a:bodyPr wrap="square">
-            <a:spAutoFit/>
-          </a:bodyPr>
-          <a:lstStyle/>
-          <a:p>
-            <a:pPr algn="l">
-              <a:spcAft>
-                <a:spcPts val="600"/>
-              </a:spcAft>
-            </a:pPr>
-            <a:r>
-              <a:rPr sz="4000" b="1">
-                <a:solidFill>
-                  <a:srgbClr val="0F6E8C"/>
+              <a:t>6</a:t>
+            </a:r>
+            <a:r>
+              <a:rPr sz="1050" b="0">
+                <a:solidFill>
+                  <a:srgbClr val="6B7683"/>
                 </a:solidFill>
                 <a:latin typeface="Consolas"/>
               </a:rPr>
-              <a:t>9,269</a:t>
-            </a:r>
-          </a:p>
-          <a:p>
-            <a:pPr algn="l">
-              <a:lnSpc>
-                <a:spcPct val="120000"/>
-              </a:lnSpc>
-              <a:spcAft>
-                <a:spcPts val="100"/>
-              </a:spcAft>
-            </a:pPr>
-            <a:r>
-              <a:rPr sz="1200" b="0">
-                <a:solidFill>
-                  <a:srgbClr val="59636F"/>
-                </a:solidFill>
-                <a:latin typeface="Segoe UI"/>
-              </a:rPr>
-              <a:t>scored trials across</a:t>
-            </a:r>
-          </a:p>
-          <a:p>
-            <a:pPr algn="l">
-              <a:lnSpc>
-                <a:spcPct val="120000"/>
-              </a:lnSpc>
-              <a:spcAft>
-                <a:spcPts val="100"/>
-              </a:spcAft>
-            </a:pPr>
-            <a:r>
-              <a:rPr sz="1200" b="0">
-                <a:solidFill>
-                  <a:srgbClr val="59636F"/>
-                </a:solidFill>
-                <a:latin typeface="Segoe UI"/>
-              </a:rPr>
-              <a:t>24 crossed cells</a:t>
-            </a:r>
-          </a:p>
-        </p:txBody>
-      </p:sp>
-      <p:sp>
-        <p:nvSpPr>
-          <p:cNvPr id="5" name="TextBox 4"/>
-          <p:cNvSpPr txBox="1"/>
-          <p:nvPr/>
-        </p:nvSpPr>
-        <p:spPr>
-          <a:xfrm>
-            <a:off x="2971800" y="2286000"/>
-            <a:ext cx="2011680" cy="1828800"/>
-          </a:xfrm>
-          <a:prstGeom prst="rect">
-            <a:avLst/>
-          </a:prstGeom>
-          <a:noFill/>
-        </p:spPr>
-        <p:txBody>
-          <a:bodyPr wrap="square">
-            <a:spAutoFit/>
-          </a:bodyPr>
-          <a:lstStyle/>
-          <a:p>
-            <a:pPr algn="l">
-              <a:spcAft>
-                <a:spcPts val="600"/>
-              </a:spcAft>
-            </a:pPr>
-            <a:r>
-              <a:rPr sz="4000" b="1">
-                <a:solidFill>
-                  <a:srgbClr val="0F6E8C"/>
-                </a:solidFill>
-                <a:latin typeface="Consolas"/>
-              </a:rPr>
-              <a:t>$3.12</a:t>
-            </a:r>
-          </a:p>
-          <a:p>
-            <a:pPr algn="l">
-              <a:lnSpc>
-                <a:spcPct val="120000"/>
-              </a:lnSpc>
-              <a:spcAft>
-                <a:spcPts val="100"/>
-              </a:spcAft>
-            </a:pPr>
-            <a:r>
-              <a:rPr sz="1200" b="0">
-                <a:solidFill>
-                  <a:srgbClr val="59636F"/>
-                </a:solidFill>
-                <a:latin typeface="Segoe UI"/>
-              </a:rPr>
-              <a:t>total API spend,</a:t>
-            </a:r>
-          </a:p>
-          <a:p>
-            <a:pPr algn="l">
-              <a:lnSpc>
-                <a:spcPct val="120000"/>
-              </a:lnSpc>
-              <a:spcAft>
-                <a:spcPts val="100"/>
-              </a:spcAft>
-            </a:pPr>
-            <a:r>
-              <a:rPr sz="1200" b="0">
-                <a:solidFill>
-                  <a:srgbClr val="59636F"/>
-                </a:solidFill>
-                <a:latin typeface="Segoe UI"/>
-              </a:rPr>
-              <a:t>of a $10 ceiling</a:t>
-            </a:r>
-          </a:p>
-        </p:txBody>
-      </p:sp>
-      <p:sp>
-        <p:nvSpPr>
-          <p:cNvPr id="6" name="TextBox 5"/>
-          <p:cNvSpPr txBox="1"/>
-          <p:nvPr/>
-        </p:nvSpPr>
-        <p:spPr>
-          <a:xfrm>
-            <a:off x="5120640" y="2286000"/>
-            <a:ext cx="2011680" cy="1828800"/>
-          </a:xfrm>
-          <a:prstGeom prst="rect">
-            <a:avLst/>
-          </a:prstGeom>
-          <a:noFill/>
-        </p:spPr>
-        <p:txBody>
-          <a:bodyPr wrap="square">
-            <a:spAutoFit/>
-          </a:bodyPr>
-          <a:lstStyle/>
-          <a:p>
-            <a:pPr algn="l">
-              <a:spcAft>
-                <a:spcPts val="600"/>
-              </a:spcAft>
-            </a:pPr>
-            <a:r>
-              <a:rPr sz="4000" b="1">
-                <a:solidFill>
-                  <a:srgbClr val="0F6E8C"/>
-                </a:solidFill>
-                <a:latin typeface="Consolas"/>
-              </a:rPr>
-              <a:t>0</a:t>
-            </a:r>
-          </a:p>
-          <a:p>
-            <a:pPr algn="l">
-              <a:lnSpc>
-                <a:spcPct val="120000"/>
-              </a:lnSpc>
-              <a:spcAft>
-                <a:spcPts val="100"/>
-              </a:spcAft>
-            </a:pPr>
-            <a:r>
-              <a:rPr sz="1200" b="0">
-                <a:solidFill>
-                  <a:srgbClr val="59636F"/>
-                </a:solidFill>
-                <a:latin typeface="Segoe UI"/>
-              </a:rPr>
-              <a:t>malformed</a:t>
-            </a:r>
-          </a:p>
-          <a:p>
-            <a:pPr algn="l">
-              <a:lnSpc>
-                <a:spcPct val="120000"/>
-              </a:lnSpc>
-              <a:spcAft>
-                <a:spcPts val="100"/>
-              </a:spcAft>
-            </a:pPr>
-            <a:r>
-              <a:rPr sz="1200" b="0">
-                <a:solidFill>
-                  <a:srgbClr val="59636F"/>
-                </a:solidFill>
-                <a:latin typeface="Segoe UI"/>
-              </a:rPr>
-              <a:t>predictions</a:t>
-            </a:r>
-          </a:p>
-        </p:txBody>
-      </p:sp>
-      <p:sp>
-        <p:nvSpPr>
-          <p:cNvPr id="7" name="TextBox 6"/>
-          <p:cNvSpPr txBox="1"/>
-          <p:nvPr/>
-        </p:nvSpPr>
-        <p:spPr>
-          <a:xfrm>
-            <a:off x="7269480" y="2286000"/>
-            <a:ext cx="2011680" cy="1828800"/>
-          </a:xfrm>
-          <a:prstGeom prst="rect">
-            <a:avLst/>
-          </a:prstGeom>
-          <a:noFill/>
-        </p:spPr>
-        <p:txBody>
-          <a:bodyPr wrap="square">
-            <a:spAutoFit/>
-          </a:bodyPr>
-          <a:lstStyle/>
-          <a:p>
-            <a:pPr algn="l">
-              <a:spcAft>
-                <a:spcPts val="600"/>
-              </a:spcAft>
-            </a:pPr>
-            <a:r>
-              <a:rPr sz="4000" b="1">
-                <a:solidFill>
-                  <a:srgbClr val="0F6E8C"/>
-                </a:solidFill>
-                <a:latin typeface="Consolas"/>
-              </a:rPr>
-              <a:t>15</a:t>
-            </a:r>
-          </a:p>
-          <a:p>
-            <a:pPr algn="l">
-              <a:lnSpc>
-                <a:spcPct val="120000"/>
-              </a:lnSpc>
-              <a:spcAft>
-                <a:spcPts val="100"/>
-              </a:spcAft>
-            </a:pPr>
-            <a:r>
-              <a:rPr sz="1200" b="0">
-                <a:solidFill>
-                  <a:srgbClr val="59636F"/>
-                </a:solidFill>
-                <a:latin typeface="Segoe UI"/>
-              </a:rPr>
-              <a:t>preregistered decisions,</a:t>
-            </a:r>
-          </a:p>
-          <a:p>
-            <a:pPr algn="l">
-              <a:lnSpc>
-                <a:spcPct val="120000"/>
-              </a:lnSpc>
-              <a:spcAft>
-                <a:spcPts val="100"/>
-              </a:spcAft>
-            </a:pPr>
-            <a:r>
-              <a:rPr sz="1200" b="0">
-                <a:solidFill>
-                  <a:srgbClr val="59636F"/>
-                </a:solidFill>
-                <a:latin typeface="Segoe UI"/>
-              </a:rPr>
-              <a:t>8 logged amendments</a:t>
-            </a:r>
-          </a:p>
-        </p:txBody>
-      </p:sp>
-      <p:sp>
-        <p:nvSpPr>
-          <p:cNvPr id="8" name="TextBox 7"/>
-          <p:cNvSpPr txBox="1"/>
-          <p:nvPr/>
-        </p:nvSpPr>
-        <p:spPr>
-          <a:xfrm>
-            <a:off x="9418320" y="2286000"/>
-            <a:ext cx="2011680" cy="1828800"/>
-          </a:xfrm>
-          <a:prstGeom prst="rect">
-            <a:avLst/>
-          </a:prstGeom>
-          <a:noFill/>
-        </p:spPr>
-        <p:txBody>
-          <a:bodyPr wrap="square">
-            <a:spAutoFit/>
-          </a:bodyPr>
-          <a:lstStyle/>
-          <a:p>
-            <a:pPr algn="l">
-              <a:spcAft>
-                <a:spcPts val="600"/>
-              </a:spcAft>
-            </a:pPr>
-            <a:r>
-              <a:rPr sz="4000" b="1">
-                <a:solidFill>
-                  <a:srgbClr val="B03A26"/>
-                </a:solidFill>
-                <a:latin typeface="Consolas"/>
-              </a:rPr>
-              <a:t>2</a:t>
-            </a:r>
-          </a:p>
-          <a:p>
-            <a:pPr algn="l">
-              <a:lnSpc>
-                <a:spcPct val="120000"/>
-              </a:lnSpc>
-              <a:spcAft>
-                <a:spcPts val="100"/>
-              </a:spcAft>
-            </a:pPr>
-            <a:r>
-              <a:rPr sz="1200" b="0">
-                <a:solidFill>
-                  <a:srgbClr val="59636F"/>
-                </a:solidFill>
-                <a:latin typeface="Segoe UI"/>
-              </a:rPr>
-              <a:t>artifacts caught before</a:t>
-            </a:r>
-          </a:p>
-          <a:p>
-            <a:pPr algn="l">
-              <a:lnSpc>
-                <a:spcPct val="120000"/>
-              </a:lnSpc>
-              <a:spcAft>
-                <a:spcPts val="100"/>
-              </a:spcAft>
-            </a:pPr>
-            <a:r>
-              <a:rPr sz="1200" b="0">
-                <a:solidFill>
-                  <a:srgbClr val="59636F"/>
-                </a:solidFill>
-                <a:latin typeface="Segoe UI"/>
-              </a:rPr>
-              <a:t>they became findings</a:t>
-            </a:r>
-          </a:p>
-        </p:txBody>
-      </p:sp>
-      <p:sp>
-        <p:nvSpPr>
-          <p:cNvPr id="9" name="TextBox 8"/>
-          <p:cNvSpPr txBox="1"/>
-          <p:nvPr/>
-        </p:nvSpPr>
-        <p:spPr>
-          <a:xfrm>
-            <a:off x="822960" y="4572000"/>
-            <a:ext cx="8778240" cy="1280160"/>
-          </a:xfrm>
-          <a:prstGeom prst="rect">
-            <a:avLst/>
-          </a:prstGeom>
-          <a:noFill/>
-        </p:spPr>
-        <p:txBody>
-          <a:bodyPr wrap="square">
-            <a:spAutoFit/>
-          </a:bodyPr>
-          <a:lstStyle/>
-          <a:p>
-            <a:pPr algn="l">
-              <a:lnSpc>
-                <a:spcPct val="130000"/>
-              </a:lnSpc>
-              <a:spcAft>
-                <a:spcPts val="1200"/>
-              </a:spcAft>
-            </a:pPr>
-            <a:r>
-              <a:rPr sz="1400" b="0">
-                <a:solidFill>
-                  <a:srgbClr val="12171F"/>
-                </a:solidFill>
-                <a:latin typeface="Segoe UI"/>
-              </a:rPr>
-              <a:t>Every call logged append-only with returned model, provider, tokens, cost and prompt hash. Provider pinned with fallbacks disabled — if generator and self-predictor were served at different quantizations, “same weights” would be false.</a:t>
-            </a:r>
-          </a:p>
-        </p:txBody>
-      </p:sp>
-      <p:sp>
-        <p:nvSpPr>
-          <p:cNvPr id="10" name="TextBox 9"/>
-          <p:cNvSpPr txBox="1"/>
-          <p:nvPr/>
-        </p:nvSpPr>
-        <p:spPr>
-          <a:xfrm>
-            <a:off x="822960" y="6172200"/>
-            <a:ext cx="1828800" cy="320040"/>
-          </a:xfrm>
-          <a:prstGeom prst="rect">
-            <a:avLst/>
-          </a:prstGeom>
-          <a:noFill/>
-        </p:spPr>
-        <p:txBody>
-          <a:bodyPr wrap="square">
-            <a:spAutoFit/>
-          </a:bodyPr>
-          <a:lstStyle/>
-          <a:p>
-            <a:pPr algn="l">
-              <a:spcAft>
-                <a:spcPts val="800"/>
-              </a:spcAft>
-            </a:pPr>
-            <a:r>
-              <a:rPr sz="1100" b="0" spc="80">
-                <a:solidFill>
-                  <a:srgbClr val="0F6E8C"/>
-                </a:solidFill>
-                <a:latin typeface="Consolas"/>
-              </a:rPr>
-              <a:t>09</a:t>
-            </a:r>
-          </a:p>
-        </p:txBody>
-      </p:sp>
-      <p:sp>
-        <p:nvSpPr>
-          <p:cNvPr id="11" name="Rectangle 10"/>
-          <p:cNvSpPr/>
-          <p:nvPr/>
-        </p:nvSpPr>
-        <p:spPr>
-          <a:xfrm>
-            <a:off x="822960" y="5989320"/>
-            <a:ext cx="10545775" cy="9525"/>
-          </a:xfrm>
-          <a:prstGeom prst="rect">
-            <a:avLst/>
-          </a:prstGeom>
-          <a:solidFill>
-            <a:srgbClr val="DCE2E8"/>
-          </a:solidFill>
-          <a:ln>
-            <a:noFill/>
-          </a:ln>
-          <a:effectLst/>
-        </p:spPr>
-        <p:style>
-          <a:lnRef idx="1">
-            <a:schemeClr val="accent1"/>
-          </a:lnRef>
-          <a:fillRef idx="3">
-            <a:schemeClr val="accent1"/>
-          </a:fillRef>
-          <a:effectRef idx="2">
-            <a:schemeClr val="accent1"/>
-          </a:effectRef>
-          <a:fontRef idx="minor">
-            <a:schemeClr val="lt1"/>
-          </a:fontRef>
-        </p:style>
-        <p:txBody>
-          <a:bodyPr rtlCol="0" anchor="ctr"/>
-          <a:lstStyle/>
-          <a:p>
-            <a:pPr algn="ctr"/>
+              <a:t>  /  6     Future work</a:t>
+            </a:r>
           </a:p>
         </p:txBody>
       </p:sp>

--- a/Digital_Minds_Track3_Slides.pptx
+++ b/Digital_Minds_Track3_Slides.pptx
@@ -5,14 +5,14 @@
     <p:sldMasterId id="2147483648" r:id="rId1"/>
   </p:sldMasterIdLst>
   <p:sldIdLst>
-    <p:sldId id="256" r:id="rId7"/>
-    <p:sldId id="257" r:id="rId8"/>
-    <p:sldId id="258" r:id="rId9"/>
-    <p:sldId id="259" r:id="rId10"/>
-    <p:sldId id="260" r:id="rId11"/>
-    <p:sldId id="261" r:id="rId12"/>
+    <p:sldId id="256" r:id="rId2"/>
+    <p:sldId id="257" r:id="rId3"/>
+    <p:sldId id="258" r:id="rId4"/>
+    <p:sldId id="259" r:id="rId5"/>
+    <p:sldId id="260" r:id="rId6"/>
+    <p:sldId id="261" r:id="rId7"/>
   </p:sldIdLst>
-  <p:sldSz cx="12191695" cy="6858000" type="screen4x3"/>
+  <p:sldSz cx="12192000" cy="6858000"/>
   <p:notesSz cx="6858000" cy="9144000"/>
   <p:defaultTextStyle>
     <a:defPPr>
@@ -109,6 +109,22 @@
       </a:defRPr>
     </a:lvl9pPr>
   </p:defaultTextStyle>
+  <p:extLst>
+    <p:ext uri="{EFAFB233-063F-42B5-8137-9DF3F51BA10A}">
+      <p15:sldGuideLst xmlns:p15="http://schemas.microsoft.com/office/powerpoint/2012/main">
+        <p15:guide id="1" orient="horz" pos="2160">
+          <p15:clr>
+            <a:srgbClr val="A4A3A4"/>
+          </p15:clr>
+        </p15:guide>
+        <p15:guide id="2" pos="2880">
+          <p15:clr>
+            <a:srgbClr val="A4A3A4"/>
+          </p15:clr>
+        </p15:guide>
+      </p15:sldGuideLst>
+    </p:ext>
+  </p:extLst>
 </p:presentation>
 </file>
 
@@ -150,10 +166,9 @@
           <a:lstStyle/>
           <a:p>
             <a:r>
-              <a:rPr lang="en-US" smtClean="0"/>
+              <a:rPr lang="en-US"/>
               <a:t>Click to edit Master title style</a:t>
             </a:r>
-            <a:endParaRPr lang="en-US"/>
           </a:p>
         </p:txBody>
       </p:sp>
@@ -269,10 +284,9 @@
           </a:lstStyle>
           <a:p>
             <a:r>
-              <a:rPr lang="en-US" smtClean="0"/>
+              <a:rPr lang="en-US"/>
               <a:t>Click to edit Master subtitle style</a:t>
             </a:r>
-            <a:endParaRPr lang="en-US"/>
           </a:p>
         </p:txBody>
       </p:sp>
@@ -293,7 +307,7 @@
           <a:p>
             <a:fld id="{5BCAD085-E8A6-8845-BD4E-CB4CCA059FC4}" type="datetimeFigureOut">
               <a:rPr lang="en-US" smtClean="0"/>
-              <a:t>1/27/13</a:t>
+              <a:t>8/16/2026</a:t>
             </a:fld>
             <a:endParaRPr lang="en-US"/>
           </a:p>
@@ -387,10 +401,9 @@
           <a:lstStyle/>
           <a:p>
             <a:r>
-              <a:rPr lang="en-US" smtClean="0"/>
+              <a:rPr lang="en-US"/>
               <a:t>Click to edit Master title style</a:t>
             </a:r>
-            <a:endParaRPr lang="en-US"/>
           </a:p>
         </p:txBody>
       </p:sp>
@@ -411,38 +424,37 @@
           <a:p>
             <a:pPr lvl="0"/>
             <a:r>
-              <a:rPr lang="en-US" smtClean="0"/>
+              <a:rPr lang="en-US"/>
               <a:t>Click to edit Master text styles</a:t>
             </a:r>
           </a:p>
           <a:p>
             <a:pPr lvl="1"/>
             <a:r>
-              <a:rPr lang="en-US" smtClean="0"/>
+              <a:rPr lang="en-US"/>
               <a:t>Second level</a:t>
             </a:r>
           </a:p>
           <a:p>
             <a:pPr lvl="2"/>
             <a:r>
-              <a:rPr lang="en-US" smtClean="0"/>
+              <a:rPr lang="en-US"/>
               <a:t>Third level</a:t>
             </a:r>
           </a:p>
           <a:p>
             <a:pPr lvl="3"/>
             <a:r>
-              <a:rPr lang="en-US" smtClean="0"/>
+              <a:rPr lang="en-US"/>
               <a:t>Fourth level</a:t>
             </a:r>
           </a:p>
           <a:p>
             <a:pPr lvl="4"/>
             <a:r>
-              <a:rPr lang="en-US" smtClean="0"/>
+              <a:rPr lang="en-US"/>
               <a:t>Fifth level</a:t>
             </a:r>
-            <a:endParaRPr lang="en-US"/>
           </a:p>
         </p:txBody>
       </p:sp>
@@ -463,7 +475,7 @@
           <a:p>
             <a:fld id="{5BCAD085-E8A6-8845-BD4E-CB4CCA059FC4}" type="datetimeFigureOut">
               <a:rPr lang="en-US" smtClean="0"/>
-              <a:t>1/27/13</a:t>
+              <a:t>8/16/2026</a:t>
             </a:fld>
             <a:endParaRPr lang="en-US"/>
           </a:p>
@@ -562,10 +574,9 @@
           <a:lstStyle/>
           <a:p>
             <a:r>
-              <a:rPr lang="en-US" smtClean="0"/>
+              <a:rPr lang="en-US"/>
               <a:t>Click to edit Master title style</a:t>
             </a:r>
-            <a:endParaRPr lang="en-US"/>
           </a:p>
         </p:txBody>
       </p:sp>
@@ -591,38 +602,37 @@
           <a:p>
             <a:pPr lvl="0"/>
             <a:r>
-              <a:rPr lang="en-US" smtClean="0"/>
+              <a:rPr lang="en-US"/>
               <a:t>Click to edit Master text styles</a:t>
             </a:r>
           </a:p>
           <a:p>
             <a:pPr lvl="1"/>
             <a:r>
-              <a:rPr lang="en-US" smtClean="0"/>
+              <a:rPr lang="en-US"/>
               <a:t>Second level</a:t>
             </a:r>
           </a:p>
           <a:p>
             <a:pPr lvl="2"/>
             <a:r>
-              <a:rPr lang="en-US" smtClean="0"/>
+              <a:rPr lang="en-US"/>
               <a:t>Third level</a:t>
             </a:r>
           </a:p>
           <a:p>
             <a:pPr lvl="3"/>
             <a:r>
-              <a:rPr lang="en-US" smtClean="0"/>
+              <a:rPr lang="en-US"/>
               <a:t>Fourth level</a:t>
             </a:r>
           </a:p>
           <a:p>
             <a:pPr lvl="4"/>
             <a:r>
-              <a:rPr lang="en-US" smtClean="0"/>
+              <a:rPr lang="en-US"/>
               <a:t>Fifth level</a:t>
             </a:r>
-            <a:endParaRPr lang="en-US"/>
           </a:p>
         </p:txBody>
       </p:sp>
@@ -643,7 +653,7 @@
           <a:p>
             <a:fld id="{5BCAD085-E8A6-8845-BD4E-CB4CCA059FC4}" type="datetimeFigureOut">
               <a:rPr lang="en-US" smtClean="0"/>
-              <a:t>1/27/13</a:t>
+              <a:t>8/16/2026</a:t>
             </a:fld>
             <a:endParaRPr lang="en-US"/>
           </a:p>
@@ -737,10 +747,9 @@
           <a:lstStyle/>
           <a:p>
             <a:r>
-              <a:rPr lang="en-US" smtClean="0"/>
+              <a:rPr lang="en-US"/>
               <a:t>Click to edit Master title style</a:t>
             </a:r>
-            <a:endParaRPr lang="en-US"/>
           </a:p>
         </p:txBody>
       </p:sp>
@@ -761,38 +770,37 @@
           <a:p>
             <a:pPr lvl="0"/>
             <a:r>
-              <a:rPr lang="en-US" smtClean="0"/>
+              <a:rPr lang="en-US"/>
               <a:t>Click to edit Master text styles</a:t>
             </a:r>
           </a:p>
           <a:p>
             <a:pPr lvl="1"/>
             <a:r>
-              <a:rPr lang="en-US" smtClean="0"/>
+              <a:rPr lang="en-US"/>
               <a:t>Second level</a:t>
             </a:r>
           </a:p>
           <a:p>
             <a:pPr lvl="2"/>
             <a:r>
-              <a:rPr lang="en-US" smtClean="0"/>
+              <a:rPr lang="en-US"/>
               <a:t>Third level</a:t>
             </a:r>
           </a:p>
           <a:p>
             <a:pPr lvl="3"/>
             <a:r>
-              <a:rPr lang="en-US" smtClean="0"/>
+              <a:rPr lang="en-US"/>
               <a:t>Fourth level</a:t>
             </a:r>
           </a:p>
           <a:p>
             <a:pPr lvl="4"/>
             <a:r>
-              <a:rPr lang="en-US" smtClean="0"/>
+              <a:rPr lang="en-US"/>
               <a:t>Fifth level</a:t>
             </a:r>
-            <a:endParaRPr lang="en-US"/>
           </a:p>
         </p:txBody>
       </p:sp>
@@ -813,7 +821,7 @@
           <a:p>
             <a:fld id="{5BCAD085-E8A6-8845-BD4E-CB4CCA059FC4}" type="datetimeFigureOut">
               <a:rPr lang="en-US" smtClean="0"/>
-              <a:t>1/27/13</a:t>
+              <a:t>8/16/2026</a:t>
             </a:fld>
             <a:endParaRPr lang="en-US"/>
           </a:p>
@@ -916,10 +924,9 @@
           </a:lstStyle>
           <a:p>
             <a:r>
-              <a:rPr lang="en-US" smtClean="0"/>
+              <a:rPr lang="en-US"/>
               <a:t>Click to edit Master title style</a:t>
             </a:r>
-            <a:endParaRPr lang="en-US"/>
           </a:p>
         </p:txBody>
       </p:sp>
@@ -1036,7 +1043,7 @@
           <a:p>
             <a:pPr lvl="0"/>
             <a:r>
-              <a:rPr lang="en-US" smtClean="0"/>
+              <a:rPr lang="en-US"/>
               <a:t>Click to edit Master text styles</a:t>
             </a:r>
           </a:p>
@@ -1059,7 +1066,7 @@
           <a:p>
             <a:fld id="{5BCAD085-E8A6-8845-BD4E-CB4CCA059FC4}" type="datetimeFigureOut">
               <a:rPr lang="en-US" smtClean="0"/>
-              <a:t>1/27/13</a:t>
+              <a:t>8/16/2026</a:t>
             </a:fld>
             <a:endParaRPr lang="en-US"/>
           </a:p>
@@ -1153,10 +1160,9 @@
           <a:lstStyle/>
           <a:p>
             <a:r>
-              <a:rPr lang="en-US" smtClean="0"/>
+              <a:rPr lang="en-US"/>
               <a:t>Click to edit Master title style</a:t>
             </a:r>
-            <a:endParaRPr lang="en-US"/>
           </a:p>
         </p:txBody>
       </p:sp>
@@ -1210,38 +1216,37 @@
           <a:p>
             <a:pPr lvl="0"/>
             <a:r>
-              <a:rPr lang="en-US" smtClean="0"/>
+              <a:rPr lang="en-US"/>
               <a:t>Click to edit Master text styles</a:t>
             </a:r>
           </a:p>
           <a:p>
             <a:pPr lvl="1"/>
             <a:r>
-              <a:rPr lang="en-US" smtClean="0"/>
+              <a:rPr lang="en-US"/>
               <a:t>Second level</a:t>
             </a:r>
           </a:p>
           <a:p>
             <a:pPr lvl="2"/>
             <a:r>
-              <a:rPr lang="en-US" smtClean="0"/>
+              <a:rPr lang="en-US"/>
               <a:t>Third level</a:t>
             </a:r>
           </a:p>
           <a:p>
             <a:pPr lvl="3"/>
             <a:r>
-              <a:rPr lang="en-US" smtClean="0"/>
+              <a:rPr lang="en-US"/>
               <a:t>Fourth level</a:t>
             </a:r>
           </a:p>
           <a:p>
             <a:pPr lvl="4"/>
             <a:r>
-              <a:rPr lang="en-US" smtClean="0"/>
+              <a:rPr lang="en-US"/>
               <a:t>Fifth level</a:t>
             </a:r>
-            <a:endParaRPr lang="en-US"/>
           </a:p>
         </p:txBody>
       </p:sp>
@@ -1295,38 +1300,37 @@
           <a:p>
             <a:pPr lvl="0"/>
             <a:r>
-              <a:rPr lang="en-US" smtClean="0"/>
+              <a:rPr lang="en-US"/>
               <a:t>Click to edit Master text styles</a:t>
             </a:r>
           </a:p>
           <a:p>
             <a:pPr lvl="1"/>
             <a:r>
-              <a:rPr lang="en-US" smtClean="0"/>
+              <a:rPr lang="en-US"/>
               <a:t>Second level</a:t>
             </a:r>
           </a:p>
           <a:p>
             <a:pPr lvl="2"/>
             <a:r>
-              <a:rPr lang="en-US" smtClean="0"/>
+              <a:rPr lang="en-US"/>
               <a:t>Third level</a:t>
             </a:r>
           </a:p>
           <a:p>
             <a:pPr lvl="3"/>
             <a:r>
-              <a:rPr lang="en-US" smtClean="0"/>
+              <a:rPr lang="en-US"/>
               <a:t>Fourth level</a:t>
             </a:r>
           </a:p>
           <a:p>
             <a:pPr lvl="4"/>
             <a:r>
-              <a:rPr lang="en-US" smtClean="0"/>
+              <a:rPr lang="en-US"/>
               <a:t>Fifth level</a:t>
             </a:r>
-            <a:endParaRPr lang="en-US"/>
           </a:p>
         </p:txBody>
       </p:sp>
@@ -1347,7 +1351,7 @@
           <a:p>
             <a:fld id="{5BCAD085-E8A6-8845-BD4E-CB4CCA059FC4}" type="datetimeFigureOut">
               <a:rPr lang="en-US" smtClean="0"/>
-              <a:t>1/27/13</a:t>
+              <a:t>8/16/2026</a:t>
             </a:fld>
             <a:endParaRPr lang="en-US"/>
           </a:p>
@@ -1445,10 +1449,9 @@
           </a:lstStyle>
           <a:p>
             <a:r>
-              <a:rPr lang="en-US" smtClean="0"/>
+              <a:rPr lang="en-US"/>
               <a:t>Click to edit Master title style</a:t>
             </a:r>
-            <a:endParaRPr lang="en-US"/>
           </a:p>
         </p:txBody>
       </p:sp>
@@ -1511,7 +1514,7 @@
           <a:p>
             <a:pPr lvl="0"/>
             <a:r>
-              <a:rPr lang="en-US" smtClean="0"/>
+              <a:rPr lang="en-US"/>
               <a:t>Click to edit Master text styles</a:t>
             </a:r>
           </a:p>
@@ -1567,38 +1570,37 @@
           <a:p>
             <a:pPr lvl="0"/>
             <a:r>
-              <a:rPr lang="en-US" smtClean="0"/>
+              <a:rPr lang="en-US"/>
               <a:t>Click to edit Master text styles</a:t>
             </a:r>
           </a:p>
           <a:p>
             <a:pPr lvl="1"/>
             <a:r>
-              <a:rPr lang="en-US" smtClean="0"/>
+              <a:rPr lang="en-US"/>
               <a:t>Second level</a:t>
             </a:r>
           </a:p>
           <a:p>
             <a:pPr lvl="2"/>
             <a:r>
-              <a:rPr lang="en-US" smtClean="0"/>
+              <a:rPr lang="en-US"/>
               <a:t>Third level</a:t>
             </a:r>
           </a:p>
           <a:p>
             <a:pPr lvl="3"/>
             <a:r>
-              <a:rPr lang="en-US" smtClean="0"/>
+              <a:rPr lang="en-US"/>
               <a:t>Fourth level</a:t>
             </a:r>
           </a:p>
           <a:p>
             <a:pPr lvl="4"/>
             <a:r>
-              <a:rPr lang="en-US" smtClean="0"/>
+              <a:rPr lang="en-US"/>
               <a:t>Fifth level</a:t>
             </a:r>
-            <a:endParaRPr lang="en-US"/>
           </a:p>
         </p:txBody>
       </p:sp>
@@ -1661,7 +1663,7 @@
           <a:p>
             <a:pPr lvl="0"/>
             <a:r>
-              <a:rPr lang="en-US" smtClean="0"/>
+              <a:rPr lang="en-US"/>
               <a:t>Click to edit Master text styles</a:t>
             </a:r>
           </a:p>
@@ -1717,38 +1719,37 @@
           <a:p>
             <a:pPr lvl="0"/>
             <a:r>
-              <a:rPr lang="en-US" smtClean="0"/>
+              <a:rPr lang="en-US"/>
               <a:t>Click to edit Master text styles</a:t>
             </a:r>
           </a:p>
           <a:p>
             <a:pPr lvl="1"/>
             <a:r>
-              <a:rPr lang="en-US" smtClean="0"/>
+              <a:rPr lang="en-US"/>
               <a:t>Second level</a:t>
             </a:r>
           </a:p>
           <a:p>
             <a:pPr lvl="2"/>
             <a:r>
-              <a:rPr lang="en-US" smtClean="0"/>
+              <a:rPr lang="en-US"/>
               <a:t>Third level</a:t>
             </a:r>
           </a:p>
           <a:p>
             <a:pPr lvl="3"/>
             <a:r>
-              <a:rPr lang="en-US" smtClean="0"/>
+              <a:rPr lang="en-US"/>
               <a:t>Fourth level</a:t>
             </a:r>
           </a:p>
           <a:p>
             <a:pPr lvl="4"/>
             <a:r>
-              <a:rPr lang="en-US" smtClean="0"/>
+              <a:rPr lang="en-US"/>
               <a:t>Fifth level</a:t>
             </a:r>
-            <a:endParaRPr lang="en-US"/>
           </a:p>
         </p:txBody>
       </p:sp>
@@ -1769,7 +1770,7 @@
           <a:p>
             <a:fld id="{5BCAD085-E8A6-8845-BD4E-CB4CCA059FC4}" type="datetimeFigureOut">
               <a:rPr lang="en-US" smtClean="0"/>
-              <a:t>1/27/13</a:t>
+              <a:t>8/16/2026</a:t>
             </a:fld>
             <a:endParaRPr lang="en-US"/>
           </a:p>
@@ -1863,10 +1864,9 @@
           <a:lstStyle/>
           <a:p>
             <a:r>
-              <a:rPr lang="en-US" smtClean="0"/>
+              <a:rPr lang="en-US"/>
               <a:t>Click to edit Master title style</a:t>
             </a:r>
-            <a:endParaRPr lang="en-US"/>
           </a:p>
         </p:txBody>
       </p:sp>
@@ -1887,7 +1887,7 @@
           <a:p>
             <a:fld id="{5BCAD085-E8A6-8845-BD4E-CB4CCA059FC4}" type="datetimeFigureOut">
               <a:rPr lang="en-US" smtClean="0"/>
-              <a:t>1/27/13</a:t>
+              <a:t>8/16/2026</a:t>
             </a:fld>
             <a:endParaRPr lang="en-US"/>
           </a:p>
@@ -1982,7 +1982,7 @@
           <a:p>
             <a:fld id="{5BCAD085-E8A6-8845-BD4E-CB4CCA059FC4}" type="datetimeFigureOut">
               <a:rPr lang="en-US" smtClean="0"/>
-              <a:t>1/27/13</a:t>
+              <a:t>8/16/2026</a:t>
             </a:fld>
             <a:endParaRPr lang="en-US"/>
           </a:p>
@@ -2085,10 +2085,9 @@
           </a:lstStyle>
           <a:p>
             <a:r>
-              <a:rPr lang="en-US" smtClean="0"/>
+              <a:rPr lang="en-US"/>
               <a:t>Click to edit Master title style</a:t>
             </a:r>
-            <a:endParaRPr lang="en-US"/>
           </a:p>
         </p:txBody>
       </p:sp>
@@ -2142,38 +2141,37 @@
           <a:p>
             <a:pPr lvl="0"/>
             <a:r>
-              <a:rPr lang="en-US" smtClean="0"/>
+              <a:rPr lang="en-US"/>
               <a:t>Click to edit Master text styles</a:t>
             </a:r>
           </a:p>
           <a:p>
             <a:pPr lvl="1"/>
             <a:r>
-              <a:rPr lang="en-US" smtClean="0"/>
+              <a:rPr lang="en-US"/>
               <a:t>Second level</a:t>
             </a:r>
           </a:p>
           <a:p>
             <a:pPr lvl="2"/>
             <a:r>
-              <a:rPr lang="en-US" smtClean="0"/>
+              <a:rPr lang="en-US"/>
               <a:t>Third level</a:t>
             </a:r>
           </a:p>
           <a:p>
             <a:pPr lvl="3"/>
             <a:r>
-              <a:rPr lang="en-US" smtClean="0"/>
+              <a:rPr lang="en-US"/>
               <a:t>Fourth level</a:t>
             </a:r>
           </a:p>
           <a:p>
             <a:pPr lvl="4"/>
             <a:r>
-              <a:rPr lang="en-US" smtClean="0"/>
+              <a:rPr lang="en-US"/>
               <a:t>Fifth level</a:t>
             </a:r>
-            <a:endParaRPr lang="en-US"/>
           </a:p>
         </p:txBody>
       </p:sp>
@@ -2236,7 +2234,7 @@
           <a:p>
             <a:pPr lvl="0"/>
             <a:r>
-              <a:rPr lang="en-US" smtClean="0"/>
+              <a:rPr lang="en-US"/>
               <a:t>Click to edit Master text styles</a:t>
             </a:r>
           </a:p>
@@ -2259,7 +2257,7 @@
           <a:p>
             <a:fld id="{5BCAD085-E8A6-8845-BD4E-CB4CCA059FC4}" type="datetimeFigureOut">
               <a:rPr lang="en-US" smtClean="0"/>
-              <a:t>1/27/13</a:t>
+              <a:t>8/16/2026</a:t>
             </a:fld>
             <a:endParaRPr lang="en-US"/>
           </a:p>
@@ -2362,10 +2360,9 @@
           </a:lstStyle>
           <a:p>
             <a:r>
-              <a:rPr lang="en-US" smtClean="0"/>
+              <a:rPr lang="en-US"/>
               <a:t>Click to edit Master title style</a:t>
             </a:r>
-            <a:endParaRPr lang="en-US"/>
           </a:p>
         </p:txBody>
       </p:sp>
@@ -2489,7 +2486,7 @@
           <a:p>
             <a:pPr lvl="0"/>
             <a:r>
-              <a:rPr lang="en-US" smtClean="0"/>
+              <a:rPr lang="en-US"/>
               <a:t>Click to edit Master text styles</a:t>
             </a:r>
           </a:p>
@@ -2512,7 +2509,7 @@
           <a:p>
             <a:fld id="{5BCAD085-E8A6-8845-BD4E-CB4CCA059FC4}" type="datetimeFigureOut">
               <a:rPr lang="en-US" smtClean="0"/>
-              <a:t>1/27/13</a:t>
+              <a:t>8/16/2026</a:t>
             </a:fld>
             <a:endParaRPr lang="en-US"/>
           </a:p>
@@ -2621,10 +2618,9 @@
           <a:lstStyle/>
           <a:p>
             <a:r>
-              <a:rPr lang="en-US" smtClean="0"/>
+              <a:rPr lang="en-US"/>
               <a:t>Click to edit Master title style</a:t>
             </a:r>
-            <a:endParaRPr lang="en-US"/>
           </a:p>
         </p:txBody>
       </p:sp>
@@ -2655,38 +2651,37 @@
           <a:p>
             <a:pPr lvl="0"/>
             <a:r>
-              <a:rPr lang="en-US" smtClean="0"/>
+              <a:rPr lang="en-US"/>
               <a:t>Click to edit Master text styles</a:t>
             </a:r>
           </a:p>
           <a:p>
             <a:pPr lvl="1"/>
             <a:r>
-              <a:rPr lang="en-US" smtClean="0"/>
+              <a:rPr lang="en-US"/>
               <a:t>Second level</a:t>
             </a:r>
           </a:p>
           <a:p>
             <a:pPr lvl="2"/>
             <a:r>
-              <a:rPr lang="en-US" smtClean="0"/>
+              <a:rPr lang="en-US"/>
               <a:t>Third level</a:t>
             </a:r>
           </a:p>
           <a:p>
             <a:pPr lvl="3"/>
             <a:r>
-              <a:rPr lang="en-US" smtClean="0"/>
+              <a:rPr lang="en-US"/>
               <a:t>Fourth level</a:t>
             </a:r>
           </a:p>
           <a:p>
             <a:pPr lvl="4"/>
             <a:r>
-              <a:rPr lang="en-US" smtClean="0"/>
+              <a:rPr lang="en-US"/>
               <a:t>Fifth level</a:t>
             </a:r>
-            <a:endParaRPr lang="en-US"/>
           </a:p>
         </p:txBody>
       </p:sp>
@@ -2725,7 +2720,7 @@
           <a:p>
             <a:fld id="{5BCAD085-E8A6-8845-BD4E-CB4CCA059FC4}" type="datetimeFigureOut">
               <a:rPr lang="en-US" smtClean="0"/>
-              <a:t>1/27/13</a:t>
+              <a:t>8/16/2026</a:t>
             </a:fld>
             <a:endParaRPr lang="en-US"/>
           </a:p>
@@ -3084,7 +3079,7 @@
 </file>
 
 <file path=ppt/slides/slide1.xml><?xml version="1.0" encoding="utf-8"?>
-<p:sld xmlns:a="http://schemas.openxmlformats.org/drawingml/2006/main" xmlns:p="http://schemas.openxmlformats.org/presentationml/2006/main" xmlns:r="http://schemas.openxmlformats.org/officeDocument/2006/relationships">
+<p:sld xmlns:a="http://schemas.openxmlformats.org/drawingml/2006/main" xmlns:r="http://schemas.openxmlformats.org/officeDocument/2006/relationships" xmlns:p="http://schemas.openxmlformats.org/presentationml/2006/main">
   <p:cSld>
     <p:bg>
       <p:bgPr>
@@ -3100,7 +3095,14 @@
         <p:cNvGrpSpPr/>
         <p:nvPr/>
       </p:nvGrpSpPr>
-      <p:grpSpPr/>
+      <p:grpSpPr>
+        <a:xfrm>
+          <a:off x="0" y="0"/>
+          <a:ext cx="0" cy="0"/>
+          <a:chOff x="0" y="0"/>
+          <a:chExt cx="0" cy="0"/>
+        </a:xfrm>
+      </p:grpSpPr>
       <p:sp>
         <p:nvSpPr>
           <p:cNvPr id="2" name="Rectangle 1"/>
@@ -3142,6 +3144,7 @@
           <a:lstStyle/>
           <a:p>
             <a:pPr algn="ctr"/>
+            <a:endParaRPr/>
           </a:p>
         </p:txBody>
       </p:sp>
@@ -3162,7 +3165,7 @@
           <a:noFill/>
         </p:spPr>
         <p:txBody>
-          <a:bodyPr wrap="square" lIns="0" rIns="0" tIns="0" bIns="0">
+          <a:bodyPr wrap="square" lIns="0" tIns="0" rIns="0" bIns="0">
             <a:spAutoFit/>
           </a:bodyPr>
           <a:lstStyle/>
@@ -3201,7 +3204,7 @@
           <a:noFill/>
         </p:spPr>
         <p:txBody>
-          <a:bodyPr wrap="square" lIns="0" rIns="0" tIns="0" bIns="0">
+          <a:bodyPr wrap="square" lIns="0" tIns="0" rIns="0" bIns="0">
             <a:spAutoFit/>
           </a:bodyPr>
           <a:lstStyle/>
@@ -3221,7 +3224,7 @@
                 </a:solidFill>
                 <a:latin typeface="Calibri"/>
               </a:rPr>
-              <a:t>Beaten by Eighteen Features</a:t>
+              <a:t>Beaten by a Cheap Surface Classifier</a:t>
             </a:r>
           </a:p>
           <a:p>
@@ -3286,6 +3289,7 @@
           <a:lstStyle/>
           <a:p>
             <a:pPr algn="ctr"/>
+            <a:endParaRPr/>
           </a:p>
         </p:txBody>
       </p:sp>
@@ -3306,7 +3310,7 @@
           <a:noFill/>
         </p:spPr>
         <p:txBody>
-          <a:bodyPr wrap="square" lIns="0" rIns="0" tIns="0" bIns="0">
+          <a:bodyPr wrap="square" lIns="0" tIns="0" rIns="0" bIns="0">
             <a:spAutoFit/>
           </a:bodyPr>
           <a:lstStyle/>
@@ -3320,13 +3324,31 @@
               </a:spcAft>
             </a:pPr>
             <a:r>
-              <a:rPr sz="2100" b="0">
+              <a:rPr sz="2100" b="0" dirty="0">
                 <a:solidFill>
                   <a:srgbClr val="98A3B0"/>
                 </a:solidFill>
                 <a:latin typeface="Calibri"/>
               </a:rPr>
-              <a:t>Does behavioural self-prediction provide information unavailable to an external observer?</a:t>
+              <a:t>Does </a:t>
+            </a:r>
+            <a:r>
+              <a:rPr sz="2100" b="0" dirty="0" err="1">
+                <a:solidFill>
+                  <a:srgbClr val="98A3B0"/>
+                </a:solidFill>
+                <a:latin typeface="Calibri"/>
+              </a:rPr>
+              <a:t>behavioural</a:t>
+            </a:r>
+            <a:r>
+              <a:rPr sz="2100" b="0" dirty="0">
+                <a:solidFill>
+                  <a:srgbClr val="98A3B0"/>
+                </a:solidFill>
+                <a:latin typeface="Calibri"/>
+              </a:rPr>
+              <a:t> self-prediction provide information unavailable to an external observer?</a:t>
             </a:r>
           </a:p>
         </p:txBody>
@@ -3348,7 +3370,7 @@
           <a:noFill/>
         </p:spPr>
         <p:txBody>
-          <a:bodyPr wrap="square" lIns="0" rIns="0" tIns="0" bIns="0">
+          <a:bodyPr wrap="square" lIns="0" tIns="0" rIns="0" bIns="0">
             <a:spAutoFit/>
           </a:bodyPr>
           <a:lstStyle/>
@@ -3425,7 +3447,7 @@
           <a:noFill/>
         </p:spPr>
         <p:txBody>
-          <a:bodyPr wrap="square" lIns="0" rIns="0" tIns="0" bIns="0">
+          <a:bodyPr wrap="square" lIns="0" tIns="0" rIns="0" bIns="0">
             <a:spAutoFit/>
           </a:bodyPr>
           <a:lstStyle/>
@@ -3436,7 +3458,7 @@
               </a:spcAft>
             </a:pPr>
             <a:r>
-              <a:rPr sz="1600" b="1">
+              <a:rPr sz="1600" b="1" dirty="0">
                 <a:solidFill>
                   <a:srgbClr val="E9EEF4"/>
                 </a:solidFill>
@@ -3455,7 +3477,7 @@
               </a:spcAft>
             </a:pPr>
             <a:r>
-              <a:rPr sz="1200" b="0">
+              <a:rPr sz="1200" b="0" dirty="0">
                 <a:solidFill>
                   <a:srgbClr val="98A3B0"/>
                 </a:solidFill>
@@ -3474,7 +3496,7 @@
               </a:spcAft>
             </a:pPr>
             <a:r>
-              <a:rPr sz="1200" b="0">
+              <a:rPr sz="1200" b="0" dirty="0">
                 <a:solidFill>
                   <a:srgbClr val="98A3B0"/>
                 </a:solidFill>
@@ -3502,7 +3524,7 @@
           <a:noFill/>
         </p:spPr>
         <p:txBody>
-          <a:bodyPr wrap="square" lIns="0" rIns="0" tIns="0" bIns="0">
+          <a:bodyPr wrap="square" lIns="0" tIns="0" rIns="0" bIns="0">
             <a:spAutoFit/>
           </a:bodyPr>
           <a:lstStyle/>
@@ -3513,7 +3535,7 @@
               </a:spcAft>
             </a:pPr>
             <a:r>
-              <a:rPr sz="1300" b="1">
+              <a:rPr sz="1300" b="1" dirty="0">
                 <a:solidFill>
                   <a:srgbClr val="F0C040"/>
                 </a:solidFill>
@@ -3529,14 +3551,47 @@
               </a:spcAft>
             </a:pPr>
             <a:r>
-              <a:rPr sz="1150" b="0">
+              <a:rPr sz="1150" b="0" dirty="0">
                 <a:solidFill>
                   <a:srgbClr val="98A3B0"/>
                 </a:solidFill>
                 <a:latin typeface="Consolas"/>
               </a:rPr>
-              <a:t>github.com/UbaJaz/Digital_Minds_Research</a:t>
-            </a:r>
+              <a:t>github.com/</a:t>
+            </a:r>
+            <a:r>
+              <a:rPr sz="1150" b="0" dirty="0" err="1">
+                <a:solidFill>
+                  <a:srgbClr val="98A3B0"/>
+                </a:solidFill>
+                <a:latin typeface="Consolas"/>
+              </a:rPr>
+              <a:t>UbaJaz</a:t>
+            </a:r>
+            <a:r>
+              <a:rPr sz="1150" b="0" dirty="0">
+                <a:solidFill>
+                  <a:srgbClr val="98A3B0"/>
+                </a:solidFill>
+                <a:latin typeface="Consolas"/>
+              </a:rPr>
+              <a:t>/</a:t>
+            </a:r>
+            <a:r>
+              <a:rPr sz="1150" b="0" dirty="0" err="1">
+                <a:solidFill>
+                  <a:srgbClr val="98A3B0"/>
+                </a:solidFill>
+                <a:latin typeface="Consolas"/>
+              </a:rPr>
+              <a:t>Digital_Minds_Research</a:t>
+            </a:r>
+            <a:endParaRPr sz="1150" b="0" dirty="0">
+              <a:solidFill>
+                <a:srgbClr val="98A3B0"/>
+              </a:solidFill>
+              <a:latin typeface="Consolas"/>
+            </a:endParaRPr>
           </a:p>
         </p:txBody>
       </p:sp>
@@ -3581,6 +3636,7 @@
           <a:lstStyle/>
           <a:p>
             <a:pPr algn="ctr"/>
+            <a:endParaRPr/>
           </a:p>
         </p:txBody>
       </p:sp>
@@ -3601,7 +3657,7 @@
           <a:noFill/>
         </p:spPr>
         <p:txBody>
-          <a:bodyPr wrap="square" lIns="0" rIns="0" tIns="0" bIns="0">
+          <a:bodyPr wrap="square" lIns="0" tIns="0" rIns="0" bIns="0">
             <a:spAutoFit/>
           </a:bodyPr>
           <a:lstStyle/>
@@ -3630,7 +3686,7 @@
                 </a:solidFill>
                 <a:latin typeface="Consolas"/>
               </a:rPr>
-              <a:t>  /  6     Beaten by Eighteen Features</a:t>
+              <a:t>  /  6     Beaten by a Cheap Surface Classifier</a:t>
             </a:r>
           </a:p>
         </p:txBody>
@@ -3644,7 +3700,7 @@
 </file>
 
 <file path=ppt/slides/slide2.xml><?xml version="1.0" encoding="utf-8"?>
-<p:sld xmlns:a="http://schemas.openxmlformats.org/drawingml/2006/main" xmlns:p="http://schemas.openxmlformats.org/presentationml/2006/main" xmlns:r="http://schemas.openxmlformats.org/officeDocument/2006/relationships">
+<p:sld xmlns:a="http://schemas.openxmlformats.org/drawingml/2006/main" xmlns:r="http://schemas.openxmlformats.org/officeDocument/2006/relationships" xmlns:p="http://schemas.openxmlformats.org/presentationml/2006/main">
   <p:cSld>
     <p:bg>
       <p:bgPr>
@@ -3660,7 +3716,14 @@
         <p:cNvGrpSpPr/>
         <p:nvPr/>
       </p:nvGrpSpPr>
-      <p:grpSpPr/>
+      <p:grpSpPr>
+        <a:xfrm>
+          <a:off x="0" y="0"/>
+          <a:ext cx="0" cy="0"/>
+          <a:chOff x="0" y="0"/>
+          <a:chExt cx="0" cy="0"/>
+        </a:xfrm>
+      </p:grpSpPr>
       <p:sp>
         <p:nvSpPr>
           <p:cNvPr id="2" name="TextBox 1"/>
@@ -3678,7 +3741,7 @@
           <a:noFill/>
         </p:spPr>
         <p:txBody>
-          <a:bodyPr wrap="square" lIns="0" rIns="0" tIns="0" bIns="0">
+          <a:bodyPr wrap="square" lIns="0" tIns="0" rIns="0" bIns="0">
             <a:spAutoFit/>
           </a:bodyPr>
           <a:lstStyle/>
@@ -3717,7 +3780,7 @@
           <a:noFill/>
         </p:spPr>
         <p:txBody>
-          <a:bodyPr wrap="square" lIns="0" rIns="0" tIns="0" bIns="0">
+          <a:bodyPr wrap="square" lIns="0" tIns="0" rIns="0" bIns="0">
             <a:spAutoFit/>
           </a:bodyPr>
           <a:lstStyle/>
@@ -3759,7 +3822,7 @@
           <a:noFill/>
         </p:spPr>
         <p:txBody>
-          <a:bodyPr wrap="square" lIns="0" rIns="0" tIns="0" bIns="0">
+          <a:bodyPr wrap="square" lIns="0" tIns="0" rIns="0" bIns="0">
             <a:spAutoFit/>
           </a:bodyPr>
           <a:lstStyle/>
@@ -3836,6 +3899,7 @@
           <a:lstStyle/>
           <a:p>
             <a:pPr algn="ctr"/>
+            <a:endParaRPr/>
           </a:p>
         </p:txBody>
       </p:sp>
@@ -3856,7 +3920,7 @@
           <a:noFill/>
         </p:spPr>
         <p:txBody>
-          <a:bodyPr wrap="square" lIns="0" rIns="0" tIns="0" bIns="0">
+          <a:bodyPr wrap="square" lIns="0" tIns="0" rIns="0" bIns="0">
             <a:spAutoFit/>
           </a:bodyPr>
           <a:lstStyle/>
@@ -3907,7 +3971,7 @@
           <a:noFill/>
         </p:spPr>
         <p:txBody>
-          <a:bodyPr wrap="square" lIns="0" rIns="0" tIns="0" bIns="0">
+          <a:bodyPr wrap="square" lIns="0" tIns="0" rIns="0" bIns="0">
             <a:spAutoFit/>
           </a:bodyPr>
           <a:lstStyle/>
@@ -4010,6 +4074,7 @@
           <a:lstStyle/>
           <a:p>
             <a:pPr algn="ctr"/>
+            <a:endParaRPr/>
           </a:p>
         </p:txBody>
       </p:sp>
@@ -4030,7 +4095,7 @@
           <a:noFill/>
         </p:spPr>
         <p:txBody>
-          <a:bodyPr wrap="square" lIns="0" rIns="0" tIns="0" bIns="0">
+          <a:bodyPr wrap="square" lIns="0" tIns="0" rIns="0" bIns="0">
             <a:spAutoFit/>
           </a:bodyPr>
           <a:lstStyle/>
@@ -4044,7 +4109,7 @@
               </a:spcAft>
             </a:pPr>
             <a:r>
-              <a:rPr sz="2000" b="1">
+              <a:rPr sz="2000" b="1" dirty="0">
                 <a:solidFill>
                   <a:srgbClr val="4A90D9"/>
                 </a:solidFill>
@@ -4053,7 +4118,7 @@
               <a:t>N   </a:t>
             </a:r>
             <a:r>
-              <a:rPr sz="1000" b="1">
+              <a:rPr sz="1000" b="1" dirty="0">
                 <a:solidFill>
                   <a:srgbClr val="6B7683"/>
                 </a:solidFill>
@@ -4081,7 +4146,7 @@
           <a:noFill/>
         </p:spPr>
         <p:txBody>
-          <a:bodyPr wrap="square" lIns="0" rIns="0" tIns="0" bIns="0">
+          <a:bodyPr wrap="square" lIns="0" tIns="0" rIns="0" bIns="0">
             <a:spAutoFit/>
           </a:bodyPr>
           <a:lstStyle/>
@@ -4184,6 +4249,7 @@
           <a:lstStyle/>
           <a:p>
             <a:pPr algn="ctr"/>
+            <a:endParaRPr/>
           </a:p>
         </p:txBody>
       </p:sp>
@@ -4204,7 +4270,7 @@
           <a:noFill/>
         </p:spPr>
         <p:txBody>
-          <a:bodyPr wrap="square" lIns="0" rIns="0" tIns="0" bIns="0">
+          <a:bodyPr wrap="square" lIns="0" tIns="0" rIns="0" bIns="0">
             <a:spAutoFit/>
           </a:bodyPr>
           <a:lstStyle/>
@@ -4255,7 +4321,7 @@
           <a:noFill/>
         </p:spPr>
         <p:txBody>
-          <a:bodyPr wrap="square" lIns="0" rIns="0" tIns="0" bIns="0">
+          <a:bodyPr wrap="square" lIns="0" tIns="0" rIns="0" bIns="0">
             <a:spAutoFit/>
           </a:bodyPr>
           <a:lstStyle/>
@@ -4323,7 +4389,7 @@
         </p:nvSpPr>
         <p:spPr>
           <a:xfrm>
-            <a:off x="8110728" y="1993392"/>
+            <a:off x="8906256" y="2024549"/>
             <a:ext cx="4023360" cy="256032"/>
           </a:xfrm>
           <a:prstGeom prst="rect">
@@ -4332,7 +4398,7 @@
           <a:noFill/>
         </p:spPr>
         <p:txBody>
-          <a:bodyPr wrap="square" lIns="0" rIns="0" tIns="0" bIns="0">
+          <a:bodyPr wrap="square" lIns="0" tIns="0" rIns="0" bIns="0">
             <a:spAutoFit/>
           </a:bodyPr>
           <a:lstStyle/>
@@ -4343,7 +4409,7 @@
               </a:spcAft>
             </a:pPr>
             <a:r>
-              <a:rPr sz="1050" b="1" spc="120">
+              <a:rPr sz="1050" b="1" spc="120" dirty="0">
                 <a:solidFill>
                   <a:srgbClr val="F0C040"/>
                 </a:solidFill>
@@ -4371,7 +4437,7 @@
           <a:noFill/>
         </p:spPr>
         <p:txBody>
-          <a:bodyPr wrap="square" lIns="0" rIns="0" tIns="0" bIns="0">
+          <a:bodyPr wrap="square" lIns="0" tIns="0" rIns="0" bIns="0">
             <a:spAutoFit/>
           </a:bodyPr>
           <a:lstStyle/>
@@ -4410,7 +4476,7 @@
           <a:noFill/>
         </p:spPr>
         <p:txBody>
-          <a:bodyPr wrap="square" lIns="0" rIns="0" tIns="0" bIns="0">
+          <a:bodyPr wrap="square" lIns="0" tIns="0" rIns="0" bIns="0">
             <a:spAutoFit/>
           </a:bodyPr>
           <a:lstStyle/>
@@ -4471,7 +4537,7 @@
           </a:fontRef>
         </p:style>
         <p:txBody>
-          <a:bodyPr rtlCol="0" anchor="ctr" lIns="0" rIns="0" tIns="0" bIns="0"/>
+          <a:bodyPr lIns="0" tIns="0" rIns="0" bIns="0" rtlCol="0" anchor="ctr"/>
           <a:lstStyle/>
           <a:p>
             <a:pPr algn="ctr">
@@ -4530,7 +4596,7 @@
           </a:fontRef>
         </p:style>
         <p:txBody>
-          <a:bodyPr rtlCol="0" anchor="ctr" lIns="0" rIns="0" tIns="0" bIns="0"/>
+          <a:bodyPr lIns="0" tIns="0" rIns="0" bIns="0" rtlCol="0" anchor="ctr"/>
           <a:lstStyle/>
           <a:p>
             <a:pPr algn="ctr">
@@ -4567,7 +4633,7 @@
           <a:noFill/>
         </p:spPr>
         <p:txBody>
-          <a:bodyPr wrap="square" lIns="0" rIns="0" tIns="0" bIns="0">
+          <a:bodyPr wrap="square" lIns="0" tIns="0" rIns="0" bIns="0">
             <a:spAutoFit/>
           </a:bodyPr>
           <a:lstStyle/>
@@ -4628,7 +4694,7 @@
           </a:fontRef>
         </p:style>
         <p:txBody>
-          <a:bodyPr rtlCol="0" anchor="ctr" lIns="0" rIns="0" tIns="0" bIns="0"/>
+          <a:bodyPr lIns="0" tIns="0" rIns="0" bIns="0" rtlCol="0" anchor="ctr"/>
           <a:lstStyle/>
           <a:p>
             <a:pPr algn="ctr">
@@ -4687,7 +4753,7 @@
           </a:fontRef>
         </p:style>
         <p:txBody>
-          <a:bodyPr rtlCol="0" anchor="ctr" lIns="0" rIns="0" tIns="0" bIns="0"/>
+          <a:bodyPr lIns="0" tIns="0" rIns="0" bIns="0" rtlCol="0" anchor="ctr"/>
           <a:lstStyle/>
           <a:p>
             <a:pPr algn="ctr">
@@ -4724,7 +4790,7 @@
           <a:noFill/>
         </p:spPr>
         <p:txBody>
-          <a:bodyPr wrap="square" lIns="0" rIns="0" tIns="0" bIns="0">
+          <a:bodyPr wrap="square" lIns="0" tIns="0" rIns="0" bIns="0">
             <a:spAutoFit/>
           </a:bodyPr>
           <a:lstStyle/>
@@ -4785,7 +4851,7 @@
           </a:fontRef>
         </p:style>
         <p:txBody>
-          <a:bodyPr rtlCol="0" anchor="ctr" lIns="0" rIns="0" tIns="0" bIns="0"/>
+          <a:bodyPr lIns="0" tIns="0" rIns="0" bIns="0" rtlCol="0" anchor="ctr"/>
           <a:lstStyle/>
           <a:p>
             <a:pPr algn="ctr">
@@ -4844,7 +4910,7 @@
           </a:fontRef>
         </p:style>
         <p:txBody>
-          <a:bodyPr rtlCol="0" anchor="ctr" lIns="0" rIns="0" tIns="0" bIns="0"/>
+          <a:bodyPr lIns="0" tIns="0" rIns="0" bIns="0" rtlCol="0" anchor="ctr"/>
           <a:lstStyle/>
           <a:p>
             <a:pPr algn="ctr">
@@ -4872,7 +4938,7 @@
         </p:nvSpPr>
         <p:spPr>
           <a:xfrm>
-            <a:off x="8110728" y="3822192"/>
+            <a:off x="8140903" y="3822192"/>
             <a:ext cx="3392424" cy="384048"/>
           </a:xfrm>
           <a:prstGeom prst="rect">
@@ -4907,6 +4973,7 @@
           <a:lstStyle/>
           <a:p>
             <a:pPr algn="ctr"/>
+            <a:endParaRPr/>
           </a:p>
         </p:txBody>
       </p:sp>
@@ -4918,7 +4985,7 @@
         </p:nvSpPr>
         <p:spPr>
           <a:xfrm>
-            <a:off x="8238744" y="3913632"/>
+            <a:off x="8339328" y="3874685"/>
             <a:ext cx="3200400" cy="274320"/>
           </a:xfrm>
           <a:prstGeom prst="rect">
@@ -4927,7 +4994,7 @@
           <a:noFill/>
         </p:spPr>
         <p:txBody>
-          <a:bodyPr wrap="square" lIns="0" rIns="0" tIns="0" bIns="0">
+          <a:bodyPr wrap="square" lIns="0" tIns="0" rIns="0" bIns="0">
             <a:spAutoFit/>
           </a:bodyPr>
           <a:lstStyle/>
@@ -4941,7 +5008,7 @@
               </a:spcAft>
             </a:pPr>
             <a:r>
-              <a:rPr sz="1200" b="1">
+              <a:rPr sz="1200" b="1" dirty="0">
                 <a:solidFill>
                   <a:srgbClr val="F0C040"/>
                 </a:solidFill>
@@ -4950,7 +5017,7 @@
               <a:t>D  </a:t>
             </a:r>
             <a:r>
-              <a:rPr sz="1150" b="0">
+              <a:rPr sz="1150" b="0" dirty="0">
                 <a:solidFill>
                   <a:srgbClr val="E9EEF4"/>
                 </a:solidFill>
@@ -4978,7 +5045,7 @@
           <a:noFill/>
         </p:spPr>
         <p:txBody>
-          <a:bodyPr wrap="square" lIns="0" rIns="0" tIns="0" bIns="0">
+          <a:bodyPr wrap="square" lIns="0" tIns="0" rIns="0" bIns="0">
             <a:spAutoFit/>
           </a:bodyPr>
           <a:lstStyle/>
@@ -4992,7 +5059,7 @@
               </a:spcAft>
             </a:pPr>
             <a:r>
-              <a:rPr sz="1400" b="1">
+              <a:rPr sz="1400" b="1" dirty="0">
                 <a:solidFill>
                   <a:srgbClr val="4A9B4A"/>
                 </a:solidFill>
@@ -5001,7 +5068,7 @@
               <a:t>Capability cancels. </a:t>
             </a:r>
             <a:r>
-              <a:rPr sz="1400" b="0">
+              <a:rPr sz="1400" b="0" dirty="0">
                 <a:solidFill>
                   <a:srgbClr val="98A3B0"/>
                 </a:solidFill>
@@ -5010,7 +5077,7 @@
               <a:t>An additive competence edge appears in both of M's cells, so it drops out of the interaction  </a:t>
             </a:r>
             <a:r>
-              <a:rPr sz="1300" b="1">
+              <a:rPr sz="1300" b="1" dirty="0">
                 <a:solidFill>
                   <a:srgbClr val="E9EEF4"/>
                 </a:solidFill>
@@ -5019,7 +5086,7 @@
               <a:t>(M→M − N→M) − (M→N − N→N)</a:t>
             </a:r>
             <a:r>
-              <a:rPr sz="1400" b="0">
+              <a:rPr sz="1400" b="0" dirty="0">
                 <a:solidFill>
                   <a:srgbClr val="98A3B0"/>
                 </a:solidFill>
@@ -5038,7 +5105,7 @@
               </a:spcAft>
             </a:pPr>
             <a:r>
-              <a:rPr sz="1400" b="1">
+              <a:rPr sz="1400" b="1" dirty="0">
                 <a:solidFill>
                   <a:srgbClr val="F0C040"/>
                 </a:solidFill>
@@ -5047,7 +5114,7 @@
               <a:t>Leakage becomes the variable. </a:t>
             </a:r>
             <a:r>
-              <a:rPr sz="1400" b="0">
+              <a:rPr sz="1400" b="0" dirty="0">
                 <a:solidFill>
                   <a:srgbClr val="98A3B0"/>
                 </a:solidFill>
@@ -5056,7 +5123,7 @@
               <a:t>Four stimulus constructions on one shared 200-prompt pool, spanning surface baselines 0.54–0.85, with D fit per target column and gated on </a:t>
             </a:r>
             <a:r>
-              <a:rPr sz="1400" b="1">
+              <a:rPr sz="1400" b="1" dirty="0">
                 <a:solidFill>
                   <a:srgbClr val="E9EEF4"/>
                 </a:solidFill>
@@ -5065,7 +5132,7 @@
               <a:t>before</a:t>
             </a:r>
             <a:r>
-              <a:rPr sz="1400" b="0">
+              <a:rPr sz="1400" b="0" dirty="0">
                 <a:solidFill>
                   <a:srgbClr val="98A3B0"/>
                 </a:solidFill>
@@ -5084,7 +5151,7 @@
               </a:spcAft>
             </a:pPr>
             <a:r>
-              <a:rPr sz="1400" b="1">
+              <a:rPr sz="1400" b="1" dirty="0">
                 <a:solidFill>
                   <a:srgbClr val="4A90D9"/>
                 </a:solidFill>
@@ -5093,7 +5160,7 @@
               <a:t>The criterion. </a:t>
             </a:r>
             <a:r>
-              <a:rPr sz="1400" b="0">
+              <a:rPr sz="1400" b="0" dirty="0">
                 <a:solidFill>
                   <a:srgbClr val="98A3B0"/>
                 </a:solidFill>
@@ -5145,6 +5212,7 @@
           <a:lstStyle/>
           <a:p>
             <a:pPr algn="ctr"/>
+            <a:endParaRPr/>
           </a:p>
         </p:txBody>
       </p:sp>
@@ -5165,7 +5233,7 @@
           <a:noFill/>
         </p:spPr>
         <p:txBody>
-          <a:bodyPr wrap="square" lIns="0" rIns="0" tIns="0" bIns="0">
+          <a:bodyPr wrap="square" lIns="0" tIns="0" rIns="0" bIns="0">
             <a:spAutoFit/>
           </a:bodyPr>
           <a:lstStyle/>
@@ -5240,6 +5308,7 @@
           <a:lstStyle/>
           <a:p>
             <a:pPr algn="ctr"/>
+            <a:endParaRPr/>
           </a:p>
         </p:txBody>
       </p:sp>
@@ -5260,7 +5329,7 @@
           <a:noFill/>
         </p:spPr>
         <p:txBody>
-          <a:bodyPr wrap="square" lIns="0" rIns="0" tIns="0" bIns="0">
+          <a:bodyPr wrap="square" lIns="0" tIns="0" rIns="0" bIns="0">
             <a:spAutoFit/>
           </a:bodyPr>
           <a:lstStyle/>
@@ -5303,7 +5372,7 @@
 </file>
 
 <file path=ppt/slides/slide3.xml><?xml version="1.0" encoding="utf-8"?>
-<p:sld xmlns:a="http://schemas.openxmlformats.org/drawingml/2006/main" xmlns:p="http://schemas.openxmlformats.org/presentationml/2006/main" xmlns:r="http://schemas.openxmlformats.org/officeDocument/2006/relationships">
+<p:sld xmlns:a="http://schemas.openxmlformats.org/drawingml/2006/main" xmlns:r="http://schemas.openxmlformats.org/officeDocument/2006/relationships" xmlns:p="http://schemas.openxmlformats.org/presentationml/2006/main">
   <p:cSld>
     <p:bg>
       <p:bgPr>
@@ -5319,7 +5388,14 @@
         <p:cNvGrpSpPr/>
         <p:nvPr/>
       </p:nvGrpSpPr>
-      <p:grpSpPr/>
+      <p:grpSpPr>
+        <a:xfrm>
+          <a:off x="0" y="0"/>
+          <a:ext cx="0" cy="0"/>
+          <a:chOff x="0" y="0"/>
+          <a:chExt cx="0" cy="0"/>
+        </a:xfrm>
+      </p:grpSpPr>
       <p:sp>
         <p:nvSpPr>
           <p:cNvPr id="2" name="TextBox 1"/>
@@ -5337,7 +5413,7 @@
           <a:noFill/>
         </p:spPr>
         <p:txBody>
-          <a:bodyPr wrap="square" lIns="0" rIns="0" tIns="0" bIns="0">
+          <a:bodyPr wrap="square" lIns="0" tIns="0" rIns="0" bIns="0">
             <a:spAutoFit/>
           </a:bodyPr>
           <a:lstStyle/>
@@ -5376,7 +5452,7 @@
           <a:noFill/>
         </p:spPr>
         <p:txBody>
-          <a:bodyPr wrap="square" lIns="0" rIns="0" tIns="0" bIns="0">
+          <a:bodyPr wrap="square" lIns="0" tIns="0" rIns="0" bIns="0">
             <a:spAutoFit/>
           </a:bodyPr>
           <a:lstStyle/>
@@ -5442,6 +5518,7 @@
           <a:lstStyle/>
           <a:p>
             <a:pPr algn="ctr"/>
+            <a:endParaRPr/>
           </a:p>
         </p:txBody>
       </p:sp>
@@ -5478,7 +5555,7 @@
         <p:spPr>
           <a:xfrm>
             <a:off x="6903720" y="1700784"/>
-            <a:ext cx="4572000" cy="1005840"/>
+            <a:ext cx="4572000" cy="960120"/>
           </a:xfrm>
           <a:prstGeom prst="rect">
             <a:avLst/>
@@ -5486,7 +5563,7 @@
           <a:noFill/>
         </p:spPr>
         <p:txBody>
-          <a:bodyPr wrap="square" lIns="0" rIns="0" tIns="0" bIns="0">
+          <a:bodyPr wrap="square" lIns="0" tIns="0" rIns="0" bIns="0">
             <a:spAutoFit/>
           </a:bodyPr>
           <a:lstStyle/>
@@ -5522,7 +5599,7 @@
                 </a:solidFill>
                 <a:latin typeface="Calibri"/>
               </a:rPr>
-              <a:t>correlation between self-prediction accuracy and the 18-feature surface baseline, across ten columns</a:t>
+              <a:t>correlation between self-prediction accuracy and the 21-feature surface/textual baseline, across ten columns</a:t>
             </a:r>
           </a:p>
         </p:txBody>
@@ -5535,8 +5612,8 @@
         </p:nvSpPr>
         <p:spPr>
           <a:xfrm>
-            <a:off x="6903720" y="2779776"/>
-            <a:ext cx="4572000" cy="1005840"/>
+            <a:off x="6903720" y="2688336"/>
+            <a:ext cx="4572000" cy="960120"/>
           </a:xfrm>
           <a:prstGeom prst="rect">
             <a:avLst/>
@@ -5544,7 +5621,7 @@
           <a:noFill/>
         </p:spPr>
         <p:txBody>
-          <a:bodyPr wrap="square" lIns="0" rIns="0" tIns="0" bIns="0">
+          <a:bodyPr wrap="square" lIns="0" tIns="0" rIns="0" bIns="0">
             <a:spAutoFit/>
           </a:bodyPr>
           <a:lstStyle/>
@@ -5593,8 +5670,8 @@
         </p:nvSpPr>
         <p:spPr>
           <a:xfrm>
-            <a:off x="6903720" y="3858768"/>
-            <a:ext cx="4572000" cy="1005840"/>
+            <a:off x="6903720" y="3675888"/>
+            <a:ext cx="4572000" cy="960120"/>
           </a:xfrm>
           <a:prstGeom prst="rect">
             <a:avLst/>
@@ -5602,7 +5679,7 @@
           <a:noFill/>
         </p:spPr>
         <p:txBody>
-          <a:bodyPr wrap="square" lIns="0" rIns="0" tIns="0" bIns="0">
+          <a:bodyPr wrap="square" lIns="0" tIns="0" rIns="0" bIns="0">
             <a:spAutoFit/>
           </a:bodyPr>
           <a:lstStyle/>
@@ -5645,14 +5722,56 @@
       </p:sp>
       <p:sp>
         <p:nvSpPr>
-          <p:cNvPr id="9" name="Rectangle 8"/>
+          <p:cNvPr id="9" name="TextBox 8"/>
+          <p:cNvSpPr txBox="1"/>
+          <p:nvPr/>
+        </p:nvSpPr>
+        <p:spPr>
+          <a:xfrm>
+            <a:off x="6903720" y="4645152"/>
+            <a:ext cx="4617720" cy="384048"/>
+          </a:xfrm>
+          <a:prstGeom prst="rect">
+            <a:avLst/>
+          </a:prstGeom>
+          <a:noFill/>
+        </p:spPr>
+        <p:txBody>
+          <a:bodyPr wrap="square" lIns="0" tIns="0" rIns="0" bIns="0">
+            <a:spAutoFit/>
+          </a:bodyPr>
+          <a:lstStyle/>
+          <a:p>
+            <a:pPr algn="l">
+              <a:lnSpc>
+                <a:spcPct val="120000"/>
+              </a:lnSpc>
+              <a:spcAft>
+                <a:spcPts val="800"/>
+              </a:spcAft>
+            </a:pPr>
+            <a:r>
+              <a:rPr sz="1150" b="0">
+                <a:solidFill>
+                  <a:srgbClr val="6B7683"/>
+                </a:solidFill>
+                <a:latin typeface="Calibri"/>
+              </a:rPr>
+              <a:t>21 textual features: 18 structural/style + 3 preregistered persona-linked lexical rates</a:t>
+            </a:r>
+          </a:p>
+        </p:txBody>
+      </p:sp>
+      <p:sp>
+        <p:nvSpPr>
+          <p:cNvPr id="10" name="Rectangle 9"/>
           <p:cNvSpPr/>
           <p:nvPr/>
         </p:nvSpPr>
         <p:spPr>
           <a:xfrm>
-            <a:off x="6903720" y="4974336"/>
-            <a:ext cx="4617720" cy="1188720"/>
+            <a:off x="6903720" y="5111495"/>
+            <a:ext cx="4617720" cy="1115568"/>
           </a:xfrm>
           <a:prstGeom prst="rect">
             <a:avLst/>
@@ -5686,57 +5805,7 @@
           <a:lstStyle/>
           <a:p>
             <a:pPr algn="ctr"/>
-          </a:p>
-        </p:txBody>
-      </p:sp>
-      <p:sp>
-        <p:nvSpPr>
-          <p:cNvPr id="10" name="TextBox 9"/>
-          <p:cNvSpPr txBox="1"/>
-          <p:nvPr/>
-        </p:nvSpPr>
-        <p:spPr>
-          <a:xfrm>
-            <a:off x="7068312" y="5102352"/>
-            <a:ext cx="4297680" cy="960120"/>
-          </a:xfrm>
-          <a:prstGeom prst="rect">
-            <a:avLst/>
-          </a:prstGeom>
-          <a:noFill/>
-        </p:spPr>
-        <p:txBody>
-          <a:bodyPr wrap="square" lIns="0" rIns="0" tIns="0" bIns="0">
-            <a:spAutoFit/>
-          </a:bodyPr>
-          <a:lstStyle/>
-          <a:p>
-            <a:pPr algn="l">
-              <a:lnSpc>
-                <a:spcPct val="122000"/>
-              </a:lnSpc>
-              <a:spcAft>
-                <a:spcPts val="0"/>
-              </a:spcAft>
-            </a:pPr>
-            <a:r>
-              <a:rPr sz="1250" b="1">
-                <a:solidFill>
-                  <a:srgbClr val="E24A4A"/>
-                </a:solidFill>
-                <a:latin typeface="Calibri"/>
-              </a:rPr>
-              <a:t>Caveat.  </a:t>
-            </a:r>
-            <a:r>
-              <a:rPr sz="1250" b="0">
-                <a:solidFill>
-                  <a:srgbClr val="E9EEF4"/>
-                </a:solidFill>
-                <a:latin typeface="Calibri"/>
-              </a:rPr>
-              <a:t>VO-D also changed the behavioural expression of the hidden property, so it is not a clean causal isolation of style: the two personas largely converged on the same recommendation.</a:t>
-            </a:r>
+            <a:endParaRPr/>
           </a:p>
         </p:txBody>
       </p:sp>
@@ -5748,8 +5817,8 @@
         </p:nvSpPr>
         <p:spPr>
           <a:xfrm>
-            <a:off x="658368" y="5870448"/>
-            <a:ext cx="6035040" cy="365760"/>
+            <a:off x="7068312" y="5175504"/>
+            <a:ext cx="4297680" cy="914400"/>
           </a:xfrm>
           <a:prstGeom prst="rect">
             <a:avLst/>
@@ -5757,7 +5826,7 @@
           <a:noFill/>
         </p:spPr>
         <p:txBody>
-          <a:bodyPr wrap="square" lIns="0" rIns="0" tIns="0" bIns="0">
+          <a:bodyPr wrap="square" lIns="0" tIns="0" rIns="0" bIns="0">
             <a:spAutoFit/>
           </a:bodyPr>
           <a:lstStyle/>
@@ -5767,24 +5836,93 @@
                 <a:spcPct val="120000"/>
               </a:lnSpc>
               <a:spcAft>
+                <a:spcPts val="0"/>
+              </a:spcAft>
+            </a:pPr>
+            <a:r>
+              <a:rPr sz="1250" b="1" dirty="0">
+                <a:solidFill>
+                  <a:srgbClr val="E24A4A"/>
+                </a:solidFill>
+                <a:latin typeface="Calibri"/>
+              </a:rPr>
+              <a:t>Caveat.  </a:t>
+            </a:r>
+            <a:r>
+              <a:rPr sz="1250" b="0" dirty="0">
+                <a:solidFill>
+                  <a:srgbClr val="E9EEF4"/>
+                </a:solidFill>
+                <a:latin typeface="Calibri"/>
+              </a:rPr>
+              <a:t>VO-D/VO-E also changed the </a:t>
+            </a:r>
+            <a:r>
+              <a:rPr sz="1250" b="0" dirty="0" err="1">
+                <a:solidFill>
+                  <a:srgbClr val="E9EEF4"/>
+                </a:solidFill>
+                <a:latin typeface="Calibri"/>
+              </a:rPr>
+              <a:t>behavioural</a:t>
+            </a:r>
+            <a:r>
+              <a:rPr sz="1250" b="0" dirty="0">
+                <a:solidFill>
+                  <a:srgbClr val="E9EEF4"/>
+                </a:solidFill>
+                <a:latin typeface="Calibri"/>
+              </a:rPr>
+              <a:t> expression of the hidden property, so they are not clean causal isolation of style: the two personas largely converged on the same recommendation.</a:t>
+            </a:r>
+          </a:p>
+        </p:txBody>
+      </p:sp>
+      <p:sp>
+        <p:nvSpPr>
+          <p:cNvPr id="12" name="TextBox 11"/>
+          <p:cNvSpPr txBox="1"/>
+          <p:nvPr/>
+        </p:nvSpPr>
+        <p:spPr>
+          <a:xfrm>
+            <a:off x="658368" y="5870448"/>
+            <a:ext cx="6035040" cy="206851"/>
+          </a:xfrm>
+          <a:prstGeom prst="rect">
+            <a:avLst/>
+          </a:prstGeom>
+          <a:noFill/>
+        </p:spPr>
+        <p:txBody>
+          <a:bodyPr wrap="square" lIns="0" tIns="0" rIns="0" bIns="0">
+            <a:spAutoFit/>
+          </a:bodyPr>
+          <a:lstStyle/>
+          <a:p>
+            <a:pPr algn="l">
+              <a:lnSpc>
+                <a:spcPct val="120000"/>
+              </a:lnSpc>
+              <a:spcAft>
                 <a:spcPts val="800"/>
               </a:spcAft>
             </a:pPr>
             <a:r>
-              <a:rPr sz="1200" b="0">
-                <a:solidFill>
-                  <a:srgbClr val="6B7683"/>
+              <a:rPr sz="1200" b="0" dirty="0">
+                <a:solidFill>
+                  <a:schemeClr val="bg1"/>
                 </a:solidFill>
                 <a:latin typeface="Calibri"/>
               </a:rPr>
-              <a:t>Points at or below the diagonal: a stylometric baseline matches or beats the model.</a:t>
-            </a:r>
-          </a:p>
-        </p:txBody>
-      </p:sp>
-      <p:sp>
-        <p:nvSpPr>
-          <p:cNvPr id="12" name="Rectangle 11"/>
+              <a:t>Points at or below the diagonal: a surface/textual baseline matches or beats the model.</a:t>
+            </a:r>
+          </a:p>
+        </p:txBody>
+      </p:sp>
+      <p:sp>
+        <p:nvSpPr>
+          <p:cNvPr id="13" name="Rectangle 12"/>
           <p:cNvSpPr/>
           <p:nvPr/>
         </p:nvSpPr>
@@ -5823,12 +5961,13 @@
           <a:lstStyle/>
           <a:p>
             <a:pPr algn="ctr"/>
-          </a:p>
-        </p:txBody>
-      </p:sp>
-      <p:sp>
-        <p:nvSpPr>
-          <p:cNvPr id="13" name="TextBox 12"/>
+            <a:endParaRPr/>
+          </a:p>
+        </p:txBody>
+      </p:sp>
+      <p:sp>
+        <p:nvSpPr>
+          <p:cNvPr id="14" name="TextBox 13"/>
           <p:cNvSpPr txBox="1"/>
           <p:nvPr/>
         </p:nvSpPr>
@@ -5843,7 +5982,7 @@
           <a:noFill/>
         </p:spPr>
         <p:txBody>
-          <a:bodyPr wrap="square" lIns="0" rIns="0" tIns="0" bIns="0">
+          <a:bodyPr wrap="square" lIns="0" tIns="0" rIns="0" bIns="0">
             <a:spAutoFit/>
           </a:bodyPr>
           <a:lstStyle/>
@@ -5886,7 +6025,7 @@
 </file>
 
 <file path=ppt/slides/slide4.xml><?xml version="1.0" encoding="utf-8"?>
-<p:sld xmlns:a="http://schemas.openxmlformats.org/drawingml/2006/main" xmlns:p="http://schemas.openxmlformats.org/presentationml/2006/main" xmlns:r="http://schemas.openxmlformats.org/officeDocument/2006/relationships">
+<p:sld xmlns:a="http://schemas.openxmlformats.org/drawingml/2006/main" xmlns:r="http://schemas.openxmlformats.org/officeDocument/2006/relationships" xmlns:p="http://schemas.openxmlformats.org/presentationml/2006/main">
   <p:cSld>
     <p:bg>
       <p:bgPr>
@@ -5902,7 +6041,14 @@
         <p:cNvGrpSpPr/>
         <p:nvPr/>
       </p:nvGrpSpPr>
-      <p:grpSpPr/>
+      <p:grpSpPr>
+        <a:xfrm>
+          <a:off x="0" y="0"/>
+          <a:ext cx="0" cy="0"/>
+          <a:chOff x="0" y="0"/>
+          <a:chExt cx="0" cy="0"/>
+        </a:xfrm>
+      </p:grpSpPr>
       <p:sp>
         <p:nvSpPr>
           <p:cNvPr id="2" name="TextBox 1"/>
@@ -5920,7 +6066,7 @@
           <a:noFill/>
         </p:spPr>
         <p:txBody>
-          <a:bodyPr wrap="square" lIns="0" rIns="0" tIns="0" bIns="0">
+          <a:bodyPr wrap="square" lIns="0" tIns="0" rIns="0" bIns="0">
             <a:spAutoFit/>
           </a:bodyPr>
           <a:lstStyle/>
@@ -5959,7 +6105,7 @@
           <a:noFill/>
         </p:spPr>
         <p:txBody>
-          <a:bodyPr wrap="square" lIns="0" rIns="0" tIns="0" bIns="0">
+          <a:bodyPr wrap="square" lIns="0" tIns="0" rIns="0" bIns="0">
             <a:spAutoFit/>
           </a:bodyPr>
           <a:lstStyle/>
@@ -5979,7 +6125,7 @@
                 </a:solidFill>
                 <a:latin typeface="Calibri"/>
               </a:rPr>
-              <a:t>No self-advantage on the target column — and one positive interaction</a:t>
+              <a:t>No positive raw M-target advantage — and one positive interaction</a:t>
             </a:r>
           </a:p>
         </p:txBody>
@@ -6003,10 +6149,34 @@
                 <a:tableStyleId>{5C22544A-7EE6-4342-B048-85BDC9FD1C3A}</a:tableStyleId>
               </a:tblPr>
               <a:tblGrid>
-                <a:gridCol w="2148840"/>
-                <a:gridCol w="1417320"/>
-                <a:gridCol w="2331720"/>
-                <a:gridCol w="2331720"/>
+                <a:gridCol w="2148840">
+                  <a:extLst>
+                    <a:ext uri="{9D8B030D-6E8A-4147-A177-3AD203B41FA5}">
+                      <a16:colId xmlns:a16="http://schemas.microsoft.com/office/drawing/2014/main" val="20000"/>
+                    </a:ext>
+                  </a:extLst>
+                </a:gridCol>
+                <a:gridCol w="1417320">
+                  <a:extLst>
+                    <a:ext uri="{9D8B030D-6E8A-4147-A177-3AD203B41FA5}">
+                      <a16:colId xmlns:a16="http://schemas.microsoft.com/office/drawing/2014/main" val="20001"/>
+                    </a:ext>
+                  </a:extLst>
+                </a:gridCol>
+                <a:gridCol w="2331720">
+                  <a:extLst>
+                    <a:ext uri="{9D8B030D-6E8A-4147-A177-3AD203B41FA5}">
+                      <a16:colId xmlns:a16="http://schemas.microsoft.com/office/drawing/2014/main" val="20002"/>
+                    </a:ext>
+                  </a:extLst>
+                </a:gridCol>
+                <a:gridCol w="2331720">
+                  <a:extLst>
+                    <a:ext uri="{9D8B030D-6E8A-4147-A177-3AD203B41FA5}">
+                      <a16:colId xmlns:a16="http://schemas.microsoft.com/office/drawing/2014/main" val="20003"/>
+                    </a:ext>
+                  </a:extLst>
+                </a:gridCol>
               </a:tblGrid>
               <a:tr h="457200">
                 <a:tc>
@@ -6026,7 +6196,7 @@
                       </a:r>
                     </a:p>
                   </a:txBody>
-                  <a:tcPr marL="91440" marR="91440" anchor="ctr">
+                  <a:tcPr anchor="ctr">
                     <a:solidFill>
                       <a:srgbClr val="0D1117"/>
                     </a:solidFill>
@@ -6061,7 +6231,7 @@
                       </a:r>
                     </a:p>
                   </a:txBody>
-                  <a:tcPr marL="91440" marR="91440" anchor="ctr">
+                  <a:tcPr anchor="ctr">
                     <a:solidFill>
                       <a:srgbClr val="0D1117"/>
                     </a:solidFill>
@@ -6096,7 +6266,7 @@
                       </a:r>
                     </a:p>
                   </a:txBody>
-                  <a:tcPr marL="91440" marR="91440" anchor="ctr">
+                  <a:tcPr anchor="ctr">
                     <a:solidFill>
                       <a:srgbClr val="0D1117"/>
                     </a:solidFill>
@@ -6131,12 +6301,17 @@
                       </a:r>
                     </a:p>
                   </a:txBody>
-                  <a:tcPr marL="91440" marR="91440" anchor="ctr">
+                  <a:tcPr anchor="ctr">
                     <a:solidFill>
                       <a:srgbClr val="0D1117"/>
                     </a:solidFill>
                   </a:tcPr>
                 </a:tc>
+                <a:extLst>
+                  <a:ext uri="{0D108BD9-81ED-4DB2-BD59-A6C34878D82A}">
+                    <a16:rowId xmlns:a16="http://schemas.microsoft.com/office/drawing/2014/main" val="10000"/>
+                  </a:ext>
+                </a:extLst>
               </a:tr>
               <a:tr h="457200">
                 <a:tc>
@@ -6156,7 +6331,7 @@
                       </a:r>
                     </a:p>
                   </a:txBody>
-                  <a:tcPr marL="91440" marR="91440" anchor="ctr">
+                  <a:tcPr anchor="ctr">
                     <a:solidFill>
                       <a:srgbClr val="161B22"/>
                     </a:solidFill>
@@ -6179,7 +6354,7 @@
                       </a:r>
                     </a:p>
                   </a:txBody>
-                  <a:tcPr marL="91440" marR="91440" anchor="ctr">
+                  <a:tcPr anchor="ctr">
                     <a:solidFill>
                       <a:srgbClr val="161B22"/>
                     </a:solidFill>
@@ -6202,7 +6377,7 @@
                       </a:r>
                     </a:p>
                   </a:txBody>
-                  <a:tcPr marL="91440" marR="91440" anchor="ctr">
+                  <a:tcPr anchor="ctr">
                     <a:solidFill>
                       <a:srgbClr val="161B22"/>
                     </a:solidFill>
@@ -6225,12 +6400,17 @@
                       </a:r>
                     </a:p>
                   </a:txBody>
-                  <a:tcPr marL="91440" marR="91440" anchor="ctr">
+                  <a:tcPr anchor="ctr">
                     <a:solidFill>
                       <a:srgbClr val="161B22"/>
                     </a:solidFill>
                   </a:tcPr>
                 </a:tc>
+                <a:extLst>
+                  <a:ext uri="{0D108BD9-81ED-4DB2-BD59-A6C34878D82A}">
+                    <a16:rowId xmlns:a16="http://schemas.microsoft.com/office/drawing/2014/main" val="10001"/>
+                  </a:ext>
+                </a:extLst>
               </a:tr>
               <a:tr h="457200">
                 <a:tc>
@@ -6250,7 +6430,7 @@
                       </a:r>
                     </a:p>
                   </a:txBody>
-                  <a:tcPr marL="91440" marR="91440" anchor="ctr">
+                  <a:tcPr anchor="ctr">
                     <a:solidFill>
                       <a:srgbClr val="161B22"/>
                     </a:solidFill>
@@ -6273,7 +6453,7 @@
                       </a:r>
                     </a:p>
                   </a:txBody>
-                  <a:tcPr marL="91440" marR="91440" anchor="ctr">
+                  <a:tcPr anchor="ctr">
                     <a:solidFill>
                       <a:srgbClr val="161B22"/>
                     </a:solidFill>
@@ -6296,7 +6476,7 @@
                       </a:r>
                     </a:p>
                   </a:txBody>
-                  <a:tcPr marL="91440" marR="91440" anchor="ctr">
+                  <a:tcPr anchor="ctr">
                     <a:solidFill>
                       <a:srgbClr val="161B22"/>
                     </a:solidFill>
@@ -6319,12 +6499,17 @@
                       </a:r>
                     </a:p>
                   </a:txBody>
-                  <a:tcPr marL="91440" marR="91440" anchor="ctr">
+                  <a:tcPr anchor="ctr">
                     <a:solidFill>
                       <a:srgbClr val="161B22"/>
                     </a:solidFill>
                   </a:tcPr>
                 </a:tc>
+                <a:extLst>
+                  <a:ext uri="{0D108BD9-81ED-4DB2-BD59-A6C34878D82A}">
+                    <a16:rowId xmlns:a16="http://schemas.microsoft.com/office/drawing/2014/main" val="10002"/>
+                  </a:ext>
+                </a:extLst>
               </a:tr>
               <a:tr h="457200">
                 <a:tc>
@@ -6344,7 +6529,7 @@
                       </a:r>
                     </a:p>
                   </a:txBody>
-                  <a:tcPr marL="91440" marR="91440" anchor="ctr">
+                  <a:tcPr anchor="ctr">
                     <a:solidFill>
                       <a:srgbClr val="161B22"/>
                     </a:solidFill>
@@ -6367,7 +6552,7 @@
                       </a:r>
                     </a:p>
                   </a:txBody>
-                  <a:tcPr marL="91440" marR="91440" anchor="ctr">
+                  <a:tcPr anchor="ctr">
                     <a:solidFill>
                       <a:srgbClr val="161B22"/>
                     </a:solidFill>
@@ -6390,7 +6575,7 @@
                       </a:r>
                     </a:p>
                   </a:txBody>
-                  <a:tcPr marL="91440" marR="91440" anchor="ctr">
+                  <a:tcPr anchor="ctr">
                     <a:solidFill>
                       <a:srgbClr val="161B22"/>
                     </a:solidFill>
@@ -6413,12 +6598,17 @@
                       </a:r>
                     </a:p>
                   </a:txBody>
-                  <a:tcPr marL="91440" marR="91440" anchor="ctr">
+                  <a:tcPr anchor="ctr">
                     <a:solidFill>
                       <a:srgbClr val="161B22"/>
                     </a:solidFill>
                   </a:tcPr>
                 </a:tc>
+                <a:extLst>
+                  <a:ext uri="{0D108BD9-81ED-4DB2-BD59-A6C34878D82A}">
+                    <a16:rowId xmlns:a16="http://schemas.microsoft.com/office/drawing/2014/main" val="10003"/>
+                  </a:ext>
+                </a:extLst>
               </a:tr>
               <a:tr h="457200">
                 <a:tc>
@@ -6438,7 +6628,7 @@
                       </a:r>
                     </a:p>
                   </a:txBody>
-                  <a:tcPr marL="91440" marR="91440" anchor="ctr">
+                  <a:tcPr anchor="ctr">
                     <a:solidFill>
                       <a:srgbClr val="1A1F2E"/>
                     </a:solidFill>
@@ -6461,7 +6651,7 @@
                       </a:r>
                     </a:p>
                   </a:txBody>
-                  <a:tcPr marL="91440" marR="91440" anchor="ctr">
+                  <a:tcPr anchor="ctr">
                     <a:solidFill>
                       <a:srgbClr val="1A1F2E"/>
                     </a:solidFill>
@@ -6484,7 +6674,7 @@
                       </a:r>
                     </a:p>
                   </a:txBody>
-                  <a:tcPr marL="91440" marR="91440" anchor="ctr">
+                  <a:tcPr anchor="ctr">
                     <a:solidFill>
                       <a:srgbClr val="1A1F2E"/>
                     </a:solidFill>
@@ -6507,12 +6697,17 @@
                       </a:r>
                     </a:p>
                   </a:txBody>
-                  <a:tcPr marL="91440" marR="91440" anchor="ctr">
+                  <a:tcPr anchor="ctr">
                     <a:solidFill>
                       <a:srgbClr val="1A1F2E"/>
                     </a:solidFill>
                   </a:tcPr>
                 </a:tc>
+                <a:extLst>
+                  <a:ext uri="{0D108BD9-81ED-4DB2-BD59-A6C34878D82A}">
+                    <a16:rowId xmlns:a16="http://schemas.microsoft.com/office/drawing/2014/main" val="10004"/>
+                  </a:ext>
+                </a:extLst>
               </a:tr>
             </a:tbl>
           </a:graphicData>
@@ -6557,7 +6752,7 @@
           </a:fontRef>
         </p:style>
         <p:txBody>
-          <a:bodyPr rtlCol="0" anchor="ctr" wrap="square" lIns="146304" rIns="146304" tIns="146304"/>
+          <a:bodyPr wrap="square" lIns="146304" tIns="146304" rIns="146304" rtlCol="0" anchor="ctr"/>
           <a:lstStyle/>
           <a:p>
             <a:pPr algn="l">
@@ -6629,7 +6824,7 @@
           <a:noFill/>
         </p:spPr>
         <p:txBody>
-          <a:bodyPr wrap="square" lIns="0" rIns="0" tIns="0" bIns="0">
+          <a:bodyPr wrap="square" lIns="0" tIns="0" rIns="0" bIns="0">
             <a:spAutoFit/>
           </a:bodyPr>
           <a:lstStyle/>
@@ -6764,7 +6959,7 @@
           </a:fontRef>
         </p:style>
         <p:txBody>
-          <a:bodyPr rtlCol="0" anchor="ctr" lIns="182880"/>
+          <a:bodyPr lIns="182880" rtlCol="0" anchor="ctr"/>
           <a:lstStyle/>
           <a:p>
             <a:pPr algn="l">
@@ -6837,6 +7032,7 @@
           <a:lstStyle/>
           <a:p>
             <a:pPr algn="ctr"/>
+            <a:endParaRPr/>
           </a:p>
         </p:txBody>
       </p:sp>
@@ -6857,7 +7053,7 @@
           <a:noFill/>
         </p:spPr>
         <p:txBody>
-          <a:bodyPr wrap="square" lIns="0" rIns="0" tIns="0" bIns="0">
+          <a:bodyPr wrap="square" lIns="0" tIns="0" rIns="0" bIns="0">
             <a:spAutoFit/>
           </a:bodyPr>
           <a:lstStyle/>
@@ -6900,7 +7096,7 @@
 </file>
 
 <file path=ppt/slides/slide5.xml><?xml version="1.0" encoding="utf-8"?>
-<p:sld xmlns:a="http://schemas.openxmlformats.org/drawingml/2006/main" xmlns:p="http://schemas.openxmlformats.org/presentationml/2006/main" xmlns:r="http://schemas.openxmlformats.org/officeDocument/2006/relationships">
+<p:sld xmlns:a="http://schemas.openxmlformats.org/drawingml/2006/main" xmlns:r="http://schemas.openxmlformats.org/officeDocument/2006/relationships" xmlns:p="http://schemas.openxmlformats.org/presentationml/2006/main">
   <p:cSld>
     <p:bg>
       <p:bgPr>
@@ -6916,7 +7112,14 @@
         <p:cNvGrpSpPr/>
         <p:nvPr/>
       </p:nvGrpSpPr>
-      <p:grpSpPr/>
+      <p:grpSpPr>
+        <a:xfrm>
+          <a:off x="0" y="0"/>
+          <a:ext cx="0" cy="0"/>
+          <a:chOff x="0" y="0"/>
+          <a:chExt cx="0" cy="0"/>
+        </a:xfrm>
+      </p:grpSpPr>
       <p:sp>
         <p:nvSpPr>
           <p:cNvPr id="2" name="TextBox 1"/>
@@ -6934,7 +7137,7 @@
           <a:noFill/>
         </p:spPr>
         <p:txBody>
-          <a:bodyPr wrap="square" lIns="0" rIns="0" tIns="0" bIns="0">
+          <a:bodyPr wrap="square" lIns="0" tIns="0" rIns="0" bIns="0">
             <a:spAutoFit/>
           </a:bodyPr>
           <a:lstStyle/>
@@ -6973,7 +7176,7 @@
           <a:noFill/>
         </p:spPr>
         <p:txBody>
-          <a:bodyPr wrap="square" lIns="0" rIns="0" tIns="0" bIns="0">
+          <a:bodyPr wrap="square" lIns="0" tIns="0" rIns="0" bIns="0">
             <a:spAutoFit/>
           </a:bodyPr>
           <a:lstStyle/>
@@ -7007,6 +7210,654 @@
         <p:spPr>
           <a:xfrm>
             <a:off x="658368" y="1572768"/>
+            <a:ext cx="3456432" cy="2084831"/>
+          </a:xfrm>
+          <a:prstGeom prst="rect">
+            <a:avLst/>
+          </a:prstGeom>
+          <a:solidFill>
+            <a:srgbClr val="161B22"/>
+          </a:solidFill>
+          <a:ln w="12700">
+            <a:solidFill>
+              <a:srgbClr val="4A9B4A"/>
+            </a:solidFill>
+          </a:ln>
+          <a:effectLst/>
+        </p:spPr>
+        <p:style>
+          <a:lnRef idx="1">
+            <a:schemeClr val="accent1"/>
+          </a:lnRef>
+          <a:fillRef idx="3">
+            <a:schemeClr val="accent1"/>
+          </a:fillRef>
+          <a:effectRef idx="2">
+            <a:schemeClr val="accent1"/>
+          </a:effectRef>
+          <a:fontRef idx="minor">
+            <a:schemeClr val="lt1"/>
+          </a:fontRef>
+        </p:style>
+        <p:txBody>
+          <a:bodyPr rtlCol="0" anchor="ctr"/>
+          <a:lstStyle/>
+          <a:p>
+            <a:pPr algn="ctr"/>
+            <a:endParaRPr/>
+          </a:p>
+        </p:txBody>
+      </p:sp>
+      <p:sp>
+        <p:nvSpPr>
+          <p:cNvPr id="5" name="TextBox 4"/>
+          <p:cNvSpPr txBox="1"/>
+          <p:nvPr/>
+        </p:nvSpPr>
+        <p:spPr>
+          <a:xfrm>
+            <a:off x="841248" y="1664208"/>
+            <a:ext cx="3090672" cy="1463040"/>
+          </a:xfrm>
+          <a:prstGeom prst="rect">
+            <a:avLst/>
+          </a:prstGeom>
+          <a:noFill/>
+        </p:spPr>
+        <p:txBody>
+          <a:bodyPr wrap="square" lIns="0" tIns="0" rIns="0" bIns="0">
+            <a:spAutoFit/>
+          </a:bodyPr>
+          <a:lstStyle/>
+          <a:p>
+            <a:pPr algn="l">
+              <a:spcAft>
+                <a:spcPts val="100"/>
+              </a:spcAft>
+            </a:pPr>
+            <a:r>
+              <a:rPr sz="950" b="1" spc="100">
+                <a:solidFill>
+                  <a:srgbClr val="4A9B4A"/>
+                </a:solidFill>
+                <a:latin typeface="Consolas"/>
+              </a:rPr>
+              <a:t>MODEL RESULT</a:t>
+            </a:r>
+          </a:p>
+          <a:p>
+            <a:pPr algn="l">
+              <a:spcAft>
+                <a:spcPts val="200"/>
+              </a:spcAft>
+            </a:pPr>
+            <a:r>
+              <a:rPr sz="1300" b="1">
+                <a:solidFill>
+                  <a:srgbClr val="E9EEF4"/>
+                </a:solidFill>
+                <a:latin typeface="Calibri"/>
+              </a:rPr>
+              <a:t>Hermes-3 self-prediction</a:t>
+            </a:r>
+          </a:p>
+          <a:p>
+            <a:pPr algn="l">
+              <a:spcAft>
+                <a:spcPts val="200"/>
+              </a:spcAft>
+            </a:pPr>
+            <a:r>
+              <a:rPr sz="3600" b="1">
+                <a:solidFill>
+                  <a:srgbClr val="4A9B4A"/>
+                </a:solidFill>
+                <a:latin typeface="Consolas"/>
+              </a:rPr>
+              <a:t>0.719</a:t>
+            </a:r>
+          </a:p>
+          <a:p>
+            <a:pPr algn="l">
+              <a:lnSpc>
+                <a:spcPct val="116000"/>
+              </a:lnSpc>
+              <a:spcAft>
+                <a:spcPts val="0"/>
+              </a:spcAft>
+            </a:pPr>
+            <a:r>
+              <a:rPr sz="1150" b="0">
+                <a:solidFill>
+                  <a:srgbClr val="98A3B0"/>
+                </a:solidFill>
+                <a:latin typeface="Calibri"/>
+              </a:rPr>
+              <a:t>balanced accuracy [0.675, 0.762]</a:t>
+            </a:r>
+          </a:p>
+          <a:p>
+            <a:pPr algn="l">
+              <a:lnSpc>
+                <a:spcPct val="116000"/>
+              </a:lnSpc>
+              <a:spcAft>
+                <a:spcPts val="0"/>
+              </a:spcAft>
+            </a:pPr>
+            <a:r>
+              <a:rPr sz="1150" b="0">
+                <a:solidFill>
+                  <a:srgbClr val="98A3B0"/>
+                </a:solidFill>
+                <a:latin typeface="Calibri"/>
+              </a:rPr>
+              <a:t>discrimination +0.437</a:t>
+            </a:r>
+          </a:p>
+        </p:txBody>
+      </p:sp>
+      <p:sp>
+        <p:nvSpPr>
+          <p:cNvPr id="6" name="Rectangle 5"/>
+          <p:cNvSpPr/>
+          <p:nvPr/>
+        </p:nvSpPr>
+        <p:spPr>
+          <a:xfrm>
+            <a:off x="841248" y="3145536"/>
+            <a:ext cx="3090672" cy="137160"/>
+          </a:xfrm>
+          <a:prstGeom prst="rect">
+            <a:avLst/>
+          </a:prstGeom>
+          <a:solidFill>
+            <a:srgbClr val="1A1F2E"/>
+          </a:solidFill>
+          <a:ln>
+            <a:noFill/>
+          </a:ln>
+          <a:effectLst/>
+        </p:spPr>
+        <p:style>
+          <a:lnRef idx="1">
+            <a:schemeClr val="accent1"/>
+          </a:lnRef>
+          <a:fillRef idx="3">
+            <a:schemeClr val="accent1"/>
+          </a:fillRef>
+          <a:effectRef idx="2">
+            <a:schemeClr val="accent1"/>
+          </a:effectRef>
+          <a:fontRef idx="minor">
+            <a:schemeClr val="lt1"/>
+          </a:fontRef>
+        </p:style>
+        <p:txBody>
+          <a:bodyPr rtlCol="0" anchor="ctr"/>
+          <a:lstStyle/>
+          <a:p>
+            <a:pPr algn="ctr"/>
+            <a:endParaRPr/>
+          </a:p>
+        </p:txBody>
+      </p:sp>
+      <p:sp>
+        <p:nvSpPr>
+          <p:cNvPr id="7" name="Rectangle 6"/>
+          <p:cNvSpPr/>
+          <p:nvPr/>
+        </p:nvSpPr>
+        <p:spPr>
+          <a:xfrm>
+            <a:off x="841248" y="3145536"/>
+            <a:ext cx="1692142" cy="137160"/>
+          </a:xfrm>
+          <a:prstGeom prst="rect">
+            <a:avLst/>
+          </a:prstGeom>
+          <a:solidFill>
+            <a:srgbClr val="4A9B4A"/>
+          </a:solidFill>
+          <a:ln>
+            <a:noFill/>
+          </a:ln>
+          <a:effectLst/>
+        </p:spPr>
+        <p:style>
+          <a:lnRef idx="1">
+            <a:schemeClr val="accent1"/>
+          </a:lnRef>
+          <a:fillRef idx="3">
+            <a:schemeClr val="accent1"/>
+          </a:fillRef>
+          <a:effectRef idx="2">
+            <a:schemeClr val="accent1"/>
+          </a:effectRef>
+          <a:fontRef idx="minor">
+            <a:schemeClr val="lt1"/>
+          </a:fontRef>
+        </p:style>
+        <p:txBody>
+          <a:bodyPr rtlCol="0" anchor="ctr"/>
+          <a:lstStyle/>
+          <a:p>
+            <a:pPr algn="ctr"/>
+            <a:endParaRPr/>
+          </a:p>
+        </p:txBody>
+      </p:sp>
+      <p:sp>
+        <p:nvSpPr>
+          <p:cNvPr id="8" name="TextBox 7"/>
+          <p:cNvSpPr txBox="1"/>
+          <p:nvPr/>
+        </p:nvSpPr>
+        <p:spPr>
+          <a:xfrm>
+            <a:off x="841248" y="3319272"/>
+            <a:ext cx="3090672" cy="182880"/>
+          </a:xfrm>
+          <a:prstGeom prst="rect">
+            <a:avLst/>
+          </a:prstGeom>
+          <a:noFill/>
+        </p:spPr>
+        <p:txBody>
+          <a:bodyPr wrap="square" lIns="0" tIns="0" rIns="0" bIns="0">
+            <a:spAutoFit/>
+          </a:bodyPr>
+          <a:lstStyle/>
+          <a:p>
+            <a:pPr algn="l">
+              <a:spcAft>
+                <a:spcPts val="0"/>
+              </a:spcAft>
+            </a:pPr>
+            <a:r>
+              <a:rPr sz="950" b="0">
+                <a:solidFill>
+                  <a:srgbClr val="6B7683"/>
+                </a:solidFill>
+                <a:latin typeface="Consolas"/>
+              </a:rPr>
+              <a:t>0.50 chance</a:t>
+            </a:r>
+          </a:p>
+        </p:txBody>
+      </p:sp>
+      <p:sp>
+        <p:nvSpPr>
+          <p:cNvPr id="9" name="TextBox 8"/>
+          <p:cNvSpPr txBox="1"/>
+          <p:nvPr/>
+        </p:nvSpPr>
+        <p:spPr>
+          <a:xfrm>
+            <a:off x="841248" y="3319272"/>
+            <a:ext cx="3090672" cy="182880"/>
+          </a:xfrm>
+          <a:prstGeom prst="rect">
+            <a:avLst/>
+          </a:prstGeom>
+          <a:noFill/>
+        </p:spPr>
+        <p:txBody>
+          <a:bodyPr wrap="square" lIns="0" tIns="0" rIns="0" bIns="0">
+            <a:spAutoFit/>
+          </a:bodyPr>
+          <a:lstStyle/>
+          <a:p>
+            <a:pPr algn="r">
+              <a:spcAft>
+                <a:spcPts val="0"/>
+              </a:spcAft>
+            </a:pPr>
+            <a:r>
+              <a:rPr sz="950" b="0">
+                <a:solidFill>
+                  <a:srgbClr val="6B7683"/>
+                </a:solidFill>
+                <a:latin typeface="Consolas"/>
+              </a:rPr>
+              <a:t>0.90</a:t>
+            </a:r>
+          </a:p>
+        </p:txBody>
+      </p:sp>
+      <p:sp>
+        <p:nvSpPr>
+          <p:cNvPr id="10" name="Rectangle 9"/>
+          <p:cNvSpPr/>
+          <p:nvPr/>
+        </p:nvSpPr>
+        <p:spPr>
+          <a:xfrm>
+            <a:off x="4315968" y="1572768"/>
+            <a:ext cx="3456432" cy="2084831"/>
+          </a:xfrm>
+          <a:prstGeom prst="rect">
+            <a:avLst/>
+          </a:prstGeom>
+          <a:solidFill>
+            <a:srgbClr val="161B22"/>
+          </a:solidFill>
+          <a:ln w="12700">
+            <a:solidFill>
+              <a:srgbClr val="4A90D9"/>
+            </a:solidFill>
+          </a:ln>
+          <a:effectLst/>
+        </p:spPr>
+        <p:style>
+          <a:lnRef idx="1">
+            <a:schemeClr val="accent1"/>
+          </a:lnRef>
+          <a:fillRef idx="3">
+            <a:schemeClr val="accent1"/>
+          </a:fillRef>
+          <a:effectRef idx="2">
+            <a:schemeClr val="accent1"/>
+          </a:effectRef>
+          <a:fontRef idx="minor">
+            <a:schemeClr val="lt1"/>
+          </a:fontRef>
+        </p:style>
+        <p:txBody>
+          <a:bodyPr rtlCol="0" anchor="ctr"/>
+          <a:lstStyle/>
+          <a:p>
+            <a:pPr algn="ctr"/>
+            <a:endParaRPr/>
+          </a:p>
+        </p:txBody>
+      </p:sp>
+      <p:sp>
+        <p:nvSpPr>
+          <p:cNvPr id="11" name="TextBox 10"/>
+          <p:cNvSpPr txBox="1"/>
+          <p:nvPr/>
+        </p:nvSpPr>
+        <p:spPr>
+          <a:xfrm>
+            <a:off x="4498848" y="1664208"/>
+            <a:ext cx="3090672" cy="1463040"/>
+          </a:xfrm>
+          <a:prstGeom prst="rect">
+            <a:avLst/>
+          </a:prstGeom>
+          <a:noFill/>
+        </p:spPr>
+        <p:txBody>
+          <a:bodyPr wrap="square" lIns="0" tIns="0" rIns="0" bIns="0">
+            <a:spAutoFit/>
+          </a:bodyPr>
+          <a:lstStyle/>
+          <a:p>
+            <a:pPr algn="l">
+              <a:spcAft>
+                <a:spcPts val="100"/>
+              </a:spcAft>
+            </a:pPr>
+            <a:r>
+              <a:rPr sz="950" b="1" spc="100">
+                <a:solidFill>
+                  <a:srgbClr val="4A90D9"/>
+                </a:solidFill>
+                <a:latin typeface="Consolas"/>
+              </a:rPr>
+              <a:t>MATCHED COMPARATOR</a:t>
+            </a:r>
+          </a:p>
+          <a:p>
+            <a:pPr algn="l">
+              <a:spcAft>
+                <a:spcPts val="200"/>
+              </a:spcAft>
+            </a:pPr>
+            <a:r>
+              <a:rPr sz="1300" b="1">
+                <a:solidFill>
+                  <a:srgbClr val="E9EEF4"/>
+                </a:solidFill>
+                <a:latin typeface="Calibri"/>
+              </a:rPr>
+              <a:t>Length-only observer</a:t>
+            </a:r>
+          </a:p>
+          <a:p>
+            <a:pPr algn="l">
+              <a:spcAft>
+                <a:spcPts val="200"/>
+              </a:spcAft>
+            </a:pPr>
+            <a:r>
+              <a:rPr sz="3600" b="1">
+                <a:solidFill>
+                  <a:srgbClr val="4A90D9"/>
+                </a:solidFill>
+                <a:latin typeface="Consolas"/>
+              </a:rPr>
+              <a:t>0.808</a:t>
+            </a:r>
+          </a:p>
+          <a:p>
+            <a:pPr algn="l">
+              <a:lnSpc>
+                <a:spcPct val="116000"/>
+              </a:lnSpc>
+              <a:spcAft>
+                <a:spcPts val="0"/>
+              </a:spcAft>
+            </a:pPr>
+            <a:r>
+              <a:rPr sz="1150" b="0">
+                <a:solidFill>
+                  <a:srgbClr val="98A3B0"/>
+                </a:solidFill>
+                <a:latin typeface="Calibri"/>
+              </a:rPr>
+              <a:t>“pick the longer reply”</a:t>
+            </a:r>
+          </a:p>
+          <a:p>
+            <a:pPr algn="l">
+              <a:lnSpc>
+                <a:spcPct val="116000"/>
+              </a:lnSpc>
+              <a:spcAft>
+                <a:spcPts val="0"/>
+              </a:spcAft>
+            </a:pPr>
+            <a:r>
+              <a:rPr sz="1150" b="0">
+                <a:solidFill>
+                  <a:srgbClr val="98A3B0"/>
+                </a:solidFill>
+                <a:latin typeface="Calibri"/>
+              </a:rPr>
+              <a:t>one feature, no training</a:t>
+            </a:r>
+          </a:p>
+        </p:txBody>
+      </p:sp>
+      <p:sp>
+        <p:nvSpPr>
+          <p:cNvPr id="12" name="Rectangle 11"/>
+          <p:cNvSpPr/>
+          <p:nvPr/>
+        </p:nvSpPr>
+        <p:spPr>
+          <a:xfrm>
+            <a:off x="4498848" y="3145536"/>
+            <a:ext cx="3090672" cy="137160"/>
+          </a:xfrm>
+          <a:prstGeom prst="rect">
+            <a:avLst/>
+          </a:prstGeom>
+          <a:solidFill>
+            <a:srgbClr val="1A1F2E"/>
+          </a:solidFill>
+          <a:ln>
+            <a:noFill/>
+          </a:ln>
+          <a:effectLst/>
+        </p:spPr>
+        <p:style>
+          <a:lnRef idx="1">
+            <a:schemeClr val="accent1"/>
+          </a:lnRef>
+          <a:fillRef idx="3">
+            <a:schemeClr val="accent1"/>
+          </a:fillRef>
+          <a:effectRef idx="2">
+            <a:schemeClr val="accent1"/>
+          </a:effectRef>
+          <a:fontRef idx="minor">
+            <a:schemeClr val="lt1"/>
+          </a:fontRef>
+        </p:style>
+        <p:txBody>
+          <a:bodyPr rtlCol="0" anchor="ctr"/>
+          <a:lstStyle/>
+          <a:p>
+            <a:pPr algn="ctr"/>
+            <a:endParaRPr/>
+          </a:p>
+        </p:txBody>
+      </p:sp>
+      <p:sp>
+        <p:nvSpPr>
+          <p:cNvPr id="13" name="Rectangle 12"/>
+          <p:cNvSpPr/>
+          <p:nvPr/>
+        </p:nvSpPr>
+        <p:spPr>
+          <a:xfrm>
+            <a:off x="4498848" y="3145536"/>
+            <a:ext cx="2379817" cy="137160"/>
+          </a:xfrm>
+          <a:prstGeom prst="rect">
+            <a:avLst/>
+          </a:prstGeom>
+          <a:solidFill>
+            <a:srgbClr val="4A90D9"/>
+          </a:solidFill>
+          <a:ln>
+            <a:noFill/>
+          </a:ln>
+          <a:effectLst/>
+        </p:spPr>
+        <p:style>
+          <a:lnRef idx="1">
+            <a:schemeClr val="accent1"/>
+          </a:lnRef>
+          <a:fillRef idx="3">
+            <a:schemeClr val="accent1"/>
+          </a:fillRef>
+          <a:effectRef idx="2">
+            <a:schemeClr val="accent1"/>
+          </a:effectRef>
+          <a:fontRef idx="minor">
+            <a:schemeClr val="lt1"/>
+          </a:fontRef>
+        </p:style>
+        <p:txBody>
+          <a:bodyPr rtlCol="0" anchor="ctr"/>
+          <a:lstStyle/>
+          <a:p>
+            <a:pPr algn="ctr"/>
+            <a:endParaRPr/>
+          </a:p>
+        </p:txBody>
+      </p:sp>
+      <p:sp>
+        <p:nvSpPr>
+          <p:cNvPr id="14" name="TextBox 13"/>
+          <p:cNvSpPr txBox="1"/>
+          <p:nvPr/>
+        </p:nvSpPr>
+        <p:spPr>
+          <a:xfrm>
+            <a:off x="4498848" y="3319272"/>
+            <a:ext cx="3090672" cy="182880"/>
+          </a:xfrm>
+          <a:prstGeom prst="rect">
+            <a:avLst/>
+          </a:prstGeom>
+          <a:noFill/>
+        </p:spPr>
+        <p:txBody>
+          <a:bodyPr wrap="square" lIns="0" tIns="0" rIns="0" bIns="0">
+            <a:spAutoFit/>
+          </a:bodyPr>
+          <a:lstStyle/>
+          <a:p>
+            <a:pPr algn="l">
+              <a:spcAft>
+                <a:spcPts val="0"/>
+              </a:spcAft>
+            </a:pPr>
+            <a:r>
+              <a:rPr sz="950" b="0">
+                <a:solidFill>
+                  <a:srgbClr val="6B7683"/>
+                </a:solidFill>
+                <a:latin typeface="Consolas"/>
+              </a:rPr>
+              <a:t>0.50 chance</a:t>
+            </a:r>
+          </a:p>
+        </p:txBody>
+      </p:sp>
+      <p:sp>
+        <p:nvSpPr>
+          <p:cNvPr id="15" name="TextBox 14"/>
+          <p:cNvSpPr txBox="1"/>
+          <p:nvPr/>
+        </p:nvSpPr>
+        <p:spPr>
+          <a:xfrm>
+            <a:off x="4498848" y="3319272"/>
+            <a:ext cx="3090672" cy="182880"/>
+          </a:xfrm>
+          <a:prstGeom prst="rect">
+            <a:avLst/>
+          </a:prstGeom>
+          <a:noFill/>
+        </p:spPr>
+        <p:txBody>
+          <a:bodyPr wrap="square" lIns="0" tIns="0" rIns="0" bIns="0">
+            <a:spAutoFit/>
+          </a:bodyPr>
+          <a:lstStyle/>
+          <a:p>
+            <a:pPr algn="r">
+              <a:spcAft>
+                <a:spcPts val="0"/>
+              </a:spcAft>
+            </a:pPr>
+            <a:r>
+              <a:rPr sz="950" b="0">
+                <a:solidFill>
+                  <a:srgbClr val="6B7683"/>
+                </a:solidFill>
+                <a:latin typeface="Consolas"/>
+              </a:rPr>
+              <a:t>0.90</a:t>
+            </a:r>
+          </a:p>
+        </p:txBody>
+      </p:sp>
+      <p:sp>
+        <p:nvSpPr>
+          <p:cNvPr id="16" name="Rectangle 15"/>
+          <p:cNvSpPr/>
+          <p:nvPr/>
+        </p:nvSpPr>
+        <p:spPr>
+          <a:xfrm>
+            <a:off x="7973568" y="1572768"/>
             <a:ext cx="3456432" cy="2084831"/>
           </a:xfrm>
           <a:prstGeom prst="rect">
@@ -7041,19 +7892,20 @@
           <a:lstStyle/>
           <a:p>
             <a:pPr algn="ctr"/>
-          </a:p>
-        </p:txBody>
-      </p:sp>
-      <p:sp>
-        <p:nvSpPr>
-          <p:cNvPr id="5" name="TextBox 4"/>
+            <a:endParaRPr/>
+          </a:p>
+        </p:txBody>
+      </p:sp>
+      <p:sp>
+        <p:nvSpPr>
+          <p:cNvPr id="17" name="TextBox 16"/>
           <p:cNvSpPr txBox="1"/>
           <p:nvPr/>
         </p:nvSpPr>
         <p:spPr>
           <a:xfrm>
-            <a:off x="841248" y="1719072"/>
-            <a:ext cx="3090672" cy="1371600"/>
+            <a:off x="8156448" y="1664208"/>
+            <a:ext cx="3090672" cy="1463040"/>
           </a:xfrm>
           <a:prstGeom prst="rect">
             <a:avLst/>
@@ -7061,40 +7913,56 @@
           <a:noFill/>
         </p:spPr>
         <p:txBody>
-          <a:bodyPr wrap="square" lIns="0" rIns="0" tIns="0" bIns="0">
+          <a:bodyPr wrap="square" lIns="0" tIns="0" rIns="0" bIns="0">
             <a:spAutoFit/>
           </a:bodyPr>
           <a:lstStyle/>
           <a:p>
             <a:pPr algn="l">
               <a:spcAft>
+                <a:spcPts val="100"/>
+              </a:spcAft>
+            </a:pPr>
+            <a:r>
+              <a:rPr sz="950" b="1" spc="100">
+                <a:solidFill>
+                  <a:srgbClr val="F0C040"/>
+                </a:solidFill>
+                <a:latin typeface="Consolas"/>
+              </a:rPr>
+              <a:t>COST CRITERION</a:t>
+            </a:r>
+          </a:p>
+          <a:p>
+            <a:pPr algn="l">
+              <a:spcAft>
                 <a:spcPts val="200"/>
               </a:spcAft>
             </a:pPr>
             <a:r>
-              <a:rPr sz="1350" b="1">
+              <a:rPr sz="1300" b="1">
                 <a:solidFill>
                   <a:srgbClr val="E9EEF4"/>
                 </a:solidFill>
                 <a:latin typeface="Calibri"/>
               </a:rPr>
-              <a:t>Hermes-3 self-prediction</a:t>
+              <a:t>21-feature surface classifier</a:t>
             </a:r>
           </a:p>
           <a:p>
             <a:pPr algn="l">
               <a:spcAft>
-                <a:spcPts val="300"/>
-              </a:spcAft>
-            </a:pPr>
-            <a:r>
-              <a:rPr sz="4000" b="1">
-                <a:solidFill>
-                  <a:srgbClr val="4A9B4A"/>
+                <a:spcPts val="200"/>
+              </a:spcAft>
+            </a:pPr>
+            <a:r>
+              <a:rPr sz="3600" b="1">
+                <a:solidFill>
+                  <a:srgbClr val="F0C040"/>
                 </a:solidFill>
                 <a:latin typeface="Consolas"/>
               </a:rPr>
-              <a:t>0.719</a:t>
+              <a:t>0.831</a:t>
             </a:r>
           </a:p>
           <a:p>
@@ -7113,7 +7981,7 @@
                 </a:solidFill>
                 <a:latin typeface="Calibri"/>
               </a:rPr>
-              <a:t>balanced accuracy [0.675, 0.762]</a:t>
+              <a:t>supervised single-text</a:t>
             </a:r>
           </a:p>
           <a:p>
@@ -7132,20 +8000,20 @@
                 </a:solidFill>
                 <a:latin typeface="Calibri"/>
               </a:rPr>
-              <a:t>discrimination +0.437</a:t>
-            </a:r>
-          </a:p>
-        </p:txBody>
-      </p:sp>
-      <p:sp>
-        <p:nvSpPr>
-          <p:cNvPr id="6" name="Rectangle 5"/>
+              <a:t>authorship labelling</a:t>
+            </a:r>
+          </a:p>
+        </p:txBody>
+      </p:sp>
+      <p:sp>
+        <p:nvSpPr>
+          <p:cNvPr id="18" name="Rectangle 17"/>
           <p:cNvSpPr/>
           <p:nvPr/>
         </p:nvSpPr>
         <p:spPr>
           <a:xfrm>
-            <a:off x="841248" y="3145536"/>
+            <a:off x="8156448" y="3145536"/>
             <a:ext cx="3090672" cy="137160"/>
           </a:xfrm>
           <a:prstGeom prst="rect">
@@ -7178,616 +8046,7 @@
           <a:lstStyle/>
           <a:p>
             <a:pPr algn="ctr"/>
-          </a:p>
-        </p:txBody>
-      </p:sp>
-      <p:sp>
-        <p:nvSpPr>
-          <p:cNvPr id="7" name="Rectangle 6"/>
-          <p:cNvSpPr/>
-          <p:nvPr/>
-        </p:nvSpPr>
-        <p:spPr>
-          <a:xfrm>
-            <a:off x="841248" y="3145536"/>
-            <a:ext cx="1692142" cy="137160"/>
-          </a:xfrm>
-          <a:prstGeom prst="rect">
-            <a:avLst/>
-          </a:prstGeom>
-          <a:solidFill>
-            <a:srgbClr val="4A9B4A"/>
-          </a:solidFill>
-          <a:ln>
-            <a:noFill/>
-          </a:ln>
-          <a:effectLst/>
-        </p:spPr>
-        <p:style>
-          <a:lnRef idx="1">
-            <a:schemeClr val="accent1"/>
-          </a:lnRef>
-          <a:fillRef idx="3">
-            <a:schemeClr val="accent1"/>
-          </a:fillRef>
-          <a:effectRef idx="2">
-            <a:schemeClr val="accent1"/>
-          </a:effectRef>
-          <a:fontRef idx="minor">
-            <a:schemeClr val="lt1"/>
-          </a:fontRef>
-        </p:style>
-        <p:txBody>
-          <a:bodyPr rtlCol="0" anchor="ctr"/>
-          <a:lstStyle/>
-          <a:p>
-            <a:pPr algn="ctr"/>
-          </a:p>
-        </p:txBody>
-      </p:sp>
-      <p:sp>
-        <p:nvSpPr>
-          <p:cNvPr id="8" name="TextBox 7"/>
-          <p:cNvSpPr txBox="1"/>
-          <p:nvPr/>
-        </p:nvSpPr>
-        <p:spPr>
-          <a:xfrm>
-            <a:off x="841248" y="3319272"/>
-            <a:ext cx="3090672" cy="182880"/>
-          </a:xfrm>
-          <a:prstGeom prst="rect">
-            <a:avLst/>
-          </a:prstGeom>
-          <a:noFill/>
-        </p:spPr>
-        <p:txBody>
-          <a:bodyPr wrap="square" lIns="0" rIns="0" tIns="0" bIns="0">
-            <a:spAutoFit/>
-          </a:bodyPr>
-          <a:lstStyle/>
-          <a:p>
-            <a:pPr algn="l">
-              <a:spcAft>
-                <a:spcPts val="0"/>
-              </a:spcAft>
-            </a:pPr>
-            <a:r>
-              <a:rPr sz="950" b="0">
-                <a:solidFill>
-                  <a:srgbClr val="6B7683"/>
-                </a:solidFill>
-                <a:latin typeface="Consolas"/>
-              </a:rPr>
-              <a:t>0.50 chance</a:t>
-            </a:r>
-          </a:p>
-        </p:txBody>
-      </p:sp>
-      <p:sp>
-        <p:nvSpPr>
-          <p:cNvPr id="9" name="TextBox 8"/>
-          <p:cNvSpPr txBox="1"/>
-          <p:nvPr/>
-        </p:nvSpPr>
-        <p:spPr>
-          <a:xfrm>
-            <a:off x="841248" y="3319272"/>
-            <a:ext cx="3090672" cy="182880"/>
-          </a:xfrm>
-          <a:prstGeom prst="rect">
-            <a:avLst/>
-          </a:prstGeom>
-          <a:noFill/>
-        </p:spPr>
-        <p:txBody>
-          <a:bodyPr wrap="square" lIns="0" rIns="0" tIns="0" bIns="0">
-            <a:spAutoFit/>
-          </a:bodyPr>
-          <a:lstStyle/>
-          <a:p>
-            <a:pPr algn="r">
-              <a:spcAft>
-                <a:spcPts val="0"/>
-              </a:spcAft>
-            </a:pPr>
-            <a:r>
-              <a:rPr sz="950" b="0">
-                <a:solidFill>
-                  <a:srgbClr val="6B7683"/>
-                </a:solidFill>
-                <a:latin typeface="Consolas"/>
-              </a:rPr>
-              <a:t>0.90</a:t>
-            </a:r>
-          </a:p>
-        </p:txBody>
-      </p:sp>
-      <p:sp>
-        <p:nvSpPr>
-          <p:cNvPr id="10" name="Rectangle 9"/>
-          <p:cNvSpPr/>
-          <p:nvPr/>
-        </p:nvSpPr>
-        <p:spPr>
-          <a:xfrm>
-            <a:off x="4315968" y="1572768"/>
-            <a:ext cx="3456432" cy="2084831"/>
-          </a:xfrm>
-          <a:prstGeom prst="rect">
-            <a:avLst/>
-          </a:prstGeom>
-          <a:solidFill>
-            <a:srgbClr val="161B22"/>
-          </a:solidFill>
-          <a:ln w="12700">
-            <a:solidFill>
-              <a:srgbClr val="2A323C"/>
-            </a:solidFill>
-          </a:ln>
-          <a:effectLst/>
-        </p:spPr>
-        <p:style>
-          <a:lnRef idx="1">
-            <a:schemeClr val="accent1"/>
-          </a:lnRef>
-          <a:fillRef idx="3">
-            <a:schemeClr val="accent1"/>
-          </a:fillRef>
-          <a:effectRef idx="2">
-            <a:schemeClr val="accent1"/>
-          </a:effectRef>
-          <a:fontRef idx="minor">
-            <a:schemeClr val="lt1"/>
-          </a:fontRef>
-        </p:style>
-        <p:txBody>
-          <a:bodyPr rtlCol="0" anchor="ctr"/>
-          <a:lstStyle/>
-          <a:p>
-            <a:pPr algn="ctr"/>
-          </a:p>
-        </p:txBody>
-      </p:sp>
-      <p:sp>
-        <p:nvSpPr>
-          <p:cNvPr id="11" name="TextBox 10"/>
-          <p:cNvSpPr txBox="1"/>
-          <p:nvPr/>
-        </p:nvSpPr>
-        <p:spPr>
-          <a:xfrm>
-            <a:off x="4498848" y="1719072"/>
-            <a:ext cx="3090672" cy="1371600"/>
-          </a:xfrm>
-          <a:prstGeom prst="rect">
-            <a:avLst/>
-          </a:prstGeom>
-          <a:noFill/>
-        </p:spPr>
-        <p:txBody>
-          <a:bodyPr wrap="square" lIns="0" rIns="0" tIns="0" bIns="0">
-            <a:spAutoFit/>
-          </a:bodyPr>
-          <a:lstStyle/>
-          <a:p>
-            <a:pPr algn="l">
-              <a:spcAft>
-                <a:spcPts val="200"/>
-              </a:spcAft>
-            </a:pPr>
-            <a:r>
-              <a:rPr sz="1350" b="1">
-                <a:solidFill>
-                  <a:srgbClr val="E9EEF4"/>
-                </a:solidFill>
-                <a:latin typeface="Calibri"/>
-              </a:rPr>
-              <a:t>Length-only observer</a:t>
-            </a:r>
-          </a:p>
-          <a:p>
-            <a:pPr algn="l">
-              <a:spcAft>
-                <a:spcPts val="300"/>
-              </a:spcAft>
-            </a:pPr>
-            <a:r>
-              <a:rPr sz="4000" b="1">
-                <a:solidFill>
-                  <a:srgbClr val="4A90D9"/>
-                </a:solidFill>
-                <a:latin typeface="Consolas"/>
-              </a:rPr>
-              <a:t>0.808</a:t>
-            </a:r>
-          </a:p>
-          <a:p>
-            <a:pPr algn="l">
-              <a:lnSpc>
-                <a:spcPct val="116000"/>
-              </a:lnSpc>
-              <a:spcAft>
-                <a:spcPts val="0"/>
-              </a:spcAft>
-            </a:pPr>
-            <a:r>
-              <a:rPr sz="1150" b="0">
-                <a:solidFill>
-                  <a:srgbClr val="98A3B0"/>
-                </a:solidFill>
-                <a:latin typeface="Calibri"/>
-              </a:rPr>
-              <a:t>“pick the longer reply”</a:t>
-            </a:r>
-          </a:p>
-          <a:p>
-            <a:pPr algn="l">
-              <a:lnSpc>
-                <a:spcPct val="116000"/>
-              </a:lnSpc>
-              <a:spcAft>
-                <a:spcPts val="0"/>
-              </a:spcAft>
-            </a:pPr>
-            <a:r>
-              <a:rPr sz="1150" b="0">
-                <a:solidFill>
-                  <a:srgbClr val="98A3B0"/>
-                </a:solidFill>
-                <a:latin typeface="Calibri"/>
-              </a:rPr>
-              <a:t>one feature, no training</a:t>
-            </a:r>
-          </a:p>
-        </p:txBody>
-      </p:sp>
-      <p:sp>
-        <p:nvSpPr>
-          <p:cNvPr id="12" name="Rectangle 11"/>
-          <p:cNvSpPr/>
-          <p:nvPr/>
-        </p:nvSpPr>
-        <p:spPr>
-          <a:xfrm>
-            <a:off x="4498848" y="3145536"/>
-            <a:ext cx="3090672" cy="137160"/>
-          </a:xfrm>
-          <a:prstGeom prst="rect">
-            <a:avLst/>
-          </a:prstGeom>
-          <a:solidFill>
-            <a:srgbClr val="1A1F2E"/>
-          </a:solidFill>
-          <a:ln>
-            <a:noFill/>
-          </a:ln>
-          <a:effectLst/>
-        </p:spPr>
-        <p:style>
-          <a:lnRef idx="1">
-            <a:schemeClr val="accent1"/>
-          </a:lnRef>
-          <a:fillRef idx="3">
-            <a:schemeClr val="accent1"/>
-          </a:fillRef>
-          <a:effectRef idx="2">
-            <a:schemeClr val="accent1"/>
-          </a:effectRef>
-          <a:fontRef idx="minor">
-            <a:schemeClr val="lt1"/>
-          </a:fontRef>
-        </p:style>
-        <p:txBody>
-          <a:bodyPr rtlCol="0" anchor="ctr"/>
-          <a:lstStyle/>
-          <a:p>
-            <a:pPr algn="ctr"/>
-          </a:p>
-        </p:txBody>
-      </p:sp>
-      <p:sp>
-        <p:nvSpPr>
-          <p:cNvPr id="13" name="Rectangle 12"/>
-          <p:cNvSpPr/>
-          <p:nvPr/>
-        </p:nvSpPr>
-        <p:spPr>
-          <a:xfrm>
-            <a:off x="4498848" y="3145536"/>
-            <a:ext cx="2379817" cy="137160"/>
-          </a:xfrm>
-          <a:prstGeom prst="rect">
-            <a:avLst/>
-          </a:prstGeom>
-          <a:solidFill>
-            <a:srgbClr val="4A90D9"/>
-          </a:solidFill>
-          <a:ln>
-            <a:noFill/>
-          </a:ln>
-          <a:effectLst/>
-        </p:spPr>
-        <p:style>
-          <a:lnRef idx="1">
-            <a:schemeClr val="accent1"/>
-          </a:lnRef>
-          <a:fillRef idx="3">
-            <a:schemeClr val="accent1"/>
-          </a:fillRef>
-          <a:effectRef idx="2">
-            <a:schemeClr val="accent1"/>
-          </a:effectRef>
-          <a:fontRef idx="minor">
-            <a:schemeClr val="lt1"/>
-          </a:fontRef>
-        </p:style>
-        <p:txBody>
-          <a:bodyPr rtlCol="0" anchor="ctr"/>
-          <a:lstStyle/>
-          <a:p>
-            <a:pPr algn="ctr"/>
-          </a:p>
-        </p:txBody>
-      </p:sp>
-      <p:sp>
-        <p:nvSpPr>
-          <p:cNvPr id="14" name="TextBox 13"/>
-          <p:cNvSpPr txBox="1"/>
-          <p:nvPr/>
-        </p:nvSpPr>
-        <p:spPr>
-          <a:xfrm>
-            <a:off x="4498848" y="3319272"/>
-            <a:ext cx="3090672" cy="182880"/>
-          </a:xfrm>
-          <a:prstGeom prst="rect">
-            <a:avLst/>
-          </a:prstGeom>
-          <a:noFill/>
-        </p:spPr>
-        <p:txBody>
-          <a:bodyPr wrap="square" lIns="0" rIns="0" tIns="0" bIns="0">
-            <a:spAutoFit/>
-          </a:bodyPr>
-          <a:lstStyle/>
-          <a:p>
-            <a:pPr algn="l">
-              <a:spcAft>
-                <a:spcPts val="0"/>
-              </a:spcAft>
-            </a:pPr>
-            <a:r>
-              <a:rPr sz="950" b="0">
-                <a:solidFill>
-                  <a:srgbClr val="6B7683"/>
-                </a:solidFill>
-                <a:latin typeface="Consolas"/>
-              </a:rPr>
-              <a:t>0.50 chance</a:t>
-            </a:r>
-          </a:p>
-        </p:txBody>
-      </p:sp>
-      <p:sp>
-        <p:nvSpPr>
-          <p:cNvPr id="15" name="TextBox 14"/>
-          <p:cNvSpPr txBox="1"/>
-          <p:nvPr/>
-        </p:nvSpPr>
-        <p:spPr>
-          <a:xfrm>
-            <a:off x="4498848" y="3319272"/>
-            <a:ext cx="3090672" cy="182880"/>
-          </a:xfrm>
-          <a:prstGeom prst="rect">
-            <a:avLst/>
-          </a:prstGeom>
-          <a:noFill/>
-        </p:spPr>
-        <p:txBody>
-          <a:bodyPr wrap="square" lIns="0" rIns="0" tIns="0" bIns="0">
-            <a:spAutoFit/>
-          </a:bodyPr>
-          <a:lstStyle/>
-          <a:p>
-            <a:pPr algn="r">
-              <a:spcAft>
-                <a:spcPts val="0"/>
-              </a:spcAft>
-            </a:pPr>
-            <a:r>
-              <a:rPr sz="950" b="0">
-                <a:solidFill>
-                  <a:srgbClr val="6B7683"/>
-                </a:solidFill>
-                <a:latin typeface="Consolas"/>
-              </a:rPr>
-              <a:t>0.90</a:t>
-            </a:r>
-          </a:p>
-        </p:txBody>
-      </p:sp>
-      <p:sp>
-        <p:nvSpPr>
-          <p:cNvPr id="16" name="Rectangle 15"/>
-          <p:cNvSpPr/>
-          <p:nvPr/>
-        </p:nvSpPr>
-        <p:spPr>
-          <a:xfrm>
-            <a:off x="7973568" y="1572768"/>
-            <a:ext cx="3456432" cy="2084831"/>
-          </a:xfrm>
-          <a:prstGeom prst="rect">
-            <a:avLst/>
-          </a:prstGeom>
-          <a:solidFill>
-            <a:srgbClr val="161B22"/>
-          </a:solidFill>
-          <a:ln w="12700">
-            <a:solidFill>
-              <a:srgbClr val="2A323C"/>
-            </a:solidFill>
-          </a:ln>
-          <a:effectLst/>
-        </p:spPr>
-        <p:style>
-          <a:lnRef idx="1">
-            <a:schemeClr val="accent1"/>
-          </a:lnRef>
-          <a:fillRef idx="3">
-            <a:schemeClr val="accent1"/>
-          </a:fillRef>
-          <a:effectRef idx="2">
-            <a:schemeClr val="accent1"/>
-          </a:effectRef>
-          <a:fontRef idx="minor">
-            <a:schemeClr val="lt1"/>
-          </a:fontRef>
-        </p:style>
-        <p:txBody>
-          <a:bodyPr rtlCol="0" anchor="ctr"/>
-          <a:lstStyle/>
-          <a:p>
-            <a:pPr algn="ctr"/>
-          </a:p>
-        </p:txBody>
-      </p:sp>
-      <p:sp>
-        <p:nvSpPr>
-          <p:cNvPr id="17" name="TextBox 16"/>
-          <p:cNvSpPr txBox="1"/>
-          <p:nvPr/>
-        </p:nvSpPr>
-        <p:spPr>
-          <a:xfrm>
-            <a:off x="8156448" y="1719072"/>
-            <a:ext cx="3090672" cy="1371600"/>
-          </a:xfrm>
-          <a:prstGeom prst="rect">
-            <a:avLst/>
-          </a:prstGeom>
-          <a:noFill/>
-        </p:spPr>
-        <p:txBody>
-          <a:bodyPr wrap="square" lIns="0" rIns="0" tIns="0" bIns="0">
-            <a:spAutoFit/>
-          </a:bodyPr>
-          <a:lstStyle/>
-          <a:p>
-            <a:pPr algn="l">
-              <a:spcAft>
-                <a:spcPts val="200"/>
-              </a:spcAft>
-            </a:pPr>
-            <a:r>
-              <a:rPr sz="1350" b="1">
-                <a:solidFill>
-                  <a:srgbClr val="E9EEF4"/>
-                </a:solidFill>
-                <a:latin typeface="Calibri"/>
-              </a:rPr>
-              <a:t>18-feature surface classifier</a:t>
-            </a:r>
-          </a:p>
-          <a:p>
-            <a:pPr algn="l">
-              <a:spcAft>
-                <a:spcPts val="300"/>
-              </a:spcAft>
-            </a:pPr>
-            <a:r>
-              <a:rPr sz="4000" b="1">
-                <a:solidFill>
-                  <a:srgbClr val="F0C040"/>
-                </a:solidFill>
-                <a:latin typeface="Consolas"/>
-              </a:rPr>
-              <a:t>0.831</a:t>
-            </a:r>
-          </a:p>
-          <a:p>
-            <a:pPr algn="l">
-              <a:lnSpc>
-                <a:spcPct val="116000"/>
-              </a:lnSpc>
-              <a:spcAft>
-                <a:spcPts val="0"/>
-              </a:spcAft>
-            </a:pPr>
-            <a:r>
-              <a:rPr sz="1150" b="0">
-                <a:solidFill>
-                  <a:srgbClr val="98A3B0"/>
-                </a:solidFill>
-                <a:latin typeface="Calibri"/>
-              </a:rPr>
-              <a:t>supervised single-text</a:t>
-            </a:r>
-          </a:p>
-          <a:p>
-            <a:pPr algn="l">
-              <a:lnSpc>
-                <a:spcPct val="116000"/>
-              </a:lnSpc>
-              <a:spcAft>
-                <a:spcPts val="0"/>
-              </a:spcAft>
-            </a:pPr>
-            <a:r>
-              <a:rPr sz="1150" b="0">
-                <a:solidFill>
-                  <a:srgbClr val="98A3B0"/>
-                </a:solidFill>
-                <a:latin typeface="Calibri"/>
-              </a:rPr>
-              <a:t>authorship labelling</a:t>
-            </a:r>
-          </a:p>
-        </p:txBody>
-      </p:sp>
-      <p:sp>
-        <p:nvSpPr>
-          <p:cNvPr id="18" name="Rectangle 17"/>
-          <p:cNvSpPr/>
-          <p:nvPr/>
-        </p:nvSpPr>
-        <p:spPr>
-          <a:xfrm>
-            <a:off x="8156448" y="3145536"/>
-            <a:ext cx="3090672" cy="137160"/>
-          </a:xfrm>
-          <a:prstGeom prst="rect">
-            <a:avLst/>
-          </a:prstGeom>
-          <a:solidFill>
-            <a:srgbClr val="1A1F2E"/>
-          </a:solidFill>
-          <a:ln>
-            <a:noFill/>
-          </a:ln>
-          <a:effectLst/>
-        </p:spPr>
-        <p:style>
-          <a:lnRef idx="1">
-            <a:schemeClr val="accent1"/>
-          </a:lnRef>
-          <a:fillRef idx="3">
-            <a:schemeClr val="accent1"/>
-          </a:fillRef>
-          <a:effectRef idx="2">
-            <a:schemeClr val="accent1"/>
-          </a:effectRef>
-          <a:fontRef idx="minor">
-            <a:schemeClr val="lt1"/>
-          </a:fontRef>
-        </p:style>
-        <p:txBody>
-          <a:bodyPr rtlCol="0" anchor="ctr"/>
-          <a:lstStyle/>
-          <a:p>
-            <a:pPr algn="ctr"/>
+            <a:endParaRPr/>
           </a:p>
         </p:txBody>
       </p:sp>
@@ -7832,6 +8091,7 @@
           <a:lstStyle/>
           <a:p>
             <a:pPr algn="ctr"/>
+            <a:endParaRPr/>
           </a:p>
         </p:txBody>
       </p:sp>
@@ -7852,7 +8112,7 @@
           <a:noFill/>
         </p:spPr>
         <p:txBody>
-          <a:bodyPr wrap="square" lIns="0" rIns="0" tIns="0" bIns="0">
+          <a:bodyPr wrap="square" lIns="0" tIns="0" rIns="0" bIns="0">
             <a:spAutoFit/>
           </a:bodyPr>
           <a:lstStyle/>
@@ -7891,7 +8151,7 @@
           <a:noFill/>
         </p:spPr>
         <p:txBody>
-          <a:bodyPr wrap="square" lIns="0" rIns="0" tIns="0" bIns="0">
+          <a:bodyPr wrap="square" lIns="0" tIns="0" rIns="0" bIns="0">
             <a:spAutoFit/>
           </a:bodyPr>
           <a:lstStyle/>
@@ -7930,7 +8190,7 @@
           <a:noFill/>
         </p:spPr>
         <p:txBody>
-          <a:bodyPr wrap="square" lIns="0" rIns="0" tIns="0" bIns="0">
+          <a:bodyPr wrap="square" lIns="0" tIns="0" rIns="0" bIns="0">
             <a:spAutoFit/>
           </a:bodyPr>
           <a:lstStyle/>
@@ -7950,7 +8210,7 @@
                 </a:solidFill>
                 <a:latin typeface="Calibri"/>
               </a:rPr>
-              <a:t>Only the length rule is matched to the model's task item-for-item </a:t>
+              <a:t>The 0.831 classifier is a different evaluation procedure; the only matched comparator is the length rule </a:t>
             </a:r>
             <a:r>
               <a:rPr sz="1250" b="0">
@@ -7968,7 +8228,7 @@
                 </a:solidFill>
                 <a:latin typeface="Calibri"/>
               </a:rPr>
-              <a:t>.  The classifier is a different evaluation procedure — a cost criterion, not a matched score.</a:t>
+              <a:t>.</a:t>
             </a:r>
           </a:p>
         </p:txBody>
@@ -8016,6 +8276,7 @@
           <a:lstStyle/>
           <a:p>
             <a:pPr algn="ctr"/>
+            <a:endParaRPr/>
           </a:p>
         </p:txBody>
       </p:sp>
@@ -8036,7 +8297,7 @@
           <a:noFill/>
         </p:spPr>
         <p:txBody>
-          <a:bodyPr wrap="square" lIns="0" rIns="0" tIns="0" bIns="0">
+          <a:bodyPr wrap="square" lIns="0" tIns="0" rIns="0" bIns="0">
             <a:spAutoFit/>
           </a:bodyPr>
           <a:lstStyle/>
@@ -8069,7 +8330,7 @@
                 </a:solidFill>
                 <a:latin typeface="Consolas"/>
               </a:rPr>
-              <a:t>+0.381 [0.188, 0.566]</a:t>
+              <a:t>+0.381 [+0.188, +0.566]</a:t>
             </a:r>
           </a:p>
           <a:p>
@@ -8136,6 +8397,7 @@
           <a:lstStyle/>
           <a:p>
             <a:pPr algn="ctr"/>
+            <a:endParaRPr/>
           </a:p>
         </p:txBody>
       </p:sp>
@@ -8156,7 +8418,7 @@
           <a:noFill/>
         </p:spPr>
         <p:txBody>
-          <a:bodyPr wrap="square" lIns="0" rIns="0" tIns="0" bIns="0">
+          <a:bodyPr wrap="square" lIns="0" tIns="0" rIns="0" bIns="0">
             <a:spAutoFit/>
           </a:bodyPr>
           <a:lstStyle/>
@@ -8240,6 +8502,7 @@
           <a:lstStyle/>
           <a:p>
             <a:pPr algn="ctr"/>
+            <a:endParaRPr/>
           </a:p>
         </p:txBody>
       </p:sp>
@@ -8260,7 +8523,7 @@
           <a:noFill/>
         </p:spPr>
         <p:txBody>
-          <a:bodyPr wrap="square" lIns="0" rIns="0" tIns="0" bIns="0">
+          <a:bodyPr wrap="square" lIns="0" tIns="0" rIns="0" bIns="0">
             <a:spAutoFit/>
           </a:bodyPr>
           <a:lstStyle/>
@@ -8311,7 +8574,7 @@
           <a:noFill/>
         </p:spPr>
         <p:txBody>
-          <a:bodyPr wrap="square" lIns="0" rIns="0" tIns="0" bIns="0">
+          <a:bodyPr wrap="square" lIns="0" tIns="0" rIns="0" bIns="0">
             <a:spAutoFit/>
           </a:bodyPr>
           <a:lstStyle/>
@@ -8374,6 +8637,7 @@
           <a:lstStyle/>
           <a:p>
             <a:pPr algn="ctr"/>
+            <a:endParaRPr/>
           </a:p>
         </p:txBody>
       </p:sp>
@@ -8394,7 +8658,7 @@
           <a:noFill/>
         </p:spPr>
         <p:txBody>
-          <a:bodyPr wrap="square" lIns="0" rIns="0" tIns="0" bIns="0">
+          <a:bodyPr wrap="square" lIns="0" tIns="0" rIns="0" bIns="0">
             <a:spAutoFit/>
           </a:bodyPr>
           <a:lstStyle/>
@@ -8437,7 +8701,7 @@
 </file>
 
 <file path=ppt/slides/slide6.xml><?xml version="1.0" encoding="utf-8"?>
-<p:sld xmlns:a="http://schemas.openxmlformats.org/drawingml/2006/main" xmlns:p="http://schemas.openxmlformats.org/presentationml/2006/main" xmlns:r="http://schemas.openxmlformats.org/officeDocument/2006/relationships">
+<p:sld xmlns:a="http://schemas.openxmlformats.org/drawingml/2006/main" xmlns:r="http://schemas.openxmlformats.org/officeDocument/2006/relationships" xmlns:p="http://schemas.openxmlformats.org/presentationml/2006/main">
   <p:cSld>
     <p:bg>
       <p:bgPr>
@@ -8453,7 +8717,14 @@
         <p:cNvGrpSpPr/>
         <p:nvPr/>
       </p:nvGrpSpPr>
-      <p:grpSpPr/>
+      <p:grpSpPr>
+        <a:xfrm>
+          <a:off x="0" y="0"/>
+          <a:ext cx="0" cy="0"/>
+          <a:chOff x="0" y="0"/>
+          <a:chExt cx="0" cy="0"/>
+        </a:xfrm>
+      </p:grpSpPr>
       <p:sp>
         <p:nvSpPr>
           <p:cNvPr id="2" name="TextBox 1"/>
@@ -8471,7 +8742,7 @@
           <a:noFill/>
         </p:spPr>
         <p:txBody>
-          <a:bodyPr wrap="square" lIns="0" rIns="0" tIns="0" bIns="0">
+          <a:bodyPr wrap="square" lIns="0" tIns="0" rIns="0" bIns="0">
             <a:spAutoFit/>
           </a:bodyPr>
           <a:lstStyle/>
@@ -8510,7 +8781,7 @@
           <a:noFill/>
         </p:spPr>
         <p:txBody>
-          <a:bodyPr wrap="square" lIns="0" rIns="0" tIns="0" bIns="0">
+          <a:bodyPr wrap="square" lIns="0" tIns="0" rIns="0" bIns="0">
             <a:spAutoFit/>
           </a:bodyPr>
           <a:lstStyle/>
@@ -8552,7 +8823,7 @@
           <a:noFill/>
         </p:spPr>
         <p:txBody>
-          <a:bodyPr wrap="square" lIns="0" rIns="0" tIns="0" bIns="0">
+          <a:bodyPr wrap="square" lIns="0" tIns="0" rIns="0" bIns="0">
             <a:spAutoFit/>
           </a:bodyPr>
           <a:lstStyle/>
@@ -8629,6 +8900,7 @@
           <a:lstStyle/>
           <a:p>
             <a:pPr algn="ctr"/>
+            <a:endParaRPr/>
           </a:p>
         </p:txBody>
       </p:sp>
@@ -8673,6 +8945,7 @@
           <a:lstStyle/>
           <a:p>
             <a:pPr algn="ctr"/>
+            <a:endParaRPr/>
           </a:p>
         </p:txBody>
       </p:sp>
@@ -8693,7 +8966,7 @@
           <a:noFill/>
         </p:spPr>
         <p:txBody>
-          <a:bodyPr wrap="square" lIns="0" rIns="0" tIns="0" bIns="0">
+          <a:bodyPr wrap="square" lIns="0" tIns="0" rIns="0" bIns="0">
             <a:spAutoFit/>
           </a:bodyPr>
           <a:lstStyle/>
@@ -8744,7 +9017,7 @@
           <a:noFill/>
         </p:spPr>
         <p:txBody>
-          <a:bodyPr wrap="square" lIns="0" rIns="0" tIns="0" bIns="0">
+          <a:bodyPr wrap="square" lIns="0" tIns="0" rIns="0" bIns="0">
             <a:spAutoFit/>
           </a:bodyPr>
           <a:lstStyle/>
@@ -8786,7 +9059,7 @@
           <a:noFill/>
         </p:spPr>
         <p:txBody>
-          <a:bodyPr wrap="square" lIns="0" rIns="0" tIns="0" bIns="0">
+          <a:bodyPr wrap="square" lIns="0" tIns="0" rIns="0" bIns="0">
             <a:spAutoFit/>
           </a:bodyPr>
           <a:lstStyle/>
@@ -8828,7 +9101,7 @@
           <a:noFill/>
         </p:spPr>
         <p:txBody>
-          <a:bodyPr wrap="square" lIns="0" rIns="0" tIns="0" bIns="0">
+          <a:bodyPr wrap="square" lIns="0" tIns="0" rIns="0" bIns="0">
             <a:spAutoFit/>
           </a:bodyPr>
           <a:lstStyle/>
@@ -8893,6 +9166,7 @@
           <a:lstStyle/>
           <a:p>
             <a:pPr algn="ctr"/>
+            <a:endParaRPr/>
           </a:p>
         </p:txBody>
       </p:sp>
@@ -8937,6 +9211,7 @@
           <a:lstStyle/>
           <a:p>
             <a:pPr algn="ctr"/>
+            <a:endParaRPr/>
           </a:p>
         </p:txBody>
       </p:sp>
@@ -8957,7 +9232,7 @@
           <a:noFill/>
         </p:spPr>
         <p:txBody>
-          <a:bodyPr wrap="square" lIns="0" rIns="0" tIns="0" bIns="0">
+          <a:bodyPr wrap="square" lIns="0" tIns="0" rIns="0" bIns="0">
             <a:spAutoFit/>
           </a:bodyPr>
           <a:lstStyle/>
@@ -9008,7 +9283,7 @@
           <a:noFill/>
         </p:spPr>
         <p:txBody>
-          <a:bodyPr wrap="square" lIns="0" rIns="0" tIns="0" bIns="0">
+          <a:bodyPr wrap="square" lIns="0" tIns="0" rIns="0" bIns="0">
             <a:spAutoFit/>
           </a:bodyPr>
           <a:lstStyle/>
@@ -9050,7 +9325,7 @@
           <a:noFill/>
         </p:spPr>
         <p:txBody>
-          <a:bodyPr wrap="square" lIns="0" rIns="0" tIns="0" bIns="0">
+          <a:bodyPr wrap="square" lIns="0" tIns="0" rIns="0" bIns="0">
             <a:spAutoFit/>
           </a:bodyPr>
           <a:lstStyle/>
@@ -9092,7 +9367,7 @@
           <a:noFill/>
         </p:spPr>
         <p:txBody>
-          <a:bodyPr wrap="square" lIns="0" rIns="0" tIns="0" bIns="0">
+          <a:bodyPr wrap="square" lIns="0" tIns="0" rIns="0" bIns="0">
             <a:spAutoFit/>
           </a:bodyPr>
           <a:lstStyle/>
@@ -9157,6 +9432,7 @@
           <a:lstStyle/>
           <a:p>
             <a:pPr algn="ctr"/>
+            <a:endParaRPr/>
           </a:p>
         </p:txBody>
       </p:sp>
@@ -9201,6 +9477,7 @@
           <a:lstStyle/>
           <a:p>
             <a:pPr algn="ctr"/>
+            <a:endParaRPr/>
           </a:p>
         </p:txBody>
       </p:sp>
@@ -9221,7 +9498,7 @@
           <a:noFill/>
         </p:spPr>
         <p:txBody>
-          <a:bodyPr wrap="square" lIns="0" rIns="0" tIns="0" bIns="0">
+          <a:bodyPr wrap="square" lIns="0" tIns="0" rIns="0" bIns="0">
             <a:spAutoFit/>
           </a:bodyPr>
           <a:lstStyle/>
@@ -9272,7 +9549,7 @@
           <a:noFill/>
         </p:spPr>
         <p:txBody>
-          <a:bodyPr wrap="square" lIns="0" rIns="0" tIns="0" bIns="0">
+          <a:bodyPr wrap="square" lIns="0" tIns="0" rIns="0" bIns="0">
             <a:spAutoFit/>
           </a:bodyPr>
           <a:lstStyle/>
@@ -9314,7 +9591,7 @@
           <a:noFill/>
         </p:spPr>
         <p:txBody>
-          <a:bodyPr wrap="square" lIns="0" rIns="0" tIns="0" bIns="0">
+          <a:bodyPr wrap="square" lIns="0" tIns="0" rIns="0" bIns="0">
             <a:spAutoFit/>
           </a:bodyPr>
           <a:lstStyle/>
@@ -9356,7 +9633,7 @@
           <a:noFill/>
         </p:spPr>
         <p:txBody>
-          <a:bodyPr wrap="square" lIns="0" rIns="0" tIns="0" bIns="0">
+          <a:bodyPr wrap="square" lIns="0" tIns="0" rIns="0" bIns="0">
             <a:spAutoFit/>
           </a:bodyPr>
           <a:lstStyle/>
@@ -9424,6 +9701,7 @@
           <a:lstStyle/>
           <a:p>
             <a:pPr algn="ctr"/>
+            <a:endParaRPr/>
           </a:p>
         </p:txBody>
       </p:sp>
@@ -9444,7 +9722,7 @@
           <a:noFill/>
         </p:spPr>
         <p:txBody>
-          <a:bodyPr wrap="square" lIns="0" rIns="0" tIns="0" bIns="0">
+          <a:bodyPr wrap="square" lIns="0" tIns="0" rIns="0" bIns="0">
             <a:spAutoFit/>
           </a:bodyPr>
           <a:lstStyle/>
@@ -9507,6 +9785,7 @@
           <a:lstStyle/>
           <a:p>
             <a:pPr algn="ctr"/>
+            <a:endParaRPr/>
           </a:p>
         </p:txBody>
       </p:sp>
@@ -9527,7 +9806,7 @@
           <a:noFill/>
         </p:spPr>
         <p:txBody>
-          <a:bodyPr wrap="square" lIns="0" rIns="0" tIns="0" bIns="0">
+          <a:bodyPr wrap="square" lIns="0" tIns="0" rIns="0" bIns="0">
             <a:spAutoFit/>
           </a:bodyPr>
           <a:lstStyle/>

--- a/Digital_Minds_Track3_Slides.pptx
+++ b/Digital_Minds_Track3_Slides.pptx
@@ -3156,8 +3156,8 @@
         </p:nvSpPr>
         <p:spPr>
           <a:xfrm>
-            <a:off x="658368" y="658368"/>
-            <a:ext cx="10874959" cy="274320"/>
+            <a:off x="870034" y="521208"/>
+            <a:ext cx="10874959" cy="215444"/>
           </a:xfrm>
           <a:prstGeom prst="rect">
             <a:avLst/>
@@ -3176,9 +3176,9 @@
               </a:spcAft>
             </a:pPr>
             <a:r>
-              <a:rPr sz="1200" b="0" spc="100">
-                <a:solidFill>
-                  <a:srgbClr val="98A3B0"/>
+              <a:rPr sz="1400" b="0" spc="100" dirty="0">
+                <a:solidFill>
+                  <a:schemeClr val="bg1"/>
                 </a:solidFill>
                 <a:latin typeface="Consolas"/>
               </a:rPr>
@@ -3218,7 +3218,7 @@
               </a:spcAft>
             </a:pPr>
             <a:r>
-              <a:rPr sz="5000" b="1">
+              <a:rPr sz="5000" b="1" dirty="0">
                 <a:solidFill>
                   <a:srgbClr val="E9EEF4"/>
                 </a:solidFill>
@@ -3237,7 +3237,7 @@
               </a:spcAft>
             </a:pPr>
             <a:r>
-              <a:rPr sz="3000" b="0">
+              <a:rPr sz="3000" b="0" dirty="0">
                 <a:solidFill>
                   <a:srgbClr val="F0C040"/>
                 </a:solidFill>
@@ -3256,7 +3256,7 @@
         </p:nvSpPr>
         <p:spPr>
           <a:xfrm>
-            <a:off x="658368" y="3401568"/>
+            <a:off x="658368" y="2928213"/>
             <a:ext cx="2377440" cy="19050"/>
           </a:xfrm>
           <a:prstGeom prst="rect">
@@ -3301,8 +3301,8 @@
         </p:nvSpPr>
         <p:spPr>
           <a:xfrm>
-            <a:off x="658368" y="3703320"/>
-            <a:ext cx="8778240" cy="914400"/>
+            <a:off x="658368" y="3272356"/>
+            <a:ext cx="8778240" cy="795026"/>
           </a:xfrm>
           <a:prstGeom prst="rect">
             <a:avLst/>
@@ -3326,7 +3326,7 @@
             <a:r>
               <a:rPr sz="2100" b="0" dirty="0">
                 <a:solidFill>
-                  <a:srgbClr val="98A3B0"/>
+                  <a:schemeClr val="bg1"/>
                 </a:solidFill>
                 <a:latin typeface="Calibri"/>
               </a:rPr>
@@ -3335,7 +3335,7 @@
             <a:r>
               <a:rPr sz="2100" b="0" dirty="0" err="1">
                 <a:solidFill>
-                  <a:srgbClr val="98A3B0"/>
+                  <a:schemeClr val="bg1"/>
                 </a:solidFill>
                 <a:latin typeface="Calibri"/>
               </a:rPr>
@@ -3344,7 +3344,7 @@
             <a:r>
               <a:rPr sz="2100" b="0" dirty="0">
                 <a:solidFill>
-                  <a:srgbClr val="98A3B0"/>
+                  <a:schemeClr val="bg1"/>
                 </a:solidFill>
                 <a:latin typeface="Calibri"/>
               </a:rPr>
@@ -3361,8 +3361,8 @@
         </p:nvSpPr>
         <p:spPr>
           <a:xfrm>
-            <a:off x="658368" y="5074920"/>
-            <a:ext cx="3657600" cy="1005840"/>
+            <a:off x="658368" y="4818211"/>
+            <a:ext cx="3657600" cy="868699"/>
           </a:xfrm>
           <a:prstGeom prst="rect">
             <a:avLst/>
@@ -3381,7 +3381,7 @@
               </a:spcAft>
             </a:pPr>
             <a:r>
-              <a:rPr sz="1600" b="1">
+              <a:rPr sz="1600" b="1" dirty="0">
                 <a:solidFill>
                   <a:srgbClr val="E9EEF4"/>
                 </a:solidFill>
@@ -3400,7 +3400,7 @@
               </a:spcAft>
             </a:pPr>
             <a:r>
-              <a:rPr sz="1200" b="0">
+              <a:rPr sz="1600" b="0" dirty="0">
                 <a:solidFill>
                   <a:srgbClr val="98A3B0"/>
                 </a:solidFill>
@@ -3419,7 +3419,7 @@
               </a:spcAft>
             </a:pPr>
             <a:r>
-              <a:rPr sz="1200" b="0">
+              <a:rPr sz="1600" b="0" dirty="0">
                 <a:solidFill>
                   <a:srgbClr val="98A3B0"/>
                 </a:solidFill>
@@ -3438,8 +3438,8 @@
         </p:nvSpPr>
         <p:spPr>
           <a:xfrm>
-            <a:off x="4590288" y="5074920"/>
-            <a:ext cx="3657600" cy="1005840"/>
+            <a:off x="4590288" y="4818211"/>
+            <a:ext cx="3657600" cy="817660"/>
           </a:xfrm>
           <a:prstGeom prst="rect">
             <a:avLst/>
@@ -3458,7 +3458,7 @@
               </a:spcAft>
             </a:pPr>
             <a:r>
-              <a:rPr sz="1600" b="1" dirty="0">
+              <a:rPr sz="1500" b="1" dirty="0">
                 <a:solidFill>
                   <a:srgbClr val="E9EEF4"/>
                 </a:solidFill>
@@ -3477,7 +3477,7 @@
               </a:spcAft>
             </a:pPr>
             <a:r>
-              <a:rPr sz="1200" b="0" dirty="0">
+              <a:rPr sz="1500" b="0" dirty="0">
                 <a:solidFill>
                   <a:srgbClr val="98A3B0"/>
                 </a:solidFill>
@@ -3496,7 +3496,7 @@
               </a:spcAft>
             </a:pPr>
             <a:r>
-              <a:rPr sz="1200" b="0" dirty="0">
+              <a:rPr sz="1500" b="0" dirty="0">
                 <a:solidFill>
                   <a:srgbClr val="98A3B0"/>
                 </a:solidFill>
@@ -3515,8 +3515,8 @@
         </p:nvSpPr>
         <p:spPr>
           <a:xfrm>
-            <a:off x="8241487" y="5074920"/>
-            <a:ext cx="3291840" cy="1005840"/>
+            <a:off x="7653867" y="5074920"/>
+            <a:ext cx="4091126" cy="469359"/>
           </a:xfrm>
           <a:prstGeom prst="rect">
             <a:avLst/>
@@ -3535,7 +3535,7 @@
               </a:spcAft>
             </a:pPr>
             <a:r>
-              <a:rPr sz="1300" b="1" dirty="0">
+              <a:rPr sz="1400" b="1" dirty="0">
                 <a:solidFill>
                   <a:srgbClr val="F0C040"/>
                 </a:solidFill>
@@ -3551,44 +3551,44 @@
               </a:spcAft>
             </a:pPr>
             <a:r>
-              <a:rPr sz="1150" b="0" dirty="0">
-                <a:solidFill>
-                  <a:srgbClr val="98A3B0"/>
+              <a:rPr sz="1400" b="0" dirty="0">
+                <a:solidFill>
+                  <a:schemeClr val="bg1"/>
                 </a:solidFill>
                 <a:latin typeface="Consolas"/>
               </a:rPr>
               <a:t>github.com/</a:t>
             </a:r>
             <a:r>
-              <a:rPr sz="1150" b="0" dirty="0" err="1">
-                <a:solidFill>
-                  <a:srgbClr val="98A3B0"/>
+              <a:rPr sz="1400" b="0" dirty="0" err="1">
+                <a:solidFill>
+                  <a:schemeClr val="bg1"/>
                 </a:solidFill>
                 <a:latin typeface="Consolas"/>
               </a:rPr>
               <a:t>UbaJaz</a:t>
             </a:r>
             <a:r>
-              <a:rPr sz="1150" b="0" dirty="0">
-                <a:solidFill>
-                  <a:srgbClr val="98A3B0"/>
+              <a:rPr sz="1400" b="0" dirty="0">
+                <a:solidFill>
+                  <a:schemeClr val="bg1"/>
                 </a:solidFill>
                 <a:latin typeface="Consolas"/>
               </a:rPr>
               <a:t>/</a:t>
             </a:r>
             <a:r>
-              <a:rPr sz="1150" b="0" dirty="0" err="1">
-                <a:solidFill>
-                  <a:srgbClr val="98A3B0"/>
+              <a:rPr sz="1400" b="0" dirty="0" err="1">
+                <a:solidFill>
+                  <a:schemeClr val="bg1"/>
                 </a:solidFill>
                 <a:latin typeface="Consolas"/>
               </a:rPr>
               <a:t>Digital_Minds_Research</a:t>
             </a:r>
-            <a:endParaRPr sz="1150" b="0" dirty="0">
+            <a:endParaRPr sz="1400" b="0" dirty="0">
               <a:solidFill>
-                <a:srgbClr val="98A3B0"/>
+                <a:schemeClr val="bg1"/>
               </a:solidFill>
               <a:latin typeface="Consolas"/>
             </a:endParaRPr>
@@ -3648,8 +3648,8 @@
         </p:nvSpPr>
         <p:spPr>
           <a:xfrm>
-            <a:off x="658368" y="6400800"/>
-            <a:ext cx="10874959" cy="274320"/>
+            <a:off x="658368" y="6426555"/>
+            <a:ext cx="10874959" cy="216854"/>
           </a:xfrm>
           <a:prstGeom prst="rect">
             <a:avLst/>
@@ -3671,18 +3671,18 @@
               </a:spcAft>
             </a:pPr>
             <a:r>
-              <a:rPr sz="1050" b="1">
-                <a:solidFill>
-                  <a:srgbClr val="F0C040"/>
+              <a:rPr sz="1200" b="1" dirty="0">
+                <a:solidFill>
+                  <a:schemeClr val="bg1"/>
                 </a:solidFill>
                 <a:latin typeface="Consolas"/>
               </a:rPr>
               <a:t>1</a:t>
             </a:r>
             <a:r>
-              <a:rPr sz="1050" b="0">
-                <a:solidFill>
-                  <a:srgbClr val="6B7683"/>
+              <a:rPr sz="1200" b="0" dirty="0">
+                <a:solidFill>
+                  <a:schemeClr val="bg1"/>
                 </a:solidFill>
                 <a:latin typeface="Consolas"/>
               </a:rPr>
@@ -3752,7 +3752,7 @@
               </a:spcAft>
             </a:pPr>
             <a:r>
-              <a:rPr sz="1150" b="0" spc="160">
+              <a:rPr sz="1150" b="0" spc="160" dirty="0">
                 <a:solidFill>
                   <a:srgbClr val="F0C040"/>
                 </a:solidFill>
@@ -3794,7 +3794,7 @@
               </a:spcAft>
             </a:pPr>
             <a:r>
-              <a:rPr sz="3100" b="1">
+              <a:rPr sz="3100" b="1" dirty="0">
                 <a:solidFill>
                   <a:srgbClr val="E9EEF4"/>
                 </a:solidFill>
@@ -3836,7 +3836,7 @@
               </a:spcAft>
             </a:pPr>
             <a:r>
-              <a:rPr sz="1450" b="1">
+              <a:rPr sz="1450" b="1" dirty="0">
                 <a:solidFill>
                   <a:srgbClr val="E9EEF4"/>
                 </a:solidFill>
@@ -3845,7 +3845,7 @@
               <a:t>Two confounds block any black-box test. </a:t>
             </a:r>
             <a:r>
-              <a:rPr sz="1450" b="0">
+              <a:rPr sz="1450" b="0" dirty="0">
                 <a:solidFill>
                   <a:srgbClr val="98A3B0"/>
                 </a:solidFill>
@@ -3912,7 +3912,7 @@
         <p:spPr>
           <a:xfrm>
             <a:off x="804672" y="2395728"/>
-            <a:ext cx="1920240" cy="310896"/>
+            <a:ext cx="1920240" cy="271100"/>
           </a:xfrm>
           <a:prstGeom prst="rect">
             <a:avLst/>
@@ -3934,7 +3934,7 @@
               </a:spcAft>
             </a:pPr>
             <a:r>
-              <a:rPr sz="2000" b="1">
+              <a:rPr sz="1500" b="1" dirty="0">
                 <a:solidFill>
                   <a:srgbClr val="4A9B4A"/>
                 </a:solidFill>
@@ -3943,7 +3943,7 @@
               <a:t>M   </a:t>
             </a:r>
             <a:r>
-              <a:rPr sz="1000" b="1">
+              <a:rPr sz="1500" b="1" dirty="0">
                 <a:solidFill>
                   <a:srgbClr val="6B7683"/>
                 </a:solidFill>
@@ -3963,7 +3963,7 @@
         <p:spPr>
           <a:xfrm>
             <a:off x="804672" y="2834640"/>
-            <a:ext cx="1920240" cy="868680"/>
+            <a:ext cx="1920240" cy="751552"/>
           </a:xfrm>
           <a:prstGeom prst="rect">
             <a:avLst/>
@@ -3982,7 +3982,7 @@
               </a:spcAft>
             </a:pPr>
             <a:r>
-              <a:rPr sz="1350" b="1">
+              <a:rPr sz="1400" b="1" dirty="0">
                 <a:solidFill>
                   <a:srgbClr val="E9EEF4"/>
                 </a:solidFill>
@@ -4001,7 +4001,7 @@
               </a:spcAft>
             </a:pPr>
             <a:r>
-              <a:rPr sz="1150" b="0">
+              <a:rPr sz="1400" b="0" dirty="0">
                 <a:solidFill>
                   <a:srgbClr val="98A3B0"/>
                 </a:solidFill>
@@ -4020,7 +4020,7 @@
               </a:spcAft>
             </a:pPr>
             <a:r>
-              <a:rPr sz="1150" b="0">
+              <a:rPr sz="1400" b="0" dirty="0">
                 <a:solidFill>
                   <a:srgbClr val="98A3B0"/>
                 </a:solidFill>
@@ -4087,7 +4087,7 @@
         <p:spPr>
           <a:xfrm>
             <a:off x="3200400" y="2395728"/>
-            <a:ext cx="1920240" cy="310896"/>
+            <a:ext cx="1920240" cy="271100"/>
           </a:xfrm>
           <a:prstGeom prst="rect">
             <a:avLst/>
@@ -4109,7 +4109,7 @@
               </a:spcAft>
             </a:pPr>
             <a:r>
-              <a:rPr sz="2000" b="1" dirty="0">
+              <a:rPr sz="1500" b="1" dirty="0">
                 <a:solidFill>
                   <a:srgbClr val="4A90D9"/>
                 </a:solidFill>
@@ -4118,7 +4118,7 @@
               <a:t>N   </a:t>
             </a:r>
             <a:r>
-              <a:rPr sz="1000" b="1" dirty="0">
+              <a:rPr sz="1500" b="1" dirty="0">
                 <a:solidFill>
                   <a:srgbClr val="6B7683"/>
                 </a:solidFill>
@@ -4138,7 +4138,7 @@
         <p:spPr>
           <a:xfrm>
             <a:off x="3200400" y="2834640"/>
-            <a:ext cx="1920240" cy="868680"/>
+            <a:ext cx="1920240" cy="751552"/>
           </a:xfrm>
           <a:prstGeom prst="rect">
             <a:avLst/>
@@ -4157,7 +4157,7 @@
               </a:spcAft>
             </a:pPr>
             <a:r>
-              <a:rPr sz="1350" b="1">
+              <a:rPr sz="1400" b="1" dirty="0">
                 <a:solidFill>
                   <a:srgbClr val="E9EEF4"/>
                 </a:solidFill>
@@ -4176,7 +4176,7 @@
               </a:spcAft>
             </a:pPr>
             <a:r>
-              <a:rPr sz="1150" b="0">
+              <a:rPr sz="1400" b="0" dirty="0">
                 <a:solidFill>
                   <a:srgbClr val="98A3B0"/>
                 </a:solidFill>
@@ -4195,7 +4195,7 @@
               </a:spcAft>
             </a:pPr>
             <a:r>
-              <a:rPr sz="1150" b="0">
+              <a:rPr sz="1400" b="0" dirty="0">
                 <a:solidFill>
                   <a:srgbClr val="98A3B0"/>
                 </a:solidFill>
@@ -4262,7 +4262,7 @@
         <p:spPr>
           <a:xfrm>
             <a:off x="5596128" y="2395728"/>
-            <a:ext cx="1920240" cy="310896"/>
+            <a:ext cx="1920240" cy="271100"/>
           </a:xfrm>
           <a:prstGeom prst="rect">
             <a:avLst/>
@@ -4284,7 +4284,7 @@
               </a:spcAft>
             </a:pPr>
             <a:r>
-              <a:rPr sz="2000" b="1">
+              <a:rPr sz="1500" b="1" dirty="0">
                 <a:solidFill>
                   <a:srgbClr val="98A3B0"/>
                 </a:solidFill>
@@ -4293,7 +4293,7 @@
               <a:t>F   </a:t>
             </a:r>
             <a:r>
-              <a:rPr sz="1000" b="1">
+              <a:rPr sz="1500" b="1" dirty="0">
                 <a:solidFill>
                   <a:srgbClr val="6B7683"/>
                 </a:solidFill>
@@ -4313,7 +4313,7 @@
         <p:spPr>
           <a:xfrm>
             <a:off x="5596128" y="2834640"/>
-            <a:ext cx="1920240" cy="868680"/>
+            <a:ext cx="1920240" cy="751552"/>
           </a:xfrm>
           <a:prstGeom prst="rect">
             <a:avLst/>
@@ -4332,7 +4332,7 @@
               </a:spcAft>
             </a:pPr>
             <a:r>
-              <a:rPr sz="1350" b="1">
+              <a:rPr sz="1400" b="1" dirty="0">
                 <a:solidFill>
                   <a:srgbClr val="E9EEF4"/>
                 </a:solidFill>
@@ -4351,13 +4351,31 @@
               </a:spcAft>
             </a:pPr>
             <a:r>
-              <a:rPr sz="1150" b="0">
+              <a:rPr sz="1400" b="0" dirty="0">
                 <a:solidFill>
                   <a:srgbClr val="98A3B0"/>
                 </a:solidFill>
                 <a:latin typeface="Calibri"/>
               </a:rPr>
-              <a:t>different organisation,</a:t>
+              <a:t>different </a:t>
+            </a:r>
+            <a:r>
+              <a:rPr sz="1400" b="0" dirty="0" err="1">
+                <a:solidFill>
+                  <a:srgbClr val="98A3B0"/>
+                </a:solidFill>
+                <a:latin typeface="Calibri"/>
+              </a:rPr>
+              <a:t>organisation</a:t>
+            </a:r>
+            <a:r>
+              <a:rPr sz="1400" b="0" dirty="0">
+                <a:solidFill>
+                  <a:srgbClr val="98A3B0"/>
+                </a:solidFill>
+                <a:latin typeface="Calibri"/>
+              </a:rPr>
+              <a:t>,</a:t>
             </a:r>
           </a:p>
           <a:p>
@@ -4370,7 +4388,7 @@
               </a:spcAft>
             </a:pPr>
             <a:r>
-              <a:rPr sz="1150" b="0">
+              <a:rPr sz="1400" b="0" dirty="0">
                 <a:solidFill>
                   <a:srgbClr val="98A3B0"/>
                 </a:solidFill>
@@ -4985,8 +5003,8 @@
         </p:nvSpPr>
         <p:spPr>
           <a:xfrm>
-            <a:off x="8339328" y="3874685"/>
-            <a:ext cx="3200400" cy="274320"/>
+            <a:off x="8345458" y="3890963"/>
+            <a:ext cx="3200400" cy="235834"/>
           </a:xfrm>
           <a:prstGeom prst="rect">
             <a:avLst/>
@@ -5008,7 +5026,7 @@
               </a:spcAft>
             </a:pPr>
             <a:r>
-              <a:rPr sz="1200" b="1" dirty="0">
+              <a:rPr lang="en-US" sz="1300" b="1" dirty="0">
                 <a:solidFill>
                   <a:srgbClr val="F0C040"/>
                 </a:solidFill>
@@ -5017,7 +5035,7 @@
               <a:t>D  </a:t>
             </a:r>
             <a:r>
-              <a:rPr sz="1150" b="0" dirty="0">
+              <a:rPr lang="en-US" sz="1300" b="0" dirty="0">
                 <a:solidFill>
                   <a:srgbClr val="E9EEF4"/>
                 </a:solidFill>
@@ -5025,6 +5043,12 @@
               </a:rPr>
               <a:t>surface baseline — the cheap third party</a:t>
             </a:r>
+            <a:endParaRPr sz="1300" b="0" dirty="0">
+              <a:solidFill>
+                <a:srgbClr val="E9EEF4"/>
+              </a:solidFill>
+              <a:latin typeface="Calibri"/>
+            </a:endParaRPr>
           </a:p>
         </p:txBody>
       </p:sp>
@@ -5036,7 +5060,7 @@
         </p:nvSpPr>
         <p:spPr>
           <a:xfrm>
-            <a:off x="658368" y="4224528"/>
+            <a:off x="651967" y="4279392"/>
             <a:ext cx="10881360" cy="1371600"/>
           </a:xfrm>
           <a:prstGeom prst="rect">
@@ -5247,7 +5271,7 @@
               </a:spcAft>
             </a:pPr>
             <a:r>
-              <a:rPr sz="1250" b="1">
+              <a:rPr sz="1250" b="1" dirty="0">
                 <a:solidFill>
                   <a:srgbClr val="E9EEF4"/>
                 </a:solidFill>
@@ -5256,7 +5280,7 @@
               <a:t>Ground truth is constructed, not elicited. </a:t>
             </a:r>
             <a:r>
-              <a:rPr sz="1250" b="0">
+              <a:rPr sz="1250" b="0" dirty="0">
                 <a:solidFill>
                   <a:srgbClr val="98A3B0"/>
                 </a:solidFill>
@@ -5321,7 +5345,7 @@
         <p:spPr>
           <a:xfrm>
             <a:off x="658368" y="6400800"/>
-            <a:ext cx="10874959" cy="274320"/>
+            <a:ext cx="10874959" cy="216854"/>
           </a:xfrm>
           <a:prstGeom prst="rect">
             <a:avLst/>
@@ -5343,7 +5367,7 @@
               </a:spcAft>
             </a:pPr>
             <a:r>
-              <a:rPr sz="1050" b="1">
+              <a:rPr sz="1200" b="1" dirty="0">
                 <a:solidFill>
                   <a:srgbClr val="F0C040"/>
                 </a:solidFill>
@@ -5352,13 +5376,22 @@
               <a:t>2</a:t>
             </a:r>
             <a:r>
-              <a:rPr sz="1050" b="0">
+              <a:rPr sz="1200" b="0" dirty="0">
                 <a:solidFill>
                   <a:srgbClr val="6B7683"/>
                 </a:solidFill>
                 <a:latin typeface="Consolas"/>
               </a:rPr>
-              <a:t>  /  6     Question and design</a:t>
+              <a:t>  </a:t>
+            </a:r>
+            <a:r>
+              <a:rPr sz="1200" b="0" dirty="0">
+                <a:solidFill>
+                  <a:schemeClr val="bg1"/>
+                </a:solidFill>
+                <a:latin typeface="Consolas"/>
+              </a:rPr>
+              <a:t>/  6     Question and design</a:t>
             </a:r>
           </a:p>
         </p:txBody>
@@ -5555,7 +5588,7 @@
         <p:spPr>
           <a:xfrm>
             <a:off x="6903720" y="1700784"/>
-            <a:ext cx="4572000" cy="960120"/>
+            <a:ext cx="4572000" cy="909544"/>
           </a:xfrm>
           <a:prstGeom prst="rect">
             <a:avLst/>
@@ -5574,7 +5607,7 @@
               </a:spcAft>
             </a:pPr>
             <a:r>
-              <a:rPr sz="2800" b="1">
+              <a:rPr sz="2800" b="1" dirty="0">
                 <a:solidFill>
                   <a:srgbClr val="F0C040"/>
                 </a:solidFill>
@@ -5593,9 +5626,9 @@
               </a:spcAft>
             </a:pPr>
             <a:r>
-              <a:rPr sz="1250" b="0">
-                <a:solidFill>
-                  <a:srgbClr val="98A3B0"/>
+              <a:rPr sz="1250" b="0" dirty="0">
+                <a:solidFill>
+                  <a:schemeClr val="bg1"/>
                 </a:solidFill>
                 <a:latin typeface="Calibri"/>
               </a:rPr>
@@ -5613,7 +5646,7 @@
         <p:spPr>
           <a:xfrm>
             <a:off x="6903720" y="2688336"/>
-            <a:ext cx="4572000" cy="960120"/>
+            <a:ext cx="4572000" cy="909544"/>
           </a:xfrm>
           <a:prstGeom prst="rect">
             <a:avLst/>
@@ -5632,7 +5665,7 @@
               </a:spcAft>
             </a:pPr>
             <a:r>
-              <a:rPr sz="2800" b="1">
+              <a:rPr sz="2800" b="1" dirty="0">
                 <a:solidFill>
                   <a:srgbClr val="F0C040"/>
                 </a:solidFill>
@@ -5651,9 +5684,9 @@
               </a:spcAft>
             </a:pPr>
             <a:r>
-              <a:rPr sz="1250" b="0">
-                <a:solidFill>
-                  <a:srgbClr val="98A3B0"/>
+              <a:rPr sz="1250" b="0" dirty="0">
+                <a:solidFill>
+                  <a:schemeClr val="bg1"/>
                 </a:solidFill>
                 <a:latin typeface="Calibri"/>
               </a:rPr>
@@ -5671,7 +5704,7 @@
         <p:spPr>
           <a:xfrm>
             <a:off x="6903720" y="3675888"/>
-            <a:ext cx="4572000" cy="960120"/>
+            <a:ext cx="4572000" cy="909544"/>
           </a:xfrm>
           <a:prstGeom prst="rect">
             <a:avLst/>
@@ -5690,7 +5723,7 @@
               </a:spcAft>
             </a:pPr>
             <a:r>
-              <a:rPr sz="2800" b="1">
+              <a:rPr sz="2800" b="1" dirty="0">
                 <a:solidFill>
                   <a:srgbClr val="4A90D9"/>
                 </a:solidFill>
@@ -5709,13 +5742,31 @@
               </a:spcAft>
             </a:pPr>
             <a:r>
-              <a:rPr sz="1250" b="0">
-                <a:solidFill>
-                  <a:srgbClr val="98A3B0"/>
+              <a:rPr sz="1250" b="0" dirty="0">
+                <a:solidFill>
+                  <a:schemeClr val="bg1"/>
                 </a:solidFill>
                 <a:latin typeface="Calibri"/>
               </a:rPr>
-              <a:t>surface baseline on VO-D's M column once style is equalised — and the model falls to 0.500 with it</a:t>
+              <a:t>surface baseline on VO-D's M column once style is </a:t>
+            </a:r>
+            <a:r>
+              <a:rPr sz="1250" b="0" dirty="0" err="1">
+                <a:solidFill>
+                  <a:schemeClr val="bg1"/>
+                </a:solidFill>
+                <a:latin typeface="Calibri"/>
+              </a:rPr>
+              <a:t>equalised</a:t>
+            </a:r>
+            <a:r>
+              <a:rPr sz="1250" b="0" dirty="0">
+                <a:solidFill>
+                  <a:schemeClr val="bg1"/>
+                </a:solidFill>
+                <a:latin typeface="Calibri"/>
+              </a:rPr>
+              <a:t> — and the model falls to 0.500 with it</a:t>
             </a:r>
           </a:p>
         </p:txBody>
@@ -5729,7 +5780,7 @@
         <p:spPr>
           <a:xfrm>
             <a:off x="6903720" y="4645152"/>
-            <a:ext cx="4617720" cy="384048"/>
+            <a:ext cx="4617720" cy="410562"/>
           </a:xfrm>
           <a:prstGeom prst="rect">
             <a:avLst/>
@@ -5751,9 +5802,9 @@
               </a:spcAft>
             </a:pPr>
             <a:r>
-              <a:rPr sz="1150" b="0">
-                <a:solidFill>
-                  <a:srgbClr val="6B7683"/>
+              <a:rPr sz="1150" b="0" dirty="0">
+                <a:solidFill>
+                  <a:schemeClr val="bg1"/>
                 </a:solidFill>
                 <a:latin typeface="Calibri"/>
               </a:rPr>
@@ -5818,7 +5869,7 @@
         <p:spPr>
           <a:xfrm>
             <a:off x="7068312" y="5175504"/>
-            <a:ext cx="4297680" cy="914400"/>
+            <a:ext cx="4297680" cy="944233"/>
           </a:xfrm>
           <a:prstGeom prst="rect">
             <a:avLst/>
@@ -5840,7 +5891,7 @@
               </a:spcAft>
             </a:pPr>
             <a:r>
-              <a:rPr sz="1250" b="1" dirty="0">
+              <a:rPr sz="1300" b="1" dirty="0">
                 <a:solidFill>
                   <a:srgbClr val="E24A4A"/>
                 </a:solidFill>
@@ -5849,31 +5900,13 @@
               <a:t>Caveat.  </a:t>
             </a:r>
             <a:r>
-              <a:rPr sz="1250" b="0" dirty="0">
+              <a:rPr sz="1300" b="0" dirty="0">
                 <a:solidFill>
                   <a:srgbClr val="E9EEF4"/>
                 </a:solidFill>
                 <a:latin typeface="Calibri"/>
               </a:rPr>
-              <a:t>VO-D/VO-E also changed the </a:t>
-            </a:r>
-            <a:r>
-              <a:rPr sz="1250" b="0" dirty="0" err="1">
-                <a:solidFill>
-                  <a:srgbClr val="E9EEF4"/>
-                </a:solidFill>
-                <a:latin typeface="Calibri"/>
-              </a:rPr>
-              <a:t>behavioural</a:t>
-            </a:r>
-            <a:r>
-              <a:rPr sz="1250" b="0" dirty="0">
-                <a:solidFill>
-                  <a:srgbClr val="E9EEF4"/>
-                </a:solidFill>
-                <a:latin typeface="Calibri"/>
-              </a:rPr>
-              <a:t> expression of the hidden property, so they are not clean causal isolation of style: the two personas largely converged on the same recommendation.</a:t>
+              <a:t>VO-D/VO-E also changed the behavioral expression of the hidden property, so they are not clean causal isolation of style: the two personas largely converged on the same recommendation.</a:t>
             </a:r>
           </a:p>
         </p:txBody>
@@ -5974,7 +6007,7 @@
         <p:spPr>
           <a:xfrm>
             <a:off x="658368" y="6400800"/>
-            <a:ext cx="10874959" cy="274320"/>
+            <a:ext cx="10874959" cy="216854"/>
           </a:xfrm>
           <a:prstGeom prst="rect">
             <a:avLst/>
@@ -5996,7 +6029,7 @@
               </a:spcAft>
             </a:pPr>
             <a:r>
-              <a:rPr sz="1050" b="1">
+              <a:rPr sz="1200" b="1" dirty="0">
                 <a:solidFill>
                   <a:srgbClr val="F0C040"/>
                 </a:solidFill>
@@ -6005,13 +6038,22 @@
               <a:t>3</a:t>
             </a:r>
             <a:r>
-              <a:rPr sz="1050" b="0">
+              <a:rPr sz="1200" b="0" dirty="0">
                 <a:solidFill>
                   <a:srgbClr val="6B7683"/>
                 </a:solidFill>
                 <a:latin typeface="Consolas"/>
               </a:rPr>
-              <a:t>  /  6     Surface leakage</a:t>
+              <a:t>  </a:t>
+            </a:r>
+            <a:r>
+              <a:rPr sz="1200" b="0" dirty="0">
+                <a:solidFill>
+                  <a:schemeClr val="bg1"/>
+                </a:solidFill>
+                <a:latin typeface="Consolas"/>
+              </a:rPr>
+              <a:t>/  6     Surface leakage</a:t>
             </a:r>
           </a:p>
         </p:txBody>
@@ -6136,11 +6178,17 @@
           <p:cNvGraphicFramePr>
             <a:graphicFrameLocks noGrp="1"/>
           </p:cNvGraphicFramePr>
-          <p:nvPr/>
+          <p:nvPr>
+            <p:extLst>
+              <p:ext uri="{D42A27DB-BD31-4B8C-83A1-F6EECF244321}">
+                <p14:modId xmlns:p14="http://schemas.microsoft.com/office/powerpoint/2010/main" val="1135391230"/>
+              </p:ext>
+            </p:extLst>
+          </p:nvPr>
         </p:nvGraphicFramePr>
         <p:xfrm>
           <a:off x="658368" y="1627632"/>
-          <a:ext cx="8229600" cy="2286000"/>
+          <a:ext cx="8229600" cy="2316480"/>
         </p:xfrm>
         <a:graphic>
           <a:graphicData uri="http://schemas.openxmlformats.org/drawingml/2006/table">
@@ -6186,9 +6234,9 @@
                     <a:p>
                       <a:pPr algn="l"/>
                       <a:r>
-                        <a:rPr sz="1050" b="1">
+                        <a:rPr sz="1300" b="1" dirty="0">
                           <a:solidFill>
-                            <a:srgbClr val="6B7683"/>
+                            <a:schemeClr val="bg1"/>
                           </a:solidFill>
                           <a:latin typeface="Calibri"/>
                         </a:rPr>
@@ -6209,9 +6257,9 @@
                     <a:p>
                       <a:pPr algn="l"/>
                       <a:r>
-                        <a:rPr sz="1050" b="1">
+                        <a:rPr sz="1300" b="1" dirty="0">
                           <a:solidFill>
-                            <a:srgbClr val="6B7683"/>
+                            <a:schemeClr val="bg1"/>
                           </a:solidFill>
                           <a:latin typeface="Calibri"/>
                         </a:rPr>
@@ -6221,9 +6269,9 @@
                     <a:p>
                       <a:pPr algn="l"/>
                       <a:r>
-                        <a:rPr sz="1050" b="1">
+                        <a:rPr sz="1300" b="1" dirty="0">
                           <a:solidFill>
-                            <a:srgbClr val="6B7683"/>
+                            <a:schemeClr val="bg1"/>
                           </a:solidFill>
                           <a:latin typeface="Calibri"/>
                         </a:rPr>
@@ -6244,9 +6292,9 @@
                     <a:p>
                       <a:pPr algn="l"/>
                       <a:r>
-                        <a:rPr sz="1050" b="1">
+                        <a:rPr sz="1300" b="1" dirty="0">
                           <a:solidFill>
-                            <a:srgbClr val="6B7683"/>
+                            <a:schemeClr val="bg1"/>
                           </a:solidFill>
                           <a:latin typeface="Calibri"/>
                         </a:rPr>
@@ -6256,9 +6304,9 @@
                     <a:p>
                       <a:pPr algn="l"/>
                       <a:r>
-                        <a:rPr sz="1050" b="1">
+                        <a:rPr sz="1300" b="1" dirty="0">
                           <a:solidFill>
-                            <a:srgbClr val="6B7683"/>
+                            <a:schemeClr val="bg1"/>
                           </a:solidFill>
                           <a:latin typeface="Calibri"/>
                         </a:rPr>
@@ -6279,9 +6327,9 @@
                     <a:p>
                       <a:pPr algn="l"/>
                       <a:r>
-                        <a:rPr sz="1050" b="1">
+                        <a:rPr sz="1300" b="1" dirty="0">
                           <a:solidFill>
-                            <a:srgbClr val="6B7683"/>
+                            <a:schemeClr val="bg1"/>
                           </a:solidFill>
                           <a:latin typeface="Calibri"/>
                         </a:rPr>
@@ -6291,9 +6339,9 @@
                     <a:p>
                       <a:pPr algn="l"/>
                       <a:r>
-                        <a:rPr sz="1050" b="1">
+                        <a:rPr sz="1300" b="1" dirty="0">
                           <a:solidFill>
-                            <a:srgbClr val="6B7683"/>
+                            <a:schemeClr val="bg1"/>
                           </a:solidFill>
                           <a:latin typeface="Calibri"/>
                         </a:rPr>
@@ -6443,7 +6491,7 @@
                     <a:p>
                       <a:pPr algn="l"/>
                       <a:r>
-                        <a:rPr sz="1200" b="0">
+                        <a:rPr sz="1200" b="0" dirty="0">
                           <a:solidFill>
                             <a:srgbClr val="E9EEF4"/>
                           </a:solidFill>
@@ -6466,7 +6514,7 @@
                     <a:p>
                       <a:pPr algn="l"/>
                       <a:r>
-                        <a:rPr sz="1200" b="0">
+                        <a:rPr sz="1200" b="0" dirty="0">
                           <a:solidFill>
                             <a:srgbClr val="E9EEF4"/>
                           </a:solidFill>
@@ -6664,7 +6712,7 @@
                     <a:p>
                       <a:pPr algn="l"/>
                       <a:r>
-                        <a:rPr sz="1200" b="1">
+                        <a:rPr sz="1200" b="1" dirty="0">
                           <a:solidFill>
                             <a:srgbClr val="F0C040"/>
                           </a:solidFill>
@@ -6687,7 +6735,7 @@
                     <a:p>
                       <a:pPr algn="l"/>
                       <a:r>
-                        <a:rPr sz="1200" b="1">
+                        <a:rPr sz="1200" b="1" dirty="0">
                           <a:solidFill>
                             <a:srgbClr val="F0C040"/>
                           </a:solidFill>
@@ -6761,7 +6809,7 @@
               </a:spcAft>
             </a:pPr>
             <a:r>
-              <a:rPr sz="3000" b="1">
+              <a:rPr sz="3000" b="1" dirty="0">
                 <a:solidFill>
                   <a:srgbClr val="F0C040"/>
                 </a:solidFill>
@@ -6777,7 +6825,7 @@
               </a:spcAft>
             </a:pPr>
             <a:r>
-              <a:rPr sz="1150" b="0">
+              <a:rPr sz="1150" b="0" dirty="0">
                 <a:solidFill>
                   <a:srgbClr val="98A3B0"/>
                 </a:solidFill>
@@ -6796,7 +6844,7 @@
               </a:spcAft>
             </a:pPr>
             <a:r>
-              <a:rPr sz="1200" b="0">
+              <a:rPr sz="1200" b="0" dirty="0">
                 <a:solidFill>
                   <a:srgbClr val="E9EEF4"/>
                 </a:solidFill>
@@ -6838,7 +6886,7 @@
               </a:spcAft>
             </a:pPr>
             <a:r>
-              <a:rPr sz="1500" b="1">
+              <a:rPr sz="1500" b="1" dirty="0">
                 <a:solidFill>
                   <a:srgbClr val="E9EEF4"/>
                 </a:solidFill>
@@ -6847,7 +6895,7 @@
               <a:t>Not one construction shows a positive M-target self-advantage whose interval excludes zero. </a:t>
             </a:r>
             <a:r>
-              <a:rPr sz="1500" b="0">
+              <a:rPr sz="1500" b="0" dirty="0">
                 <a:solidFill>
                   <a:srgbClr val="98A3B0"/>
                 </a:solidFill>
@@ -6856,7 +6904,7 @@
               <a:t>The single significant value on that contrast is </a:t>
             </a:r>
             <a:r>
-              <a:rPr sz="1500" b="1">
+              <a:rPr sz="1500" b="1" dirty="0">
                 <a:solidFill>
                   <a:srgbClr val="E24A4A"/>
                 </a:solidFill>
@@ -6865,7 +6913,7 @@
               <a:t>negative</a:t>
             </a:r>
             <a:r>
-              <a:rPr sz="1500" b="0">
+              <a:rPr sz="1500" b="0" dirty="0">
                 <a:solidFill>
                   <a:srgbClr val="98A3B0"/>
                 </a:solidFill>
@@ -6884,7 +6932,7 @@
               </a:spcAft>
             </a:pPr>
             <a:r>
-              <a:rPr sz="1400" b="1">
+              <a:rPr sz="1400" b="1" dirty="0">
                 <a:solidFill>
                   <a:srgbClr val="F0C040"/>
                 </a:solidFill>
@@ -6893,7 +6941,7 @@
               <a:t>Positive interaction, but predictor-by-column differences prevent it from uniquely identifying privileged access. </a:t>
             </a:r>
             <a:r>
-              <a:rPr sz="1400" b="0">
+              <a:rPr sz="1400" b="0" dirty="0">
                 <a:solidFill>
                   <a:srgbClr val="98A3B0"/>
                 </a:solidFill>
@@ -6902,7 +6950,7 @@
               <a:t>It is positive because M </a:t>
             </a:r>
             <a:r>
-              <a:rPr sz="1400" b="1">
+              <a:rPr sz="1400" b="1" dirty="0">
                 <a:solidFill>
                   <a:srgbClr val="E9EEF4"/>
                 </a:solidFill>
@@ -6911,7 +6959,7 @@
               <a:t>under</a:t>
             </a:r>
             <a:r>
-              <a:rPr sz="1400" b="0">
+              <a:rPr sz="1400" b="0" dirty="0">
                 <a:solidFill>
                   <a:srgbClr val="98A3B0"/>
                 </a:solidFill>
@@ -6930,7 +6978,7 @@
         </p:nvSpPr>
         <p:spPr>
           <a:xfrm>
-            <a:off x="658368" y="5623560"/>
+            <a:off x="646481" y="5683187"/>
             <a:ext cx="10874959" cy="566928"/>
           </a:xfrm>
           <a:prstGeom prst="rect">
@@ -6971,7 +7019,7 @@
               </a:spcAft>
             </a:pPr>
             <a:r>
-              <a:rPr sz="1300" b="1">
+              <a:rPr sz="1300" b="1" dirty="0">
                 <a:solidFill>
                   <a:srgbClr val="E9EEF4"/>
                 </a:solidFill>
@@ -6980,13 +7028,31 @@
               <a:t>Four stimulus constructions  ·  shared 200-prompt pool</a:t>
             </a:r>
             <a:r>
-              <a:rPr sz="1100" b="0">
+              <a:rPr sz="1100" b="0" dirty="0">
                 <a:solidFill>
                   <a:srgbClr val="6B7683"/>
                 </a:solidFill>
                 <a:latin typeface="Calibri"/>
               </a:rPr>
-              <a:t>          Preregistered floor 500/cell; achieved ~400; VO-D N = 323. Prompt-clustered bootstrap throughout.</a:t>
+              <a:t>          </a:t>
+            </a:r>
+            <a:r>
+              <a:rPr sz="1100" b="0" dirty="0">
+                <a:solidFill>
+                  <a:schemeClr val="bg1"/>
+                </a:solidFill>
+                <a:latin typeface="Calibri"/>
+              </a:rPr>
+              <a:t>Preregistered floor 500/cell; achieved ~400; VO-D N = 323. Prompt-clustered bootstrap throughout</a:t>
+            </a:r>
+            <a:r>
+              <a:rPr sz="1100" b="0" dirty="0">
+                <a:solidFill>
+                  <a:srgbClr val="6B7683"/>
+                </a:solidFill>
+                <a:latin typeface="Calibri"/>
+              </a:rPr>
+              <a:t>.</a:t>
             </a:r>
           </a:p>
         </p:txBody>
@@ -7044,8 +7110,8 @@
         </p:nvSpPr>
         <p:spPr>
           <a:xfrm>
-            <a:off x="658368" y="6400800"/>
-            <a:ext cx="10874959" cy="274320"/>
+            <a:off x="664769" y="6382512"/>
+            <a:ext cx="10874959" cy="216854"/>
           </a:xfrm>
           <a:prstGeom prst="rect">
             <a:avLst/>
@@ -7067,7 +7133,7 @@
               </a:spcAft>
             </a:pPr>
             <a:r>
-              <a:rPr sz="1050" b="1">
+              <a:rPr sz="1200" b="1" dirty="0">
                 <a:solidFill>
                   <a:srgbClr val="F0C040"/>
                 </a:solidFill>
@@ -7076,13 +7142,22 @@
               <a:t>4</a:t>
             </a:r>
             <a:r>
-              <a:rPr sz="1050" b="0">
+              <a:rPr sz="1200" b="0" dirty="0">
                 <a:solidFill>
                   <a:srgbClr val="6B7683"/>
                 </a:solidFill>
                 <a:latin typeface="Consolas"/>
               </a:rPr>
-              <a:t>  /  6     Crossed design</a:t>
+              <a:t>  </a:t>
+            </a:r>
+            <a:r>
+              <a:rPr sz="1200" b="0" dirty="0">
+                <a:solidFill>
+                  <a:schemeClr val="bg1"/>
+                </a:solidFill>
+                <a:latin typeface="Consolas"/>
+              </a:rPr>
+              <a:t>/  6     Crossed design</a:t>
             </a:r>
           </a:p>
         </p:txBody>
@@ -7128,7 +7203,7 @@
         </p:nvSpPr>
         <p:spPr>
           <a:xfrm>
-            <a:off x="658368" y="475488"/>
+            <a:off x="658368" y="440944"/>
             <a:ext cx="10874959" cy="310896"/>
           </a:xfrm>
           <a:prstGeom prst="rect">
@@ -7148,7 +7223,7 @@
               </a:spcAft>
             </a:pPr>
             <a:r>
-              <a:rPr sz="1150" b="0" spc="160">
+              <a:rPr sz="1150" b="0" spc="160" dirty="0">
                 <a:solidFill>
                   <a:srgbClr val="F0C040"/>
                 </a:solidFill>
@@ -7167,7 +7242,7 @@
         </p:nvSpPr>
         <p:spPr>
           <a:xfrm>
-            <a:off x="658368" y="868680"/>
+            <a:off x="648898" y="723391"/>
             <a:ext cx="10874959" cy="1005840"/>
           </a:xfrm>
           <a:prstGeom prst="rect">
@@ -7190,7 +7265,7 @@
               </a:spcAft>
             </a:pPr>
             <a:r>
-              <a:rPr sz="3000" b="1">
+              <a:rPr sz="3000" b="1" dirty="0">
                 <a:solidFill>
                   <a:srgbClr val="E9EEF4"/>
                 </a:solidFill>
@@ -7209,7 +7284,7 @@
         </p:nvSpPr>
         <p:spPr>
           <a:xfrm>
-            <a:off x="658368" y="1572768"/>
+            <a:off x="648898" y="1385317"/>
             <a:ext cx="3456432" cy="2084831"/>
           </a:xfrm>
           <a:prstGeom prst="rect">
@@ -7256,8 +7331,8 @@
         </p:nvSpPr>
         <p:spPr>
           <a:xfrm>
-            <a:off x="841248" y="1664208"/>
-            <a:ext cx="3090672" cy="1463040"/>
+            <a:off x="841248" y="1527048"/>
+            <a:ext cx="3090672" cy="1362617"/>
           </a:xfrm>
           <a:prstGeom prst="rect">
             <a:avLst/>
@@ -7276,7 +7351,7 @@
               </a:spcAft>
             </a:pPr>
             <a:r>
-              <a:rPr sz="950" b="1" spc="100">
+              <a:rPr sz="950" b="1" spc="100" dirty="0">
                 <a:solidFill>
                   <a:srgbClr val="4A9B4A"/>
                 </a:solidFill>
@@ -7292,7 +7367,7 @@
               </a:spcAft>
             </a:pPr>
             <a:r>
-              <a:rPr sz="1300" b="1">
+              <a:rPr sz="1300" b="1" dirty="0">
                 <a:solidFill>
                   <a:srgbClr val="E9EEF4"/>
                 </a:solidFill>
@@ -7308,7 +7383,7 @@
               </a:spcAft>
             </a:pPr>
             <a:r>
-              <a:rPr sz="3600" b="1">
+              <a:rPr sz="3600" b="1" dirty="0">
                 <a:solidFill>
                   <a:srgbClr val="4A9B4A"/>
                 </a:solidFill>
@@ -7327,9 +7402,9 @@
               </a:spcAft>
             </a:pPr>
             <a:r>
-              <a:rPr sz="1150" b="0">
-                <a:solidFill>
-                  <a:srgbClr val="98A3B0"/>
+              <a:rPr sz="1150" b="0" dirty="0">
+                <a:solidFill>
+                  <a:schemeClr val="bg1"/>
                 </a:solidFill>
                 <a:latin typeface="Calibri"/>
               </a:rPr>
@@ -7346,9 +7421,9 @@
               </a:spcAft>
             </a:pPr>
             <a:r>
-              <a:rPr sz="1150" b="0">
-                <a:solidFill>
-                  <a:srgbClr val="98A3B0"/>
+              <a:rPr sz="1150" b="0" dirty="0">
+                <a:solidFill>
+                  <a:schemeClr val="bg1"/>
                 </a:solidFill>
                 <a:latin typeface="Calibri"/>
               </a:rPr>
@@ -7533,7 +7608,7 @@
         </p:nvSpPr>
         <p:spPr>
           <a:xfrm>
-            <a:off x="4315968" y="1572768"/>
+            <a:off x="4297680" y="1394968"/>
             <a:ext cx="3456432" cy="2084831"/>
           </a:xfrm>
           <a:prstGeom prst="rect">
@@ -7580,8 +7655,8 @@
         </p:nvSpPr>
         <p:spPr>
           <a:xfrm>
-            <a:off x="4498848" y="1664208"/>
-            <a:ext cx="3090672" cy="1463040"/>
+            <a:off x="4498848" y="1577341"/>
+            <a:ext cx="3090672" cy="1362617"/>
           </a:xfrm>
           <a:prstGeom prst="rect">
             <a:avLst/>
@@ -7600,7 +7675,7 @@
               </a:spcAft>
             </a:pPr>
             <a:r>
-              <a:rPr sz="950" b="1" spc="100">
+              <a:rPr sz="950" b="1" spc="100" dirty="0">
                 <a:solidFill>
                   <a:srgbClr val="4A90D9"/>
                 </a:solidFill>
@@ -7616,7 +7691,7 @@
               </a:spcAft>
             </a:pPr>
             <a:r>
-              <a:rPr sz="1300" b="1">
+              <a:rPr sz="1300" b="1" dirty="0">
                 <a:solidFill>
                   <a:srgbClr val="E9EEF4"/>
                 </a:solidFill>
@@ -7632,7 +7707,7 @@
               </a:spcAft>
             </a:pPr>
             <a:r>
-              <a:rPr sz="3600" b="1">
+              <a:rPr sz="3600" b="1" dirty="0">
                 <a:solidFill>
                   <a:srgbClr val="4A90D9"/>
                 </a:solidFill>
@@ -7651,9 +7726,9 @@
               </a:spcAft>
             </a:pPr>
             <a:r>
-              <a:rPr sz="1150" b="0">
-                <a:solidFill>
-                  <a:srgbClr val="98A3B0"/>
+              <a:rPr sz="1150" b="0" dirty="0">
+                <a:solidFill>
+                  <a:schemeClr val="bg1"/>
                 </a:solidFill>
                 <a:latin typeface="Calibri"/>
               </a:rPr>
@@ -7670,9 +7745,9 @@
               </a:spcAft>
             </a:pPr>
             <a:r>
-              <a:rPr sz="1150" b="0">
-                <a:solidFill>
-                  <a:srgbClr val="98A3B0"/>
+              <a:rPr sz="1150" b="0" dirty="0">
+                <a:solidFill>
+                  <a:schemeClr val="bg1"/>
                 </a:solidFill>
                 <a:latin typeface="Calibri"/>
               </a:rPr>
@@ -7857,7 +7932,7 @@
         </p:nvSpPr>
         <p:spPr>
           <a:xfrm>
-            <a:off x="7973568" y="1572768"/>
+            <a:off x="7910768" y="1394968"/>
             <a:ext cx="3456432" cy="2084831"/>
           </a:xfrm>
           <a:prstGeom prst="rect">
@@ -7904,8 +7979,8 @@
         </p:nvSpPr>
         <p:spPr>
           <a:xfrm>
-            <a:off x="8156448" y="1664208"/>
-            <a:ext cx="3090672" cy="1463040"/>
+            <a:off x="8093648" y="1554480"/>
+            <a:ext cx="3090672" cy="1362617"/>
           </a:xfrm>
           <a:prstGeom prst="rect">
             <a:avLst/>
@@ -7924,7 +7999,7 @@
               </a:spcAft>
             </a:pPr>
             <a:r>
-              <a:rPr sz="950" b="1" spc="100">
+              <a:rPr sz="950" b="1" spc="100" dirty="0">
                 <a:solidFill>
                   <a:srgbClr val="F0C040"/>
                 </a:solidFill>
@@ -7940,7 +8015,7 @@
               </a:spcAft>
             </a:pPr>
             <a:r>
-              <a:rPr sz="1300" b="1">
+              <a:rPr sz="1300" b="1" dirty="0">
                 <a:solidFill>
                   <a:srgbClr val="E9EEF4"/>
                 </a:solidFill>
@@ -7956,7 +8031,7 @@
               </a:spcAft>
             </a:pPr>
             <a:r>
-              <a:rPr sz="3600" b="1">
+              <a:rPr sz="3600" b="1" dirty="0">
                 <a:solidFill>
                   <a:srgbClr val="F0C040"/>
                 </a:solidFill>
@@ -7975,9 +8050,9 @@
               </a:spcAft>
             </a:pPr>
             <a:r>
-              <a:rPr sz="1150" b="0">
-                <a:solidFill>
-                  <a:srgbClr val="98A3B0"/>
+              <a:rPr sz="1150" b="0" dirty="0">
+                <a:solidFill>
+                  <a:schemeClr val="bg1"/>
                 </a:solidFill>
                 <a:latin typeface="Calibri"/>
               </a:rPr>
@@ -7994,9 +8069,9 @@
               </a:spcAft>
             </a:pPr>
             <a:r>
-              <a:rPr sz="1150" b="0">
-                <a:solidFill>
-                  <a:srgbClr val="98A3B0"/>
+              <a:rPr sz="1150" b="0" dirty="0">
+                <a:solidFill>
+                  <a:schemeClr val="bg1"/>
                 </a:solidFill>
                 <a:latin typeface="Calibri"/>
               </a:rPr>
@@ -8181,7 +8256,7 @@
         </p:nvSpPr>
         <p:spPr>
           <a:xfrm>
-            <a:off x="658368" y="3712463"/>
+            <a:off x="658368" y="3633723"/>
             <a:ext cx="10881360" cy="457200"/>
           </a:xfrm>
           <a:prstGeom prst="rect">
@@ -8204,7 +8279,7 @@
               </a:spcAft>
             </a:pPr>
             <a:r>
-              <a:rPr sz="1250" b="0">
+              <a:rPr sz="1250" b="0" dirty="0">
                 <a:solidFill>
                   <a:srgbClr val="98A3B0"/>
                 </a:solidFill>
@@ -8213,7 +8288,7 @@
               <a:t>The 0.831 classifier is a different evaluation procedure; the only matched comparator is the length rule </a:t>
             </a:r>
             <a:r>
-              <a:rPr sz="1250" b="0">
+              <a:rPr sz="1250" b="0" dirty="0">
                 <a:solidFill>
                   <a:srgbClr val="E9EEF4"/>
                 </a:solidFill>
@@ -8222,7 +8297,7 @@
               <a:t>(paired difference +0.095 [+0.036, +0.155], McNemar p = 0.0018)</a:t>
             </a:r>
             <a:r>
-              <a:rPr sz="1250" b="0">
+              <a:rPr sz="1250" b="0" dirty="0">
                 <a:solidFill>
                   <a:srgbClr val="98A3B0"/>
                 </a:solidFill>
@@ -8242,7 +8317,7 @@
         <p:spPr>
           <a:xfrm>
             <a:off x="658368" y="4206240"/>
-            <a:ext cx="7040880" cy="1207008"/>
+            <a:ext cx="6858000" cy="1005840"/>
           </a:xfrm>
           <a:prstGeom prst="rect">
             <a:avLst/>
@@ -8288,7 +8363,7 @@
         </p:nvSpPr>
         <p:spPr>
           <a:xfrm>
-            <a:off x="841248" y="4325112"/>
+            <a:off x="859536" y="4348312"/>
             <a:ext cx="6675120" cy="1005840"/>
           </a:xfrm>
           <a:prstGeom prst="rect">
@@ -8362,8 +8437,8 @@
         </p:nvSpPr>
         <p:spPr>
           <a:xfrm>
-            <a:off x="7882127" y="4206240"/>
-            <a:ext cx="3657600" cy="1207008"/>
+            <a:off x="7866257" y="4215384"/>
+            <a:ext cx="3508879" cy="1138768"/>
           </a:xfrm>
           <a:prstGeom prst="rect">
             <a:avLst/>
@@ -8566,7 +8641,7 @@
         <p:spPr>
           <a:xfrm>
             <a:off x="658368" y="6053328"/>
-            <a:ext cx="10874959" cy="256032"/>
+            <a:ext cx="10874959" cy="161583"/>
           </a:xfrm>
           <a:prstGeom prst="rect">
             <a:avLst/>
@@ -8585,9 +8660,9 @@
               </a:spcAft>
             </a:pPr>
             <a:r>
-              <a:rPr sz="1050" b="0">
-                <a:solidFill>
-                  <a:srgbClr val="6B7683"/>
+              <a:rPr sz="1050" b="0" dirty="0">
+                <a:solidFill>
+                  <a:schemeClr val="bg1"/>
                 </a:solidFill>
                 <a:latin typeface="Consolas"/>
               </a:rPr>
@@ -8650,7 +8725,7 @@
         <p:spPr>
           <a:xfrm>
             <a:off x="658368" y="6400800"/>
-            <a:ext cx="10874959" cy="274320"/>
+            <a:ext cx="10874959" cy="216854"/>
           </a:xfrm>
           <a:prstGeom prst="rect">
             <a:avLst/>
@@ -8672,7 +8747,7 @@
               </a:spcAft>
             </a:pPr>
             <a:r>
-              <a:rPr sz="1050" b="1">
+              <a:rPr sz="1200" b="1" dirty="0">
                 <a:solidFill>
                   <a:srgbClr val="F0C040"/>
                 </a:solidFill>
@@ -8681,13 +8756,22 @@
               <a:t>5</a:t>
             </a:r>
             <a:r>
-              <a:rPr sz="1050" b="0">
+              <a:rPr sz="1200" b="0" dirty="0">
                 <a:solidFill>
                   <a:srgbClr val="6B7683"/>
                 </a:solidFill>
                 <a:latin typeface="Consolas"/>
               </a:rPr>
-              <a:t>  /  6     Self-prediction</a:t>
+              <a:t>  </a:t>
+            </a:r>
+            <a:r>
+              <a:rPr sz="1200" b="0" dirty="0">
+                <a:solidFill>
+                  <a:schemeClr val="bg1"/>
+                </a:solidFill>
+                <a:latin typeface="Consolas"/>
+              </a:rPr>
+              <a:t>/  6     Self-prediction</a:t>
             </a:r>
           </a:p>
         </p:txBody>
@@ -8733,7 +8817,7 @@
         </p:nvSpPr>
         <p:spPr>
           <a:xfrm>
-            <a:off x="658368" y="475488"/>
+            <a:off x="658367" y="299105"/>
             <a:ext cx="10874959" cy="310896"/>
           </a:xfrm>
           <a:prstGeom prst="rect">
@@ -8772,7 +8856,7 @@
         </p:nvSpPr>
         <p:spPr>
           <a:xfrm>
-            <a:off x="658368" y="868680"/>
+            <a:off x="658368" y="683153"/>
             <a:ext cx="10874959" cy="1005840"/>
           </a:xfrm>
           <a:prstGeom prst="rect">
@@ -8795,7 +8879,7 @@
               </a:spcAft>
             </a:pPr>
             <a:r>
-              <a:rPr sz="3400" b="1">
+              <a:rPr sz="3400" b="1" dirty="0">
                 <a:solidFill>
                   <a:srgbClr val="E9EEF4"/>
                 </a:solidFill>
@@ -8814,8 +8898,8 @@
         </p:nvSpPr>
         <p:spPr>
           <a:xfrm>
-            <a:off x="658368" y="1536192"/>
-            <a:ext cx="10881360" cy="457200"/>
+            <a:off x="658368" y="1403604"/>
+            <a:ext cx="10881360" cy="586892"/>
           </a:xfrm>
           <a:prstGeom prst="rect">
             <a:avLst/>
@@ -8837,7 +8921,7 @@
               </a:spcAft>
             </a:pPr>
             <a:r>
-              <a:rPr sz="1550" b="0">
+              <a:rPr sz="1550" b="0" dirty="0">
                 <a:solidFill>
                   <a:srgbClr val="98A3B0"/>
                 </a:solidFill>
@@ -8846,13 +8930,13 @@
               <a:t>One question is left open by our own data: </a:t>
             </a:r>
             <a:r>
-              <a:rPr sz="1550" b="1">
+              <a:rPr sz="1550" b="1" dirty="0">
                 <a:solidFill>
                   <a:srgbClr val="E9EEF4"/>
                 </a:solidFill>
                 <a:latin typeface="Calibri"/>
               </a:rPr>
-              <a:t>what is the model-specific residual that survives control of cheap surface cues, and can a behavioural test be built in which a positive privileged-access result would be identifiable?</a:t>
+              <a:t>what is the model-specific residual that survives control of cheap surface cues, and can a behavioral test be built in which a positive privileged-access result would be identifiable?</a:t>
             </a:r>
           </a:p>
         </p:txBody>
@@ -8957,7 +9041,7 @@
         </p:nvSpPr>
         <p:spPr>
           <a:xfrm>
-            <a:off x="841248" y="2432304"/>
+            <a:off x="841248" y="2368296"/>
             <a:ext cx="3163824" cy="310896"/>
           </a:xfrm>
           <a:prstGeom prst="rect">
@@ -9008,7 +9092,7 @@
         </p:nvSpPr>
         <p:spPr>
           <a:xfrm>
-            <a:off x="841248" y="2871216"/>
+            <a:off x="841248" y="2800181"/>
             <a:ext cx="3163824" cy="457200"/>
           </a:xfrm>
           <a:prstGeom prst="rect">
@@ -9031,7 +9115,7 @@
               </a:spcAft>
             </a:pPr>
             <a:r>
-              <a:rPr sz="1400" b="1">
+              <a:rPr sz="1400" b="1" dirty="0">
                 <a:solidFill>
                   <a:srgbClr val="E9EEF4"/>
                 </a:solidFill>
@@ -9050,8 +9134,8 @@
         </p:nvSpPr>
         <p:spPr>
           <a:xfrm>
-            <a:off x="841248" y="3401568"/>
-            <a:ext cx="3163824" cy="1463040"/>
+            <a:off x="841248" y="3220005"/>
+            <a:ext cx="3163824" cy="1636025"/>
           </a:xfrm>
           <a:prstGeom prst="rect">
             <a:avLst/>
@@ -9073,13 +9157,31 @@
               </a:spcAft>
             </a:pPr>
             <a:r>
-              <a:rPr sz="1150" b="0">
-                <a:solidFill>
-                  <a:srgbClr val="98A3B0"/>
+              <a:rPr sz="1200" b="0" dirty="0">
+                <a:solidFill>
+                  <a:schemeClr val="bg1"/>
                 </a:solidFill>
                 <a:latin typeface="Calibri"/>
               </a:rPr>
-              <a:t>Re-run the probe on the same pairs under two questions — “which would you produce?” against “which is better?”. A residual as large under the quality question reads as self-preference; one specific to the prediction framing is the discriminating outcome. Needs a behavioural manipulation check run before collection.</a:t>
+              <a:t>Re-run the probe on the same pairs under two questions — “which would you produce?” against “which is better?”. A residual as large under the quality question reads as self-preference; one specific to the prediction framing is the discriminating outcome. Needs a </a:t>
+            </a:r>
+            <a:r>
+              <a:rPr sz="1200" b="0" dirty="0" err="1">
+                <a:solidFill>
+                  <a:schemeClr val="bg1"/>
+                </a:solidFill>
+                <a:latin typeface="Calibri"/>
+              </a:rPr>
+              <a:t>behavioural</a:t>
+            </a:r>
+            <a:r>
+              <a:rPr sz="1200" b="0" dirty="0">
+                <a:solidFill>
+                  <a:schemeClr val="bg1"/>
+                </a:solidFill>
+                <a:latin typeface="Calibri"/>
+              </a:rPr>
+              <a:t> manipulation check run before collection.</a:t>
             </a:r>
           </a:p>
         </p:txBody>
@@ -9223,7 +9325,7 @@
         </p:nvSpPr>
         <p:spPr>
           <a:xfrm>
-            <a:off x="4572000" y="2432304"/>
+            <a:off x="4572000" y="2388934"/>
             <a:ext cx="3163824" cy="310896"/>
           </a:xfrm>
           <a:prstGeom prst="rect">
@@ -9246,7 +9348,7 @@
               </a:spcAft>
             </a:pPr>
             <a:r>
-              <a:rPr sz="2000" b="1">
+              <a:rPr sz="2000" b="1" dirty="0">
                 <a:solidFill>
                   <a:srgbClr val="4A90D9"/>
                 </a:solidFill>
@@ -9255,7 +9357,7 @@
               <a:t>2   </a:t>
             </a:r>
             <a:r>
-              <a:rPr sz="1250" b="1">
+              <a:rPr sz="1250" b="1" dirty="0">
                 <a:solidFill>
                   <a:srgbClr val="4A90D9"/>
                 </a:solidFill>
@@ -9274,7 +9376,7 @@
         </p:nvSpPr>
         <p:spPr>
           <a:xfrm>
-            <a:off x="4572000" y="2871216"/>
+            <a:off x="4572000" y="2827421"/>
             <a:ext cx="3163824" cy="457200"/>
           </a:xfrm>
           <a:prstGeom prst="rect">
@@ -9317,7 +9419,7 @@
         <p:spPr>
           <a:xfrm>
             <a:off x="4572000" y="3401568"/>
-            <a:ext cx="3163824" cy="1463040"/>
+            <a:ext cx="3163824" cy="1163332"/>
           </a:xfrm>
           <a:prstGeom prst="rect">
             <a:avLst/>
@@ -9339,13 +9441,49 @@
               </a:spcAft>
             </a:pPr>
             <a:r>
-              <a:rPr sz="1150" b="0">
-                <a:solidFill>
-                  <a:srgbClr val="98A3B0"/>
+              <a:rPr sz="1200" b="0" dirty="0">
+                <a:solidFill>
+                  <a:schemeClr val="bg1"/>
                 </a:solidFill>
                 <a:latin typeface="Calibri"/>
               </a:rPr>
-              <a:t>Take the leakage gate and the response-bias check to published behavioural introspection results, and ask how many survive controls this cheap. No new model runs; it tests whether the framework generalises beyond our stimuli.</a:t>
+              <a:t>Take the leakage gate and the response-bias check to published </a:t>
+            </a:r>
+            <a:r>
+              <a:rPr sz="1200" b="0" dirty="0" err="1">
+                <a:solidFill>
+                  <a:schemeClr val="bg1"/>
+                </a:solidFill>
+                <a:latin typeface="Calibri"/>
+              </a:rPr>
+              <a:t>behavioural</a:t>
+            </a:r>
+            <a:r>
+              <a:rPr sz="1200" b="0" dirty="0">
+                <a:solidFill>
+                  <a:schemeClr val="bg1"/>
+                </a:solidFill>
+                <a:latin typeface="Calibri"/>
+              </a:rPr>
+              <a:t> introspection results, and ask how many survive controls this cheap. No new model runs; it tests whether the framework </a:t>
+            </a:r>
+            <a:r>
+              <a:rPr sz="1200" b="0" dirty="0" err="1">
+                <a:solidFill>
+                  <a:schemeClr val="bg1"/>
+                </a:solidFill>
+                <a:latin typeface="Calibri"/>
+              </a:rPr>
+              <a:t>generalises</a:t>
+            </a:r>
+            <a:r>
+              <a:rPr sz="1200" b="0" dirty="0">
+                <a:solidFill>
+                  <a:schemeClr val="bg1"/>
+                </a:solidFill>
+                <a:latin typeface="Calibri"/>
+              </a:rPr>
+              <a:t> beyond our stimuli.</a:t>
             </a:r>
           </a:p>
         </p:txBody>
@@ -9489,7 +9627,7 @@
         </p:nvSpPr>
         <p:spPr>
           <a:xfrm>
-            <a:off x="8302752" y="2432304"/>
+            <a:off x="8302752" y="2367915"/>
             <a:ext cx="3163824" cy="310896"/>
           </a:xfrm>
           <a:prstGeom prst="rect">
@@ -9512,7 +9650,7 @@
               </a:spcAft>
             </a:pPr>
             <a:r>
-              <a:rPr sz="2000" b="1">
+              <a:rPr sz="2000" b="1" dirty="0">
                 <a:solidFill>
                   <a:srgbClr val="F0C040"/>
                 </a:solidFill>
@@ -9521,7 +9659,7 @@
               <a:t>3   </a:t>
             </a:r>
             <a:r>
-              <a:rPr sz="1250" b="1">
+              <a:rPr sz="1250" b="1" dirty="0">
                 <a:solidFill>
                   <a:srgbClr val="F0C040"/>
                 </a:solidFill>
@@ -9540,7 +9678,7 @@
         </p:nvSpPr>
         <p:spPr>
           <a:xfrm>
-            <a:off x="8302752" y="2871216"/>
+            <a:off x="8302752" y="2778272"/>
             <a:ext cx="3163824" cy="457200"/>
           </a:xfrm>
           <a:prstGeom prst="rect">
@@ -9563,7 +9701,7 @@
               </a:spcAft>
             </a:pPr>
             <a:r>
-              <a:rPr sz="1400" b="1">
+              <a:rPr sz="1400" b="1" dirty="0">
                 <a:solidFill>
                   <a:srgbClr val="E9EEF4"/>
                 </a:solidFill>
@@ -9582,8 +9720,8 @@
         </p:nvSpPr>
         <p:spPr>
           <a:xfrm>
-            <a:off x="8302752" y="3401568"/>
-            <a:ext cx="3163824" cy="1463040"/>
+            <a:off x="8266176" y="3334933"/>
+            <a:ext cx="3236976" cy="1636025"/>
           </a:xfrm>
           <a:prstGeom prst="rect">
             <a:avLst/>
@@ -9605,9 +9743,9 @@
               </a:spcAft>
             </a:pPr>
             <a:r>
-              <a:rPr sz="1150" b="0">
-                <a:solidFill>
-                  <a:srgbClr val="98A3B0"/>
+              <a:rPr sz="1200" b="0" dirty="0">
+                <a:solidFill>
+                  <a:schemeClr val="bg1"/>
                 </a:solidFill>
                 <a:latin typeface="Calibri"/>
               </a:rPr>
@@ -9625,7 +9763,7 @@
         <p:spPr>
           <a:xfrm>
             <a:off x="658368" y="5193792"/>
-            <a:ext cx="10881360" cy="457200"/>
+            <a:ext cx="10881360" cy="221214"/>
           </a:xfrm>
           <a:prstGeom prst="rect">
             <a:avLst/>
@@ -9647,9 +9785,9 @@
               </a:spcAft>
             </a:pPr>
             <a:r>
-              <a:rPr sz="1250" b="0">
-                <a:solidFill>
-                  <a:srgbClr val="6B7683"/>
+              <a:rPr sz="1250" b="0" dirty="0">
+                <a:solidFill>
+                  <a:schemeClr val="bg1"/>
                 </a:solidFill>
                 <a:latin typeface="Calibri"/>
               </a:rPr>
@@ -9798,7 +9936,7 @@
         <p:spPr>
           <a:xfrm>
             <a:off x="658368" y="6400800"/>
-            <a:ext cx="10874959" cy="274320"/>
+            <a:ext cx="10874959" cy="216854"/>
           </a:xfrm>
           <a:prstGeom prst="rect">
             <a:avLst/>
@@ -9820,7 +9958,7 @@
               </a:spcAft>
             </a:pPr>
             <a:r>
-              <a:rPr sz="1050" b="1">
+              <a:rPr sz="1200" b="1" dirty="0">
                 <a:solidFill>
                   <a:srgbClr val="F0C040"/>
                 </a:solidFill>
@@ -9829,13 +9967,22 @@
               <a:t>6</a:t>
             </a:r>
             <a:r>
-              <a:rPr sz="1050" b="0">
+              <a:rPr sz="1200" b="0" dirty="0">
                 <a:solidFill>
                   <a:srgbClr val="6B7683"/>
                 </a:solidFill>
                 <a:latin typeface="Consolas"/>
               </a:rPr>
-              <a:t>  /  6     Future work</a:t>
+              <a:t> </a:t>
+            </a:r>
+            <a:r>
+              <a:rPr sz="1200" b="0" dirty="0">
+                <a:solidFill>
+                  <a:schemeClr val="bg1"/>
+                </a:solidFill>
+                <a:latin typeface="Consolas"/>
+              </a:rPr>
+              <a:t> /  6     Future work</a:t>
             </a:r>
           </a:p>
         </p:txBody>
